--- a/output/material_change_graphs.pptx
+++ b/output/material_change_graphs.pptx
@@ -13,6 +13,8 @@
     <p:sldId id="261" r:id="rId12"/>
     <p:sldId id="262" r:id="rId13"/>
     <p:sldId id="263" r:id="rId14"/>
+    <p:sldId id="264" r:id="rId15"/>
+    <p:sldId id="265" r:id="rId16"/>
   </p:sldIdLst>
   <p:sldSz cx="12191695" cy="6858000" type="screen4x3"/>
   <p:notesSz cx="6858000" cy="9144000"/>
@@ -3243,6 +3245,83 @@
 </p:sld>
 </file>
 
+<file path=ppt/slides/slide10.xml><?xml version="1.0" encoding="utf-8"?>
+<p:sld xmlns:a="http://schemas.openxmlformats.org/drawingml/2006/main" xmlns:p="http://schemas.openxmlformats.org/presentationml/2006/main" xmlns:r="http://schemas.openxmlformats.org/officeDocument/2006/relationships">
+  <p:cSld>
+    <p:spTree>
+      <p:nvGrpSpPr>
+        <p:cNvPr id="1" name=""/>
+        <p:cNvGrpSpPr/>
+        <p:nvPr/>
+      </p:nvGrpSpPr>
+      <p:grpSpPr/>
+      <p:sp>
+        <p:nvSpPr>
+          <p:cNvPr id="2" name="TextBox 1"/>
+          <p:cNvSpPr txBox="1"/>
+          <p:nvPr/>
+        </p:nvSpPr>
+        <p:spPr>
+          <a:xfrm>
+            <a:off x="457200" y="182880"/>
+            <a:ext cx="11277295" cy="548640"/>
+          </a:xfrm>
+          <a:prstGeom prst="rect">
+            <a:avLst/>
+          </a:prstGeom>
+          <a:noFill/>
+        </p:spPr>
+        <p:txBody>
+          <a:bodyPr wrap="none">
+            <a:spAutoFit/>
+          </a:bodyPr>
+          <a:lstStyle/>
+          <a:p>
+            <a:pPr algn="l">
+              <a:defRPr sz="1800" b="1">
+                <a:solidFill>
+                  <a:srgbClr val="212121"/>
+                </a:solidFill>
+              </a:defRPr>
+            </a:pPr>
+            <a:r>
+              <a:t>Margin TMT (NCR) - INR/MT</a:t>
+            </a:r>
+          </a:p>
+        </p:txBody>
+      </p:sp>
+      <p:pic>
+        <p:nvPicPr>
+          <p:cNvPr id="3" name="Picture 2" descr="Margin_TMT_(NCR).png"/>
+          <p:cNvPicPr>
+            <a:picLocks noChangeAspect="1"/>
+          </p:cNvPicPr>
+          <p:nvPr/>
+        </p:nvPicPr>
+        <p:blipFill>
+          <a:blip r:embed="rId2"/>
+          <a:stretch>
+            <a:fillRect/>
+          </a:stretch>
+        </p:blipFill>
+        <p:spPr>
+          <a:xfrm>
+            <a:off x="274320" y="822960"/>
+            <a:ext cx="11612880" cy="5760720"/>
+          </a:xfrm>
+          <a:prstGeom prst="rect">
+            <a:avLst/>
+          </a:prstGeom>
+        </p:spPr>
+      </p:pic>
+    </p:spTree>
+  </p:cSld>
+  <p:clrMapOvr>
+    <a:masterClrMapping/>
+  </p:clrMapOvr>
+</p:sld>
+</file>
+
 <file path=ppt/slides/slide2.xml><?xml version="1.0" encoding="utf-8"?>
 <p:sld xmlns:a="http://schemas.openxmlformats.org/drawingml/2006/main" xmlns:p="http://schemas.openxmlformats.org/presentationml/2006/main" xmlns:r="http://schemas.openxmlformats.org/officeDocument/2006/relationships">
   <p:cSld>
@@ -3668,14 +3747,14 @@
               </a:defRPr>
             </a:pPr>
             <a:r>
-              <a:t>Nett Margin Billet (Raipur &amp; NCR) - INR/MT</a:t>
+              <a:t>Nett Margin Billet (Raipur) - INR/MT</a:t>
             </a:r>
           </a:p>
         </p:txBody>
       </p:sp>
       <p:pic>
         <p:nvPicPr>
-          <p:cNvPr id="3" name="Picture 2" descr="Nett_Margin_Billet.png"/>
+          <p:cNvPr id="3" name="Picture 2" descr="Nett_Margin_Billet_(Raipur).png"/>
           <p:cNvPicPr>
             <a:picLocks noChangeAspect="1"/>
           </p:cNvPicPr>
@@ -3745,14 +3824,91 @@
               </a:defRPr>
             </a:pPr>
             <a:r>
-              <a:t>Margin TMT (Raipur &amp; NCR) - INR/MT</a:t>
+              <a:t>Nett Margin Billet (NCR) - INR/MT</a:t>
             </a:r>
           </a:p>
         </p:txBody>
       </p:sp>
       <p:pic>
         <p:nvPicPr>
-          <p:cNvPr id="3" name="Picture 2" descr="Margin_TMT.png"/>
+          <p:cNvPr id="3" name="Picture 2" descr="Nett_Margin_Billet_(NCR).png"/>
+          <p:cNvPicPr>
+            <a:picLocks noChangeAspect="1"/>
+          </p:cNvPicPr>
+          <p:nvPr/>
+        </p:nvPicPr>
+        <p:blipFill>
+          <a:blip r:embed="rId2"/>
+          <a:stretch>
+            <a:fillRect/>
+          </a:stretch>
+        </p:blipFill>
+        <p:spPr>
+          <a:xfrm>
+            <a:off x="274320" y="822960"/>
+            <a:ext cx="11612880" cy="5760720"/>
+          </a:xfrm>
+          <a:prstGeom prst="rect">
+            <a:avLst/>
+          </a:prstGeom>
+        </p:spPr>
+      </p:pic>
+    </p:spTree>
+  </p:cSld>
+  <p:clrMapOvr>
+    <a:masterClrMapping/>
+  </p:clrMapOvr>
+</p:sld>
+</file>
+
+<file path=ppt/slides/slide9.xml><?xml version="1.0" encoding="utf-8"?>
+<p:sld xmlns:a="http://schemas.openxmlformats.org/drawingml/2006/main" xmlns:p="http://schemas.openxmlformats.org/presentationml/2006/main" xmlns:r="http://schemas.openxmlformats.org/officeDocument/2006/relationships">
+  <p:cSld>
+    <p:spTree>
+      <p:nvGrpSpPr>
+        <p:cNvPr id="1" name=""/>
+        <p:cNvGrpSpPr/>
+        <p:nvPr/>
+      </p:nvGrpSpPr>
+      <p:grpSpPr/>
+      <p:sp>
+        <p:nvSpPr>
+          <p:cNvPr id="2" name="TextBox 1"/>
+          <p:cNvSpPr txBox="1"/>
+          <p:nvPr/>
+        </p:nvSpPr>
+        <p:spPr>
+          <a:xfrm>
+            <a:off x="457200" y="182880"/>
+            <a:ext cx="11277295" cy="548640"/>
+          </a:xfrm>
+          <a:prstGeom prst="rect">
+            <a:avLst/>
+          </a:prstGeom>
+          <a:noFill/>
+        </p:spPr>
+        <p:txBody>
+          <a:bodyPr wrap="none">
+            <a:spAutoFit/>
+          </a:bodyPr>
+          <a:lstStyle/>
+          <a:p>
+            <a:pPr algn="l">
+              <a:defRPr sz="1800" b="1">
+                <a:solidFill>
+                  <a:srgbClr val="212121"/>
+                </a:solidFill>
+              </a:defRPr>
+            </a:pPr>
+            <a:r>
+              <a:t>Margin TMT (Raipur) - INR/MT</a:t>
+            </a:r>
+          </a:p>
+        </p:txBody>
+      </p:sp>
+      <p:pic>
+        <p:nvPicPr>
+          <p:cNvPr id="3" name="Picture 2" descr="Margin_TMT_(Raipur).png"/>
           <p:cNvPicPr>
             <a:picLocks noChangeAspect="1"/>
           </p:cNvPicPr>

--- a/output/material_change_graphs.pptx
+++ b/output/material_change_graphs.pptx
@@ -156,16 +156,15 @@
               <a:lstStyle/>
               <a:p>
                 <a:pPr>
-                  <a:defRPr b="1" i="0" strike="noStrike" sz="1100" u="none">
+                  <a:defRPr b="1" i="0" strike="noStrike" sz="1000" u="none">
                     <a:solidFill>
-                      <a:srgbClr val="FFFFFF"/>
+                      <a:srgbClr val="213366"/>
                     </a:solidFill>
                     <a:latin typeface="Calibri"/>
                   </a:defRPr>
                 </a:pPr>
               </a:p>
             </c:txPr>
-            <c:dLblPos val="inEnd"/>
             <c:showLegendKey val="0"/>
             <c:showVal val="1"/>
             <c:showCatName val="0"/>
@@ -297,16 +296,15 @@
             <a:lstStyle/>
             <a:p>
               <a:pPr>
-                <a:defRPr b="1" i="0" strike="noStrike" sz="1100" u="none">
+                <a:defRPr b="1" i="0" strike="noStrike" sz="1000" u="none">
                   <a:solidFill>
-                    <a:srgbClr val="FFFFFF"/>
+                    <a:srgbClr val="213366"/>
                   </a:solidFill>
                   <a:latin typeface="Calibri"/>
                 </a:defRPr>
               </a:pPr>
             </a:p>
           </c:txPr>
-          <c:dLblPos val="inEnd"/>
           <c:showLegendKey val="0"/>
           <c:showVal val="1"/>
           <c:showCatName val="0"/>
@@ -367,8 +365,19 @@
         <c:scaling>
           <c:orientation val="minMax"/>
         </c:scaling>
-        <c:delete val="1"/>
+        <c:delete val="0"/>
         <c:axPos val="l"/>
+        <c:majorGridlines>
+          <c:spPr>
+            <a:ln w="6350" cap="flat">
+              <a:solidFill>
+                <a:srgbClr val="E0E0E0"/>
+              </a:solidFill>
+              <a:prstDash val="dash"/>
+              <a:round/>
+            </a:ln>
+          </c:spPr>
+        </c:majorGridlines>
         <c:numFmt formatCode="General" sourceLinked="0"/>
         <c:majorTickMark val="out"/>
         <c:minorTickMark val="none"/>
@@ -387,11 +396,11 @@
           <a:lstStyle/>
           <a:p>
             <a:pPr>
-              <a:defRPr sz="1200" b="0" i="0" u="none" strike="noStrike">
+              <a:defRPr sz="1000" b="0" i="0" u="none" strike="noStrike">
                 <a:solidFill>
-                  <a:srgbClr val="000000"/>
+                  <a:srgbClr val="7F7F7F"/>
                 </a:solidFill>
-                <a:latin typeface="Arial"/>
+                <a:latin typeface="Calibri"/>
               </a:defRPr>
             </a:pPr>
             <a:endParaRPr lang="en-US"/>
@@ -467,16 +476,15 @@
               <a:lstStyle/>
               <a:p>
                 <a:pPr>
-                  <a:defRPr b="1" i="0" strike="noStrike" sz="1100" u="none">
+                  <a:defRPr b="1" i="0" strike="noStrike" sz="1000" u="none">
                     <a:solidFill>
-                      <a:srgbClr val="FFFFFF"/>
+                      <a:srgbClr val="213366"/>
                     </a:solidFill>
                     <a:latin typeface="Calibri"/>
                   </a:defRPr>
                 </a:pPr>
               </a:p>
             </c:txPr>
-            <c:dLblPos val="inEnd"/>
             <c:showLegendKey val="0"/>
             <c:showVal val="1"/>
             <c:showCatName val="0"/>
@@ -608,16 +616,15 @@
             <a:lstStyle/>
             <a:p>
               <a:pPr>
-                <a:defRPr b="1" i="0" strike="noStrike" sz="1100" u="none">
+                <a:defRPr b="1" i="0" strike="noStrike" sz="1000" u="none">
                   <a:solidFill>
-                    <a:srgbClr val="FFFFFF"/>
+                    <a:srgbClr val="213366"/>
                   </a:solidFill>
                   <a:latin typeface="Calibri"/>
                 </a:defRPr>
               </a:pPr>
             </a:p>
           </c:txPr>
-          <c:dLblPos val="inEnd"/>
           <c:showLegendKey val="0"/>
           <c:showVal val="1"/>
           <c:showCatName val="0"/>
@@ -678,8 +685,19 @@
         <c:scaling>
           <c:orientation val="minMax"/>
         </c:scaling>
-        <c:delete val="1"/>
+        <c:delete val="0"/>
         <c:axPos val="l"/>
+        <c:majorGridlines>
+          <c:spPr>
+            <a:ln w="6350" cap="flat">
+              <a:solidFill>
+                <a:srgbClr val="E0E0E0"/>
+              </a:solidFill>
+              <a:prstDash val="dash"/>
+              <a:round/>
+            </a:ln>
+          </c:spPr>
+        </c:majorGridlines>
         <c:numFmt formatCode="General" sourceLinked="0"/>
         <c:majorTickMark val="out"/>
         <c:minorTickMark val="none"/>
@@ -698,11 +716,11 @@
           <a:lstStyle/>
           <a:p>
             <a:pPr>
-              <a:defRPr sz="1200" b="0" i="0" u="none" strike="noStrike">
+              <a:defRPr sz="1000" b="0" i="0" u="none" strike="noStrike">
                 <a:solidFill>
-                  <a:srgbClr val="000000"/>
+                  <a:srgbClr val="7F7F7F"/>
                 </a:solidFill>
-                <a:latin typeface="Arial"/>
+                <a:latin typeface="Calibri"/>
               </a:defRPr>
             </a:pPr>
             <a:endParaRPr lang="en-US"/>
@@ -778,16 +796,15 @@
               <a:lstStyle/>
               <a:p>
                 <a:pPr>
-                  <a:defRPr b="1" i="0" strike="noStrike" sz="1100" u="none">
+                  <a:defRPr b="1" i="0" strike="noStrike" sz="1000" u="none">
                     <a:solidFill>
-                      <a:srgbClr val="FFFFFF"/>
+                      <a:srgbClr val="213366"/>
                     </a:solidFill>
                     <a:latin typeface="Calibri"/>
                   </a:defRPr>
                 </a:pPr>
               </a:p>
             </c:txPr>
-            <c:dLblPos val="inEnd"/>
             <c:showLegendKey val="0"/>
             <c:showVal val="1"/>
             <c:showCatName val="0"/>
@@ -940,16 +957,15 @@
               <a:lstStyle/>
               <a:p>
                 <a:pPr>
-                  <a:defRPr b="1" i="0" strike="noStrike" sz="1100" u="none">
+                  <a:defRPr b="1" i="0" strike="noStrike" sz="1000" u="none">
                     <a:solidFill>
-                      <a:srgbClr val="FFFFFF"/>
+                      <a:srgbClr val="213366"/>
                     </a:solidFill>
                     <a:latin typeface="Calibri"/>
                   </a:defRPr>
                 </a:pPr>
               </a:p>
             </c:txPr>
-            <c:dLblPos val="inEnd"/>
             <c:showLegendKey val="0"/>
             <c:showVal val="1"/>
             <c:showCatName val="0"/>
@@ -1081,16 +1097,15 @@
             <a:lstStyle/>
             <a:p>
               <a:pPr>
-                <a:defRPr b="1" i="0" strike="noStrike" sz="1100" u="none">
+                <a:defRPr b="1" i="0" strike="noStrike" sz="1000" u="none">
                   <a:solidFill>
-                    <a:srgbClr val="FFFFFF"/>
+                    <a:srgbClr val="213366"/>
                   </a:solidFill>
                   <a:latin typeface="Calibri"/>
                 </a:defRPr>
               </a:pPr>
             </a:p>
           </c:txPr>
-          <c:dLblPos val="inEnd"/>
           <c:showLegendKey val="0"/>
           <c:showVal val="1"/>
           <c:showCatName val="0"/>
@@ -1151,8 +1166,19 @@
         <c:scaling>
           <c:orientation val="minMax"/>
         </c:scaling>
-        <c:delete val="1"/>
+        <c:delete val="0"/>
         <c:axPos val="l"/>
+        <c:majorGridlines>
+          <c:spPr>
+            <a:ln w="6350" cap="flat">
+              <a:solidFill>
+                <a:srgbClr val="E0E0E0"/>
+              </a:solidFill>
+              <a:prstDash val="dash"/>
+              <a:round/>
+            </a:ln>
+          </c:spPr>
+        </c:majorGridlines>
         <c:numFmt formatCode="General" sourceLinked="0"/>
         <c:majorTickMark val="out"/>
         <c:minorTickMark val="none"/>
@@ -1171,11 +1197,11 @@
           <a:lstStyle/>
           <a:p>
             <a:pPr>
-              <a:defRPr sz="1200" b="0" i="0" u="none" strike="noStrike">
+              <a:defRPr sz="1000" b="0" i="0" u="none" strike="noStrike">
                 <a:solidFill>
-                  <a:srgbClr val="000000"/>
+                  <a:srgbClr val="7F7F7F"/>
                 </a:solidFill>
-                <a:latin typeface="Arial"/>
+                <a:latin typeface="Calibri"/>
               </a:defRPr>
             </a:pPr>
             <a:endParaRPr lang="en-US"/>
@@ -1271,16 +1297,15 @@
               <a:lstStyle/>
               <a:p>
                 <a:pPr>
-                  <a:defRPr b="1" i="0" strike="noStrike" sz="1100" u="none">
+                  <a:defRPr b="1" i="0" strike="noStrike" sz="1000" u="none">
                     <a:solidFill>
-                      <a:srgbClr val="FFFFFF"/>
+                      <a:srgbClr val="213366"/>
                     </a:solidFill>
                     <a:latin typeface="Calibri"/>
                   </a:defRPr>
                 </a:pPr>
               </a:p>
             </c:txPr>
-            <c:dLblPos val="inEnd"/>
             <c:showLegendKey val="0"/>
             <c:showVal val="1"/>
             <c:showCatName val="0"/>
@@ -1412,16 +1437,15 @@
             <a:lstStyle/>
             <a:p>
               <a:pPr>
-                <a:defRPr b="1" i="0" strike="noStrike" sz="1100" u="none">
+                <a:defRPr b="1" i="0" strike="noStrike" sz="1000" u="none">
                   <a:solidFill>
-                    <a:srgbClr val="FFFFFF"/>
+                    <a:srgbClr val="213366"/>
                   </a:solidFill>
                   <a:latin typeface="Calibri"/>
                 </a:defRPr>
               </a:pPr>
             </a:p>
           </c:txPr>
-          <c:dLblPos val="inEnd"/>
           <c:showLegendKey val="0"/>
           <c:showVal val="1"/>
           <c:showCatName val="0"/>
@@ -1482,8 +1506,19 @@
         <c:scaling>
           <c:orientation val="minMax"/>
         </c:scaling>
-        <c:delete val="1"/>
+        <c:delete val="0"/>
         <c:axPos val="l"/>
+        <c:majorGridlines>
+          <c:spPr>
+            <a:ln w="6350" cap="flat">
+              <a:solidFill>
+                <a:srgbClr val="E0E0E0"/>
+              </a:solidFill>
+              <a:prstDash val="dash"/>
+              <a:round/>
+            </a:ln>
+          </c:spPr>
+        </c:majorGridlines>
         <c:numFmt formatCode="General" sourceLinked="0"/>
         <c:majorTickMark val="out"/>
         <c:minorTickMark val="none"/>
@@ -1502,11 +1537,11 @@
           <a:lstStyle/>
           <a:p>
             <a:pPr>
-              <a:defRPr sz="1200" b="0" i="0" u="none" strike="noStrike">
+              <a:defRPr sz="1000" b="0" i="0" u="none" strike="noStrike">
                 <a:solidFill>
-                  <a:srgbClr val="000000"/>
+                  <a:srgbClr val="7F7F7F"/>
                 </a:solidFill>
-                <a:latin typeface="Arial"/>
+                <a:latin typeface="Calibri"/>
               </a:defRPr>
             </a:pPr>
             <a:endParaRPr lang="en-US"/>
@@ -1582,16 +1617,15 @@
               <a:lstStyle/>
               <a:p>
                 <a:pPr>
-                  <a:defRPr b="1" i="0" strike="noStrike" sz="1100" u="none">
+                  <a:defRPr b="1" i="0" strike="noStrike" sz="1000" u="none">
                     <a:solidFill>
-                      <a:srgbClr val="FFFFFF"/>
+                      <a:srgbClr val="213366"/>
                     </a:solidFill>
                     <a:latin typeface="Calibri"/>
                   </a:defRPr>
                 </a:pPr>
               </a:p>
             </c:txPr>
-            <c:dLblPos val="inEnd"/>
             <c:showLegendKey val="0"/>
             <c:showVal val="1"/>
             <c:showCatName val="0"/>
@@ -1723,16 +1757,15 @@
             <a:lstStyle/>
             <a:p>
               <a:pPr>
-                <a:defRPr b="1" i="0" strike="noStrike" sz="1100" u="none">
+                <a:defRPr b="1" i="0" strike="noStrike" sz="1000" u="none">
                   <a:solidFill>
-                    <a:srgbClr val="FFFFFF"/>
+                    <a:srgbClr val="213366"/>
                   </a:solidFill>
                   <a:latin typeface="Calibri"/>
                 </a:defRPr>
               </a:pPr>
             </a:p>
           </c:txPr>
-          <c:dLblPos val="inEnd"/>
           <c:showLegendKey val="0"/>
           <c:showVal val="1"/>
           <c:showCatName val="0"/>
@@ -1793,8 +1826,19 @@
         <c:scaling>
           <c:orientation val="minMax"/>
         </c:scaling>
-        <c:delete val="1"/>
+        <c:delete val="0"/>
         <c:axPos val="l"/>
+        <c:majorGridlines>
+          <c:spPr>
+            <a:ln w="6350" cap="flat">
+              <a:solidFill>
+                <a:srgbClr val="E0E0E0"/>
+              </a:solidFill>
+              <a:prstDash val="dash"/>
+              <a:round/>
+            </a:ln>
+          </c:spPr>
+        </c:majorGridlines>
         <c:numFmt formatCode="General" sourceLinked="0"/>
         <c:majorTickMark val="out"/>
         <c:minorTickMark val="none"/>
@@ -1813,11 +1857,11 @@
           <a:lstStyle/>
           <a:p>
             <a:pPr>
-              <a:defRPr sz="1200" b="0" i="0" u="none" strike="noStrike">
+              <a:defRPr sz="1000" b="0" i="0" u="none" strike="noStrike">
                 <a:solidFill>
-                  <a:srgbClr val="000000"/>
+                  <a:srgbClr val="7F7F7F"/>
                 </a:solidFill>
-                <a:latin typeface="Arial"/>
+                <a:latin typeface="Calibri"/>
               </a:defRPr>
             </a:pPr>
             <a:endParaRPr lang="en-US"/>
@@ -1893,16 +1937,15 @@
               <a:lstStyle/>
               <a:p>
                 <a:pPr>
-                  <a:defRPr b="1" i="0" strike="noStrike" sz="1100" u="none">
+                  <a:defRPr b="1" i="0" strike="noStrike" sz="1000" u="none">
                     <a:solidFill>
-                      <a:srgbClr val="FFFFFF"/>
+                      <a:srgbClr val="213366"/>
                     </a:solidFill>
                     <a:latin typeface="Calibri"/>
                   </a:defRPr>
                 </a:pPr>
               </a:p>
             </c:txPr>
-            <c:dLblPos val="inEnd"/>
             <c:showLegendKey val="0"/>
             <c:showVal val="1"/>
             <c:showCatName val="0"/>
@@ -2034,16 +2077,15 @@
             <a:lstStyle/>
             <a:p>
               <a:pPr>
-                <a:defRPr b="1" i="0" strike="noStrike" sz="1100" u="none">
+                <a:defRPr b="1" i="0" strike="noStrike" sz="1000" u="none">
                   <a:solidFill>
-                    <a:srgbClr val="FFFFFF"/>
+                    <a:srgbClr val="213366"/>
                   </a:solidFill>
                   <a:latin typeface="Calibri"/>
                 </a:defRPr>
               </a:pPr>
             </a:p>
           </c:txPr>
-          <c:dLblPos val="inEnd"/>
           <c:showLegendKey val="0"/>
           <c:showVal val="1"/>
           <c:showCatName val="0"/>
@@ -2104,8 +2146,19 @@
         <c:scaling>
           <c:orientation val="minMax"/>
         </c:scaling>
-        <c:delete val="1"/>
+        <c:delete val="0"/>
         <c:axPos val="l"/>
+        <c:majorGridlines>
+          <c:spPr>
+            <a:ln w="6350" cap="flat">
+              <a:solidFill>
+                <a:srgbClr val="E0E0E0"/>
+              </a:solidFill>
+              <a:prstDash val="dash"/>
+              <a:round/>
+            </a:ln>
+          </c:spPr>
+        </c:majorGridlines>
         <c:numFmt formatCode="General" sourceLinked="0"/>
         <c:majorTickMark val="out"/>
         <c:minorTickMark val="none"/>
@@ -2124,11 +2177,11 @@
           <a:lstStyle/>
           <a:p>
             <a:pPr>
-              <a:defRPr sz="1200" b="0" i="0" u="none" strike="noStrike">
+              <a:defRPr sz="1000" b="0" i="0" u="none" strike="noStrike">
                 <a:solidFill>
-                  <a:srgbClr val="000000"/>
+                  <a:srgbClr val="7F7F7F"/>
                 </a:solidFill>
-                <a:latin typeface="Arial"/>
+                <a:latin typeface="Calibri"/>
               </a:defRPr>
             </a:pPr>
             <a:endParaRPr lang="en-US"/>
@@ -2204,16 +2257,15 @@
               <a:lstStyle/>
               <a:p>
                 <a:pPr>
-                  <a:defRPr b="1" i="0" strike="noStrike" sz="1100" u="none">
+                  <a:defRPr b="1" i="0" strike="noStrike" sz="1000" u="none">
                     <a:solidFill>
-                      <a:srgbClr val="FFFFFF"/>
+                      <a:srgbClr val="213366"/>
                     </a:solidFill>
                     <a:latin typeface="Calibri"/>
                   </a:defRPr>
                 </a:pPr>
               </a:p>
             </c:txPr>
-            <c:dLblPos val="inEnd"/>
             <c:showLegendKey val="0"/>
             <c:showVal val="1"/>
             <c:showCatName val="0"/>
@@ -2345,16 +2397,15 @@
             <a:lstStyle/>
             <a:p>
               <a:pPr>
-                <a:defRPr b="1" i="0" strike="noStrike" sz="1100" u="none">
+                <a:defRPr b="1" i="0" strike="noStrike" sz="1000" u="none">
                   <a:solidFill>
-                    <a:srgbClr val="FFFFFF"/>
+                    <a:srgbClr val="213366"/>
                   </a:solidFill>
                   <a:latin typeface="Calibri"/>
                 </a:defRPr>
               </a:pPr>
             </a:p>
           </c:txPr>
-          <c:dLblPos val="inEnd"/>
           <c:showLegendKey val="0"/>
           <c:showVal val="1"/>
           <c:showCatName val="0"/>
@@ -2415,8 +2466,19 @@
         <c:scaling>
           <c:orientation val="minMax"/>
         </c:scaling>
-        <c:delete val="1"/>
+        <c:delete val="0"/>
         <c:axPos val="l"/>
+        <c:majorGridlines>
+          <c:spPr>
+            <a:ln w="6350" cap="flat">
+              <a:solidFill>
+                <a:srgbClr val="E0E0E0"/>
+              </a:solidFill>
+              <a:prstDash val="dash"/>
+              <a:round/>
+            </a:ln>
+          </c:spPr>
+        </c:majorGridlines>
         <c:numFmt formatCode="General" sourceLinked="0"/>
         <c:majorTickMark val="out"/>
         <c:minorTickMark val="none"/>
@@ -2435,11 +2497,11 @@
           <a:lstStyle/>
           <a:p>
             <a:pPr>
-              <a:defRPr sz="1200" b="0" i="0" u="none" strike="noStrike">
+              <a:defRPr sz="1000" b="0" i="0" u="none" strike="noStrike">
                 <a:solidFill>
-                  <a:srgbClr val="000000"/>
+                  <a:srgbClr val="7F7F7F"/>
                 </a:solidFill>
-                <a:latin typeface="Arial"/>
+                <a:latin typeface="Calibri"/>
               </a:defRPr>
             </a:pPr>
             <a:endParaRPr lang="en-US"/>
@@ -2515,16 +2577,15 @@
               <a:lstStyle/>
               <a:p>
                 <a:pPr>
-                  <a:defRPr b="1" i="0" strike="noStrike" sz="1100" u="none">
+                  <a:defRPr b="1" i="0" strike="noStrike" sz="1000" u="none">
                     <a:solidFill>
-                      <a:srgbClr val="FFFFFF"/>
+                      <a:srgbClr val="213366"/>
                     </a:solidFill>
                     <a:latin typeface="Calibri"/>
                   </a:defRPr>
                 </a:pPr>
               </a:p>
             </c:txPr>
-            <c:dLblPos val="inEnd"/>
             <c:showLegendKey val="0"/>
             <c:showVal val="1"/>
             <c:showCatName val="0"/>
@@ -2656,16 +2717,15 @@
             <a:lstStyle/>
             <a:p>
               <a:pPr>
-                <a:defRPr b="1" i="0" strike="noStrike" sz="1100" u="none">
+                <a:defRPr b="1" i="0" strike="noStrike" sz="1000" u="none">
                   <a:solidFill>
-                    <a:srgbClr val="FFFFFF"/>
+                    <a:srgbClr val="213366"/>
                   </a:solidFill>
                   <a:latin typeface="Calibri"/>
                 </a:defRPr>
               </a:pPr>
             </a:p>
           </c:txPr>
-          <c:dLblPos val="inEnd"/>
           <c:showLegendKey val="0"/>
           <c:showVal val="1"/>
           <c:showCatName val="0"/>
@@ -2726,8 +2786,19 @@
         <c:scaling>
           <c:orientation val="minMax"/>
         </c:scaling>
-        <c:delete val="1"/>
+        <c:delete val="0"/>
         <c:axPos val="l"/>
+        <c:majorGridlines>
+          <c:spPr>
+            <a:ln w="6350" cap="flat">
+              <a:solidFill>
+                <a:srgbClr val="E0E0E0"/>
+              </a:solidFill>
+              <a:prstDash val="dash"/>
+              <a:round/>
+            </a:ln>
+          </c:spPr>
+        </c:majorGridlines>
         <c:numFmt formatCode="General" sourceLinked="0"/>
         <c:majorTickMark val="out"/>
         <c:minorTickMark val="none"/>
@@ -2746,11 +2817,11 @@
           <a:lstStyle/>
           <a:p>
             <a:pPr>
-              <a:defRPr sz="1200" b="0" i="0" u="none" strike="noStrike">
+              <a:defRPr sz="1000" b="0" i="0" u="none" strike="noStrike">
                 <a:solidFill>
-                  <a:srgbClr val="000000"/>
+                  <a:srgbClr val="7F7F7F"/>
                 </a:solidFill>
-                <a:latin typeface="Arial"/>
+                <a:latin typeface="Calibri"/>
               </a:defRPr>
             </a:pPr>
             <a:endParaRPr lang="en-US"/>
@@ -2826,16 +2897,15 @@
               <a:lstStyle/>
               <a:p>
                 <a:pPr>
-                  <a:defRPr b="1" i="0" strike="noStrike" sz="1100" u="none">
+                  <a:defRPr b="1" i="0" strike="noStrike" sz="1000" u="none">
                     <a:solidFill>
-                      <a:srgbClr val="FFFFFF"/>
+                      <a:srgbClr val="213366"/>
                     </a:solidFill>
                     <a:latin typeface="Calibri"/>
                   </a:defRPr>
                 </a:pPr>
               </a:p>
             </c:txPr>
-            <c:dLblPos val="inEnd"/>
             <c:showLegendKey val="0"/>
             <c:showVal val="1"/>
             <c:showCatName val="0"/>
@@ -2967,16 +3037,15 @@
             <a:lstStyle/>
             <a:p>
               <a:pPr>
-                <a:defRPr b="1" i="0" strike="noStrike" sz="1100" u="none">
+                <a:defRPr b="1" i="0" strike="noStrike" sz="1000" u="none">
                   <a:solidFill>
-                    <a:srgbClr val="FFFFFF"/>
+                    <a:srgbClr val="213366"/>
                   </a:solidFill>
                   <a:latin typeface="Calibri"/>
                 </a:defRPr>
               </a:pPr>
             </a:p>
           </c:txPr>
-          <c:dLblPos val="inEnd"/>
           <c:showLegendKey val="0"/>
           <c:showVal val="1"/>
           <c:showCatName val="0"/>
@@ -3037,8 +3106,19 @@
         <c:scaling>
           <c:orientation val="minMax"/>
         </c:scaling>
-        <c:delete val="1"/>
+        <c:delete val="0"/>
         <c:axPos val="l"/>
+        <c:majorGridlines>
+          <c:spPr>
+            <a:ln w="6350" cap="flat">
+              <a:solidFill>
+                <a:srgbClr val="E0E0E0"/>
+              </a:solidFill>
+              <a:prstDash val="dash"/>
+              <a:round/>
+            </a:ln>
+          </c:spPr>
+        </c:majorGridlines>
         <c:numFmt formatCode="General" sourceLinked="0"/>
         <c:majorTickMark val="out"/>
         <c:minorTickMark val="none"/>
@@ -3057,11 +3137,11 @@
           <a:lstStyle/>
           <a:p>
             <a:pPr>
-              <a:defRPr sz="1200" b="0" i="0" u="none" strike="noStrike">
+              <a:defRPr sz="1000" b="0" i="0" u="none" strike="noStrike">
                 <a:solidFill>
-                  <a:srgbClr val="000000"/>
+                  <a:srgbClr val="7F7F7F"/>
                 </a:solidFill>
-                <a:latin typeface="Arial"/>
+                <a:latin typeface="Calibri"/>
               </a:defRPr>
             </a:pPr>
             <a:endParaRPr lang="en-US"/>

--- a/output/material_change_graphs.pptx
+++ b/output/material_change_graphs.pptx
@@ -170,9 +170,9 @@
           </c:dLbls>
           <c:cat>
             <c:multiLvlStrRef>
-              <c:f>Sheet1!$A$2:$A$29</c:f>
+              <c:f>Sheet1!$A$2:$A$18</c:f>
               <c:multiLvlStrCache>
-                <c:ptCount val="28"/>
+                <c:ptCount val="17"/>
                 <c:lvl>
                   <c:pt idx="0">
                     <c:v>Dec'24</c:v>
@@ -193,69 +193,36 @@
                     <c:v>May'25</c:v>
                   </c:pt>
                   <c:pt idx="6">
-                    <c:v>May'25</c:v>
+                    <c:v>Jun'25</c:v>
                   </c:pt>
                   <c:pt idx="7">
-                    <c:v>Jun'25</c:v>
+                    <c:v>Jul'25</c:v>
                   </c:pt>
                   <c:pt idx="8">
-                    <c:v>Jul'25</c:v>
+                    <c:v>Aug'25</c:v>
                   </c:pt>
                   <c:pt idx="9">
-                    <c:v>Jul'25</c:v>
+                    <c:v>Sep'25</c:v>
                   </c:pt>
                   <c:pt idx="10">
-                    <c:v>Jul'25</c:v>
+                    <c:v>Oct'25</c:v>
                   </c:pt>
                   <c:pt idx="11">
-                    <c:v>Aug'25</c:v>
+                    <c:v>Nov'25</c:v>
                   </c:pt>
                   <c:pt idx="12">
-                    <c:v>Sep'25</c:v>
+                    <c:v>Dec'25</c:v>
                   </c:pt>
                   <c:pt idx="13">
-                    <c:v>Oct'25</c:v>
+                    <c:v>Jan'26</c:v>
                   </c:pt>
                   <c:pt idx="14">
-                    <c:v>Nov'25</c:v>
+                    <c:v>Feb'26</c:v>
                   </c:pt>
                   <c:pt idx="15">
-                    <c:v>Dec'25</c:v>
+                    <c:v>Mar'26</c:v>
                   </c:pt>
                   <c:pt idx="16">
-                    <c:v>Dec'25</c:v>
-                  </c:pt>
-                  <c:pt idx="17">
-                    <c:v>Jan'26</c:v>
-                  </c:pt>
-                  <c:pt idx="18">
-                    <c:v>Jan'26</c:v>
-                  </c:pt>
-                  <c:pt idx="19">
-                    <c:v>Jan'26</c:v>
-                  </c:pt>
-                  <c:pt idx="20">
-                    <c:v>Feb'26</c:v>
-                  </c:pt>
-                  <c:pt idx="21">
-                    <c:v>Feb'26</c:v>
-                  </c:pt>
-                  <c:pt idx="22">
-                    <c:v>Feb'26</c:v>
-                  </c:pt>
-                  <c:pt idx="23">
-                    <c:v>Mar'26</c:v>
-                  </c:pt>
-                  <c:pt idx="24">
-                    <c:v>Mar'26</c:v>
-                  </c:pt>
-                  <c:pt idx="25">
-                    <c:v>Mar'26</c:v>
-                  </c:pt>
-                  <c:pt idx="26">
-                    <c:v>Mar'26</c:v>
-                  </c:pt>
-                  <c:pt idx="27">
                     <c:v>Apr'26</c:v>
                   </c:pt>
                 </c:lvl>
@@ -264,10 +231,10 @@
           </c:cat>
           <c:val>
             <c:numRef>
-              <c:f>Sheet1!$B$2:$B$29</c:f>
+              <c:f>Sheet1!$B$2:$B$18</c:f>
               <c:numCache>
                 <c:formatCode>General</c:formatCode>
-                <c:ptCount val="28"/>
+                <c:ptCount val="17"/>
                 <c:pt idx="0">
                   <c:v>31300</c:v>
                 </c:pt>
@@ -284,72 +251,39 @@
                   <c:v>32700</c:v>
                 </c:pt>
                 <c:pt idx="5">
-                  <c:v>32700</c:v>
+                  <c:v>31800</c:v>
                 </c:pt>
                 <c:pt idx="6">
+                  <c:v>31100</c:v>
+                </c:pt>
+                <c:pt idx="7">
+                  <c:v>31200</c:v>
+                </c:pt>
+                <c:pt idx="8">
+                  <c:v>31500</c:v>
+                </c:pt>
+                <c:pt idx="9">
                   <c:v>31800</c:v>
                 </c:pt>
-                <c:pt idx="7">
-                  <c:v>31100</c:v>
-                </c:pt>
-                <c:pt idx="8">
-                  <c:v>30900</c:v>
-                </c:pt>
-                <c:pt idx="9">
+                <c:pt idx="10">
+                  <c:v>30200</c:v>
+                </c:pt>
+                <c:pt idx="11">
+                  <c:v>31000</c:v>
+                </c:pt>
+                <c:pt idx="12">
                   <c:v>31500</c:v>
                 </c:pt>
-                <c:pt idx="10">
-                  <c:v>31200</c:v>
-                </c:pt>
-                <c:pt idx="11">
-                  <c:v>31500</c:v>
-                </c:pt>
-                <c:pt idx="12">
-                  <c:v>31800</c:v>
-                </c:pt>
                 <c:pt idx="13">
-                  <c:v>30200</c:v>
+                  <c:v>33750</c:v>
                 </c:pt>
                 <c:pt idx="14">
-                  <c:v>31000</c:v>
+                  <c:v>33700</c:v>
                 </c:pt>
                 <c:pt idx="15">
-                  <c:v>31300</c:v>
+                  <c:v>34500</c:v>
                 </c:pt>
                 <c:pt idx="16">
-                  <c:v>31500</c:v>
-                </c:pt>
-                <c:pt idx="17">
-                  <c:v>33450</c:v>
-                </c:pt>
-                <c:pt idx="18">
-                  <c:v>33750</c:v>
-                </c:pt>
-                <c:pt idx="19">
-                  <c:v>33750</c:v>
-                </c:pt>
-                <c:pt idx="20">
-                  <c:v>34850</c:v>
-                </c:pt>
-                <c:pt idx="21">
-                  <c:v>33800</c:v>
-                </c:pt>
-                <c:pt idx="22">
-                  <c:v>33700</c:v>
-                </c:pt>
-                <c:pt idx="23">
-                  <c:v>34800</c:v>
-                </c:pt>
-                <c:pt idx="24">
-                  <c:v>34900</c:v>
-                </c:pt>
-                <c:pt idx="25">
-                  <c:v>34400</c:v>
-                </c:pt>
-                <c:pt idx="26">
-                  <c:v>34500</c:v>
-                </c:pt>
-                <c:pt idx="27">
                   <c:v>36000</c:v>
                 </c:pt>
               </c:numCache>
@@ -403,9 +337,9 @@
           </c:dLbls>
           <c:cat>
             <c:multiLvlStrRef>
-              <c:f>Sheet1!$A$2:$A$29</c:f>
+              <c:f>Sheet1!$A$2:$A$18</c:f>
               <c:multiLvlStrCache>
-                <c:ptCount val="28"/>
+                <c:ptCount val="17"/>
                 <c:lvl>
                   <c:pt idx="0">
                     <c:v>Dec'24</c:v>
@@ -426,69 +360,36 @@
                     <c:v>May'25</c:v>
                   </c:pt>
                   <c:pt idx="6">
-                    <c:v>May'25</c:v>
+                    <c:v>Jun'25</c:v>
                   </c:pt>
                   <c:pt idx="7">
-                    <c:v>Jun'25</c:v>
+                    <c:v>Jul'25</c:v>
                   </c:pt>
                   <c:pt idx="8">
-                    <c:v>Jul'25</c:v>
+                    <c:v>Aug'25</c:v>
                   </c:pt>
                   <c:pt idx="9">
-                    <c:v>Jul'25</c:v>
+                    <c:v>Sep'25</c:v>
                   </c:pt>
                   <c:pt idx="10">
-                    <c:v>Jul'25</c:v>
+                    <c:v>Oct'25</c:v>
                   </c:pt>
                   <c:pt idx="11">
-                    <c:v>Aug'25</c:v>
+                    <c:v>Nov'25</c:v>
                   </c:pt>
                   <c:pt idx="12">
-                    <c:v>Sep'25</c:v>
+                    <c:v>Dec'25</c:v>
                   </c:pt>
                   <c:pt idx="13">
-                    <c:v>Oct'25</c:v>
+                    <c:v>Jan'26</c:v>
                   </c:pt>
                   <c:pt idx="14">
-                    <c:v>Nov'25</c:v>
+                    <c:v>Feb'26</c:v>
                   </c:pt>
                   <c:pt idx="15">
-                    <c:v>Dec'25</c:v>
+                    <c:v>Mar'26</c:v>
                   </c:pt>
                   <c:pt idx="16">
-                    <c:v>Dec'25</c:v>
-                  </c:pt>
-                  <c:pt idx="17">
-                    <c:v>Jan'26</c:v>
-                  </c:pt>
-                  <c:pt idx="18">
-                    <c:v>Jan'26</c:v>
-                  </c:pt>
-                  <c:pt idx="19">
-                    <c:v>Jan'26</c:v>
-                  </c:pt>
-                  <c:pt idx="20">
-                    <c:v>Feb'26</c:v>
-                  </c:pt>
-                  <c:pt idx="21">
-                    <c:v>Feb'26</c:v>
-                  </c:pt>
-                  <c:pt idx="22">
-                    <c:v>Feb'26</c:v>
-                  </c:pt>
-                  <c:pt idx="23">
-                    <c:v>Mar'26</c:v>
-                  </c:pt>
-                  <c:pt idx="24">
-                    <c:v>Mar'26</c:v>
-                  </c:pt>
-                  <c:pt idx="25">
-                    <c:v>Mar'26</c:v>
-                  </c:pt>
-                  <c:pt idx="26">
-                    <c:v>Mar'26</c:v>
-                  </c:pt>
-                  <c:pt idx="27">
                     <c:v>Apr'26</c:v>
                   </c:pt>
                 </c:lvl>
@@ -497,10 +398,10 @@
           </c:cat>
           <c:val>
             <c:numRef>
-              <c:f>Sheet1!$C$2:$C$29</c:f>
+              <c:f>Sheet1!$C$2:$C$18</c:f>
               <c:numCache>
                 <c:formatCode>General</c:formatCode>
-                <c:ptCount val="28"/>
+                <c:ptCount val="17"/>
                 <c:pt idx="0">
                   <c:v>33100</c:v>
                 </c:pt>
@@ -517,72 +418,39 @@
                   <c:v>33800</c:v>
                 </c:pt>
                 <c:pt idx="5">
-                  <c:v>33600</c:v>
+                  <c:v>32800</c:v>
                 </c:pt>
                 <c:pt idx="6">
+                  <c:v>32400</c:v>
+                </c:pt>
+                <c:pt idx="7">
+                  <c:v>31900</c:v>
+                </c:pt>
+                <c:pt idx="8">
+                  <c:v>30700</c:v>
+                </c:pt>
+                <c:pt idx="9">
+                  <c:v>31400</c:v>
+                </c:pt>
+                <c:pt idx="10">
+                  <c:v>29900</c:v>
+                </c:pt>
+                <c:pt idx="11">
+                  <c:v>31800</c:v>
+                </c:pt>
+                <c:pt idx="12">
+                  <c:v>31700</c:v>
+                </c:pt>
+                <c:pt idx="13">
+                  <c:v>34400</c:v>
+                </c:pt>
+                <c:pt idx="14">
                   <c:v>32800</c:v>
                 </c:pt>
-                <c:pt idx="7">
-                  <c:v>32400</c:v>
-                </c:pt>
-                <c:pt idx="8">
-                  <c:v>32300</c:v>
-                </c:pt>
-                <c:pt idx="9">
-                  <c:v>31900</c:v>
-                </c:pt>
-                <c:pt idx="10">
-                  <c:v>31900</c:v>
-                </c:pt>
-                <c:pt idx="11">
-                  <c:v>30700</c:v>
-                </c:pt>
-                <c:pt idx="12">
-                  <c:v>31400</c:v>
-                </c:pt>
-                <c:pt idx="13">
-                  <c:v>29900</c:v>
-                </c:pt>
-                <c:pt idx="14">
-                  <c:v>31800</c:v>
-                </c:pt>
                 <c:pt idx="15">
-                  <c:v>31300</c:v>
+                  <c:v>34500</c:v>
                 </c:pt>
                 <c:pt idx="16">
-                  <c:v>31700</c:v>
-                </c:pt>
-                <c:pt idx="17">
-                  <c:v>33600</c:v>
-                </c:pt>
-                <c:pt idx="18">
-                  <c:v>34600</c:v>
-                </c:pt>
-                <c:pt idx="19">
-                  <c:v>34400</c:v>
-                </c:pt>
-                <c:pt idx="20">
-                  <c:v>34900</c:v>
-                </c:pt>
-                <c:pt idx="21">
-                  <c:v>33100</c:v>
-                </c:pt>
-                <c:pt idx="22">
-                  <c:v>32800</c:v>
-                </c:pt>
-                <c:pt idx="23">
-                  <c:v>34700</c:v>
-                </c:pt>
-                <c:pt idx="24">
-                  <c:v>35000</c:v>
-                </c:pt>
-                <c:pt idx="25">
-                  <c:v>34500</c:v>
-                </c:pt>
-                <c:pt idx="26">
-                  <c:v>34500</c:v>
-                </c:pt>
-                <c:pt idx="27">
                   <c:v>36500</c:v>
                 </c:pt>
               </c:numCache>
@@ -644,7 +512,7 @@
           <a:lstStyle/>
           <a:p>
             <a:pPr>
-              <a:defRPr sz="900" b="0" i="0" u="none" strike="noStrike">
+              <a:defRPr sz="1000" b="0" i="0" u="none" strike="noStrike">
                 <a:solidFill>
                   <a:srgbClr val="7F7F7F"/>
                 </a:solidFill>
@@ -764,7 +632,9 @@
     <c:autoTitleDeleted val="1"/>
     <c:plotArea>
       <c:layout/>
-      <c:lineChart>
+      <c:barChart>
+        <c:barDir val="col"/>
+        <c:grouping val="clustered"/>
         <c:varyColors val="0"/>
         <c:ser>
           <c:idx val="0"/>
@@ -784,13 +654,6 @@
             <a:solidFill>
               <a:srgbClr val="1565C0"/>
             </a:solidFill>
-            <a:ln w="25400" cap="flat">
-              <a:solidFill>
-                <a:srgbClr val="1565C0"/>
-              </a:solidFill>
-              <a:prstDash val="solid"/>
-              <a:round/>
-            </a:ln>
             <a:effectLst/>
           </c:spPr>
           <c:invertIfNegative val="0"/>
@@ -818,28 +681,11 @@
             <c:showBubbleSize val="0"/>
             <c:showLeaderLines val="0"/>
           </c:dLbls>
-          <c:marker>
-            <c:symbol val="circle"/>
-            <c:size val="6"/>
-            <c:spPr>
-              <a:solidFill>
-                <a:srgbClr val="1565C0"/>
-              </a:solidFill>
-              <a:ln w="9525" cap="flat">
-                <a:solidFill>
-                  <a:srgbClr val="1565C0"/>
-                </a:solidFill>
-                <a:prstDash val="solid"/>
-                <a:round/>
-              </a:ln>
-              <a:effectLst/>
-            </c:spPr>
-          </c:marker>
           <c:cat>
             <c:multiLvlStrRef>
-              <c:f>Sheet1!$A$2:$A$29</c:f>
+              <c:f>Sheet1!$A$2:$A$18</c:f>
               <c:multiLvlStrCache>
-                <c:ptCount val="28"/>
+                <c:ptCount val="17"/>
                 <c:lvl>
                   <c:pt idx="0">
                     <c:v>Dec'24</c:v>
@@ -860,69 +706,36 @@
                     <c:v>May'25</c:v>
                   </c:pt>
                   <c:pt idx="6">
-                    <c:v>May'25</c:v>
+                    <c:v>Jun'25</c:v>
                   </c:pt>
                   <c:pt idx="7">
-                    <c:v>Jun'25</c:v>
+                    <c:v>Jul'25</c:v>
                   </c:pt>
                   <c:pt idx="8">
-                    <c:v>Jul'25</c:v>
+                    <c:v>Aug'25</c:v>
                   </c:pt>
                   <c:pt idx="9">
-                    <c:v>Jul'25</c:v>
+                    <c:v>Sep'25</c:v>
                   </c:pt>
                   <c:pt idx="10">
-                    <c:v>Jul'25</c:v>
+                    <c:v>Oct'25</c:v>
                   </c:pt>
                   <c:pt idx="11">
-                    <c:v>Aug'25</c:v>
+                    <c:v>Nov'25</c:v>
                   </c:pt>
                   <c:pt idx="12">
-                    <c:v>Sep'25</c:v>
+                    <c:v>Dec'25</c:v>
                   </c:pt>
                   <c:pt idx="13">
-                    <c:v>Oct'25</c:v>
+                    <c:v>Jan'26</c:v>
                   </c:pt>
                   <c:pt idx="14">
-                    <c:v>Nov'25</c:v>
+                    <c:v>Feb'26</c:v>
                   </c:pt>
                   <c:pt idx="15">
-                    <c:v>Dec'25</c:v>
+                    <c:v>Mar'26</c:v>
                   </c:pt>
                   <c:pt idx="16">
-                    <c:v>Dec'25</c:v>
-                  </c:pt>
-                  <c:pt idx="17">
-                    <c:v>Jan'26</c:v>
-                  </c:pt>
-                  <c:pt idx="18">
-                    <c:v>Jan'26</c:v>
-                  </c:pt>
-                  <c:pt idx="19">
-                    <c:v>Jan'26</c:v>
-                  </c:pt>
-                  <c:pt idx="20">
-                    <c:v>Feb'26</c:v>
-                  </c:pt>
-                  <c:pt idx="21">
-                    <c:v>Feb'26</c:v>
-                  </c:pt>
-                  <c:pt idx="22">
-                    <c:v>Feb'26</c:v>
-                  </c:pt>
-                  <c:pt idx="23">
-                    <c:v>Mar'26</c:v>
-                  </c:pt>
-                  <c:pt idx="24">
-                    <c:v>Mar'26</c:v>
-                  </c:pt>
-                  <c:pt idx="25">
-                    <c:v>Mar'26</c:v>
-                  </c:pt>
-                  <c:pt idx="26">
-                    <c:v>Mar'26</c:v>
-                  </c:pt>
-                  <c:pt idx="27">
                     <c:v>Apr'26</c:v>
                   </c:pt>
                 </c:lvl>
@@ -931,10 +744,10 @@
           </c:cat>
           <c:val>
             <c:numRef>
-              <c:f>Sheet1!$B$2:$B$29</c:f>
+              <c:f>Sheet1!$B$2:$B$18</c:f>
               <c:numCache>
                 <c:formatCode>General</c:formatCode>
-                <c:ptCount val="28"/>
+                <c:ptCount val="17"/>
                 <c:pt idx="0">
                   <c:v>24200</c:v>
                 </c:pt>
@@ -951,78 +764,44 @@
                   <c:v>24700</c:v>
                 </c:pt>
                 <c:pt idx="5">
-                  <c:v>24200</c:v>
+                  <c:v>23700</c:v>
                 </c:pt>
                 <c:pt idx="6">
-                  <c:v>23700</c:v>
+                  <c:v>22350</c:v>
                 </c:pt>
                 <c:pt idx="7">
-                  <c:v>22350</c:v>
+                  <c:v>24800</c:v>
                 </c:pt>
                 <c:pt idx="8">
-                  <c:v>22550</c:v>
+                  <c:v>23150</c:v>
                 </c:pt>
                 <c:pt idx="9">
-                  <c:v>24900</c:v>
+                  <c:v>24300</c:v>
                 </c:pt>
                 <c:pt idx="10">
-                  <c:v>24800</c:v>
+                  <c:v>22800</c:v>
                 </c:pt>
                 <c:pt idx="11">
-                  <c:v>23150</c:v>
+                  <c:v>23750</c:v>
                 </c:pt>
                 <c:pt idx="12">
-                  <c:v>24300</c:v>
+                  <c:v>22900</c:v>
                 </c:pt>
                 <c:pt idx="13">
-                  <c:v>22800</c:v>
+                  <c:v>25750</c:v>
                 </c:pt>
                 <c:pt idx="14">
-                  <c:v>23750</c:v>
+                  <c:v>25800</c:v>
                 </c:pt>
                 <c:pt idx="15">
-                  <c:v>22550</c:v>
+                  <c:v>25800</c:v>
                 </c:pt>
                 <c:pt idx="16">
-                  <c:v>22900</c:v>
-                </c:pt>
-                <c:pt idx="17">
-                  <c:v>24300</c:v>
-                </c:pt>
-                <c:pt idx="18">
-                  <c:v>25650</c:v>
-                </c:pt>
-                <c:pt idx="19">
-                  <c:v>25750</c:v>
-                </c:pt>
-                <c:pt idx="20">
-                  <c:v>27500</c:v>
-                </c:pt>
-                <c:pt idx="21">
-                  <c:v>26100</c:v>
-                </c:pt>
-                <c:pt idx="22">
-                  <c:v>25800</c:v>
-                </c:pt>
-                <c:pt idx="23">
-                  <c:v>26650</c:v>
-                </c:pt>
-                <c:pt idx="24">
-                  <c:v>26300</c:v>
-                </c:pt>
-                <c:pt idx="25">
-                  <c:v>25450</c:v>
-                </c:pt>
-                <c:pt idx="26">
-                  <c:v>25800</c:v>
-                </c:pt>
-                <c:pt idx="27">
                   <c:v>27400</c:v>
                 </c:pt>
               </c:numCache>
             </c:numRef>
           </c:val>
-          <c:smooth val="0"/>
         </c:ser>
         <c:ser>
           <c:idx val="1"/>
@@ -1042,13 +821,6 @@
             <a:solidFill>
               <a:srgbClr val="D32F2F"/>
             </a:solidFill>
-            <a:ln w="25400" cap="flat">
-              <a:solidFill>
-                <a:srgbClr val="D32F2F"/>
-              </a:solidFill>
-              <a:prstDash val="solid"/>
-              <a:round/>
-            </a:ln>
             <a:effectLst/>
           </c:spPr>
           <c:invertIfNegative val="0"/>
@@ -1076,28 +848,11 @@
             <c:showBubbleSize val="0"/>
             <c:showLeaderLines val="0"/>
           </c:dLbls>
-          <c:marker>
-            <c:symbol val="circle"/>
-            <c:size val="6"/>
-            <c:spPr>
-              <a:solidFill>
-                <a:srgbClr val="D32F2F"/>
-              </a:solidFill>
-              <a:ln w="9525" cap="flat">
-                <a:solidFill>
-                  <a:srgbClr val="D32F2F"/>
-                </a:solidFill>
-                <a:prstDash val="solid"/>
-                <a:round/>
-              </a:ln>
-              <a:effectLst/>
-            </c:spPr>
-          </c:marker>
           <c:cat>
             <c:multiLvlStrRef>
-              <c:f>Sheet1!$A$2:$A$29</c:f>
+              <c:f>Sheet1!$A$2:$A$18</c:f>
               <c:multiLvlStrCache>
-                <c:ptCount val="28"/>
+                <c:ptCount val="17"/>
                 <c:lvl>
                   <c:pt idx="0">
                     <c:v>Dec'24</c:v>
@@ -1118,69 +873,36 @@
                     <c:v>May'25</c:v>
                   </c:pt>
                   <c:pt idx="6">
-                    <c:v>May'25</c:v>
+                    <c:v>Jun'25</c:v>
                   </c:pt>
                   <c:pt idx="7">
-                    <c:v>Jun'25</c:v>
+                    <c:v>Jul'25</c:v>
                   </c:pt>
                   <c:pt idx="8">
-                    <c:v>Jul'25</c:v>
+                    <c:v>Aug'25</c:v>
                   </c:pt>
                   <c:pt idx="9">
-                    <c:v>Jul'25</c:v>
+                    <c:v>Sep'25</c:v>
                   </c:pt>
                   <c:pt idx="10">
-                    <c:v>Jul'25</c:v>
+                    <c:v>Oct'25</c:v>
                   </c:pt>
                   <c:pt idx="11">
-                    <c:v>Aug'25</c:v>
+                    <c:v>Nov'25</c:v>
                   </c:pt>
                   <c:pt idx="12">
-                    <c:v>Sep'25</c:v>
+                    <c:v>Dec'25</c:v>
                   </c:pt>
                   <c:pt idx="13">
-                    <c:v>Oct'25</c:v>
+                    <c:v>Jan'26</c:v>
                   </c:pt>
                   <c:pt idx="14">
-                    <c:v>Nov'25</c:v>
+                    <c:v>Feb'26</c:v>
                   </c:pt>
                   <c:pt idx="15">
-                    <c:v>Dec'25</c:v>
+                    <c:v>Mar'26</c:v>
                   </c:pt>
                   <c:pt idx="16">
-                    <c:v>Dec'25</c:v>
-                  </c:pt>
-                  <c:pt idx="17">
-                    <c:v>Jan'26</c:v>
-                  </c:pt>
-                  <c:pt idx="18">
-                    <c:v>Jan'26</c:v>
-                  </c:pt>
-                  <c:pt idx="19">
-                    <c:v>Jan'26</c:v>
-                  </c:pt>
-                  <c:pt idx="20">
-                    <c:v>Feb'26</c:v>
-                  </c:pt>
-                  <c:pt idx="21">
-                    <c:v>Feb'26</c:v>
-                  </c:pt>
-                  <c:pt idx="22">
-                    <c:v>Feb'26</c:v>
-                  </c:pt>
-                  <c:pt idx="23">
-                    <c:v>Mar'26</c:v>
-                  </c:pt>
-                  <c:pt idx="24">
-                    <c:v>Mar'26</c:v>
-                  </c:pt>
-                  <c:pt idx="25">
-                    <c:v>Mar'26</c:v>
-                  </c:pt>
-                  <c:pt idx="26">
-                    <c:v>Mar'26</c:v>
-                  </c:pt>
-                  <c:pt idx="27">
                     <c:v>Apr'26</c:v>
                   </c:pt>
                 </c:lvl>
@@ -1189,10 +911,10 @@
           </c:cat>
           <c:val>
             <c:numRef>
-              <c:f>Sheet1!$C$2:$C$29</c:f>
+              <c:f>Sheet1!$C$2:$C$18</c:f>
               <c:numCache>
                 <c:formatCode>General</c:formatCode>
-                <c:ptCount val="28"/>
+                <c:ptCount val="17"/>
                 <c:pt idx="0">
                   <c:v>32550</c:v>
                 </c:pt>
@@ -1209,78 +931,44 @@
                   <c:v>34800</c:v>
                 </c:pt>
                 <c:pt idx="5">
-                  <c:v>34200</c:v>
+                  <c:v>33100</c:v>
                 </c:pt>
                 <c:pt idx="6">
-                  <c:v>33100</c:v>
+                  <c:v>32550</c:v>
                 </c:pt>
                 <c:pt idx="7">
-                  <c:v>32550</c:v>
+                  <c:v>33700</c:v>
                 </c:pt>
                 <c:pt idx="8">
-                  <c:v>32450</c:v>
+                  <c:v>33250</c:v>
                 </c:pt>
                 <c:pt idx="9">
-                  <c:v>33700</c:v>
+                  <c:v>32850</c:v>
                 </c:pt>
                 <c:pt idx="10">
-                  <c:v>33700</c:v>
+                  <c:v>31800</c:v>
                 </c:pt>
                 <c:pt idx="11">
-                  <c:v>33250</c:v>
+                  <c:v>32400</c:v>
                 </c:pt>
                 <c:pt idx="12">
-                  <c:v>32850</c:v>
+                  <c:v>33000</c:v>
                 </c:pt>
                 <c:pt idx="13">
-                  <c:v>31800</c:v>
+                  <c:v>38150</c:v>
                 </c:pt>
                 <c:pt idx="14">
-                  <c:v>32400</c:v>
+                  <c:v>37800</c:v>
                 </c:pt>
                 <c:pt idx="15">
-                  <c:v>33000</c:v>
+                  <c:v>37050</c:v>
                 </c:pt>
                 <c:pt idx="16">
-                  <c:v>33000</c:v>
-                </c:pt>
-                <c:pt idx="17">
-                  <c:v>37000</c:v>
-                </c:pt>
-                <c:pt idx="18">
-                  <c:v>38000</c:v>
-                </c:pt>
-                <c:pt idx="19">
-                  <c:v>38150</c:v>
-                </c:pt>
-                <c:pt idx="20">
-                  <c:v>38300</c:v>
-                </c:pt>
-                <c:pt idx="21">
-                  <c:v>37950</c:v>
-                </c:pt>
-                <c:pt idx="22">
-                  <c:v>37800</c:v>
-                </c:pt>
-                <c:pt idx="23">
-                  <c:v>37550</c:v>
-                </c:pt>
-                <c:pt idx="24">
-                  <c:v>37300</c:v>
-                </c:pt>
-                <c:pt idx="25">
-                  <c:v>37250</c:v>
-                </c:pt>
-                <c:pt idx="26">
-                  <c:v>37050</c:v>
-                </c:pt>
-                <c:pt idx="27">
                   <c:v>38550</c:v>
                 </c:pt>
               </c:numCache>
             </c:numRef>
           </c:val>
-          <c:smooth val="0"/>
         </c:ser>
         <c:ser>
           <c:idx val="2"/>
@@ -1300,13 +988,6 @@
             <a:solidFill>
               <a:srgbClr val="616161"/>
             </a:solidFill>
-            <a:ln w="25400" cap="flat">
-              <a:solidFill>
-                <a:srgbClr val="616161"/>
-              </a:solidFill>
-              <a:prstDash val="solid"/>
-              <a:round/>
-            </a:ln>
             <a:effectLst/>
           </c:spPr>
           <c:invertIfNegative val="0"/>
@@ -1334,28 +1015,11 @@
             <c:showBubbleSize val="0"/>
             <c:showLeaderLines val="0"/>
           </c:dLbls>
-          <c:marker>
-            <c:symbol val="circle"/>
-            <c:size val="6"/>
-            <c:spPr>
-              <a:solidFill>
-                <a:srgbClr val="616161"/>
-              </a:solidFill>
-              <a:ln w="9525" cap="flat">
-                <a:solidFill>
-                  <a:srgbClr val="616161"/>
-                </a:solidFill>
-                <a:prstDash val="solid"/>
-                <a:round/>
-              </a:ln>
-              <a:effectLst/>
-            </c:spPr>
-          </c:marker>
           <c:cat>
             <c:multiLvlStrRef>
-              <c:f>Sheet1!$A$2:$A$29</c:f>
+              <c:f>Sheet1!$A$2:$A$18</c:f>
               <c:multiLvlStrCache>
-                <c:ptCount val="28"/>
+                <c:ptCount val="17"/>
                 <c:lvl>
                   <c:pt idx="0">
                     <c:v>Dec'24</c:v>
@@ -1376,69 +1040,36 @@
                     <c:v>May'25</c:v>
                   </c:pt>
                   <c:pt idx="6">
-                    <c:v>May'25</c:v>
+                    <c:v>Jun'25</c:v>
                   </c:pt>
                   <c:pt idx="7">
-                    <c:v>Jun'25</c:v>
+                    <c:v>Jul'25</c:v>
                   </c:pt>
                   <c:pt idx="8">
-                    <c:v>Jul'25</c:v>
+                    <c:v>Aug'25</c:v>
                   </c:pt>
                   <c:pt idx="9">
-                    <c:v>Jul'25</c:v>
+                    <c:v>Sep'25</c:v>
                   </c:pt>
                   <c:pt idx="10">
-                    <c:v>Jul'25</c:v>
+                    <c:v>Oct'25</c:v>
                   </c:pt>
                   <c:pt idx="11">
-                    <c:v>Aug'25</c:v>
+                    <c:v>Nov'25</c:v>
                   </c:pt>
                   <c:pt idx="12">
-                    <c:v>Sep'25</c:v>
+                    <c:v>Dec'25</c:v>
                   </c:pt>
                   <c:pt idx="13">
-                    <c:v>Oct'25</c:v>
+                    <c:v>Jan'26</c:v>
                   </c:pt>
                   <c:pt idx="14">
-                    <c:v>Nov'25</c:v>
+                    <c:v>Feb'26</c:v>
                   </c:pt>
                   <c:pt idx="15">
-                    <c:v>Dec'25</c:v>
+                    <c:v>Mar'26</c:v>
                   </c:pt>
                   <c:pt idx="16">
-                    <c:v>Dec'25</c:v>
-                  </c:pt>
-                  <c:pt idx="17">
-                    <c:v>Jan'26</c:v>
-                  </c:pt>
-                  <c:pt idx="18">
-                    <c:v>Jan'26</c:v>
-                  </c:pt>
-                  <c:pt idx="19">
-                    <c:v>Jan'26</c:v>
-                  </c:pt>
-                  <c:pt idx="20">
-                    <c:v>Feb'26</c:v>
-                  </c:pt>
-                  <c:pt idx="21">
-                    <c:v>Feb'26</c:v>
-                  </c:pt>
-                  <c:pt idx="22">
-                    <c:v>Feb'26</c:v>
-                  </c:pt>
-                  <c:pt idx="23">
-                    <c:v>Mar'26</c:v>
-                  </c:pt>
-                  <c:pt idx="24">
-                    <c:v>Mar'26</c:v>
-                  </c:pt>
-                  <c:pt idx="25">
-                    <c:v>Mar'26</c:v>
-                  </c:pt>
-                  <c:pt idx="26">
-                    <c:v>Mar'26</c:v>
-                  </c:pt>
-                  <c:pt idx="27">
                     <c:v>Apr'26</c:v>
                   </c:pt>
                 </c:lvl>
@@ -1447,10 +1078,10 @@
           </c:cat>
           <c:val>
             <c:numRef>
-              <c:f>Sheet1!$D$2:$D$29</c:f>
+              <c:f>Sheet1!$D$2:$D$18</c:f>
               <c:numCache>
                 <c:formatCode>General</c:formatCode>
-                <c:ptCount val="28"/>
+                <c:ptCount val="17"/>
                 <c:pt idx="0">
                   <c:v>28800</c:v>
                 </c:pt>
@@ -1467,79 +1098,77 @@
                   <c:v>29000</c:v>
                 </c:pt>
                 <c:pt idx="5">
-                  <c:v>28550</c:v>
+                  <c:v>27700</c:v>
                 </c:pt>
                 <c:pt idx="6">
-                  <c:v>27700</c:v>
+                  <c:v>26400</c:v>
                 </c:pt>
                 <c:pt idx="7">
-                  <c:v>26400</c:v>
+                  <c:v>28800</c:v>
                 </c:pt>
                 <c:pt idx="8">
-                  <c:v>26500</c:v>
+                  <c:v>27750</c:v>
                 </c:pt>
                 <c:pt idx="9">
-                  <c:v>28900</c:v>
+                  <c:v>28450</c:v>
                 </c:pt>
                 <c:pt idx="10">
-                  <c:v>28800</c:v>
+                  <c:v>26800</c:v>
                 </c:pt>
                 <c:pt idx="11">
-                  <c:v>27750</c:v>
+                  <c:v>26950</c:v>
                 </c:pt>
                 <c:pt idx="12">
-                  <c:v>28450</c:v>
+                  <c:v>26900</c:v>
                 </c:pt>
                 <c:pt idx="13">
-                  <c:v>26800</c:v>
+                  <c:v>29150</c:v>
                 </c:pt>
                 <c:pt idx="14">
-                  <c:v>26950</c:v>
+                  <c:v>29150</c:v>
                 </c:pt>
                 <c:pt idx="15">
-                  <c:v>26550</c:v>
+                  <c:v>29650</c:v>
                 </c:pt>
                 <c:pt idx="16">
-                  <c:v>26900</c:v>
-                </c:pt>
-                <c:pt idx="17">
-                  <c:v>28100</c:v>
-                </c:pt>
-                <c:pt idx="18">
-                  <c:v>29250</c:v>
-                </c:pt>
-                <c:pt idx="19">
-                  <c:v>29150</c:v>
-                </c:pt>
-                <c:pt idx="20">
-                  <c:v>30450</c:v>
-                </c:pt>
-                <c:pt idx="21">
-                  <c:v>29400</c:v>
-                </c:pt>
-                <c:pt idx="22">
-                  <c:v>29150</c:v>
-                </c:pt>
-                <c:pt idx="23">
-                  <c:v>30500</c:v>
-                </c:pt>
-                <c:pt idx="24">
-                  <c:v>30200</c:v>
-                </c:pt>
-                <c:pt idx="25">
-                  <c:v>29500</c:v>
-                </c:pt>
-                <c:pt idx="26">
-                  <c:v>29650</c:v>
-                </c:pt>
-                <c:pt idx="27">
                   <c:v>31400</c:v>
                 </c:pt>
               </c:numCache>
             </c:numRef>
           </c:val>
-          <c:smooth val="0"/>
         </c:ser>
+        <c:dLbls>
+          <c:numFmt formatCode="#,##0" sourceLinked="0"/>
+          <c:txPr>
+            <a:bodyPr/>
+            <a:lstStyle/>
+            <a:p>
+              <a:pPr>
+                <a:defRPr b="0" i="0" strike="noStrike" sz="1200" u="none">
+                  <a:solidFill>
+                    <a:srgbClr val="000000"/>
+                  </a:solidFill>
+                  <a:latin typeface="Arial"/>
+                </a:defRPr>
+              </a:pPr>
+            </a:p>
+          </c:txPr>
+          <c:showLegendKey val="0"/>
+          <c:showVal val="0"/>
+          <c:showCatName val="0"/>
+          <c:showSerName val="0"/>
+          <c:showPercent val="0"/>
+          <c:showBubbleSize val="0"/>
+          <c:showLeaderLines val="0"/>
+        </c:dLbls>
+        <c:gapWidth val="150"/>
+        <c:overlap val="0"/>
+        <c:axId val="2094734554"/>
+        <c:axId val="2094734553"/>
+        <c:axId val="2094734556"/>
+      </c:barChart>
+      <c:lineChart>
+        <c:varyColors val="0"/>
         <c:ser>
           <c:idx val="3"/>
           <c:order val="3"/>
@@ -1558,7 +1187,7 @@
             <a:solidFill>
               <a:srgbClr val="FF8F00"/>
             </a:solidFill>
-            <a:ln w="25400" cap="flat">
+            <a:ln w="31750" cap="flat">
               <a:solidFill>
                 <a:srgbClr val="FF8F00"/>
               </a:solidFill>
@@ -1611,9 +1240,9 @@
           </c:marker>
           <c:cat>
             <c:multiLvlStrRef>
-              <c:f>Sheet1!$A$2:$A$29</c:f>
+              <c:f>Sheet1!$A$2:$A$18</c:f>
               <c:multiLvlStrCache>
-                <c:ptCount val="28"/>
+                <c:ptCount val="17"/>
                 <c:lvl>
                   <c:pt idx="0">
                     <c:v>Dec'24</c:v>
@@ -1634,69 +1263,36 @@
                     <c:v>May'25</c:v>
                   </c:pt>
                   <c:pt idx="6">
-                    <c:v>May'25</c:v>
+                    <c:v>Jun'25</c:v>
                   </c:pt>
                   <c:pt idx="7">
-                    <c:v>Jun'25</c:v>
+                    <c:v>Jul'25</c:v>
                   </c:pt>
                   <c:pt idx="8">
-                    <c:v>Jul'25</c:v>
+                    <c:v>Aug'25</c:v>
                   </c:pt>
                   <c:pt idx="9">
-                    <c:v>Jul'25</c:v>
+                    <c:v>Sep'25</c:v>
                   </c:pt>
                   <c:pt idx="10">
-                    <c:v>Jul'25</c:v>
+                    <c:v>Oct'25</c:v>
                   </c:pt>
                   <c:pt idx="11">
-                    <c:v>Aug'25</c:v>
+                    <c:v>Nov'25</c:v>
                   </c:pt>
                   <c:pt idx="12">
-                    <c:v>Sep'25</c:v>
+                    <c:v>Dec'25</c:v>
                   </c:pt>
                   <c:pt idx="13">
-                    <c:v>Oct'25</c:v>
+                    <c:v>Jan'26</c:v>
                   </c:pt>
                   <c:pt idx="14">
-                    <c:v>Nov'25</c:v>
+                    <c:v>Feb'26</c:v>
                   </c:pt>
                   <c:pt idx="15">
-                    <c:v>Dec'25</c:v>
+                    <c:v>Mar'26</c:v>
                   </c:pt>
                   <c:pt idx="16">
-                    <c:v>Dec'25</c:v>
-                  </c:pt>
-                  <c:pt idx="17">
-                    <c:v>Jan'26</c:v>
-                  </c:pt>
-                  <c:pt idx="18">
-                    <c:v>Jan'26</c:v>
-                  </c:pt>
-                  <c:pt idx="19">
-                    <c:v>Jan'26</c:v>
-                  </c:pt>
-                  <c:pt idx="20">
-                    <c:v>Feb'26</c:v>
-                  </c:pt>
-                  <c:pt idx="21">
-                    <c:v>Feb'26</c:v>
-                  </c:pt>
-                  <c:pt idx="22">
-                    <c:v>Feb'26</c:v>
-                  </c:pt>
-                  <c:pt idx="23">
-                    <c:v>Mar'26</c:v>
-                  </c:pt>
-                  <c:pt idx="24">
-                    <c:v>Mar'26</c:v>
-                  </c:pt>
-                  <c:pt idx="25">
-                    <c:v>Mar'26</c:v>
-                  </c:pt>
-                  <c:pt idx="26">
-                    <c:v>Mar'26</c:v>
-                  </c:pt>
-                  <c:pt idx="27">
                     <c:v>Apr'26</c:v>
                   </c:pt>
                 </c:lvl>
@@ -1705,10 +1301,10 @@
           </c:cat>
           <c:val>
             <c:numRef>
-              <c:f>Sheet1!$E$2:$E$29</c:f>
+              <c:f>Sheet1!$E$2:$E$18</c:f>
               <c:numCache>
                 <c:formatCode>General</c:formatCode>
-                <c:ptCount val="28"/>
+                <c:ptCount val="17"/>
                 <c:pt idx="0">
                   <c:v>65.5</c:v>
                 </c:pt>
@@ -1725,72 +1321,39 @@
                   <c:v>70.8</c:v>
                 </c:pt>
                 <c:pt idx="5">
-                  <c:v>70.7</c:v>
+                  <c:v>72.2</c:v>
                 </c:pt>
                 <c:pt idx="6">
-                  <c:v>72.2</c:v>
+                  <c:v>72.3</c:v>
                 </c:pt>
                 <c:pt idx="7">
                   <c:v>72.3</c:v>
                 </c:pt>
                 <c:pt idx="8">
-                  <c:v>72.7</c:v>
+                  <c:v>69.9</c:v>
                 </c:pt>
                 <c:pt idx="9">
-                  <c:v>72.3</c:v>
+                  <c:v>69.9</c:v>
                 </c:pt>
                 <c:pt idx="10">
-                  <c:v>72.3</c:v>
+                  <c:v>72</c:v>
                 </c:pt>
                 <c:pt idx="11">
                   <c:v>69.9</c:v>
                 </c:pt>
                 <c:pt idx="12">
-                  <c:v>69.9</c:v>
+                  <c:v>69.3</c:v>
                 </c:pt>
                 <c:pt idx="13">
-                  <c:v>72</c:v>
+                  <c:v>73.1</c:v>
                 </c:pt>
                 <c:pt idx="14">
-                  <c:v>69.9</c:v>
+                  <c:v>73.2</c:v>
                 </c:pt>
                 <c:pt idx="15">
-                  <c:v>69.4</c:v>
+                  <c:v>75.5</c:v>
                 </c:pt>
                 <c:pt idx="16">
-                  <c:v>69.3</c:v>
-                </c:pt>
-                <c:pt idx="17">
-                  <c:v>71.6</c:v>
-                </c:pt>
-                <c:pt idx="18">
-                  <c:v>73</c:v>
-                </c:pt>
-                <c:pt idx="19">
-                  <c:v>73.1</c:v>
-                </c:pt>
-                <c:pt idx="20">
-                  <c:v>74.3</c:v>
-                </c:pt>
-                <c:pt idx="21">
-                  <c:v>73.3</c:v>
-                </c:pt>
-                <c:pt idx="22">
-                  <c:v>73.2</c:v>
-                </c:pt>
-                <c:pt idx="23">
-                  <c:v>74.4</c:v>
-                </c:pt>
-                <c:pt idx="24">
-                  <c:v>74.6</c:v>
-                </c:pt>
-                <c:pt idx="25">
-                  <c:v>75.5</c:v>
-                </c:pt>
-                <c:pt idx="26">
-                  <c:v>75.5</c:v>
-                </c:pt>
-                <c:pt idx="27">
                   <c:v>81</c:v>
                 </c:pt>
               </c:numCache>
@@ -1824,7 +1387,7 @@
         </c:dLbls>
         <c:marker val="1"/>
         <c:axId val="2094734554"/>
-        <c:axId val="2094734552"/>
+        <c:axId val="2094734553"/>
         <c:axId val="2094734556"/>
       </c:lineChart>
       <c:catAx>
@@ -1852,7 +1415,7 @@
           <a:lstStyle/>
           <a:p>
             <a:pPr>
-              <a:defRPr sz="900" b="0" i="0" u="none" strike="noStrike">
+              <a:defRPr sz="1000" b="0" i="0" u="none" strike="noStrike">
                 <a:solidFill>
                   <a:srgbClr val="7F7F7F"/>
                 </a:solidFill>
@@ -2023,9 +1586,9 @@
           </c:dLbls>
           <c:cat>
             <c:multiLvlStrRef>
-              <c:f>Sheet1!$A$2:$A$29</c:f>
+              <c:f>Sheet1!$A$2:$A$18</c:f>
               <c:multiLvlStrCache>
-                <c:ptCount val="28"/>
+                <c:ptCount val="17"/>
                 <c:lvl>
                   <c:pt idx="0">
                     <c:v>Dec'24</c:v>
@@ -2046,69 +1609,36 @@
                     <c:v>May'25</c:v>
                   </c:pt>
                   <c:pt idx="6">
-                    <c:v>May'25</c:v>
+                    <c:v>Jun'25</c:v>
                   </c:pt>
                   <c:pt idx="7">
-                    <c:v>Jun'25</c:v>
+                    <c:v>Jul'25</c:v>
                   </c:pt>
                   <c:pt idx="8">
-                    <c:v>Jul'25</c:v>
+                    <c:v>Aug'25</c:v>
                   </c:pt>
                   <c:pt idx="9">
-                    <c:v>Jul'25</c:v>
+                    <c:v>Sep'25</c:v>
                   </c:pt>
                   <c:pt idx="10">
-                    <c:v>Jul'25</c:v>
+                    <c:v>Oct'25</c:v>
                   </c:pt>
                   <c:pt idx="11">
-                    <c:v>Aug'25</c:v>
+                    <c:v>Nov'25</c:v>
                   </c:pt>
                   <c:pt idx="12">
-                    <c:v>Sep'25</c:v>
+                    <c:v>Dec'25</c:v>
                   </c:pt>
                   <c:pt idx="13">
-                    <c:v>Oct'25</c:v>
+                    <c:v>Jan'26</c:v>
                   </c:pt>
                   <c:pt idx="14">
-                    <c:v>Nov'25</c:v>
+                    <c:v>Feb'26</c:v>
                   </c:pt>
                   <c:pt idx="15">
-                    <c:v>Dec'25</c:v>
+                    <c:v>Mar'26</c:v>
                   </c:pt>
                   <c:pt idx="16">
-                    <c:v>Dec'25</c:v>
-                  </c:pt>
-                  <c:pt idx="17">
-                    <c:v>Jan'26</c:v>
-                  </c:pt>
-                  <c:pt idx="18">
-                    <c:v>Jan'26</c:v>
-                  </c:pt>
-                  <c:pt idx="19">
-                    <c:v>Jan'26</c:v>
-                  </c:pt>
-                  <c:pt idx="20">
-                    <c:v>Feb'26</c:v>
-                  </c:pt>
-                  <c:pt idx="21">
-                    <c:v>Feb'26</c:v>
-                  </c:pt>
-                  <c:pt idx="22">
-                    <c:v>Feb'26</c:v>
-                  </c:pt>
-                  <c:pt idx="23">
-                    <c:v>Mar'26</c:v>
-                  </c:pt>
-                  <c:pt idx="24">
-                    <c:v>Mar'26</c:v>
-                  </c:pt>
-                  <c:pt idx="25">
-                    <c:v>Mar'26</c:v>
-                  </c:pt>
-                  <c:pt idx="26">
-                    <c:v>Mar'26</c:v>
-                  </c:pt>
-                  <c:pt idx="27">
                     <c:v>Apr'26</c:v>
                   </c:pt>
                 </c:lvl>
@@ -2117,10 +1647,10 @@
           </c:cat>
           <c:val>
             <c:numRef>
-              <c:f>Sheet1!$B$2:$B$29</c:f>
+              <c:f>Sheet1!$B$2:$B$18</c:f>
               <c:numCache>
                 <c:formatCode>General</c:formatCode>
-                <c:ptCount val="28"/>
+                <c:ptCount val="17"/>
                 <c:pt idx="0">
                   <c:v>518.69</c:v>
                 </c:pt>
@@ -2137,72 +1667,39 @@
                   <c:v>1612.62</c:v>
                 </c:pt>
                 <c:pt idx="5">
-                  <c:v>1969.18</c:v>
+                  <c:v>1458.55</c:v>
                 </c:pt>
                 <c:pt idx="6">
-                  <c:v>1458.55</c:v>
+                  <c:v>902.54</c:v>
                 </c:pt>
                 <c:pt idx="7">
-                  <c:v>902.54</c:v>
+                  <c:v>-1172.9</c:v>
                 </c:pt>
                 <c:pt idx="8">
-                  <c:v>498.63</c:v>
+                  <c:v>-485.6</c:v>
                 </c:pt>
                 <c:pt idx="9">
-                  <c:v>-1301.05</c:v>
+                  <c:v>-1776.62</c:v>
                 </c:pt>
                 <c:pt idx="10">
-                  <c:v>-1172.9</c:v>
+                  <c:v>-1433.88</c:v>
                 </c:pt>
                 <c:pt idx="11">
-                  <c:v>-485.6</c:v>
+                  <c:v>-1189.77</c:v>
                 </c:pt>
                 <c:pt idx="12">
-                  <c:v>-1776.62</c:v>
+                  <c:v>618.4</c:v>
                 </c:pt>
                 <c:pt idx="13">
-                  <c:v>-1433.88</c:v>
+                  <c:v>433.02</c:v>
                 </c:pt>
                 <c:pt idx="14">
-                  <c:v>-1189.77</c:v>
+                  <c:v>-610.99</c:v>
                 </c:pt>
                 <c:pt idx="15">
-                  <c:v>427</c:v>
+                  <c:v>509.7</c:v>
                 </c:pt>
                 <c:pt idx="16">
-                  <c:v>618.4</c:v>
-                </c:pt>
-                <c:pt idx="17">
-                  <c:v>1639.58</c:v>
-                </c:pt>
-                <c:pt idx="18">
-                  <c:v>676.67</c:v>
-                </c:pt>
-                <c:pt idx="19">
-                  <c:v>433.02</c:v>
-                </c:pt>
-                <c:pt idx="20">
-                  <c:v>-609.77</c:v>
-                </c:pt>
-                <c:pt idx="21">
-                  <c:v>-726.71</c:v>
-                </c:pt>
-                <c:pt idx="22">
-                  <c:v>-610.99</c:v>
-                </c:pt>
-                <c:pt idx="23">
-                  <c:v>556.33</c:v>
-                </c:pt>
-                <c:pt idx="24">
-                  <c:v>558.24</c:v>
-                </c:pt>
-                <c:pt idx="25">
-                  <c:v>259.94</c:v>
-                </c:pt>
-                <c:pt idx="26">
-                  <c:v>509.7</c:v>
-                </c:pt>
-                <c:pt idx="27">
                   <c:v>416.63</c:v>
                 </c:pt>
               </c:numCache>
@@ -2256,9 +1753,9 @@
           </c:dLbls>
           <c:cat>
             <c:multiLvlStrRef>
-              <c:f>Sheet1!$A$2:$A$29</c:f>
+              <c:f>Sheet1!$A$2:$A$18</c:f>
               <c:multiLvlStrCache>
-                <c:ptCount val="28"/>
+                <c:ptCount val="17"/>
                 <c:lvl>
                   <c:pt idx="0">
                     <c:v>Dec'24</c:v>
@@ -2279,69 +1776,36 @@
                     <c:v>May'25</c:v>
                   </c:pt>
                   <c:pt idx="6">
-                    <c:v>May'25</c:v>
+                    <c:v>Jun'25</c:v>
                   </c:pt>
                   <c:pt idx="7">
-                    <c:v>Jun'25</c:v>
+                    <c:v>Jul'25</c:v>
                   </c:pt>
                   <c:pt idx="8">
-                    <c:v>Jul'25</c:v>
+                    <c:v>Aug'25</c:v>
                   </c:pt>
                   <c:pt idx="9">
-                    <c:v>Jul'25</c:v>
+                    <c:v>Sep'25</c:v>
                   </c:pt>
                   <c:pt idx="10">
-                    <c:v>Jul'25</c:v>
+                    <c:v>Oct'25</c:v>
                   </c:pt>
                   <c:pt idx="11">
-                    <c:v>Aug'25</c:v>
+                    <c:v>Nov'25</c:v>
                   </c:pt>
                   <c:pt idx="12">
-                    <c:v>Sep'25</c:v>
+                    <c:v>Dec'25</c:v>
                   </c:pt>
                   <c:pt idx="13">
-                    <c:v>Oct'25</c:v>
+                    <c:v>Jan'26</c:v>
                   </c:pt>
                   <c:pt idx="14">
-                    <c:v>Nov'25</c:v>
+                    <c:v>Feb'26</c:v>
                   </c:pt>
                   <c:pt idx="15">
-                    <c:v>Dec'25</c:v>
+                    <c:v>Mar'26</c:v>
                   </c:pt>
                   <c:pt idx="16">
-                    <c:v>Dec'25</c:v>
-                  </c:pt>
-                  <c:pt idx="17">
-                    <c:v>Jan'26</c:v>
-                  </c:pt>
-                  <c:pt idx="18">
-                    <c:v>Jan'26</c:v>
-                  </c:pt>
-                  <c:pt idx="19">
-                    <c:v>Jan'26</c:v>
-                  </c:pt>
-                  <c:pt idx="20">
-                    <c:v>Feb'26</c:v>
-                  </c:pt>
-                  <c:pt idx="21">
-                    <c:v>Feb'26</c:v>
-                  </c:pt>
-                  <c:pt idx="22">
-                    <c:v>Feb'26</c:v>
-                  </c:pt>
-                  <c:pt idx="23">
-                    <c:v>Mar'26</c:v>
-                  </c:pt>
-                  <c:pt idx="24">
-                    <c:v>Mar'26</c:v>
-                  </c:pt>
-                  <c:pt idx="25">
-                    <c:v>Mar'26</c:v>
-                  </c:pt>
-                  <c:pt idx="26">
-                    <c:v>Mar'26</c:v>
-                  </c:pt>
-                  <c:pt idx="27">
                     <c:v>Apr'26</c:v>
                   </c:pt>
                 </c:lvl>
@@ -2350,10 +1814,10 @@
           </c:cat>
           <c:val>
             <c:numRef>
-              <c:f>Sheet1!$C$2:$C$29</c:f>
+              <c:f>Sheet1!$C$2:$C$18</c:f>
               <c:numCache>
                 <c:formatCode>General</c:formatCode>
-                <c:ptCount val="28"/>
+                <c:ptCount val="17"/>
                 <c:pt idx="0">
                   <c:v>85.71</c:v>
                 </c:pt>
@@ -2370,72 +1834,39 @@
                   <c:v>169.18</c:v>
                 </c:pt>
                 <c:pt idx="5">
-                  <c:v>441.85</c:v>
+                  <c:v>318.45</c:v>
                 </c:pt>
                 <c:pt idx="6">
-                  <c:v>318.45</c:v>
+                  <c:v>544.96</c:v>
                 </c:pt>
                 <c:pt idx="7">
-                  <c:v>544.96</c:v>
+                  <c:v>-919.91</c:v>
                 </c:pt>
                 <c:pt idx="8">
-                  <c:v>408.01</c:v>
+                  <c:v>-610.19</c:v>
                 </c:pt>
                 <c:pt idx="9">
-                  <c:v>-1068.01</c:v>
+                  <c:v>-1076.88</c:v>
                 </c:pt>
                 <c:pt idx="10">
-                  <c:v>-919.91</c:v>
+                  <c:v>-869.46</c:v>
                 </c:pt>
                 <c:pt idx="11">
-                  <c:v>-610.19</c:v>
+                  <c:v>-613.2</c:v>
                 </c:pt>
                 <c:pt idx="12">
-                  <c:v>-1076.88</c:v>
+                  <c:v>-70.46</c:v>
                 </c:pt>
                 <c:pt idx="13">
-                  <c:v>-869.46</c:v>
+                  <c:v>741.76</c:v>
                 </c:pt>
                 <c:pt idx="14">
-                  <c:v>-613.2</c:v>
+                  <c:v>-105.68</c:v>
                 </c:pt>
                 <c:pt idx="15">
-                  <c:v>-95.17</c:v>
+                  <c:v>172.45</c:v>
                 </c:pt>
                 <c:pt idx="16">
-                  <c:v>-70.46</c:v>
-                </c:pt>
-                <c:pt idx="17">
-                  <c:v>323.7</c:v>
-                </c:pt>
-                <c:pt idx="18">
-                  <c:v>806.24</c:v>
-                </c:pt>
-                <c:pt idx="19">
-                  <c:v>741.76</c:v>
-                </c:pt>
-                <c:pt idx="20">
-                  <c:v>-246.38</c:v>
-                </c:pt>
-                <c:pt idx="21">
-                  <c:v>23.22</c:v>
-                </c:pt>
-                <c:pt idx="22">
-                  <c:v>-105.68</c:v>
-                </c:pt>
-                <c:pt idx="23">
-                  <c:v>11</c:v>
-                </c:pt>
-                <c:pt idx="24">
-                  <c:v>-47.79</c:v>
-                </c:pt>
-                <c:pt idx="25">
-                  <c:v>65.27</c:v>
-                </c:pt>
-                <c:pt idx="26">
-                  <c:v>172.45</c:v>
-                </c:pt>
-                <c:pt idx="27">
                   <c:v>92.68</c:v>
                 </c:pt>
               </c:numCache>
@@ -2497,7 +1928,7 @@
           <a:lstStyle/>
           <a:p>
             <a:pPr>
-              <a:defRPr sz="900" b="0" i="0" u="none" strike="noStrike">
+              <a:defRPr sz="1000" b="0" i="0" u="none" strike="noStrike">
                 <a:solidFill>
                   <a:srgbClr val="7F7F7F"/>
                 </a:solidFill>
@@ -2668,9 +2099,9 @@
           </c:dLbls>
           <c:cat>
             <c:multiLvlStrRef>
-              <c:f>Sheet1!$A$2:$A$29</c:f>
+              <c:f>Sheet1!$A$2:$A$18</c:f>
               <c:multiLvlStrCache>
-                <c:ptCount val="28"/>
+                <c:ptCount val="17"/>
                 <c:lvl>
                   <c:pt idx="0">
                     <c:v>Dec'24</c:v>
@@ -2691,69 +2122,36 @@
                     <c:v>May'25</c:v>
                   </c:pt>
                   <c:pt idx="6">
-                    <c:v>May'25</c:v>
+                    <c:v>Jun'25</c:v>
                   </c:pt>
                   <c:pt idx="7">
-                    <c:v>Jun'25</c:v>
+                    <c:v>Jul'25</c:v>
                   </c:pt>
                   <c:pt idx="8">
-                    <c:v>Jul'25</c:v>
+                    <c:v>Aug'25</c:v>
                   </c:pt>
                   <c:pt idx="9">
-                    <c:v>Jul'25</c:v>
+                    <c:v>Sep'25</c:v>
                   </c:pt>
                   <c:pt idx="10">
-                    <c:v>Jul'25</c:v>
+                    <c:v>Oct'25</c:v>
                   </c:pt>
                   <c:pt idx="11">
-                    <c:v>Aug'25</c:v>
+                    <c:v>Nov'25</c:v>
                   </c:pt>
                   <c:pt idx="12">
-                    <c:v>Sep'25</c:v>
+                    <c:v>Dec'25</c:v>
                   </c:pt>
                   <c:pt idx="13">
-                    <c:v>Oct'25</c:v>
+                    <c:v>Jan'26</c:v>
                   </c:pt>
                   <c:pt idx="14">
-                    <c:v>Nov'25</c:v>
+                    <c:v>Feb'26</c:v>
                   </c:pt>
                   <c:pt idx="15">
-                    <c:v>Dec'25</c:v>
+                    <c:v>Mar'26</c:v>
                   </c:pt>
                   <c:pt idx="16">
-                    <c:v>Dec'25</c:v>
-                  </c:pt>
-                  <c:pt idx="17">
-                    <c:v>Jan'26</c:v>
-                  </c:pt>
-                  <c:pt idx="18">
-                    <c:v>Jan'26</c:v>
-                  </c:pt>
-                  <c:pt idx="19">
-                    <c:v>Jan'26</c:v>
-                  </c:pt>
-                  <c:pt idx="20">
-                    <c:v>Feb'26</c:v>
-                  </c:pt>
-                  <c:pt idx="21">
-                    <c:v>Feb'26</c:v>
-                  </c:pt>
-                  <c:pt idx="22">
-                    <c:v>Feb'26</c:v>
-                  </c:pt>
-                  <c:pt idx="23">
-                    <c:v>Mar'26</c:v>
-                  </c:pt>
-                  <c:pt idx="24">
-                    <c:v>Mar'26</c:v>
-                  </c:pt>
-                  <c:pt idx="25">
-                    <c:v>Mar'26</c:v>
-                  </c:pt>
-                  <c:pt idx="26">
-                    <c:v>Mar'26</c:v>
-                  </c:pt>
-                  <c:pt idx="27">
                     <c:v>Apr'26</c:v>
                   </c:pt>
                 </c:lvl>
@@ -2762,10 +2160,10 @@
           </c:cat>
           <c:val>
             <c:numRef>
-              <c:f>Sheet1!$B$2:$B$29</c:f>
+              <c:f>Sheet1!$B$2:$B$18</c:f>
               <c:numCache>
                 <c:formatCode>General</c:formatCode>
-                <c:ptCount val="28"/>
+                <c:ptCount val="17"/>
                 <c:pt idx="0">
                   <c:v>785.24</c:v>
                 </c:pt>
@@ -2782,72 +2180,39 @@
                   <c:v>3221.52</c:v>
                 </c:pt>
                 <c:pt idx="5">
-                  <c:v>3282.54</c:v>
+                  <c:v>2227.82</c:v>
                 </c:pt>
                 <c:pt idx="6">
-                  <c:v>2227.82</c:v>
+                  <c:v>1583.36</c:v>
                 </c:pt>
                 <c:pt idx="7">
-                  <c:v>1583.36</c:v>
+                  <c:v>-1162.28</c:v>
                 </c:pt>
                 <c:pt idx="8">
-                  <c:v>928.22</c:v>
+                  <c:v>-262.29</c:v>
                 </c:pt>
                 <c:pt idx="9">
-                  <c:v>-1091.46</c:v>
+                  <c:v>-1411.63</c:v>
                 </c:pt>
                 <c:pt idx="10">
-                  <c:v>-1162.28</c:v>
+                  <c:v>-1554.96</c:v>
                 </c:pt>
                 <c:pt idx="11">
-                  <c:v>-262.29</c:v>
+                  <c:v>-1118.49</c:v>
                 </c:pt>
                 <c:pt idx="12">
-                  <c:v>-1411.63</c:v>
+                  <c:v>594.55</c:v>
                 </c:pt>
                 <c:pt idx="13">
-                  <c:v>-1554.96</c:v>
+                  <c:v>1130.09</c:v>
                 </c:pt>
                 <c:pt idx="14">
-                  <c:v>-1118.49</c:v>
+                  <c:v>536.13</c:v>
                 </c:pt>
                 <c:pt idx="15">
-                  <c:v>556.02</c:v>
+                  <c:v>2456.18</c:v>
                 </c:pt>
                 <c:pt idx="16">
-                  <c:v>594.55</c:v>
-                </c:pt>
-                <c:pt idx="17">
-                  <c:v>1999.1</c:v>
-                </c:pt>
-                <c:pt idx="18">
-                  <c:v>1024.48</c:v>
-                </c:pt>
-                <c:pt idx="19">
-                  <c:v>1130.09</c:v>
-                </c:pt>
-                <c:pt idx="20">
-                  <c:v>322.95</c:v>
-                </c:pt>
-                <c:pt idx="21">
-                  <c:v>417.87</c:v>
-                </c:pt>
-                <c:pt idx="22">
-                  <c:v>536.13</c:v>
-                </c:pt>
-                <c:pt idx="23">
-                  <c:v>2145.58</c:v>
-                </c:pt>
-                <c:pt idx="24">
-                  <c:v>2500.31</c:v>
-                </c:pt>
-                <c:pt idx="25">
-                  <c:v>2358.82</c:v>
-                </c:pt>
-                <c:pt idx="26">
-                  <c:v>2456.18</c:v>
-                </c:pt>
-                <c:pt idx="27">
                   <c:v>3047.16</c:v>
                 </c:pt>
               </c:numCache>
@@ -2901,9 +2266,9 @@
           </c:dLbls>
           <c:cat>
             <c:multiLvlStrRef>
-              <c:f>Sheet1!$A$2:$A$29</c:f>
+              <c:f>Sheet1!$A$2:$A$18</c:f>
               <c:multiLvlStrCache>
-                <c:ptCount val="28"/>
+                <c:ptCount val="17"/>
                 <c:lvl>
                   <c:pt idx="0">
                     <c:v>Dec'24</c:v>
@@ -2924,69 +2289,36 @@
                     <c:v>May'25</c:v>
                   </c:pt>
                   <c:pt idx="6">
-                    <c:v>May'25</c:v>
+                    <c:v>Jun'25</c:v>
                   </c:pt>
                   <c:pt idx="7">
-                    <c:v>Jun'25</c:v>
+                    <c:v>Jul'25</c:v>
                   </c:pt>
                   <c:pt idx="8">
-                    <c:v>Jul'25</c:v>
+                    <c:v>Aug'25</c:v>
                   </c:pt>
                   <c:pt idx="9">
-                    <c:v>Jul'25</c:v>
+                    <c:v>Sep'25</c:v>
                   </c:pt>
                   <c:pt idx="10">
-                    <c:v>Jul'25</c:v>
+                    <c:v>Oct'25</c:v>
                   </c:pt>
                   <c:pt idx="11">
-                    <c:v>Aug'25</c:v>
+                    <c:v>Nov'25</c:v>
                   </c:pt>
                   <c:pt idx="12">
-                    <c:v>Sep'25</c:v>
+                    <c:v>Dec'25</c:v>
                   </c:pt>
                   <c:pt idx="13">
-                    <c:v>Oct'25</c:v>
+                    <c:v>Jan'26</c:v>
                   </c:pt>
                   <c:pt idx="14">
-                    <c:v>Nov'25</c:v>
+                    <c:v>Feb'26</c:v>
                   </c:pt>
                   <c:pt idx="15">
-                    <c:v>Dec'25</c:v>
+                    <c:v>Mar'26</c:v>
                   </c:pt>
                   <c:pt idx="16">
-                    <c:v>Dec'25</c:v>
-                  </c:pt>
-                  <c:pt idx="17">
-                    <c:v>Jan'26</c:v>
-                  </c:pt>
-                  <c:pt idx="18">
-                    <c:v>Jan'26</c:v>
-                  </c:pt>
-                  <c:pt idx="19">
-                    <c:v>Jan'26</c:v>
-                  </c:pt>
-                  <c:pt idx="20">
-                    <c:v>Feb'26</c:v>
-                  </c:pt>
-                  <c:pt idx="21">
-                    <c:v>Feb'26</c:v>
-                  </c:pt>
-                  <c:pt idx="22">
-                    <c:v>Feb'26</c:v>
-                  </c:pt>
-                  <c:pt idx="23">
-                    <c:v>Mar'26</c:v>
-                  </c:pt>
-                  <c:pt idx="24">
-                    <c:v>Mar'26</c:v>
-                  </c:pt>
-                  <c:pt idx="25">
-                    <c:v>Mar'26</c:v>
-                  </c:pt>
-                  <c:pt idx="26">
-                    <c:v>Mar'26</c:v>
-                  </c:pt>
-                  <c:pt idx="27">
                     <c:v>Apr'26</c:v>
                   </c:pt>
                 </c:lvl>
@@ -2995,10 +2327,10 @@
           </c:cat>
           <c:val>
             <c:numRef>
-              <c:f>Sheet1!$C$2:$C$29</c:f>
+              <c:f>Sheet1!$C$2:$C$18</c:f>
               <c:numCache>
                 <c:formatCode>General</c:formatCode>
-                <c:ptCount val="28"/>
+                <c:ptCount val="17"/>
                 <c:pt idx="0">
                   <c:v>1176.79</c:v>
                 </c:pt>
@@ -3015,72 +2347,39 @@
                   <c:v>3002.54</c:v>
                 </c:pt>
                 <c:pt idx="5">
-                  <c:v>2928.59</c:v>
+                  <c:v>2211.4</c:v>
                 </c:pt>
                 <c:pt idx="6">
-                  <c:v>2211.4</c:v>
+                  <c:v>2045.32</c:v>
                 </c:pt>
                 <c:pt idx="7">
-                  <c:v>2045.32</c:v>
+                  <c:v>971.93</c:v>
                 </c:pt>
                 <c:pt idx="8">
-                  <c:v>1708.07</c:v>
+                  <c:v>193.73</c:v>
                 </c:pt>
                 <c:pt idx="9">
-                  <c:v>1123.45</c:v>
+                  <c:v>-279.89</c:v>
                 </c:pt>
                 <c:pt idx="10">
-                  <c:v>971.93</c:v>
+                  <c:v>-859.62</c:v>
                 </c:pt>
                 <c:pt idx="11">
-                  <c:v>193.73</c:v>
+                  <c:v>-565.31</c:v>
                 </c:pt>
                 <c:pt idx="12">
-                  <c:v>-279.89</c:v>
+                  <c:v>630.58</c:v>
                 </c:pt>
                 <c:pt idx="13">
-                  <c:v>-859.62</c:v>
+                  <c:v>2214.89</c:v>
                 </c:pt>
                 <c:pt idx="14">
-                  <c:v>-565.31</c:v>
+                  <c:v>2774.28</c:v>
                 </c:pt>
                 <c:pt idx="15">
-                  <c:v>308.87</c:v>
+                  <c:v>4245.83</c:v>
                 </c:pt>
                 <c:pt idx="16">
-                  <c:v>630.58</c:v>
-                </c:pt>
-                <c:pt idx="17">
-                  <c:v>2107.09</c:v>
-                </c:pt>
-                <c:pt idx="18">
-                  <c:v>2379.09</c:v>
-                </c:pt>
-                <c:pt idx="19">
-                  <c:v>2214.89</c:v>
-                </c:pt>
-                <c:pt idx="20">
-                  <c:v>1567.65</c:v>
-                </c:pt>
-                <c:pt idx="21">
-                  <c:v>2450.61</c:v>
-                </c:pt>
-                <c:pt idx="22">
-                  <c:v>2774.28</c:v>
-                </c:pt>
-                <c:pt idx="23">
-                  <c:v>4129.88</c:v>
-                </c:pt>
-                <c:pt idx="24">
-                  <c:v>4021.43</c:v>
-                </c:pt>
-                <c:pt idx="25">
-                  <c:v>3589.8</c:v>
-                </c:pt>
-                <c:pt idx="26">
-                  <c:v>4245.83</c:v>
-                </c:pt>
-                <c:pt idx="27">
                   <c:v>4799.42</c:v>
                 </c:pt>
               </c:numCache>
@@ -3142,7 +2441,7 @@
           <a:lstStyle/>
           <a:p>
             <a:pPr>
-              <a:defRPr sz="900" b="0" i="0" u="none" strike="noStrike">
+              <a:defRPr sz="1000" b="0" i="0" u="none" strike="noStrike">
                 <a:solidFill>
                   <a:srgbClr val="7F7F7F"/>
                 </a:solidFill>
@@ -4520,7 +3819,7 @@
                 <a:ea typeface="Calibri" pitchFamily="34" charset="-122"/>
                 <a:cs typeface="Calibri" pitchFamily="34" charset="-120"/>
               </a:rPr>
-              <a:t>Key raw material prices and margin trends with month-on-month changes</a:t>
+              <a:t>Monthly raw material prices and margin trends with period-on-period changes</a:t>
             </a:r>
             <a:endParaRPr lang="en-US" sz="1200" dirty="0"/>
           </a:p>
@@ -4559,7 +3858,7 @@
                 <a:ea typeface="Calibri" pitchFamily="34" charset="-122"/>
                 <a:cs typeface="Calibri" pitchFamily="34" charset="-120"/>
               </a:rPr>
-              <a:t>Period: 2024-12-12 to 2026-04-02  |  28 data points</a:t>
+              <a:t>Period: 2024-12-12 to 2026-04-02  |  17 months</a:t>
             </a:r>
             <a:endParaRPr lang="en-US" sz="1200" dirty="0"/>
           </a:p>
@@ -4773,18 +4072,20 @@
         </p:nvSpPr>
         <p:spPr>
           <a:xfrm>
-            <a:off x="457200" y="5166360"/>
-            <a:ext cx="11274552" cy="274320"/>
-          </a:xfrm>
-          <a:prstGeom prst="rect">
-            <a:avLst/>
-          </a:prstGeom>
-          <a:solidFill>
-            <a:srgbClr val="F2F2F2"/>
-          </a:solidFill>
-          <a:ln w="6350">
-            <a:solidFill>
-              <a:srgbClr val="CCCCCC"/>
+            <a:off x="1824671" y="3448286"/>
+            <a:ext cx="234909" cy="201168"/>
+          </a:xfrm>
+          <a:prstGeom prst="roundRect">
+            <a:avLst>
+              <a:gd name="adj" fmla="val 13636"/>
+            </a:avLst>
+          </a:prstGeom>
+          <a:solidFill>
+            <a:srgbClr val="213366"/>
+          </a:solidFill>
+          <a:ln w="12700">
+            <a:solidFill>
+              <a:srgbClr val="333333"/>
             </a:solidFill>
             <a:prstDash val="solid"/>
           </a:ln>
@@ -4798,8 +4099,8 @@
         </p:nvSpPr>
         <p:spPr>
           <a:xfrm>
-            <a:off x="594360" y="5166360"/>
-            <a:ext cx="11000232" cy="274320"/>
+            <a:off x="1824671" y="3448286"/>
+            <a:ext cx="234909" cy="201168"/>
           </a:xfrm>
           <a:prstGeom prst="rect">
             <a:avLst/>
@@ -4811,19 +4112,2129 @@
           <a:bodyPr wrap="square" lIns="0" tIns="0" rIns="0" bIns="0" rtlCol="0" anchor="ctr"/>
           <a:lstStyle/>
           <a:p>
-            <a:pPr algn="l" indent="0" marL="0">
+            <a:pPr algn="ctr" indent="0" marL="0">
               <a:buNone/>
             </a:pPr>
             <a:r>
-              <a:rPr lang="en-US" sz="1100" b="1" dirty="0">
-                <a:solidFill>
-                  <a:srgbClr val="213366"/>
+              <a:rPr lang="en-US" sz="700" b="1" dirty="0">
+                <a:solidFill>
+                  <a:srgbClr val="FFFFFF"/>
                 </a:solidFill>
                 <a:latin typeface="Calibri" pitchFamily="34" charset="0"/>
                 <a:ea typeface="Calibri" pitchFamily="34" charset="-122"/>
                 <a:cs typeface="Calibri" pitchFamily="34" charset="-120"/>
               </a:rPr>
-              <a:t>Latest change:  Raipur +1,500  |  NCR +2,000     •     Period avg:  Raipur 32,736  |  NCR 33,104 INR/MT</a:t>
+              <a:t>+700</a:t>
+            </a:r>
+            <a:endParaRPr lang="en-US" sz="700" dirty="0"/>
+          </a:p>
+        </p:txBody>
+      </p:sp>
+      <p:sp>
+        <p:nvSpPr>
+          <p:cNvPr id="9" name="Shape 5"/>
+          <p:cNvSpPr/>
+          <p:nvPr/>
+        </p:nvSpPr>
+        <p:spPr>
+          <a:xfrm>
+            <a:off x="2434823" y="3040408"/>
+            <a:ext cx="234909" cy="201168"/>
+          </a:xfrm>
+          <a:prstGeom prst="roundRect">
+            <a:avLst>
+              <a:gd name="adj" fmla="val 13636"/>
+            </a:avLst>
+          </a:prstGeom>
+          <a:solidFill>
+            <a:srgbClr val="213366"/>
+          </a:solidFill>
+          <a:ln w="12700">
+            <a:solidFill>
+              <a:srgbClr val="333333"/>
+            </a:solidFill>
+            <a:prstDash val="solid"/>
+          </a:ln>
+        </p:spPr>
+      </p:sp>
+      <p:sp>
+        <p:nvSpPr>
+          <p:cNvPr id="10" name="Text 6"/>
+          <p:cNvSpPr/>
+          <p:nvPr/>
+        </p:nvSpPr>
+        <p:spPr>
+          <a:xfrm>
+            <a:off x="2434823" y="3040408"/>
+            <a:ext cx="234909" cy="201168"/>
+          </a:xfrm>
+          <a:prstGeom prst="rect">
+            <a:avLst/>
+          </a:prstGeom>
+          <a:noFill/>
+          <a:ln/>
+        </p:spPr>
+        <p:txBody>
+          <a:bodyPr wrap="square" lIns="0" tIns="0" rIns="0" bIns="0" rtlCol="0" anchor="ctr"/>
+          <a:lstStyle/>
+          <a:p>
+            <a:pPr algn="ctr" indent="0" marL="0">
+              <a:buNone/>
+            </a:pPr>
+            <a:r>
+              <a:rPr lang="en-US" sz="700" b="1" dirty="0">
+                <a:solidFill>
+                  <a:srgbClr val="FFFFFF"/>
+                </a:solidFill>
+                <a:latin typeface="Calibri" pitchFamily="34" charset="0"/>
+                <a:ea typeface="Calibri" pitchFamily="34" charset="-122"/>
+                <a:cs typeface="Calibri" pitchFamily="34" charset="-120"/>
+              </a:rPr>
+              <a:t>+800</a:t>
+            </a:r>
+            <a:endParaRPr lang="en-US" sz="700" dirty="0"/>
+          </a:p>
+        </p:txBody>
+      </p:sp>
+      <p:sp>
+        <p:nvSpPr>
+          <p:cNvPr id="11" name="Shape 7"/>
+          <p:cNvSpPr/>
+          <p:nvPr/>
+        </p:nvSpPr>
+        <p:spPr>
+          <a:xfrm>
+            <a:off x="3044975" y="2734499"/>
+            <a:ext cx="234909" cy="201168"/>
+          </a:xfrm>
+          <a:prstGeom prst="roundRect">
+            <a:avLst>
+              <a:gd name="adj" fmla="val 13636"/>
+            </a:avLst>
+          </a:prstGeom>
+          <a:solidFill>
+            <a:srgbClr val="213366"/>
+          </a:solidFill>
+          <a:ln w="12700">
+            <a:solidFill>
+              <a:srgbClr val="333333"/>
+            </a:solidFill>
+            <a:prstDash val="solid"/>
+          </a:ln>
+        </p:spPr>
+      </p:sp>
+      <p:sp>
+        <p:nvSpPr>
+          <p:cNvPr id="12" name="Text 8"/>
+          <p:cNvSpPr/>
+          <p:nvPr/>
+        </p:nvSpPr>
+        <p:spPr>
+          <a:xfrm>
+            <a:off x="3044975" y="2734499"/>
+            <a:ext cx="234909" cy="201168"/>
+          </a:xfrm>
+          <a:prstGeom prst="rect">
+            <a:avLst/>
+          </a:prstGeom>
+          <a:noFill/>
+          <a:ln/>
+        </p:spPr>
+        <p:txBody>
+          <a:bodyPr wrap="square" lIns="0" tIns="0" rIns="0" bIns="0" rtlCol="0" anchor="ctr"/>
+          <a:lstStyle/>
+          <a:p>
+            <a:pPr algn="ctr" indent="0" marL="0">
+              <a:buNone/>
+            </a:pPr>
+            <a:r>
+              <a:rPr lang="en-US" sz="700" b="1" dirty="0">
+                <a:solidFill>
+                  <a:srgbClr val="FFFFFF"/>
+                </a:solidFill>
+                <a:latin typeface="Calibri" pitchFamily="34" charset="0"/>
+                <a:ea typeface="Calibri" pitchFamily="34" charset="-122"/>
+                <a:cs typeface="Calibri" pitchFamily="34" charset="-120"/>
+              </a:rPr>
+              <a:t>+600</a:t>
+            </a:r>
+            <a:endParaRPr lang="en-US" sz="700" dirty="0"/>
+          </a:p>
+        </p:txBody>
+      </p:sp>
+      <p:sp>
+        <p:nvSpPr>
+          <p:cNvPr id="13" name="Shape 9"/>
+          <p:cNvSpPr/>
+          <p:nvPr/>
+        </p:nvSpPr>
+        <p:spPr>
+          <a:xfrm>
+            <a:off x="3655127" y="3329136"/>
+            <a:ext cx="234909" cy="201168"/>
+          </a:xfrm>
+          <a:prstGeom prst="roundRect">
+            <a:avLst>
+              <a:gd name="adj" fmla="val 13636"/>
+            </a:avLst>
+          </a:prstGeom>
+          <a:solidFill>
+            <a:srgbClr val="213366"/>
+          </a:solidFill>
+          <a:ln w="12700">
+            <a:solidFill>
+              <a:srgbClr val="333333"/>
+            </a:solidFill>
+            <a:prstDash val="solid"/>
+          </a:ln>
+        </p:spPr>
+      </p:sp>
+      <p:sp>
+        <p:nvSpPr>
+          <p:cNvPr id="14" name="Text 10"/>
+          <p:cNvSpPr/>
+          <p:nvPr/>
+        </p:nvSpPr>
+        <p:spPr>
+          <a:xfrm>
+            <a:off x="3655127" y="3329136"/>
+            <a:ext cx="234909" cy="201168"/>
+          </a:xfrm>
+          <a:prstGeom prst="rect">
+            <a:avLst/>
+          </a:prstGeom>
+          <a:noFill/>
+          <a:ln/>
+        </p:spPr>
+        <p:txBody>
+          <a:bodyPr wrap="square" lIns="0" tIns="0" rIns="0" bIns="0" rtlCol="0" anchor="ctr"/>
+          <a:lstStyle/>
+          <a:p>
+            <a:pPr algn="ctr" indent="0" marL="0">
+              <a:buNone/>
+            </a:pPr>
+            <a:r>
+              <a:rPr lang="en-US" sz="700" b="1" dirty="0">
+                <a:solidFill>
+                  <a:srgbClr val="FFFFFF"/>
+                </a:solidFill>
+                <a:latin typeface="Calibri" pitchFamily="34" charset="0"/>
+                <a:ea typeface="Calibri" pitchFamily="34" charset="-122"/>
+                <a:cs typeface="Calibri" pitchFamily="34" charset="-120"/>
+              </a:rPr>
+              <a:t>-700</a:t>
+            </a:r>
+            <a:endParaRPr lang="en-US" sz="700" dirty="0"/>
+          </a:p>
+        </p:txBody>
+      </p:sp>
+      <p:sp>
+        <p:nvSpPr>
+          <p:cNvPr id="15" name="Shape 11"/>
+          <p:cNvSpPr/>
+          <p:nvPr/>
+        </p:nvSpPr>
+        <p:spPr>
+          <a:xfrm>
+            <a:off x="4265279" y="3787999"/>
+            <a:ext cx="234909" cy="201168"/>
+          </a:xfrm>
+          <a:prstGeom prst="roundRect">
+            <a:avLst>
+              <a:gd name="adj" fmla="val 13636"/>
+            </a:avLst>
+          </a:prstGeom>
+          <a:solidFill>
+            <a:srgbClr val="213366"/>
+          </a:solidFill>
+          <a:ln w="12700">
+            <a:solidFill>
+              <a:srgbClr val="333333"/>
+            </a:solidFill>
+            <a:prstDash val="solid"/>
+          </a:ln>
+        </p:spPr>
+      </p:sp>
+      <p:sp>
+        <p:nvSpPr>
+          <p:cNvPr id="16" name="Text 12"/>
+          <p:cNvSpPr/>
+          <p:nvPr/>
+        </p:nvSpPr>
+        <p:spPr>
+          <a:xfrm>
+            <a:off x="4265279" y="3787999"/>
+            <a:ext cx="234909" cy="201168"/>
+          </a:xfrm>
+          <a:prstGeom prst="rect">
+            <a:avLst/>
+          </a:prstGeom>
+          <a:noFill/>
+          <a:ln/>
+        </p:spPr>
+        <p:txBody>
+          <a:bodyPr wrap="square" lIns="0" tIns="0" rIns="0" bIns="0" rtlCol="0" anchor="ctr"/>
+          <a:lstStyle/>
+          <a:p>
+            <a:pPr algn="ctr" indent="0" marL="0">
+              <a:buNone/>
+            </a:pPr>
+            <a:r>
+              <a:rPr lang="en-US" sz="700" b="1" dirty="0">
+                <a:solidFill>
+                  <a:srgbClr val="FFFFFF"/>
+                </a:solidFill>
+                <a:latin typeface="Calibri" pitchFamily="34" charset="0"/>
+                <a:ea typeface="Calibri" pitchFamily="34" charset="-122"/>
+                <a:cs typeface="Calibri" pitchFamily="34" charset="-120"/>
+              </a:rPr>
+              <a:t>-900</a:t>
+            </a:r>
+            <a:endParaRPr lang="en-US" sz="700" dirty="0"/>
+          </a:p>
+        </p:txBody>
+      </p:sp>
+      <p:sp>
+        <p:nvSpPr>
+          <p:cNvPr id="17" name="Shape 13"/>
+          <p:cNvSpPr/>
+          <p:nvPr/>
+        </p:nvSpPr>
+        <p:spPr>
+          <a:xfrm>
+            <a:off x="4875432" y="4144892"/>
+            <a:ext cx="234909" cy="201168"/>
+          </a:xfrm>
+          <a:prstGeom prst="roundRect">
+            <a:avLst>
+              <a:gd name="adj" fmla="val 13636"/>
+            </a:avLst>
+          </a:prstGeom>
+          <a:solidFill>
+            <a:srgbClr val="213366"/>
+          </a:solidFill>
+          <a:ln w="12700">
+            <a:solidFill>
+              <a:srgbClr val="333333"/>
+            </a:solidFill>
+            <a:prstDash val="solid"/>
+          </a:ln>
+        </p:spPr>
+      </p:sp>
+      <p:sp>
+        <p:nvSpPr>
+          <p:cNvPr id="18" name="Text 14"/>
+          <p:cNvSpPr/>
+          <p:nvPr/>
+        </p:nvSpPr>
+        <p:spPr>
+          <a:xfrm>
+            <a:off x="4875432" y="4144892"/>
+            <a:ext cx="234909" cy="201168"/>
+          </a:xfrm>
+          <a:prstGeom prst="rect">
+            <a:avLst/>
+          </a:prstGeom>
+          <a:noFill/>
+          <a:ln/>
+        </p:spPr>
+        <p:txBody>
+          <a:bodyPr wrap="square" lIns="0" tIns="0" rIns="0" bIns="0" rtlCol="0" anchor="ctr"/>
+          <a:lstStyle/>
+          <a:p>
+            <a:pPr algn="ctr" indent="0" marL="0">
+              <a:buNone/>
+            </a:pPr>
+            <a:r>
+              <a:rPr lang="en-US" sz="700" b="1" dirty="0">
+                <a:solidFill>
+                  <a:srgbClr val="FFFFFF"/>
+                </a:solidFill>
+                <a:latin typeface="Calibri" pitchFamily="34" charset="0"/>
+                <a:ea typeface="Calibri" pitchFamily="34" charset="-122"/>
+                <a:cs typeface="Calibri" pitchFamily="34" charset="-120"/>
+              </a:rPr>
+              <a:t>-700</a:t>
+            </a:r>
+            <a:endParaRPr lang="en-US" sz="700" dirty="0"/>
+          </a:p>
+        </p:txBody>
+      </p:sp>
+      <p:sp>
+        <p:nvSpPr>
+          <p:cNvPr id="19" name="Shape 15"/>
+          <p:cNvSpPr/>
+          <p:nvPr/>
+        </p:nvSpPr>
+        <p:spPr>
+          <a:xfrm>
+            <a:off x="5485584" y="3856163"/>
+            <a:ext cx="234909" cy="201168"/>
+          </a:xfrm>
+          <a:prstGeom prst="roundRect">
+            <a:avLst>
+              <a:gd name="adj" fmla="val 13636"/>
+            </a:avLst>
+          </a:prstGeom>
+          <a:solidFill>
+            <a:srgbClr val="213366"/>
+          </a:solidFill>
+          <a:ln w="12700">
+            <a:solidFill>
+              <a:srgbClr val="333333"/>
+            </a:solidFill>
+            <a:prstDash val="solid"/>
+          </a:ln>
+        </p:spPr>
+      </p:sp>
+      <p:sp>
+        <p:nvSpPr>
+          <p:cNvPr id="20" name="Text 16"/>
+          <p:cNvSpPr/>
+          <p:nvPr/>
+        </p:nvSpPr>
+        <p:spPr>
+          <a:xfrm>
+            <a:off x="5485584" y="3856163"/>
+            <a:ext cx="234909" cy="201168"/>
+          </a:xfrm>
+          <a:prstGeom prst="rect">
+            <a:avLst/>
+          </a:prstGeom>
+          <a:noFill/>
+          <a:ln/>
+        </p:spPr>
+        <p:txBody>
+          <a:bodyPr wrap="square" lIns="0" tIns="0" rIns="0" bIns="0" rtlCol="0" anchor="ctr"/>
+          <a:lstStyle/>
+          <a:p>
+            <a:pPr algn="ctr" indent="0" marL="0">
+              <a:buNone/>
+            </a:pPr>
+            <a:r>
+              <a:rPr lang="en-US" sz="700" b="1" dirty="0">
+                <a:solidFill>
+                  <a:srgbClr val="FFFFFF"/>
+                </a:solidFill>
+                <a:latin typeface="Calibri" pitchFamily="34" charset="0"/>
+                <a:ea typeface="Calibri" pitchFamily="34" charset="-122"/>
+                <a:cs typeface="Calibri" pitchFamily="34" charset="-120"/>
+              </a:rPr>
+              <a:t>+100</a:t>
+            </a:r>
+            <a:endParaRPr lang="en-US" sz="700" dirty="0"/>
+          </a:p>
+        </p:txBody>
+      </p:sp>
+      <p:sp>
+        <p:nvSpPr>
+          <p:cNvPr id="21" name="Shape 17"/>
+          <p:cNvSpPr/>
+          <p:nvPr/>
+        </p:nvSpPr>
+        <p:spPr>
+          <a:xfrm>
+            <a:off x="6095736" y="3703209"/>
+            <a:ext cx="234909" cy="201168"/>
+          </a:xfrm>
+          <a:prstGeom prst="roundRect">
+            <a:avLst>
+              <a:gd name="adj" fmla="val 13636"/>
+            </a:avLst>
+          </a:prstGeom>
+          <a:solidFill>
+            <a:srgbClr val="213366"/>
+          </a:solidFill>
+          <a:ln w="12700">
+            <a:solidFill>
+              <a:srgbClr val="333333"/>
+            </a:solidFill>
+            <a:prstDash val="solid"/>
+          </a:ln>
+        </p:spPr>
+      </p:sp>
+      <p:sp>
+        <p:nvSpPr>
+          <p:cNvPr id="22" name="Text 18"/>
+          <p:cNvSpPr/>
+          <p:nvPr/>
+        </p:nvSpPr>
+        <p:spPr>
+          <a:xfrm>
+            <a:off x="6095736" y="3703209"/>
+            <a:ext cx="234909" cy="201168"/>
+          </a:xfrm>
+          <a:prstGeom prst="rect">
+            <a:avLst/>
+          </a:prstGeom>
+          <a:noFill/>
+          <a:ln/>
+        </p:spPr>
+        <p:txBody>
+          <a:bodyPr wrap="square" lIns="0" tIns="0" rIns="0" bIns="0" rtlCol="0" anchor="ctr"/>
+          <a:lstStyle/>
+          <a:p>
+            <a:pPr algn="ctr" indent="0" marL="0">
+              <a:buNone/>
+            </a:pPr>
+            <a:r>
+              <a:rPr lang="en-US" sz="700" b="1" dirty="0">
+                <a:solidFill>
+                  <a:srgbClr val="FFFFFF"/>
+                </a:solidFill>
+                <a:latin typeface="Calibri" pitchFamily="34" charset="0"/>
+                <a:ea typeface="Calibri" pitchFamily="34" charset="-122"/>
+                <a:cs typeface="Calibri" pitchFamily="34" charset="-120"/>
+              </a:rPr>
+              <a:t>+300</a:t>
+            </a:r>
+            <a:endParaRPr lang="en-US" sz="700" dirty="0"/>
+          </a:p>
+        </p:txBody>
+      </p:sp>
+      <p:sp>
+        <p:nvSpPr>
+          <p:cNvPr id="23" name="Shape 19"/>
+          <p:cNvSpPr/>
+          <p:nvPr/>
+        </p:nvSpPr>
+        <p:spPr>
+          <a:xfrm>
+            <a:off x="6705888" y="3550255"/>
+            <a:ext cx="234909" cy="201168"/>
+          </a:xfrm>
+          <a:prstGeom prst="roundRect">
+            <a:avLst>
+              <a:gd name="adj" fmla="val 13636"/>
+            </a:avLst>
+          </a:prstGeom>
+          <a:solidFill>
+            <a:srgbClr val="213366"/>
+          </a:solidFill>
+          <a:ln w="12700">
+            <a:solidFill>
+              <a:srgbClr val="333333"/>
+            </a:solidFill>
+            <a:prstDash val="solid"/>
+          </a:ln>
+        </p:spPr>
+      </p:sp>
+      <p:sp>
+        <p:nvSpPr>
+          <p:cNvPr id="24" name="Text 20"/>
+          <p:cNvSpPr/>
+          <p:nvPr/>
+        </p:nvSpPr>
+        <p:spPr>
+          <a:xfrm>
+            <a:off x="6705888" y="3550255"/>
+            <a:ext cx="234909" cy="201168"/>
+          </a:xfrm>
+          <a:prstGeom prst="rect">
+            <a:avLst/>
+          </a:prstGeom>
+          <a:noFill/>
+          <a:ln/>
+        </p:spPr>
+        <p:txBody>
+          <a:bodyPr wrap="square" lIns="0" tIns="0" rIns="0" bIns="0" rtlCol="0" anchor="ctr"/>
+          <a:lstStyle/>
+          <a:p>
+            <a:pPr algn="ctr" indent="0" marL="0">
+              <a:buNone/>
+            </a:pPr>
+            <a:r>
+              <a:rPr lang="en-US" sz="700" b="1" dirty="0">
+                <a:solidFill>
+                  <a:srgbClr val="FFFFFF"/>
+                </a:solidFill>
+                <a:latin typeface="Calibri" pitchFamily="34" charset="0"/>
+                <a:ea typeface="Calibri" pitchFamily="34" charset="-122"/>
+                <a:cs typeface="Calibri" pitchFamily="34" charset="-120"/>
+              </a:rPr>
+              <a:t>+300</a:t>
+            </a:r>
+            <a:endParaRPr lang="en-US" sz="700" dirty="0"/>
+          </a:p>
+        </p:txBody>
+      </p:sp>
+      <p:sp>
+        <p:nvSpPr>
+          <p:cNvPr id="25" name="Shape 21"/>
+          <p:cNvSpPr/>
+          <p:nvPr/>
+        </p:nvSpPr>
+        <p:spPr>
+          <a:xfrm>
+            <a:off x="7316041" y="4603755"/>
+            <a:ext cx="234909" cy="201168"/>
+          </a:xfrm>
+          <a:prstGeom prst="roundRect">
+            <a:avLst>
+              <a:gd name="adj" fmla="val 13636"/>
+            </a:avLst>
+          </a:prstGeom>
+          <a:solidFill>
+            <a:srgbClr val="213366"/>
+          </a:solidFill>
+          <a:ln w="12700">
+            <a:solidFill>
+              <a:srgbClr val="333333"/>
+            </a:solidFill>
+            <a:prstDash val="solid"/>
+          </a:ln>
+        </p:spPr>
+      </p:sp>
+      <p:sp>
+        <p:nvSpPr>
+          <p:cNvPr id="26" name="Text 22"/>
+          <p:cNvSpPr/>
+          <p:nvPr/>
+        </p:nvSpPr>
+        <p:spPr>
+          <a:xfrm>
+            <a:off x="7316041" y="4603755"/>
+            <a:ext cx="234909" cy="201168"/>
+          </a:xfrm>
+          <a:prstGeom prst="rect">
+            <a:avLst/>
+          </a:prstGeom>
+          <a:noFill/>
+          <a:ln/>
+        </p:spPr>
+        <p:txBody>
+          <a:bodyPr wrap="square" lIns="0" tIns="0" rIns="0" bIns="0" rtlCol="0" anchor="ctr"/>
+          <a:lstStyle/>
+          <a:p>
+            <a:pPr algn="ctr" indent="0" marL="0">
+              <a:buNone/>
+            </a:pPr>
+            <a:r>
+              <a:rPr lang="en-US" sz="700" b="1" dirty="0">
+                <a:solidFill>
+                  <a:srgbClr val="FFFFFF"/>
+                </a:solidFill>
+                <a:latin typeface="Calibri" pitchFamily="34" charset="0"/>
+                <a:ea typeface="Calibri" pitchFamily="34" charset="-122"/>
+                <a:cs typeface="Calibri" pitchFamily="34" charset="-120"/>
+              </a:rPr>
+              <a:t>-1,600</a:t>
+            </a:r>
+            <a:endParaRPr lang="en-US" sz="700" dirty="0"/>
+          </a:p>
+        </p:txBody>
+      </p:sp>
+      <p:sp>
+        <p:nvSpPr>
+          <p:cNvPr id="27" name="Shape 23"/>
+          <p:cNvSpPr/>
+          <p:nvPr/>
+        </p:nvSpPr>
+        <p:spPr>
+          <a:xfrm>
+            <a:off x="7926193" y="3958133"/>
+            <a:ext cx="234909" cy="201168"/>
+          </a:xfrm>
+          <a:prstGeom prst="roundRect">
+            <a:avLst>
+              <a:gd name="adj" fmla="val 13636"/>
+            </a:avLst>
+          </a:prstGeom>
+          <a:solidFill>
+            <a:srgbClr val="213366"/>
+          </a:solidFill>
+          <a:ln w="12700">
+            <a:solidFill>
+              <a:srgbClr val="333333"/>
+            </a:solidFill>
+            <a:prstDash val="solid"/>
+          </a:ln>
+        </p:spPr>
+      </p:sp>
+      <p:sp>
+        <p:nvSpPr>
+          <p:cNvPr id="28" name="Text 24"/>
+          <p:cNvSpPr/>
+          <p:nvPr/>
+        </p:nvSpPr>
+        <p:spPr>
+          <a:xfrm>
+            <a:off x="7926193" y="3958133"/>
+            <a:ext cx="234909" cy="201168"/>
+          </a:xfrm>
+          <a:prstGeom prst="rect">
+            <a:avLst/>
+          </a:prstGeom>
+          <a:noFill/>
+          <a:ln/>
+        </p:spPr>
+        <p:txBody>
+          <a:bodyPr wrap="square" lIns="0" tIns="0" rIns="0" bIns="0" rtlCol="0" anchor="ctr"/>
+          <a:lstStyle/>
+          <a:p>
+            <a:pPr algn="ctr" indent="0" marL="0">
+              <a:buNone/>
+            </a:pPr>
+            <a:r>
+              <a:rPr lang="en-US" sz="700" b="1" dirty="0">
+                <a:solidFill>
+                  <a:srgbClr val="FFFFFF"/>
+                </a:solidFill>
+                <a:latin typeface="Calibri" pitchFamily="34" charset="0"/>
+                <a:ea typeface="Calibri" pitchFamily="34" charset="-122"/>
+                <a:cs typeface="Calibri" pitchFamily="34" charset="-120"/>
+              </a:rPr>
+              <a:t>+800</a:t>
+            </a:r>
+            <a:endParaRPr lang="en-US" sz="700" dirty="0"/>
+          </a:p>
+        </p:txBody>
+      </p:sp>
+      <p:sp>
+        <p:nvSpPr>
+          <p:cNvPr id="29" name="Shape 25"/>
+          <p:cNvSpPr/>
+          <p:nvPr/>
+        </p:nvSpPr>
+        <p:spPr>
+          <a:xfrm>
+            <a:off x="8536345" y="3703209"/>
+            <a:ext cx="234909" cy="201168"/>
+          </a:xfrm>
+          <a:prstGeom prst="roundRect">
+            <a:avLst>
+              <a:gd name="adj" fmla="val 13636"/>
+            </a:avLst>
+          </a:prstGeom>
+          <a:solidFill>
+            <a:srgbClr val="213366"/>
+          </a:solidFill>
+          <a:ln w="12700">
+            <a:solidFill>
+              <a:srgbClr val="333333"/>
+            </a:solidFill>
+            <a:prstDash val="solid"/>
+          </a:ln>
+        </p:spPr>
+      </p:sp>
+      <p:sp>
+        <p:nvSpPr>
+          <p:cNvPr id="30" name="Text 26"/>
+          <p:cNvSpPr/>
+          <p:nvPr/>
+        </p:nvSpPr>
+        <p:spPr>
+          <a:xfrm>
+            <a:off x="8536345" y="3703209"/>
+            <a:ext cx="234909" cy="201168"/>
+          </a:xfrm>
+          <a:prstGeom prst="rect">
+            <a:avLst/>
+          </a:prstGeom>
+          <a:noFill/>
+          <a:ln/>
+        </p:spPr>
+        <p:txBody>
+          <a:bodyPr wrap="square" lIns="0" tIns="0" rIns="0" bIns="0" rtlCol="0" anchor="ctr"/>
+          <a:lstStyle/>
+          <a:p>
+            <a:pPr algn="ctr" indent="0" marL="0">
+              <a:buNone/>
+            </a:pPr>
+            <a:r>
+              <a:rPr lang="en-US" sz="700" b="1" dirty="0">
+                <a:solidFill>
+                  <a:srgbClr val="FFFFFF"/>
+                </a:solidFill>
+                <a:latin typeface="Calibri" pitchFamily="34" charset="0"/>
+                <a:ea typeface="Calibri" pitchFamily="34" charset="-122"/>
+                <a:cs typeface="Calibri" pitchFamily="34" charset="-120"/>
+              </a:rPr>
+              <a:t>+500</a:t>
+            </a:r>
+            <a:endParaRPr lang="en-US" sz="700" dirty="0"/>
+          </a:p>
+        </p:txBody>
+      </p:sp>
+      <p:sp>
+        <p:nvSpPr>
+          <p:cNvPr id="31" name="Shape 27"/>
+          <p:cNvSpPr/>
+          <p:nvPr/>
+        </p:nvSpPr>
+        <p:spPr>
+          <a:xfrm>
+            <a:off x="9146497" y="2556053"/>
+            <a:ext cx="234909" cy="201168"/>
+          </a:xfrm>
+          <a:prstGeom prst="roundRect">
+            <a:avLst>
+              <a:gd name="adj" fmla="val 13636"/>
+            </a:avLst>
+          </a:prstGeom>
+          <a:solidFill>
+            <a:srgbClr val="213366"/>
+          </a:solidFill>
+          <a:ln w="12700">
+            <a:solidFill>
+              <a:srgbClr val="333333"/>
+            </a:solidFill>
+            <a:prstDash val="solid"/>
+          </a:ln>
+        </p:spPr>
+      </p:sp>
+      <p:sp>
+        <p:nvSpPr>
+          <p:cNvPr id="32" name="Text 28"/>
+          <p:cNvSpPr/>
+          <p:nvPr/>
+        </p:nvSpPr>
+        <p:spPr>
+          <a:xfrm>
+            <a:off x="9146497" y="2556053"/>
+            <a:ext cx="234909" cy="201168"/>
+          </a:xfrm>
+          <a:prstGeom prst="rect">
+            <a:avLst/>
+          </a:prstGeom>
+          <a:noFill/>
+          <a:ln/>
+        </p:spPr>
+        <p:txBody>
+          <a:bodyPr wrap="square" lIns="0" tIns="0" rIns="0" bIns="0" rtlCol="0" anchor="ctr"/>
+          <a:lstStyle/>
+          <a:p>
+            <a:pPr algn="ctr" indent="0" marL="0">
+              <a:buNone/>
+            </a:pPr>
+            <a:r>
+              <a:rPr lang="en-US" sz="700" b="1" dirty="0">
+                <a:solidFill>
+                  <a:srgbClr val="FFFFFF"/>
+                </a:solidFill>
+                <a:latin typeface="Calibri" pitchFamily="34" charset="0"/>
+                <a:ea typeface="Calibri" pitchFamily="34" charset="-122"/>
+                <a:cs typeface="Calibri" pitchFamily="34" charset="-120"/>
+              </a:rPr>
+              <a:t>+2,250</a:t>
+            </a:r>
+            <a:endParaRPr lang="en-US" sz="700" dirty="0"/>
+          </a:p>
+        </p:txBody>
+      </p:sp>
+      <p:sp>
+        <p:nvSpPr>
+          <p:cNvPr id="33" name="Shape 29"/>
+          <p:cNvSpPr/>
+          <p:nvPr/>
+        </p:nvSpPr>
+        <p:spPr>
+          <a:xfrm>
+            <a:off x="9756649" y="2819289"/>
+            <a:ext cx="234909" cy="201168"/>
+          </a:xfrm>
+          <a:prstGeom prst="roundRect">
+            <a:avLst>
+              <a:gd name="adj" fmla="val 13636"/>
+            </a:avLst>
+          </a:prstGeom>
+          <a:solidFill>
+            <a:srgbClr val="213366"/>
+          </a:solidFill>
+          <a:ln w="12700">
+            <a:solidFill>
+              <a:srgbClr val="333333"/>
+            </a:solidFill>
+            <a:prstDash val="solid"/>
+          </a:ln>
+        </p:spPr>
+      </p:sp>
+      <p:sp>
+        <p:nvSpPr>
+          <p:cNvPr id="34" name="Text 30"/>
+          <p:cNvSpPr/>
+          <p:nvPr/>
+        </p:nvSpPr>
+        <p:spPr>
+          <a:xfrm>
+            <a:off x="9756649" y="2819289"/>
+            <a:ext cx="234909" cy="201168"/>
+          </a:xfrm>
+          <a:prstGeom prst="rect">
+            <a:avLst/>
+          </a:prstGeom>
+          <a:noFill/>
+          <a:ln/>
+        </p:spPr>
+        <p:txBody>
+          <a:bodyPr wrap="square" lIns="0" tIns="0" rIns="0" bIns="0" rtlCol="0" anchor="ctr"/>
+          <a:lstStyle/>
+          <a:p>
+            <a:pPr algn="ctr" indent="0" marL="0">
+              <a:buNone/>
+            </a:pPr>
+            <a:r>
+              <a:rPr lang="en-US" sz="700" b="1" dirty="0">
+                <a:solidFill>
+                  <a:srgbClr val="FFFFFF"/>
+                </a:solidFill>
+                <a:latin typeface="Calibri" pitchFamily="34" charset="0"/>
+                <a:ea typeface="Calibri" pitchFamily="34" charset="-122"/>
+                <a:cs typeface="Calibri" pitchFamily="34" charset="-120"/>
+              </a:rPr>
+              <a:t>-50</a:t>
+            </a:r>
+            <a:endParaRPr lang="en-US" sz="700" dirty="0"/>
+          </a:p>
+        </p:txBody>
+      </p:sp>
+      <p:sp>
+        <p:nvSpPr>
+          <p:cNvPr id="35" name="Shape 31"/>
+          <p:cNvSpPr/>
+          <p:nvPr/>
+        </p:nvSpPr>
+        <p:spPr>
+          <a:xfrm>
+            <a:off x="10366802" y="2173667"/>
+            <a:ext cx="234909" cy="201168"/>
+          </a:xfrm>
+          <a:prstGeom prst="roundRect">
+            <a:avLst>
+              <a:gd name="adj" fmla="val 13636"/>
+            </a:avLst>
+          </a:prstGeom>
+          <a:solidFill>
+            <a:srgbClr val="213366"/>
+          </a:solidFill>
+          <a:ln w="12700">
+            <a:solidFill>
+              <a:srgbClr val="333333"/>
+            </a:solidFill>
+            <a:prstDash val="solid"/>
+          </a:ln>
+        </p:spPr>
+      </p:sp>
+      <p:sp>
+        <p:nvSpPr>
+          <p:cNvPr id="36" name="Text 32"/>
+          <p:cNvSpPr/>
+          <p:nvPr/>
+        </p:nvSpPr>
+        <p:spPr>
+          <a:xfrm>
+            <a:off x="10366802" y="2173667"/>
+            <a:ext cx="234909" cy="201168"/>
+          </a:xfrm>
+          <a:prstGeom prst="rect">
+            <a:avLst/>
+          </a:prstGeom>
+          <a:noFill/>
+          <a:ln/>
+        </p:spPr>
+        <p:txBody>
+          <a:bodyPr wrap="square" lIns="0" tIns="0" rIns="0" bIns="0" rtlCol="0" anchor="ctr"/>
+          <a:lstStyle/>
+          <a:p>
+            <a:pPr algn="ctr" indent="0" marL="0">
+              <a:buNone/>
+            </a:pPr>
+            <a:r>
+              <a:rPr lang="en-US" sz="700" b="1" dirty="0">
+                <a:solidFill>
+                  <a:srgbClr val="FFFFFF"/>
+                </a:solidFill>
+                <a:latin typeface="Calibri" pitchFamily="34" charset="0"/>
+                <a:ea typeface="Calibri" pitchFamily="34" charset="-122"/>
+                <a:cs typeface="Calibri" pitchFamily="34" charset="-120"/>
+              </a:rPr>
+              <a:t>+800</a:t>
+            </a:r>
+            <a:endParaRPr lang="en-US" sz="700" dirty="0"/>
+          </a:p>
+        </p:txBody>
+      </p:sp>
+      <p:sp>
+        <p:nvSpPr>
+          <p:cNvPr id="37" name="Shape 33"/>
+          <p:cNvSpPr/>
+          <p:nvPr/>
+        </p:nvSpPr>
+        <p:spPr>
+          <a:xfrm>
+            <a:off x="10976954" y="1408896"/>
+            <a:ext cx="234909" cy="201168"/>
+          </a:xfrm>
+          <a:prstGeom prst="roundRect">
+            <a:avLst>
+              <a:gd name="adj" fmla="val 13636"/>
+            </a:avLst>
+          </a:prstGeom>
+          <a:solidFill>
+            <a:srgbClr val="213366"/>
+          </a:solidFill>
+          <a:ln w="12700">
+            <a:solidFill>
+              <a:srgbClr val="333333"/>
+            </a:solidFill>
+            <a:prstDash val="solid"/>
+          </a:ln>
+        </p:spPr>
+      </p:sp>
+      <p:sp>
+        <p:nvSpPr>
+          <p:cNvPr id="38" name="Text 34"/>
+          <p:cNvSpPr/>
+          <p:nvPr/>
+        </p:nvSpPr>
+        <p:spPr>
+          <a:xfrm>
+            <a:off x="10976954" y="1408896"/>
+            <a:ext cx="234909" cy="201168"/>
+          </a:xfrm>
+          <a:prstGeom prst="rect">
+            <a:avLst/>
+          </a:prstGeom>
+          <a:noFill/>
+          <a:ln/>
+        </p:spPr>
+        <p:txBody>
+          <a:bodyPr wrap="square" lIns="0" tIns="0" rIns="0" bIns="0" rtlCol="0" anchor="ctr"/>
+          <a:lstStyle/>
+          <a:p>
+            <a:pPr algn="ctr" indent="0" marL="0">
+              <a:buNone/>
+            </a:pPr>
+            <a:r>
+              <a:rPr lang="en-US" sz="700" b="1" dirty="0">
+                <a:solidFill>
+                  <a:srgbClr val="FFFFFF"/>
+                </a:solidFill>
+                <a:latin typeface="Calibri" pitchFamily="34" charset="0"/>
+                <a:ea typeface="Calibri" pitchFamily="34" charset="-122"/>
+                <a:cs typeface="Calibri" pitchFamily="34" charset="-120"/>
+              </a:rPr>
+              <a:t>+1,500</a:t>
+            </a:r>
+            <a:endParaRPr lang="en-US" sz="700" dirty="0"/>
+          </a:p>
+        </p:txBody>
+      </p:sp>
+      <p:sp>
+        <p:nvSpPr>
+          <p:cNvPr id="39" name="Shape 35"/>
+          <p:cNvSpPr/>
+          <p:nvPr/>
+        </p:nvSpPr>
+        <p:spPr>
+          <a:xfrm>
+            <a:off x="2038224" y="3278152"/>
+            <a:ext cx="234909" cy="201168"/>
+          </a:xfrm>
+          <a:prstGeom prst="roundRect">
+            <a:avLst>
+              <a:gd name="adj" fmla="val 13636"/>
+            </a:avLst>
+          </a:prstGeom>
+          <a:solidFill>
+            <a:srgbClr val="7F7F7F"/>
+          </a:solidFill>
+          <a:ln w="12700">
+            <a:solidFill>
+              <a:srgbClr val="333333"/>
+            </a:solidFill>
+            <a:prstDash val="solid"/>
+          </a:ln>
+        </p:spPr>
+      </p:sp>
+      <p:sp>
+        <p:nvSpPr>
+          <p:cNvPr id="40" name="Text 36"/>
+          <p:cNvSpPr/>
+          <p:nvPr/>
+        </p:nvSpPr>
+        <p:spPr>
+          <a:xfrm>
+            <a:off x="2038224" y="3278152"/>
+            <a:ext cx="234909" cy="201168"/>
+          </a:xfrm>
+          <a:prstGeom prst="rect">
+            <a:avLst/>
+          </a:prstGeom>
+          <a:noFill/>
+          <a:ln/>
+        </p:spPr>
+        <p:txBody>
+          <a:bodyPr wrap="square" lIns="0" tIns="0" rIns="0" bIns="0" rtlCol="0" anchor="ctr"/>
+          <a:lstStyle/>
+          <a:p>
+            <a:pPr algn="ctr" indent="0" marL="0">
+              <a:buNone/>
+            </a:pPr>
+            <a:r>
+              <a:rPr lang="en-US" sz="700" b="1" dirty="0">
+                <a:solidFill>
+                  <a:srgbClr val="FFFFFF"/>
+                </a:solidFill>
+                <a:latin typeface="Calibri" pitchFamily="34" charset="0"/>
+                <a:ea typeface="Calibri" pitchFamily="34" charset="-122"/>
+                <a:cs typeface="Calibri" pitchFamily="34" charset="-120"/>
+              </a:rPr>
+              <a:t>-300</a:t>
+            </a:r>
+            <a:endParaRPr lang="en-US" sz="700" dirty="0"/>
+          </a:p>
+        </p:txBody>
+      </p:sp>
+      <p:sp>
+        <p:nvSpPr>
+          <p:cNvPr id="41" name="Shape 37"/>
+          <p:cNvSpPr/>
+          <p:nvPr/>
+        </p:nvSpPr>
+        <p:spPr>
+          <a:xfrm>
+            <a:off x="2648376" y="2581545"/>
+            <a:ext cx="234909" cy="201168"/>
+          </a:xfrm>
+          <a:prstGeom prst="roundRect">
+            <a:avLst>
+              <a:gd name="adj" fmla="val 13636"/>
+            </a:avLst>
+          </a:prstGeom>
+          <a:solidFill>
+            <a:srgbClr val="7F7F7F"/>
+          </a:solidFill>
+          <a:ln w="12700">
+            <a:solidFill>
+              <a:srgbClr val="333333"/>
+            </a:solidFill>
+            <a:prstDash val="solid"/>
+          </a:ln>
+        </p:spPr>
+      </p:sp>
+      <p:sp>
+        <p:nvSpPr>
+          <p:cNvPr id="42" name="Text 38"/>
+          <p:cNvSpPr/>
+          <p:nvPr/>
+        </p:nvSpPr>
+        <p:spPr>
+          <a:xfrm>
+            <a:off x="2648376" y="2581545"/>
+            <a:ext cx="234909" cy="201168"/>
+          </a:xfrm>
+          <a:prstGeom prst="rect">
+            <a:avLst/>
+          </a:prstGeom>
+          <a:noFill/>
+          <a:ln/>
+        </p:spPr>
+        <p:txBody>
+          <a:bodyPr wrap="square" lIns="0" tIns="0" rIns="0" bIns="0" rtlCol="0" anchor="ctr"/>
+          <a:lstStyle/>
+          <a:p>
+            <a:pPr algn="ctr" indent="0" marL="0">
+              <a:buNone/>
+            </a:pPr>
+            <a:r>
+              <a:rPr lang="en-US" sz="700" b="1" dirty="0">
+                <a:solidFill>
+                  <a:srgbClr val="FFFFFF"/>
+                </a:solidFill>
+                <a:latin typeface="Calibri" pitchFamily="34" charset="0"/>
+                <a:ea typeface="Calibri" pitchFamily="34" charset="-122"/>
+                <a:cs typeface="Calibri" pitchFamily="34" charset="-120"/>
+              </a:rPr>
+              <a:t>+900</a:t>
+            </a:r>
+            <a:endParaRPr lang="en-US" sz="700" dirty="0"/>
+          </a:p>
+        </p:txBody>
+      </p:sp>
+      <p:sp>
+        <p:nvSpPr>
+          <p:cNvPr id="43" name="Shape 39"/>
+          <p:cNvSpPr/>
+          <p:nvPr/>
+        </p:nvSpPr>
+        <p:spPr>
+          <a:xfrm>
+            <a:off x="3258528" y="3074213"/>
+            <a:ext cx="234909" cy="201168"/>
+          </a:xfrm>
+          <a:prstGeom prst="roundRect">
+            <a:avLst>
+              <a:gd name="adj" fmla="val 13636"/>
+            </a:avLst>
+          </a:prstGeom>
+          <a:solidFill>
+            <a:srgbClr val="7F7F7F"/>
+          </a:solidFill>
+          <a:ln w="12700">
+            <a:solidFill>
+              <a:srgbClr val="333333"/>
+            </a:solidFill>
+            <a:prstDash val="solid"/>
+          </a:ln>
+        </p:spPr>
+      </p:sp>
+      <p:sp>
+        <p:nvSpPr>
+          <p:cNvPr id="44" name="Text 40"/>
+          <p:cNvSpPr/>
+          <p:nvPr/>
+        </p:nvSpPr>
+        <p:spPr>
+          <a:xfrm>
+            <a:off x="3258528" y="3074213"/>
+            <a:ext cx="234909" cy="201168"/>
+          </a:xfrm>
+          <a:prstGeom prst="rect">
+            <a:avLst/>
+          </a:prstGeom>
+          <a:noFill/>
+          <a:ln/>
+        </p:spPr>
+        <p:txBody>
+          <a:bodyPr wrap="square" lIns="0" tIns="0" rIns="0" bIns="0" rtlCol="0" anchor="ctr"/>
+          <a:lstStyle/>
+          <a:p>
+            <a:pPr algn="ctr" indent="0" marL="0">
+              <a:buNone/>
+            </a:pPr>
+            <a:r>
+              <a:rPr lang="en-US" sz="700" b="1" dirty="0">
+                <a:solidFill>
+                  <a:srgbClr val="FFFFFF"/>
+                </a:solidFill>
+                <a:latin typeface="Calibri" pitchFamily="34" charset="0"/>
+                <a:ea typeface="Calibri" pitchFamily="34" charset="-122"/>
+                <a:cs typeface="Calibri" pitchFamily="34" charset="-120"/>
+              </a:rPr>
+              <a:t>-500</a:t>
+            </a:r>
+            <a:endParaRPr lang="en-US" sz="700" dirty="0"/>
+          </a:p>
+        </p:txBody>
+      </p:sp>
+      <p:sp>
+        <p:nvSpPr>
+          <p:cNvPr id="45" name="Shape 41"/>
+          <p:cNvSpPr/>
+          <p:nvPr/>
+        </p:nvSpPr>
+        <p:spPr>
+          <a:xfrm>
+            <a:off x="3868680" y="2530560"/>
+            <a:ext cx="234909" cy="201168"/>
+          </a:xfrm>
+          <a:prstGeom prst="roundRect">
+            <a:avLst>
+              <a:gd name="adj" fmla="val 13636"/>
+            </a:avLst>
+          </a:prstGeom>
+          <a:solidFill>
+            <a:srgbClr val="7F7F7F"/>
+          </a:solidFill>
+          <a:ln w="12700">
+            <a:solidFill>
+              <a:srgbClr val="333333"/>
+            </a:solidFill>
+            <a:prstDash val="solid"/>
+          </a:ln>
+        </p:spPr>
+      </p:sp>
+      <p:sp>
+        <p:nvSpPr>
+          <p:cNvPr id="46" name="Text 42"/>
+          <p:cNvSpPr/>
+          <p:nvPr/>
+        </p:nvSpPr>
+        <p:spPr>
+          <a:xfrm>
+            <a:off x="3868680" y="2530560"/>
+            <a:ext cx="234909" cy="201168"/>
+          </a:xfrm>
+          <a:prstGeom prst="rect">
+            <a:avLst/>
+          </a:prstGeom>
+          <a:noFill/>
+          <a:ln/>
+        </p:spPr>
+        <p:txBody>
+          <a:bodyPr wrap="square" lIns="0" tIns="0" rIns="0" bIns="0" rtlCol="0" anchor="ctr"/>
+          <a:lstStyle/>
+          <a:p>
+            <a:pPr algn="ctr" indent="0" marL="0">
+              <a:buNone/>
+            </a:pPr>
+            <a:r>
+              <a:rPr lang="en-US" sz="700" b="1" dirty="0">
+                <a:solidFill>
+                  <a:srgbClr val="FFFFFF"/>
+                </a:solidFill>
+                <a:latin typeface="Calibri" pitchFamily="34" charset="0"/>
+                <a:ea typeface="Calibri" pitchFamily="34" charset="-122"/>
+                <a:cs typeface="Calibri" pitchFamily="34" charset="-120"/>
+              </a:rPr>
+              <a:t>+600</a:t>
+            </a:r>
+            <a:endParaRPr lang="en-US" sz="700" dirty="0"/>
+          </a:p>
+        </p:txBody>
+      </p:sp>
+      <p:sp>
+        <p:nvSpPr>
+          <p:cNvPr id="47" name="Shape 43"/>
+          <p:cNvSpPr/>
+          <p:nvPr/>
+        </p:nvSpPr>
+        <p:spPr>
+          <a:xfrm>
+            <a:off x="4478833" y="3278152"/>
+            <a:ext cx="234909" cy="201168"/>
+          </a:xfrm>
+          <a:prstGeom prst="roundRect">
+            <a:avLst>
+              <a:gd name="adj" fmla="val 13636"/>
+            </a:avLst>
+          </a:prstGeom>
+          <a:solidFill>
+            <a:srgbClr val="7F7F7F"/>
+          </a:solidFill>
+          <a:ln w="12700">
+            <a:solidFill>
+              <a:srgbClr val="333333"/>
+            </a:solidFill>
+            <a:prstDash val="solid"/>
+          </a:ln>
+        </p:spPr>
+      </p:sp>
+      <p:sp>
+        <p:nvSpPr>
+          <p:cNvPr id="48" name="Text 44"/>
+          <p:cNvSpPr/>
+          <p:nvPr/>
+        </p:nvSpPr>
+        <p:spPr>
+          <a:xfrm>
+            <a:off x="4478833" y="3278152"/>
+            <a:ext cx="234909" cy="201168"/>
+          </a:xfrm>
+          <a:prstGeom prst="rect">
+            <a:avLst/>
+          </a:prstGeom>
+          <a:noFill/>
+          <a:ln/>
+        </p:spPr>
+        <p:txBody>
+          <a:bodyPr wrap="square" lIns="0" tIns="0" rIns="0" bIns="0" rtlCol="0" anchor="ctr"/>
+          <a:lstStyle/>
+          <a:p>
+            <a:pPr algn="ctr" indent="0" marL="0">
+              <a:buNone/>
+            </a:pPr>
+            <a:r>
+              <a:rPr lang="en-US" sz="700" b="1" dirty="0">
+                <a:solidFill>
+                  <a:srgbClr val="FFFFFF"/>
+                </a:solidFill>
+                <a:latin typeface="Calibri" pitchFamily="34" charset="0"/>
+                <a:ea typeface="Calibri" pitchFamily="34" charset="-122"/>
+                <a:cs typeface="Calibri" pitchFamily="34" charset="-120"/>
+              </a:rPr>
+              <a:t>-1,000</a:t>
+            </a:r>
+            <a:endParaRPr lang="en-US" sz="700" dirty="0"/>
+          </a:p>
+        </p:txBody>
+      </p:sp>
+      <p:sp>
+        <p:nvSpPr>
+          <p:cNvPr id="49" name="Shape 45"/>
+          <p:cNvSpPr/>
+          <p:nvPr/>
+        </p:nvSpPr>
+        <p:spPr>
+          <a:xfrm>
+            <a:off x="5088985" y="3482091"/>
+            <a:ext cx="234909" cy="201168"/>
+          </a:xfrm>
+          <a:prstGeom prst="roundRect">
+            <a:avLst>
+              <a:gd name="adj" fmla="val 13636"/>
+            </a:avLst>
+          </a:prstGeom>
+          <a:solidFill>
+            <a:srgbClr val="7F7F7F"/>
+          </a:solidFill>
+          <a:ln w="12700">
+            <a:solidFill>
+              <a:srgbClr val="333333"/>
+            </a:solidFill>
+            <a:prstDash val="solid"/>
+          </a:ln>
+        </p:spPr>
+      </p:sp>
+      <p:sp>
+        <p:nvSpPr>
+          <p:cNvPr id="50" name="Text 46"/>
+          <p:cNvSpPr/>
+          <p:nvPr/>
+        </p:nvSpPr>
+        <p:spPr>
+          <a:xfrm>
+            <a:off x="5088985" y="3482091"/>
+            <a:ext cx="234909" cy="201168"/>
+          </a:xfrm>
+          <a:prstGeom prst="rect">
+            <a:avLst/>
+          </a:prstGeom>
+          <a:noFill/>
+          <a:ln/>
+        </p:spPr>
+        <p:txBody>
+          <a:bodyPr wrap="square" lIns="0" tIns="0" rIns="0" bIns="0" rtlCol="0" anchor="ctr"/>
+          <a:lstStyle/>
+          <a:p>
+            <a:pPr algn="ctr" indent="0" marL="0">
+              <a:buNone/>
+            </a:pPr>
+            <a:r>
+              <a:rPr lang="en-US" sz="700" b="1" dirty="0">
+                <a:solidFill>
+                  <a:srgbClr val="FFFFFF"/>
+                </a:solidFill>
+                <a:latin typeface="Calibri" pitchFamily="34" charset="0"/>
+                <a:ea typeface="Calibri" pitchFamily="34" charset="-122"/>
+                <a:cs typeface="Calibri" pitchFamily="34" charset="-120"/>
+              </a:rPr>
+              <a:t>-400</a:t>
+            </a:r>
+            <a:endParaRPr lang="en-US" sz="700" dirty="0"/>
+          </a:p>
+        </p:txBody>
+      </p:sp>
+      <p:sp>
+        <p:nvSpPr>
+          <p:cNvPr id="51" name="Shape 47"/>
+          <p:cNvSpPr/>
+          <p:nvPr/>
+        </p:nvSpPr>
+        <p:spPr>
+          <a:xfrm>
+            <a:off x="5699137" y="3737014"/>
+            <a:ext cx="234909" cy="201168"/>
+          </a:xfrm>
+          <a:prstGeom prst="roundRect">
+            <a:avLst>
+              <a:gd name="adj" fmla="val 13636"/>
+            </a:avLst>
+          </a:prstGeom>
+          <a:solidFill>
+            <a:srgbClr val="7F7F7F"/>
+          </a:solidFill>
+          <a:ln w="12700">
+            <a:solidFill>
+              <a:srgbClr val="333333"/>
+            </a:solidFill>
+            <a:prstDash val="solid"/>
+          </a:ln>
+        </p:spPr>
+      </p:sp>
+      <p:sp>
+        <p:nvSpPr>
+          <p:cNvPr id="52" name="Text 48"/>
+          <p:cNvSpPr/>
+          <p:nvPr/>
+        </p:nvSpPr>
+        <p:spPr>
+          <a:xfrm>
+            <a:off x="5699137" y="3737014"/>
+            <a:ext cx="234909" cy="201168"/>
+          </a:xfrm>
+          <a:prstGeom prst="rect">
+            <a:avLst/>
+          </a:prstGeom>
+          <a:noFill/>
+          <a:ln/>
+        </p:spPr>
+        <p:txBody>
+          <a:bodyPr wrap="square" lIns="0" tIns="0" rIns="0" bIns="0" rtlCol="0" anchor="ctr"/>
+          <a:lstStyle/>
+          <a:p>
+            <a:pPr algn="ctr" indent="0" marL="0">
+              <a:buNone/>
+            </a:pPr>
+            <a:r>
+              <a:rPr lang="en-US" sz="700" b="1" dirty="0">
+                <a:solidFill>
+                  <a:srgbClr val="FFFFFF"/>
+                </a:solidFill>
+                <a:latin typeface="Calibri" pitchFamily="34" charset="0"/>
+                <a:ea typeface="Calibri" pitchFamily="34" charset="-122"/>
+                <a:cs typeface="Calibri" pitchFamily="34" charset="-120"/>
+              </a:rPr>
+              <a:t>-500</a:t>
+            </a:r>
+            <a:endParaRPr lang="en-US" sz="700" dirty="0"/>
+          </a:p>
+        </p:txBody>
+      </p:sp>
+      <p:sp>
+        <p:nvSpPr>
+          <p:cNvPr id="53" name="Shape 49"/>
+          <p:cNvSpPr/>
+          <p:nvPr/>
+        </p:nvSpPr>
+        <p:spPr>
+          <a:xfrm>
+            <a:off x="6309289" y="4348831"/>
+            <a:ext cx="234909" cy="201168"/>
+          </a:xfrm>
+          <a:prstGeom prst="roundRect">
+            <a:avLst>
+              <a:gd name="adj" fmla="val 13636"/>
+            </a:avLst>
+          </a:prstGeom>
+          <a:solidFill>
+            <a:srgbClr val="7F7F7F"/>
+          </a:solidFill>
+          <a:ln w="12700">
+            <a:solidFill>
+              <a:srgbClr val="333333"/>
+            </a:solidFill>
+            <a:prstDash val="solid"/>
+          </a:ln>
+        </p:spPr>
+      </p:sp>
+      <p:sp>
+        <p:nvSpPr>
+          <p:cNvPr id="54" name="Text 50"/>
+          <p:cNvSpPr/>
+          <p:nvPr/>
+        </p:nvSpPr>
+        <p:spPr>
+          <a:xfrm>
+            <a:off x="6309289" y="4348831"/>
+            <a:ext cx="234909" cy="201168"/>
+          </a:xfrm>
+          <a:prstGeom prst="rect">
+            <a:avLst/>
+          </a:prstGeom>
+          <a:noFill/>
+          <a:ln/>
+        </p:spPr>
+        <p:txBody>
+          <a:bodyPr wrap="square" lIns="0" tIns="0" rIns="0" bIns="0" rtlCol="0" anchor="ctr"/>
+          <a:lstStyle/>
+          <a:p>
+            <a:pPr algn="ctr" indent="0" marL="0">
+              <a:buNone/>
+            </a:pPr>
+            <a:r>
+              <a:rPr lang="en-US" sz="700" b="1" dirty="0">
+                <a:solidFill>
+                  <a:srgbClr val="FFFFFF"/>
+                </a:solidFill>
+                <a:latin typeface="Calibri" pitchFamily="34" charset="0"/>
+                <a:ea typeface="Calibri" pitchFamily="34" charset="-122"/>
+                <a:cs typeface="Calibri" pitchFamily="34" charset="-120"/>
+              </a:rPr>
+              <a:t>-1,200</a:t>
+            </a:r>
+            <a:endParaRPr lang="en-US" sz="700" dirty="0"/>
+          </a:p>
+        </p:txBody>
+      </p:sp>
+      <p:sp>
+        <p:nvSpPr>
+          <p:cNvPr id="55" name="Shape 51"/>
+          <p:cNvSpPr/>
+          <p:nvPr/>
+        </p:nvSpPr>
+        <p:spPr>
+          <a:xfrm>
+            <a:off x="6919442" y="3754194"/>
+            <a:ext cx="234909" cy="201168"/>
+          </a:xfrm>
+          <a:prstGeom prst="roundRect">
+            <a:avLst>
+              <a:gd name="adj" fmla="val 13636"/>
+            </a:avLst>
+          </a:prstGeom>
+          <a:solidFill>
+            <a:srgbClr val="7F7F7F"/>
+          </a:solidFill>
+          <a:ln w="12700">
+            <a:solidFill>
+              <a:srgbClr val="333333"/>
+            </a:solidFill>
+            <a:prstDash val="solid"/>
+          </a:ln>
+        </p:spPr>
+      </p:sp>
+      <p:sp>
+        <p:nvSpPr>
+          <p:cNvPr id="56" name="Text 52"/>
+          <p:cNvSpPr/>
+          <p:nvPr/>
+        </p:nvSpPr>
+        <p:spPr>
+          <a:xfrm>
+            <a:off x="6919442" y="3754194"/>
+            <a:ext cx="234909" cy="201168"/>
+          </a:xfrm>
+          <a:prstGeom prst="rect">
+            <a:avLst/>
+          </a:prstGeom>
+          <a:noFill/>
+          <a:ln/>
+        </p:spPr>
+        <p:txBody>
+          <a:bodyPr wrap="square" lIns="0" tIns="0" rIns="0" bIns="0" rtlCol="0" anchor="ctr"/>
+          <a:lstStyle/>
+          <a:p>
+            <a:pPr algn="ctr" indent="0" marL="0">
+              <a:buNone/>
+            </a:pPr>
+            <a:r>
+              <a:rPr lang="en-US" sz="700" b="1" dirty="0">
+                <a:solidFill>
+                  <a:srgbClr val="FFFFFF"/>
+                </a:solidFill>
+                <a:latin typeface="Calibri" pitchFamily="34" charset="0"/>
+                <a:ea typeface="Calibri" pitchFamily="34" charset="-122"/>
+                <a:cs typeface="Calibri" pitchFamily="34" charset="-120"/>
+              </a:rPr>
+              <a:t>+700</a:t>
+            </a:r>
+            <a:endParaRPr lang="en-US" sz="700" dirty="0"/>
+          </a:p>
+        </p:txBody>
+      </p:sp>
+      <p:sp>
+        <p:nvSpPr>
+          <p:cNvPr id="57" name="Shape 53"/>
+          <p:cNvSpPr/>
+          <p:nvPr/>
+        </p:nvSpPr>
+        <p:spPr>
+          <a:xfrm>
+            <a:off x="7529594" y="4756709"/>
+            <a:ext cx="234909" cy="201168"/>
+          </a:xfrm>
+          <a:prstGeom prst="roundRect">
+            <a:avLst>
+              <a:gd name="adj" fmla="val 13636"/>
+            </a:avLst>
+          </a:prstGeom>
+          <a:solidFill>
+            <a:srgbClr val="7F7F7F"/>
+          </a:solidFill>
+          <a:ln w="12700">
+            <a:solidFill>
+              <a:srgbClr val="333333"/>
+            </a:solidFill>
+            <a:prstDash val="solid"/>
+          </a:ln>
+        </p:spPr>
+      </p:sp>
+      <p:sp>
+        <p:nvSpPr>
+          <p:cNvPr id="58" name="Text 54"/>
+          <p:cNvSpPr/>
+          <p:nvPr/>
+        </p:nvSpPr>
+        <p:spPr>
+          <a:xfrm>
+            <a:off x="7529594" y="4756709"/>
+            <a:ext cx="234909" cy="201168"/>
+          </a:xfrm>
+          <a:prstGeom prst="rect">
+            <a:avLst/>
+          </a:prstGeom>
+          <a:noFill/>
+          <a:ln/>
+        </p:spPr>
+        <p:txBody>
+          <a:bodyPr wrap="square" lIns="0" tIns="0" rIns="0" bIns="0" rtlCol="0" anchor="ctr"/>
+          <a:lstStyle/>
+          <a:p>
+            <a:pPr algn="ctr" indent="0" marL="0">
+              <a:buNone/>
+            </a:pPr>
+            <a:r>
+              <a:rPr lang="en-US" sz="700" b="1" dirty="0">
+                <a:solidFill>
+                  <a:srgbClr val="FFFFFF"/>
+                </a:solidFill>
+                <a:latin typeface="Calibri" pitchFamily="34" charset="0"/>
+                <a:ea typeface="Calibri" pitchFamily="34" charset="-122"/>
+                <a:cs typeface="Calibri" pitchFamily="34" charset="-120"/>
+              </a:rPr>
+              <a:t>-1,500</a:t>
+            </a:r>
+            <a:endParaRPr lang="en-US" sz="700" dirty="0"/>
+          </a:p>
+        </p:txBody>
+      </p:sp>
+      <p:sp>
+        <p:nvSpPr>
+          <p:cNvPr id="59" name="Shape 55"/>
+          <p:cNvSpPr/>
+          <p:nvPr/>
+        </p:nvSpPr>
+        <p:spPr>
+          <a:xfrm>
+            <a:off x="8139746" y="3550255"/>
+            <a:ext cx="234909" cy="201168"/>
+          </a:xfrm>
+          <a:prstGeom prst="roundRect">
+            <a:avLst>
+              <a:gd name="adj" fmla="val 13636"/>
+            </a:avLst>
+          </a:prstGeom>
+          <a:solidFill>
+            <a:srgbClr val="7F7F7F"/>
+          </a:solidFill>
+          <a:ln w="12700">
+            <a:solidFill>
+              <a:srgbClr val="333333"/>
+            </a:solidFill>
+            <a:prstDash val="solid"/>
+          </a:ln>
+        </p:spPr>
+      </p:sp>
+      <p:sp>
+        <p:nvSpPr>
+          <p:cNvPr id="60" name="Text 56"/>
+          <p:cNvSpPr/>
+          <p:nvPr/>
+        </p:nvSpPr>
+        <p:spPr>
+          <a:xfrm>
+            <a:off x="8139746" y="3550255"/>
+            <a:ext cx="234909" cy="201168"/>
+          </a:xfrm>
+          <a:prstGeom prst="rect">
+            <a:avLst/>
+          </a:prstGeom>
+          <a:noFill/>
+          <a:ln/>
+        </p:spPr>
+        <p:txBody>
+          <a:bodyPr wrap="square" lIns="0" tIns="0" rIns="0" bIns="0" rtlCol="0" anchor="ctr"/>
+          <a:lstStyle/>
+          <a:p>
+            <a:pPr algn="ctr" indent="0" marL="0">
+              <a:buNone/>
+            </a:pPr>
+            <a:r>
+              <a:rPr lang="en-US" sz="700" b="1" dirty="0">
+                <a:solidFill>
+                  <a:srgbClr val="FFFFFF"/>
+                </a:solidFill>
+                <a:latin typeface="Calibri" pitchFamily="34" charset="0"/>
+                <a:ea typeface="Calibri" pitchFamily="34" charset="-122"/>
+                <a:cs typeface="Calibri" pitchFamily="34" charset="-120"/>
+              </a:rPr>
+              <a:t>+1,900</a:t>
+            </a:r>
+            <a:endParaRPr lang="en-US" sz="700" dirty="0"/>
+          </a:p>
+        </p:txBody>
+      </p:sp>
+      <p:sp>
+        <p:nvSpPr>
+          <p:cNvPr id="61" name="Shape 57"/>
+          <p:cNvSpPr/>
+          <p:nvPr/>
+        </p:nvSpPr>
+        <p:spPr>
+          <a:xfrm>
+            <a:off x="8749898" y="3838984"/>
+            <a:ext cx="234909" cy="201168"/>
+          </a:xfrm>
+          <a:prstGeom prst="roundRect">
+            <a:avLst>
+              <a:gd name="adj" fmla="val 13636"/>
+            </a:avLst>
+          </a:prstGeom>
+          <a:solidFill>
+            <a:srgbClr val="7F7F7F"/>
+          </a:solidFill>
+          <a:ln w="12700">
+            <a:solidFill>
+              <a:srgbClr val="333333"/>
+            </a:solidFill>
+            <a:prstDash val="solid"/>
+          </a:ln>
+        </p:spPr>
+      </p:sp>
+      <p:sp>
+        <p:nvSpPr>
+          <p:cNvPr id="62" name="Text 58"/>
+          <p:cNvSpPr/>
+          <p:nvPr/>
+        </p:nvSpPr>
+        <p:spPr>
+          <a:xfrm>
+            <a:off x="8749898" y="3838984"/>
+            <a:ext cx="234909" cy="201168"/>
+          </a:xfrm>
+          <a:prstGeom prst="rect">
+            <a:avLst/>
+          </a:prstGeom>
+          <a:noFill/>
+          <a:ln/>
+        </p:spPr>
+        <p:txBody>
+          <a:bodyPr wrap="square" lIns="0" tIns="0" rIns="0" bIns="0" rtlCol="0" anchor="ctr"/>
+          <a:lstStyle/>
+          <a:p>
+            <a:pPr algn="ctr" indent="0" marL="0">
+              <a:buNone/>
+            </a:pPr>
+            <a:r>
+              <a:rPr lang="en-US" sz="700" b="1" dirty="0">
+                <a:solidFill>
+                  <a:srgbClr val="FFFFFF"/>
+                </a:solidFill>
+                <a:latin typeface="Calibri" pitchFamily="34" charset="0"/>
+                <a:ea typeface="Calibri" pitchFamily="34" charset="-122"/>
+                <a:cs typeface="Calibri" pitchFamily="34" charset="-120"/>
+              </a:rPr>
+              <a:t>-100</a:t>
+            </a:r>
+            <a:endParaRPr lang="en-US" sz="700" dirty="0"/>
+          </a:p>
+        </p:txBody>
+      </p:sp>
+      <p:sp>
+        <p:nvSpPr>
+          <p:cNvPr id="63" name="Shape 59"/>
+          <p:cNvSpPr/>
+          <p:nvPr/>
+        </p:nvSpPr>
+        <p:spPr>
+          <a:xfrm>
+            <a:off x="9360051" y="2224652"/>
+            <a:ext cx="234909" cy="201168"/>
+          </a:xfrm>
+          <a:prstGeom prst="roundRect">
+            <a:avLst>
+              <a:gd name="adj" fmla="val 13636"/>
+            </a:avLst>
+          </a:prstGeom>
+          <a:solidFill>
+            <a:srgbClr val="7F7F7F"/>
+          </a:solidFill>
+          <a:ln w="12700">
+            <a:solidFill>
+              <a:srgbClr val="333333"/>
+            </a:solidFill>
+            <a:prstDash val="solid"/>
+          </a:ln>
+        </p:spPr>
+      </p:sp>
+      <p:sp>
+        <p:nvSpPr>
+          <p:cNvPr id="64" name="Text 60"/>
+          <p:cNvSpPr/>
+          <p:nvPr/>
+        </p:nvSpPr>
+        <p:spPr>
+          <a:xfrm>
+            <a:off x="9360051" y="2224652"/>
+            <a:ext cx="234909" cy="201168"/>
+          </a:xfrm>
+          <a:prstGeom prst="rect">
+            <a:avLst/>
+          </a:prstGeom>
+          <a:noFill/>
+          <a:ln/>
+        </p:spPr>
+        <p:txBody>
+          <a:bodyPr wrap="square" lIns="0" tIns="0" rIns="0" bIns="0" rtlCol="0" anchor="ctr"/>
+          <a:lstStyle/>
+          <a:p>
+            <a:pPr algn="ctr" indent="0" marL="0">
+              <a:buNone/>
+            </a:pPr>
+            <a:r>
+              <a:rPr lang="en-US" sz="700" b="1" dirty="0">
+                <a:solidFill>
+                  <a:srgbClr val="FFFFFF"/>
+                </a:solidFill>
+                <a:latin typeface="Calibri" pitchFamily="34" charset="0"/>
+                <a:ea typeface="Calibri" pitchFamily="34" charset="-122"/>
+                <a:cs typeface="Calibri" pitchFamily="34" charset="-120"/>
+              </a:rPr>
+              <a:t>+2,700</a:t>
+            </a:r>
+            <a:endParaRPr lang="en-US" sz="700" dirty="0"/>
+          </a:p>
+        </p:txBody>
+      </p:sp>
+      <p:sp>
+        <p:nvSpPr>
+          <p:cNvPr id="65" name="Shape 61"/>
+          <p:cNvSpPr/>
+          <p:nvPr/>
+        </p:nvSpPr>
+        <p:spPr>
+          <a:xfrm>
+            <a:off x="9970203" y="3278152"/>
+            <a:ext cx="234909" cy="201168"/>
+          </a:xfrm>
+          <a:prstGeom prst="roundRect">
+            <a:avLst>
+              <a:gd name="adj" fmla="val 13636"/>
+            </a:avLst>
+          </a:prstGeom>
+          <a:solidFill>
+            <a:srgbClr val="7F7F7F"/>
+          </a:solidFill>
+          <a:ln w="12700">
+            <a:solidFill>
+              <a:srgbClr val="333333"/>
+            </a:solidFill>
+            <a:prstDash val="solid"/>
+          </a:ln>
+        </p:spPr>
+      </p:sp>
+      <p:sp>
+        <p:nvSpPr>
+          <p:cNvPr id="66" name="Text 62"/>
+          <p:cNvSpPr/>
+          <p:nvPr/>
+        </p:nvSpPr>
+        <p:spPr>
+          <a:xfrm>
+            <a:off x="9970203" y="3278152"/>
+            <a:ext cx="234909" cy="201168"/>
+          </a:xfrm>
+          <a:prstGeom prst="rect">
+            <a:avLst/>
+          </a:prstGeom>
+          <a:noFill/>
+          <a:ln/>
+        </p:spPr>
+        <p:txBody>
+          <a:bodyPr wrap="square" lIns="0" tIns="0" rIns="0" bIns="0" rtlCol="0" anchor="ctr"/>
+          <a:lstStyle/>
+          <a:p>
+            <a:pPr algn="ctr" indent="0" marL="0">
+              <a:buNone/>
+            </a:pPr>
+            <a:r>
+              <a:rPr lang="en-US" sz="700" b="1" dirty="0">
+                <a:solidFill>
+                  <a:srgbClr val="FFFFFF"/>
+                </a:solidFill>
+                <a:latin typeface="Calibri" pitchFamily="34" charset="0"/>
+                <a:ea typeface="Calibri" pitchFamily="34" charset="-122"/>
+                <a:cs typeface="Calibri" pitchFamily="34" charset="-120"/>
+              </a:rPr>
+              <a:t>-1,600</a:t>
+            </a:r>
+            <a:endParaRPr lang="en-US" sz="700" dirty="0"/>
+          </a:p>
+        </p:txBody>
+      </p:sp>
+      <p:sp>
+        <p:nvSpPr>
+          <p:cNvPr id="67" name="Shape 63"/>
+          <p:cNvSpPr/>
+          <p:nvPr/>
+        </p:nvSpPr>
+        <p:spPr>
+          <a:xfrm>
+            <a:off x="10580355" y="2173667"/>
+            <a:ext cx="234909" cy="201168"/>
+          </a:xfrm>
+          <a:prstGeom prst="roundRect">
+            <a:avLst>
+              <a:gd name="adj" fmla="val 13636"/>
+            </a:avLst>
+          </a:prstGeom>
+          <a:solidFill>
+            <a:srgbClr val="7F7F7F"/>
+          </a:solidFill>
+          <a:ln w="12700">
+            <a:solidFill>
+              <a:srgbClr val="333333"/>
+            </a:solidFill>
+            <a:prstDash val="solid"/>
+          </a:ln>
+        </p:spPr>
+      </p:sp>
+      <p:sp>
+        <p:nvSpPr>
+          <p:cNvPr id="68" name="Text 64"/>
+          <p:cNvSpPr/>
+          <p:nvPr/>
+        </p:nvSpPr>
+        <p:spPr>
+          <a:xfrm>
+            <a:off x="10580355" y="2173667"/>
+            <a:ext cx="234909" cy="201168"/>
+          </a:xfrm>
+          <a:prstGeom prst="rect">
+            <a:avLst/>
+          </a:prstGeom>
+          <a:noFill/>
+          <a:ln/>
+        </p:spPr>
+        <p:txBody>
+          <a:bodyPr wrap="square" lIns="0" tIns="0" rIns="0" bIns="0" rtlCol="0" anchor="ctr"/>
+          <a:lstStyle/>
+          <a:p>
+            <a:pPr algn="ctr" indent="0" marL="0">
+              <a:buNone/>
+            </a:pPr>
+            <a:r>
+              <a:rPr lang="en-US" sz="700" b="1" dirty="0">
+                <a:solidFill>
+                  <a:srgbClr val="FFFFFF"/>
+                </a:solidFill>
+                <a:latin typeface="Calibri" pitchFamily="34" charset="0"/>
+                <a:ea typeface="Calibri" pitchFamily="34" charset="-122"/>
+                <a:cs typeface="Calibri" pitchFamily="34" charset="-120"/>
+              </a:rPr>
+              <a:t>+1,700</a:t>
+            </a:r>
+            <a:endParaRPr lang="en-US" sz="700" dirty="0"/>
+          </a:p>
+        </p:txBody>
+      </p:sp>
+      <p:sp>
+        <p:nvSpPr>
+          <p:cNvPr id="69" name="Shape 65"/>
+          <p:cNvSpPr/>
+          <p:nvPr/>
+        </p:nvSpPr>
+        <p:spPr>
+          <a:xfrm>
+            <a:off x="11190507" y="1153973"/>
+            <a:ext cx="234909" cy="201168"/>
+          </a:xfrm>
+          <a:prstGeom prst="roundRect">
+            <a:avLst>
+              <a:gd name="adj" fmla="val 13636"/>
+            </a:avLst>
+          </a:prstGeom>
+          <a:solidFill>
+            <a:srgbClr val="7F7F7F"/>
+          </a:solidFill>
+          <a:ln w="12700">
+            <a:solidFill>
+              <a:srgbClr val="333333"/>
+            </a:solidFill>
+            <a:prstDash val="solid"/>
+          </a:ln>
+        </p:spPr>
+      </p:sp>
+      <p:sp>
+        <p:nvSpPr>
+          <p:cNvPr id="70" name="Text 66"/>
+          <p:cNvSpPr/>
+          <p:nvPr/>
+        </p:nvSpPr>
+        <p:spPr>
+          <a:xfrm>
+            <a:off x="11190507" y="1153973"/>
+            <a:ext cx="234909" cy="201168"/>
+          </a:xfrm>
+          <a:prstGeom prst="rect">
+            <a:avLst/>
+          </a:prstGeom>
+          <a:noFill/>
+          <a:ln/>
+        </p:spPr>
+        <p:txBody>
+          <a:bodyPr wrap="square" lIns="0" tIns="0" rIns="0" bIns="0" rtlCol="0" anchor="ctr"/>
+          <a:lstStyle/>
+          <a:p>
+            <a:pPr algn="ctr" indent="0" marL="0">
+              <a:buNone/>
+            </a:pPr>
+            <a:r>
+              <a:rPr lang="en-US" sz="700" b="1" dirty="0">
+                <a:solidFill>
+                  <a:srgbClr val="FFFFFF"/>
+                </a:solidFill>
+                <a:latin typeface="Calibri" pitchFamily="34" charset="0"/>
+                <a:ea typeface="Calibri" pitchFamily="34" charset="-122"/>
+                <a:cs typeface="Calibri" pitchFamily="34" charset="-120"/>
+              </a:rPr>
+              <a:t>+2,000</a:t>
+            </a:r>
+            <a:endParaRPr lang="en-US" sz="700" dirty="0"/>
+          </a:p>
+        </p:txBody>
+      </p:sp>
+      <p:sp>
+        <p:nvSpPr>
+          <p:cNvPr id="71" name="Shape 67"/>
+          <p:cNvSpPr/>
+          <p:nvPr/>
+        </p:nvSpPr>
+        <p:spPr>
+          <a:xfrm>
+            <a:off x="457200" y="5166360"/>
+            <a:ext cx="11274552" cy="274320"/>
+          </a:xfrm>
+          <a:prstGeom prst="rect">
+            <a:avLst/>
+          </a:prstGeom>
+          <a:solidFill>
+            <a:srgbClr val="F2F2F2"/>
+          </a:solidFill>
+          <a:ln w="6350">
+            <a:solidFill>
+              <a:srgbClr val="CCCCCC"/>
+            </a:solidFill>
+            <a:prstDash val="solid"/>
+          </a:ln>
+        </p:spPr>
+      </p:sp>
+      <p:sp>
+        <p:nvSpPr>
+          <p:cNvPr id="72" name="Text 68"/>
+          <p:cNvSpPr/>
+          <p:nvPr/>
+        </p:nvSpPr>
+        <p:spPr>
+          <a:xfrm>
+            <a:off x="594360" y="5166360"/>
+            <a:ext cx="11000232" cy="274320"/>
+          </a:xfrm>
+          <a:prstGeom prst="rect">
+            <a:avLst/>
+          </a:prstGeom>
+          <a:noFill/>
+          <a:ln/>
+        </p:spPr>
+        <p:txBody>
+          <a:bodyPr wrap="square" lIns="0" tIns="0" rIns="0" bIns="0" rtlCol="0" anchor="ctr"/>
+          <a:lstStyle/>
+          <a:p>
+            <a:pPr algn="l" indent="0" marL="0">
+              <a:buNone/>
+            </a:pPr>
+            <a:r>
+              <a:rPr lang="en-US" sz="1100" b="1" dirty="0">
+                <a:solidFill>
+                  <a:srgbClr val="213366"/>
+                </a:solidFill>
+                <a:latin typeface="Calibri" pitchFamily="34" charset="0"/>
+                <a:ea typeface="Calibri" pitchFamily="34" charset="-122"/>
+                <a:cs typeface="Calibri" pitchFamily="34" charset="-120"/>
+              </a:rPr>
+              <a:t>Period avg:  Raipur 32,368  |  NCR 32,788 INR/MT</a:t>
             </a:r>
             <a:endParaRPr lang="en-US" sz="1100" dirty="0"/>
           </a:p>
@@ -4831,7 +6242,7 @@
       </p:sp>
       <p:sp>
         <p:nvSpPr>
-          <p:cNvPr id="9" name="Text 5"/>
+          <p:cNvPr id="73" name="Text 69"/>
           <p:cNvSpPr/>
           <p:nvPr/>
         </p:nvSpPr>
@@ -4870,7 +6281,7 @@
       </p:sp>
       <p:sp>
         <p:nvSpPr>
-          <p:cNvPr id="10" name="Text 6"/>
+          <p:cNvPr id="74" name="Text 70"/>
           <p:cNvSpPr/>
           <p:nvPr/>
         </p:nvSpPr>
@@ -5379,18 +6790,20 @@
         </p:nvSpPr>
         <p:spPr>
           <a:xfrm>
-            <a:off x="457200" y="5166360"/>
-            <a:ext cx="11274552" cy="274320"/>
-          </a:xfrm>
-          <a:prstGeom prst="rect">
-            <a:avLst/>
-          </a:prstGeom>
-          <a:solidFill>
-            <a:srgbClr val="F2F2F2"/>
-          </a:solidFill>
-          <a:ln w="6350">
-            <a:solidFill>
-              <a:srgbClr val="CCCCCC"/>
+            <a:off x="1824671" y="2143542"/>
+            <a:ext cx="234909" cy="201168"/>
+          </a:xfrm>
+          <a:prstGeom prst="roundRect">
+            <a:avLst>
+              <a:gd name="adj" fmla="val 13636"/>
+            </a:avLst>
+          </a:prstGeom>
+          <a:solidFill>
+            <a:srgbClr val="213366"/>
+          </a:solidFill>
+          <a:ln w="12700">
+            <a:solidFill>
+              <a:srgbClr val="333333"/>
             </a:solidFill>
             <a:prstDash val="solid"/>
           </a:ln>
@@ -5404,8 +6817,8 @@
         </p:nvSpPr>
         <p:spPr>
           <a:xfrm>
-            <a:off x="594360" y="5166360"/>
-            <a:ext cx="11000232" cy="274320"/>
+            <a:off x="1824671" y="2143542"/>
+            <a:ext cx="234909" cy="201168"/>
           </a:xfrm>
           <a:prstGeom prst="rect">
             <a:avLst/>
@@ -5417,19 +6830,2129 @@
           <a:bodyPr wrap="square" lIns="0" tIns="0" rIns="0" bIns="0" rtlCol="0" anchor="ctr"/>
           <a:lstStyle/>
           <a:p>
-            <a:pPr algn="l" indent="0" marL="0">
+            <a:pPr algn="ctr" indent="0" marL="0">
               <a:buNone/>
             </a:pPr>
             <a:r>
-              <a:rPr lang="en-US" sz="1100" b="1" dirty="0">
-                <a:solidFill>
-                  <a:srgbClr val="213366"/>
+              <a:rPr lang="en-US" sz="700" b="1" dirty="0">
+                <a:solidFill>
+                  <a:srgbClr val="FFFFFF"/>
                 </a:solidFill>
                 <a:latin typeface="Calibri" pitchFamily="34" charset="0"/>
                 <a:ea typeface="Calibri" pitchFamily="34" charset="-122"/>
                 <a:cs typeface="Calibri" pitchFamily="34" charset="-120"/>
               </a:rPr>
-              <a:t>Latest change:  Raipur -93  |  NCR -80     •     Period avg:  Raipur 178  |  NCR -48 INR/MT</a:t>
+              <a:t>+97</a:t>
+            </a:r>
+            <a:endParaRPr lang="en-US" sz="700" dirty="0"/>
+          </a:p>
+        </p:txBody>
+      </p:sp>
+      <p:sp>
+        <p:nvSpPr>
+          <p:cNvPr id="9" name="Shape 5"/>
+          <p:cNvSpPr/>
+          <p:nvPr/>
+        </p:nvSpPr>
+        <p:spPr>
+          <a:xfrm>
+            <a:off x="2434823" y="2787648"/>
+            <a:ext cx="234909" cy="201168"/>
+          </a:xfrm>
+          <a:prstGeom prst="roundRect">
+            <a:avLst>
+              <a:gd name="adj" fmla="val 13636"/>
+            </a:avLst>
+          </a:prstGeom>
+          <a:solidFill>
+            <a:srgbClr val="213366"/>
+          </a:solidFill>
+          <a:ln w="12700">
+            <a:solidFill>
+              <a:srgbClr val="333333"/>
+            </a:solidFill>
+            <a:prstDash val="solid"/>
+          </a:ln>
+        </p:spPr>
+      </p:sp>
+      <p:sp>
+        <p:nvSpPr>
+          <p:cNvPr id="10" name="Text 6"/>
+          <p:cNvSpPr/>
+          <p:nvPr/>
+        </p:nvSpPr>
+        <p:spPr>
+          <a:xfrm>
+            <a:off x="2434823" y="2787648"/>
+            <a:ext cx="234909" cy="201168"/>
+          </a:xfrm>
+          <a:prstGeom prst="rect">
+            <a:avLst/>
+          </a:prstGeom>
+          <a:noFill/>
+          <a:ln/>
+        </p:spPr>
+        <p:txBody>
+          <a:bodyPr wrap="square" lIns="0" tIns="0" rIns="0" bIns="0" rtlCol="0" anchor="ctr"/>
+          <a:lstStyle/>
+          <a:p>
+            <a:pPr algn="ctr" indent="0" marL="0">
+              <a:buNone/>
+            </a:pPr>
+            <a:r>
+              <a:rPr lang="en-US" sz="700" b="1" dirty="0">
+                <a:solidFill>
+                  <a:srgbClr val="FFFFFF"/>
+                </a:solidFill>
+                <a:latin typeface="Calibri" pitchFamily="34" charset="0"/>
+                <a:ea typeface="Calibri" pitchFamily="34" charset="-122"/>
+                <a:cs typeface="Calibri" pitchFamily="34" charset="-120"/>
+              </a:rPr>
+              <a:t>-409</a:t>
+            </a:r>
+            <a:endParaRPr lang="en-US" sz="700" dirty="0"/>
+          </a:p>
+        </p:txBody>
+      </p:sp>
+      <p:sp>
+        <p:nvSpPr>
+          <p:cNvPr id="11" name="Shape 7"/>
+          <p:cNvSpPr/>
+          <p:nvPr/>
+        </p:nvSpPr>
+        <p:spPr>
+          <a:xfrm>
+            <a:off x="3044975" y="2331815"/>
+            <a:ext cx="234909" cy="201168"/>
+          </a:xfrm>
+          <a:prstGeom prst="roundRect">
+            <a:avLst>
+              <a:gd name="adj" fmla="val 13636"/>
+            </a:avLst>
+          </a:prstGeom>
+          <a:solidFill>
+            <a:srgbClr val="213366"/>
+          </a:solidFill>
+          <a:ln w="12700">
+            <a:solidFill>
+              <a:srgbClr val="333333"/>
+            </a:solidFill>
+            <a:prstDash val="solid"/>
+          </a:ln>
+        </p:spPr>
+      </p:sp>
+      <p:sp>
+        <p:nvSpPr>
+          <p:cNvPr id="12" name="Text 8"/>
+          <p:cNvSpPr/>
+          <p:nvPr/>
+        </p:nvSpPr>
+        <p:spPr>
+          <a:xfrm>
+            <a:off x="3044975" y="2331815"/>
+            <a:ext cx="234909" cy="201168"/>
+          </a:xfrm>
+          <a:prstGeom prst="rect">
+            <a:avLst/>
+          </a:prstGeom>
+          <a:noFill/>
+          <a:ln/>
+        </p:spPr>
+        <p:txBody>
+          <a:bodyPr wrap="square" lIns="0" tIns="0" rIns="0" bIns="0" rtlCol="0" anchor="ctr"/>
+          <a:lstStyle/>
+          <a:p>
+            <a:pPr algn="ctr" indent="0" marL="0">
+              <a:buNone/>
+            </a:pPr>
+            <a:r>
+              <a:rPr lang="en-US" sz="700" b="1" dirty="0">
+                <a:solidFill>
+                  <a:srgbClr val="FFFFFF"/>
+                </a:solidFill>
+                <a:latin typeface="Calibri" pitchFamily="34" charset="0"/>
+                <a:ea typeface="Calibri" pitchFamily="34" charset="-122"/>
+                <a:cs typeface="Calibri" pitchFamily="34" charset="-120"/>
+              </a:rPr>
+              <a:t>+220</a:t>
+            </a:r>
+            <a:endParaRPr lang="en-US" sz="700" dirty="0"/>
+          </a:p>
+        </p:txBody>
+      </p:sp>
+      <p:sp>
+        <p:nvSpPr>
+          <p:cNvPr id="13" name="Shape 9"/>
+          <p:cNvSpPr/>
+          <p:nvPr/>
+        </p:nvSpPr>
+        <p:spPr>
+          <a:xfrm>
+            <a:off x="3655127" y="1153973"/>
+            <a:ext cx="234909" cy="201168"/>
+          </a:xfrm>
+          <a:prstGeom prst="roundRect">
+            <a:avLst>
+              <a:gd name="adj" fmla="val 13636"/>
+            </a:avLst>
+          </a:prstGeom>
+          <a:solidFill>
+            <a:srgbClr val="213366"/>
+          </a:solidFill>
+          <a:ln w="12700">
+            <a:solidFill>
+              <a:srgbClr val="333333"/>
+            </a:solidFill>
+            <a:prstDash val="solid"/>
+          </a:ln>
+        </p:spPr>
+      </p:sp>
+      <p:sp>
+        <p:nvSpPr>
+          <p:cNvPr id="14" name="Text 10"/>
+          <p:cNvSpPr/>
+          <p:nvPr/>
+        </p:nvSpPr>
+        <p:spPr>
+          <a:xfrm>
+            <a:off x="3655127" y="1153973"/>
+            <a:ext cx="234909" cy="201168"/>
+          </a:xfrm>
+          <a:prstGeom prst="rect">
+            <a:avLst/>
+          </a:prstGeom>
+          <a:noFill/>
+          <a:ln/>
+        </p:spPr>
+        <p:txBody>
+          <a:bodyPr wrap="square" lIns="0" tIns="0" rIns="0" bIns="0" rtlCol="0" anchor="ctr"/>
+          <a:lstStyle/>
+          <a:p>
+            <a:pPr algn="ctr" indent="0" marL="0">
+              <a:buNone/>
+            </a:pPr>
+            <a:r>
+              <a:rPr lang="en-US" sz="700" b="1" dirty="0">
+                <a:solidFill>
+                  <a:srgbClr val="FFFFFF"/>
+                </a:solidFill>
+                <a:latin typeface="Calibri" pitchFamily="34" charset="0"/>
+                <a:ea typeface="Calibri" pitchFamily="34" charset="-122"/>
+                <a:cs typeface="Calibri" pitchFamily="34" charset="-120"/>
+              </a:rPr>
+              <a:t>+1,186</a:t>
+            </a:r>
+            <a:endParaRPr lang="en-US" sz="700" dirty="0"/>
+          </a:p>
+        </p:txBody>
+      </p:sp>
+      <p:sp>
+        <p:nvSpPr>
+          <p:cNvPr id="15" name="Shape 11"/>
+          <p:cNvSpPr/>
+          <p:nvPr/>
+        </p:nvSpPr>
+        <p:spPr>
+          <a:xfrm>
+            <a:off x="4265279" y="1544685"/>
+            <a:ext cx="234909" cy="201168"/>
+          </a:xfrm>
+          <a:prstGeom prst="roundRect">
+            <a:avLst>
+              <a:gd name="adj" fmla="val 13636"/>
+            </a:avLst>
+          </a:prstGeom>
+          <a:solidFill>
+            <a:srgbClr val="213366"/>
+          </a:solidFill>
+          <a:ln w="12700">
+            <a:solidFill>
+              <a:srgbClr val="333333"/>
+            </a:solidFill>
+            <a:prstDash val="solid"/>
+          </a:ln>
+        </p:spPr>
+      </p:sp>
+      <p:sp>
+        <p:nvSpPr>
+          <p:cNvPr id="16" name="Text 12"/>
+          <p:cNvSpPr/>
+          <p:nvPr/>
+        </p:nvSpPr>
+        <p:spPr>
+          <a:xfrm>
+            <a:off x="4265279" y="1544685"/>
+            <a:ext cx="234909" cy="201168"/>
+          </a:xfrm>
+          <a:prstGeom prst="rect">
+            <a:avLst/>
+          </a:prstGeom>
+          <a:noFill/>
+          <a:ln/>
+        </p:spPr>
+        <p:txBody>
+          <a:bodyPr wrap="square" lIns="0" tIns="0" rIns="0" bIns="0" rtlCol="0" anchor="ctr"/>
+          <a:lstStyle/>
+          <a:p>
+            <a:pPr algn="ctr" indent="0" marL="0">
+              <a:buNone/>
+            </a:pPr>
+            <a:r>
+              <a:rPr lang="en-US" sz="700" b="1" dirty="0">
+                <a:solidFill>
+                  <a:srgbClr val="FFFFFF"/>
+                </a:solidFill>
+                <a:latin typeface="Calibri" pitchFamily="34" charset="0"/>
+                <a:ea typeface="Calibri" pitchFamily="34" charset="-122"/>
+                <a:cs typeface="Calibri" pitchFamily="34" charset="-120"/>
+              </a:rPr>
+              <a:t>-154</a:t>
+            </a:r>
+            <a:endParaRPr lang="en-US" sz="700" dirty="0"/>
+          </a:p>
+        </p:txBody>
+      </p:sp>
+      <p:sp>
+        <p:nvSpPr>
+          <p:cNvPr id="17" name="Shape 13"/>
+          <p:cNvSpPr/>
+          <p:nvPr/>
+        </p:nvSpPr>
+        <p:spPr>
+          <a:xfrm>
+            <a:off x="4875432" y="2096717"/>
+            <a:ext cx="234909" cy="201168"/>
+          </a:xfrm>
+          <a:prstGeom prst="roundRect">
+            <a:avLst>
+              <a:gd name="adj" fmla="val 13636"/>
+            </a:avLst>
+          </a:prstGeom>
+          <a:solidFill>
+            <a:srgbClr val="213366"/>
+          </a:solidFill>
+          <a:ln w="12700">
+            <a:solidFill>
+              <a:srgbClr val="333333"/>
+            </a:solidFill>
+            <a:prstDash val="solid"/>
+          </a:ln>
+        </p:spPr>
+      </p:sp>
+      <p:sp>
+        <p:nvSpPr>
+          <p:cNvPr id="18" name="Text 14"/>
+          <p:cNvSpPr/>
+          <p:nvPr/>
+        </p:nvSpPr>
+        <p:spPr>
+          <a:xfrm>
+            <a:off x="4875432" y="2096717"/>
+            <a:ext cx="234909" cy="201168"/>
+          </a:xfrm>
+          <a:prstGeom prst="rect">
+            <a:avLst/>
+          </a:prstGeom>
+          <a:noFill/>
+          <a:ln/>
+        </p:spPr>
+        <p:txBody>
+          <a:bodyPr wrap="square" lIns="0" tIns="0" rIns="0" bIns="0" rtlCol="0" anchor="ctr"/>
+          <a:lstStyle/>
+          <a:p>
+            <a:pPr algn="ctr" indent="0" marL="0">
+              <a:buNone/>
+            </a:pPr>
+            <a:r>
+              <a:rPr lang="en-US" sz="700" b="1" dirty="0">
+                <a:solidFill>
+                  <a:srgbClr val="FFFFFF"/>
+                </a:solidFill>
+                <a:latin typeface="Calibri" pitchFamily="34" charset="0"/>
+                <a:ea typeface="Calibri" pitchFamily="34" charset="-122"/>
+                <a:cs typeface="Calibri" pitchFamily="34" charset="-120"/>
+              </a:rPr>
+              <a:t>-556</a:t>
+            </a:r>
+            <a:endParaRPr lang="en-US" sz="700" dirty="0"/>
+          </a:p>
+        </p:txBody>
+      </p:sp>
+      <p:sp>
+        <p:nvSpPr>
+          <p:cNvPr id="19" name="Shape 15"/>
+          <p:cNvSpPr/>
+          <p:nvPr/>
+        </p:nvSpPr>
+        <p:spPr>
+          <a:xfrm>
+            <a:off x="5485584" y="4157308"/>
+            <a:ext cx="234909" cy="201168"/>
+          </a:xfrm>
+          <a:prstGeom prst="roundRect">
+            <a:avLst>
+              <a:gd name="adj" fmla="val 13636"/>
+            </a:avLst>
+          </a:prstGeom>
+          <a:solidFill>
+            <a:srgbClr val="213366"/>
+          </a:solidFill>
+          <a:ln w="12700">
+            <a:solidFill>
+              <a:srgbClr val="333333"/>
+            </a:solidFill>
+            <a:prstDash val="solid"/>
+          </a:ln>
+        </p:spPr>
+      </p:sp>
+      <p:sp>
+        <p:nvSpPr>
+          <p:cNvPr id="20" name="Text 16"/>
+          <p:cNvSpPr/>
+          <p:nvPr/>
+        </p:nvSpPr>
+        <p:spPr>
+          <a:xfrm>
+            <a:off x="5485584" y="4157308"/>
+            <a:ext cx="234909" cy="201168"/>
+          </a:xfrm>
+          <a:prstGeom prst="rect">
+            <a:avLst/>
+          </a:prstGeom>
+          <a:noFill/>
+          <a:ln/>
+        </p:spPr>
+        <p:txBody>
+          <a:bodyPr wrap="square" lIns="0" tIns="0" rIns="0" bIns="0" rtlCol="0" anchor="ctr"/>
+          <a:lstStyle/>
+          <a:p>
+            <a:pPr algn="ctr" indent="0" marL="0">
+              <a:buNone/>
+            </a:pPr>
+            <a:r>
+              <a:rPr lang="en-US" sz="700" b="1" dirty="0">
+                <a:solidFill>
+                  <a:srgbClr val="FFFFFF"/>
+                </a:solidFill>
+                <a:latin typeface="Calibri" pitchFamily="34" charset="0"/>
+                <a:ea typeface="Calibri" pitchFamily="34" charset="-122"/>
+                <a:cs typeface="Calibri" pitchFamily="34" charset="-120"/>
+              </a:rPr>
+              <a:t>-2,075</a:t>
+            </a:r>
+            <a:endParaRPr lang="en-US" sz="700" dirty="0"/>
+          </a:p>
+        </p:txBody>
+      </p:sp>
+      <p:sp>
+        <p:nvSpPr>
+          <p:cNvPr id="21" name="Shape 17"/>
+          <p:cNvSpPr/>
+          <p:nvPr/>
+        </p:nvSpPr>
+        <p:spPr>
+          <a:xfrm>
+            <a:off x="6095736" y="3237181"/>
+            <a:ext cx="234909" cy="201168"/>
+          </a:xfrm>
+          <a:prstGeom prst="roundRect">
+            <a:avLst>
+              <a:gd name="adj" fmla="val 13636"/>
+            </a:avLst>
+          </a:prstGeom>
+          <a:solidFill>
+            <a:srgbClr val="213366"/>
+          </a:solidFill>
+          <a:ln w="12700">
+            <a:solidFill>
+              <a:srgbClr val="333333"/>
+            </a:solidFill>
+            <a:prstDash val="solid"/>
+          </a:ln>
+        </p:spPr>
+      </p:sp>
+      <p:sp>
+        <p:nvSpPr>
+          <p:cNvPr id="22" name="Text 18"/>
+          <p:cNvSpPr/>
+          <p:nvPr/>
+        </p:nvSpPr>
+        <p:spPr>
+          <a:xfrm>
+            <a:off x="6095736" y="3237181"/>
+            <a:ext cx="234909" cy="201168"/>
+          </a:xfrm>
+          <a:prstGeom prst="rect">
+            <a:avLst/>
+          </a:prstGeom>
+          <a:noFill/>
+          <a:ln/>
+        </p:spPr>
+        <p:txBody>
+          <a:bodyPr wrap="square" lIns="0" tIns="0" rIns="0" bIns="0" rtlCol="0" anchor="ctr"/>
+          <a:lstStyle/>
+          <a:p>
+            <a:pPr algn="ctr" indent="0" marL="0">
+              <a:buNone/>
+            </a:pPr>
+            <a:r>
+              <a:rPr lang="en-US" sz="700" b="1" dirty="0">
+                <a:solidFill>
+                  <a:srgbClr val="FFFFFF"/>
+                </a:solidFill>
+                <a:latin typeface="Calibri" pitchFamily="34" charset="0"/>
+                <a:ea typeface="Calibri" pitchFamily="34" charset="-122"/>
+                <a:cs typeface="Calibri" pitchFamily="34" charset="-120"/>
+              </a:rPr>
+              <a:t>+687</a:t>
+            </a:r>
+            <a:endParaRPr lang="en-US" sz="700" dirty="0"/>
+          </a:p>
+        </p:txBody>
+      </p:sp>
+      <p:sp>
+        <p:nvSpPr>
+          <p:cNvPr id="23" name="Shape 19"/>
+          <p:cNvSpPr/>
+          <p:nvPr/>
+        </p:nvSpPr>
+        <p:spPr>
+          <a:xfrm>
+            <a:off x="6705888" y="4756709"/>
+            <a:ext cx="234909" cy="201168"/>
+          </a:xfrm>
+          <a:prstGeom prst="roundRect">
+            <a:avLst>
+              <a:gd name="adj" fmla="val 13636"/>
+            </a:avLst>
+          </a:prstGeom>
+          <a:solidFill>
+            <a:srgbClr val="213366"/>
+          </a:solidFill>
+          <a:ln w="12700">
+            <a:solidFill>
+              <a:srgbClr val="333333"/>
+            </a:solidFill>
+            <a:prstDash val="solid"/>
+          </a:ln>
+        </p:spPr>
+      </p:sp>
+      <p:sp>
+        <p:nvSpPr>
+          <p:cNvPr id="24" name="Text 20"/>
+          <p:cNvSpPr/>
+          <p:nvPr/>
+        </p:nvSpPr>
+        <p:spPr>
+          <a:xfrm>
+            <a:off x="6705888" y="4756709"/>
+            <a:ext cx="234909" cy="201168"/>
+          </a:xfrm>
+          <a:prstGeom prst="rect">
+            <a:avLst/>
+          </a:prstGeom>
+          <a:noFill/>
+          <a:ln/>
+        </p:spPr>
+        <p:txBody>
+          <a:bodyPr wrap="square" lIns="0" tIns="0" rIns="0" bIns="0" rtlCol="0" anchor="ctr"/>
+          <a:lstStyle/>
+          <a:p>
+            <a:pPr algn="ctr" indent="0" marL="0">
+              <a:buNone/>
+            </a:pPr>
+            <a:r>
+              <a:rPr lang="en-US" sz="700" b="1" dirty="0">
+                <a:solidFill>
+                  <a:srgbClr val="FFFFFF"/>
+                </a:solidFill>
+                <a:latin typeface="Calibri" pitchFamily="34" charset="0"/>
+                <a:ea typeface="Calibri" pitchFamily="34" charset="-122"/>
+                <a:cs typeface="Calibri" pitchFamily="34" charset="-120"/>
+              </a:rPr>
+              <a:t>-1,291</a:t>
+            </a:r>
+            <a:endParaRPr lang="en-US" sz="700" dirty="0"/>
+          </a:p>
+        </p:txBody>
+      </p:sp>
+      <p:sp>
+        <p:nvSpPr>
+          <p:cNvPr id="25" name="Shape 21"/>
+          <p:cNvSpPr/>
+          <p:nvPr/>
+        </p:nvSpPr>
+        <p:spPr>
+          <a:xfrm>
+            <a:off x="7316041" y="4178677"/>
+            <a:ext cx="234909" cy="201168"/>
+          </a:xfrm>
+          <a:prstGeom prst="roundRect">
+            <a:avLst>
+              <a:gd name="adj" fmla="val 13636"/>
+            </a:avLst>
+          </a:prstGeom>
+          <a:solidFill>
+            <a:srgbClr val="213366"/>
+          </a:solidFill>
+          <a:ln w="12700">
+            <a:solidFill>
+              <a:srgbClr val="333333"/>
+            </a:solidFill>
+            <a:prstDash val="solid"/>
+          </a:ln>
+        </p:spPr>
+      </p:sp>
+      <p:sp>
+        <p:nvSpPr>
+          <p:cNvPr id="26" name="Text 22"/>
+          <p:cNvSpPr/>
+          <p:nvPr/>
+        </p:nvSpPr>
+        <p:spPr>
+          <a:xfrm>
+            <a:off x="7316041" y="4178677"/>
+            <a:ext cx="234909" cy="201168"/>
+          </a:xfrm>
+          <a:prstGeom prst="rect">
+            <a:avLst/>
+          </a:prstGeom>
+          <a:noFill/>
+          <a:ln/>
+        </p:spPr>
+        <p:txBody>
+          <a:bodyPr wrap="square" lIns="0" tIns="0" rIns="0" bIns="0" rtlCol="0" anchor="ctr"/>
+          <a:lstStyle/>
+          <a:p>
+            <a:pPr algn="ctr" indent="0" marL="0">
+              <a:buNone/>
+            </a:pPr>
+            <a:r>
+              <a:rPr lang="en-US" sz="700" b="1" dirty="0">
+                <a:solidFill>
+                  <a:srgbClr val="FFFFFF"/>
+                </a:solidFill>
+                <a:latin typeface="Calibri" pitchFamily="34" charset="0"/>
+                <a:ea typeface="Calibri" pitchFamily="34" charset="-122"/>
+                <a:cs typeface="Calibri" pitchFamily="34" charset="-120"/>
+              </a:rPr>
+              <a:t>+343</a:t>
+            </a:r>
+            <a:endParaRPr lang="en-US" sz="700" dirty="0"/>
+          </a:p>
+        </p:txBody>
+      </p:sp>
+      <p:sp>
+        <p:nvSpPr>
+          <p:cNvPr id="27" name="Shape 23"/>
+          <p:cNvSpPr/>
+          <p:nvPr/>
+        </p:nvSpPr>
+        <p:spPr>
+          <a:xfrm>
+            <a:off x="7926193" y="3936313"/>
+            <a:ext cx="234909" cy="201168"/>
+          </a:xfrm>
+          <a:prstGeom prst="roundRect">
+            <a:avLst>
+              <a:gd name="adj" fmla="val 13636"/>
+            </a:avLst>
+          </a:prstGeom>
+          <a:solidFill>
+            <a:srgbClr val="213366"/>
+          </a:solidFill>
+          <a:ln w="12700">
+            <a:solidFill>
+              <a:srgbClr val="333333"/>
+            </a:solidFill>
+            <a:prstDash val="solid"/>
+          </a:ln>
+        </p:spPr>
+      </p:sp>
+      <p:sp>
+        <p:nvSpPr>
+          <p:cNvPr id="28" name="Text 24"/>
+          <p:cNvSpPr/>
+          <p:nvPr/>
+        </p:nvSpPr>
+        <p:spPr>
+          <a:xfrm>
+            <a:off x="7926193" y="3936313"/>
+            <a:ext cx="234909" cy="201168"/>
+          </a:xfrm>
+          <a:prstGeom prst="rect">
+            <a:avLst/>
+          </a:prstGeom>
+          <a:noFill/>
+          <a:ln/>
+        </p:spPr>
+        <p:txBody>
+          <a:bodyPr wrap="square" lIns="0" tIns="0" rIns="0" bIns="0" rtlCol="0" anchor="ctr"/>
+          <a:lstStyle/>
+          <a:p>
+            <a:pPr algn="ctr" indent="0" marL="0">
+              <a:buNone/>
+            </a:pPr>
+            <a:r>
+              <a:rPr lang="en-US" sz="700" b="1" dirty="0">
+                <a:solidFill>
+                  <a:srgbClr val="FFFFFF"/>
+                </a:solidFill>
+                <a:latin typeface="Calibri" pitchFamily="34" charset="0"/>
+                <a:ea typeface="Calibri" pitchFamily="34" charset="-122"/>
+                <a:cs typeface="Calibri" pitchFamily="34" charset="-120"/>
+              </a:rPr>
+              <a:t>+244</a:t>
+            </a:r>
+            <a:endParaRPr lang="en-US" sz="700" dirty="0"/>
+          </a:p>
+        </p:txBody>
+      </p:sp>
+      <p:sp>
+        <p:nvSpPr>
+          <p:cNvPr id="29" name="Shape 25"/>
+          <p:cNvSpPr/>
+          <p:nvPr/>
+        </p:nvSpPr>
+        <p:spPr>
+          <a:xfrm>
+            <a:off x="8536345" y="2141080"/>
+            <a:ext cx="234909" cy="201168"/>
+          </a:xfrm>
+          <a:prstGeom prst="roundRect">
+            <a:avLst>
+              <a:gd name="adj" fmla="val 13636"/>
+            </a:avLst>
+          </a:prstGeom>
+          <a:solidFill>
+            <a:srgbClr val="213366"/>
+          </a:solidFill>
+          <a:ln w="12700">
+            <a:solidFill>
+              <a:srgbClr val="333333"/>
+            </a:solidFill>
+            <a:prstDash val="solid"/>
+          </a:ln>
+        </p:spPr>
+      </p:sp>
+      <p:sp>
+        <p:nvSpPr>
+          <p:cNvPr id="30" name="Text 26"/>
+          <p:cNvSpPr/>
+          <p:nvPr/>
+        </p:nvSpPr>
+        <p:spPr>
+          <a:xfrm>
+            <a:off x="8536345" y="2141080"/>
+            <a:ext cx="234909" cy="201168"/>
+          </a:xfrm>
+          <a:prstGeom prst="rect">
+            <a:avLst/>
+          </a:prstGeom>
+          <a:noFill/>
+          <a:ln/>
+        </p:spPr>
+        <p:txBody>
+          <a:bodyPr wrap="square" lIns="0" tIns="0" rIns="0" bIns="0" rtlCol="0" anchor="ctr"/>
+          <a:lstStyle/>
+          <a:p>
+            <a:pPr algn="ctr" indent="0" marL="0">
+              <a:buNone/>
+            </a:pPr>
+            <a:r>
+              <a:rPr lang="en-US" sz="700" b="1" dirty="0">
+                <a:solidFill>
+                  <a:srgbClr val="FFFFFF"/>
+                </a:solidFill>
+                <a:latin typeface="Calibri" pitchFamily="34" charset="0"/>
+                <a:ea typeface="Calibri" pitchFamily="34" charset="-122"/>
+                <a:cs typeface="Calibri" pitchFamily="34" charset="-120"/>
+              </a:rPr>
+              <a:t>+1,808</a:t>
+            </a:r>
+            <a:endParaRPr lang="en-US" sz="700" dirty="0"/>
+          </a:p>
+        </p:txBody>
+      </p:sp>
+      <p:sp>
+        <p:nvSpPr>
+          <p:cNvPr id="31" name="Shape 27"/>
+          <p:cNvSpPr/>
+          <p:nvPr/>
+        </p:nvSpPr>
+        <p:spPr>
+          <a:xfrm>
+            <a:off x="9146497" y="2562877"/>
+            <a:ext cx="234909" cy="201168"/>
+          </a:xfrm>
+          <a:prstGeom prst="roundRect">
+            <a:avLst>
+              <a:gd name="adj" fmla="val 13636"/>
+            </a:avLst>
+          </a:prstGeom>
+          <a:solidFill>
+            <a:srgbClr val="213366"/>
+          </a:solidFill>
+          <a:ln w="12700">
+            <a:solidFill>
+              <a:srgbClr val="333333"/>
+            </a:solidFill>
+            <a:prstDash val="solid"/>
+          </a:ln>
+        </p:spPr>
+      </p:sp>
+      <p:sp>
+        <p:nvSpPr>
+          <p:cNvPr id="32" name="Text 28"/>
+          <p:cNvSpPr/>
+          <p:nvPr/>
+        </p:nvSpPr>
+        <p:spPr>
+          <a:xfrm>
+            <a:off x="9146497" y="2562877"/>
+            <a:ext cx="234909" cy="201168"/>
+          </a:xfrm>
+          <a:prstGeom prst="rect">
+            <a:avLst/>
+          </a:prstGeom>
+          <a:noFill/>
+          <a:ln/>
+        </p:spPr>
+        <p:txBody>
+          <a:bodyPr wrap="square" lIns="0" tIns="0" rIns="0" bIns="0" rtlCol="0" anchor="ctr"/>
+          <a:lstStyle/>
+          <a:p>
+            <a:pPr algn="ctr" indent="0" marL="0">
+              <a:buNone/>
+            </a:pPr>
+            <a:r>
+              <a:rPr lang="en-US" sz="700" b="1" dirty="0">
+                <a:solidFill>
+                  <a:srgbClr val="FFFFFF"/>
+                </a:solidFill>
+                <a:latin typeface="Calibri" pitchFamily="34" charset="0"/>
+                <a:ea typeface="Calibri" pitchFamily="34" charset="-122"/>
+                <a:cs typeface="Calibri" pitchFamily="34" charset="-120"/>
+              </a:rPr>
+              <a:t>-185</a:t>
+            </a:r>
+            <a:endParaRPr lang="en-US" sz="700" dirty="0"/>
+          </a:p>
+        </p:txBody>
+      </p:sp>
+      <p:sp>
+        <p:nvSpPr>
+          <p:cNvPr id="33" name="Shape 29"/>
+          <p:cNvSpPr/>
+          <p:nvPr/>
+        </p:nvSpPr>
+        <p:spPr>
+          <a:xfrm>
+            <a:off x="9756649" y="3599418"/>
+            <a:ext cx="234909" cy="201168"/>
+          </a:xfrm>
+          <a:prstGeom prst="roundRect">
+            <a:avLst>
+              <a:gd name="adj" fmla="val 13636"/>
+            </a:avLst>
+          </a:prstGeom>
+          <a:solidFill>
+            <a:srgbClr val="213366"/>
+          </a:solidFill>
+          <a:ln w="12700">
+            <a:solidFill>
+              <a:srgbClr val="333333"/>
+            </a:solidFill>
+            <a:prstDash val="solid"/>
+          </a:ln>
+        </p:spPr>
+      </p:sp>
+      <p:sp>
+        <p:nvSpPr>
+          <p:cNvPr id="34" name="Text 30"/>
+          <p:cNvSpPr/>
+          <p:nvPr/>
+        </p:nvSpPr>
+        <p:spPr>
+          <a:xfrm>
+            <a:off x="9756649" y="3599418"/>
+            <a:ext cx="234909" cy="201168"/>
+          </a:xfrm>
+          <a:prstGeom prst="rect">
+            <a:avLst/>
+          </a:prstGeom>
+          <a:noFill/>
+          <a:ln/>
+        </p:spPr>
+        <p:txBody>
+          <a:bodyPr wrap="square" lIns="0" tIns="0" rIns="0" bIns="0" rtlCol="0" anchor="ctr"/>
+          <a:lstStyle/>
+          <a:p>
+            <a:pPr algn="ctr" indent="0" marL="0">
+              <a:buNone/>
+            </a:pPr>
+            <a:r>
+              <a:rPr lang="en-US" sz="700" b="1" dirty="0">
+                <a:solidFill>
+                  <a:srgbClr val="FFFFFF"/>
+                </a:solidFill>
+                <a:latin typeface="Calibri" pitchFamily="34" charset="0"/>
+                <a:ea typeface="Calibri" pitchFamily="34" charset="-122"/>
+                <a:cs typeface="Calibri" pitchFamily="34" charset="-120"/>
+              </a:rPr>
+              <a:t>-1,044</a:t>
+            </a:r>
+            <a:endParaRPr lang="en-US" sz="700" dirty="0"/>
+          </a:p>
+        </p:txBody>
+      </p:sp>
+      <p:sp>
+        <p:nvSpPr>
+          <p:cNvPr id="35" name="Shape 31"/>
+          <p:cNvSpPr/>
+          <p:nvPr/>
+        </p:nvSpPr>
+        <p:spPr>
+          <a:xfrm>
+            <a:off x="10366802" y="2249002"/>
+            <a:ext cx="234909" cy="201168"/>
+          </a:xfrm>
+          <a:prstGeom prst="roundRect">
+            <a:avLst>
+              <a:gd name="adj" fmla="val 13636"/>
+            </a:avLst>
+          </a:prstGeom>
+          <a:solidFill>
+            <a:srgbClr val="213366"/>
+          </a:solidFill>
+          <a:ln w="12700">
+            <a:solidFill>
+              <a:srgbClr val="333333"/>
+            </a:solidFill>
+            <a:prstDash val="solid"/>
+          </a:ln>
+        </p:spPr>
+      </p:sp>
+      <p:sp>
+        <p:nvSpPr>
+          <p:cNvPr id="36" name="Text 32"/>
+          <p:cNvSpPr/>
+          <p:nvPr/>
+        </p:nvSpPr>
+        <p:spPr>
+          <a:xfrm>
+            <a:off x="10366802" y="2249002"/>
+            <a:ext cx="234909" cy="201168"/>
+          </a:xfrm>
+          <a:prstGeom prst="rect">
+            <a:avLst/>
+          </a:prstGeom>
+          <a:noFill/>
+          <a:ln/>
+        </p:spPr>
+        <p:txBody>
+          <a:bodyPr wrap="square" lIns="0" tIns="0" rIns="0" bIns="0" rtlCol="0" anchor="ctr"/>
+          <a:lstStyle/>
+          <a:p>
+            <a:pPr algn="ctr" indent="0" marL="0">
+              <a:buNone/>
+            </a:pPr>
+            <a:r>
+              <a:rPr lang="en-US" sz="700" b="1" dirty="0">
+                <a:solidFill>
+                  <a:srgbClr val="FFFFFF"/>
+                </a:solidFill>
+                <a:latin typeface="Calibri" pitchFamily="34" charset="0"/>
+                <a:ea typeface="Calibri" pitchFamily="34" charset="-122"/>
+                <a:cs typeface="Calibri" pitchFamily="34" charset="-120"/>
+              </a:rPr>
+              <a:t>+1,121</a:t>
+            </a:r>
+            <a:endParaRPr lang="en-US" sz="700" dirty="0"/>
+          </a:p>
+        </p:txBody>
+      </p:sp>
+      <p:sp>
+        <p:nvSpPr>
+          <p:cNvPr id="37" name="Shape 33"/>
+          <p:cNvSpPr/>
+          <p:nvPr/>
+        </p:nvSpPr>
+        <p:spPr>
+          <a:xfrm>
+            <a:off x="10976954" y="2579150"/>
+            <a:ext cx="234909" cy="201168"/>
+          </a:xfrm>
+          <a:prstGeom prst="roundRect">
+            <a:avLst>
+              <a:gd name="adj" fmla="val 13636"/>
+            </a:avLst>
+          </a:prstGeom>
+          <a:solidFill>
+            <a:srgbClr val="213366"/>
+          </a:solidFill>
+          <a:ln w="12700">
+            <a:solidFill>
+              <a:srgbClr val="333333"/>
+            </a:solidFill>
+            <a:prstDash val="solid"/>
+          </a:ln>
+        </p:spPr>
+      </p:sp>
+      <p:sp>
+        <p:nvSpPr>
+          <p:cNvPr id="38" name="Text 34"/>
+          <p:cNvSpPr/>
+          <p:nvPr/>
+        </p:nvSpPr>
+        <p:spPr>
+          <a:xfrm>
+            <a:off x="10976954" y="2579150"/>
+            <a:ext cx="234909" cy="201168"/>
+          </a:xfrm>
+          <a:prstGeom prst="rect">
+            <a:avLst/>
+          </a:prstGeom>
+          <a:noFill/>
+          <a:ln/>
+        </p:spPr>
+        <p:txBody>
+          <a:bodyPr wrap="square" lIns="0" tIns="0" rIns="0" bIns="0" rtlCol="0" anchor="ctr"/>
+          <a:lstStyle/>
+          <a:p>
+            <a:pPr algn="ctr" indent="0" marL="0">
+              <a:buNone/>
+            </a:pPr>
+            <a:r>
+              <a:rPr lang="en-US" sz="700" b="1" dirty="0">
+                <a:solidFill>
+                  <a:srgbClr val="FFFFFF"/>
+                </a:solidFill>
+                <a:latin typeface="Calibri" pitchFamily="34" charset="0"/>
+                <a:ea typeface="Calibri" pitchFamily="34" charset="-122"/>
+                <a:cs typeface="Calibri" pitchFamily="34" charset="-120"/>
+              </a:rPr>
+              <a:t>-93</a:t>
+            </a:r>
+            <a:endParaRPr lang="en-US" sz="700" dirty="0"/>
+          </a:p>
+        </p:txBody>
+      </p:sp>
+      <p:sp>
+        <p:nvSpPr>
+          <p:cNvPr id="39" name="Shape 35"/>
+          <p:cNvSpPr/>
+          <p:nvPr/>
+        </p:nvSpPr>
+        <p:spPr>
+          <a:xfrm>
+            <a:off x="2038224" y="2408542"/>
+            <a:ext cx="234909" cy="201168"/>
+          </a:xfrm>
+          <a:prstGeom prst="roundRect">
+            <a:avLst>
+              <a:gd name="adj" fmla="val 13636"/>
+            </a:avLst>
+          </a:prstGeom>
+          <a:solidFill>
+            <a:srgbClr val="7F7F7F"/>
+          </a:solidFill>
+          <a:ln w="12700">
+            <a:solidFill>
+              <a:srgbClr val="333333"/>
+            </a:solidFill>
+            <a:prstDash val="solid"/>
+          </a:ln>
+        </p:spPr>
+      </p:sp>
+      <p:sp>
+        <p:nvSpPr>
+          <p:cNvPr id="40" name="Text 36"/>
+          <p:cNvSpPr/>
+          <p:nvPr/>
+        </p:nvSpPr>
+        <p:spPr>
+          <a:xfrm>
+            <a:off x="2038224" y="2408542"/>
+            <a:ext cx="234909" cy="201168"/>
+          </a:xfrm>
+          <a:prstGeom prst="rect">
+            <a:avLst/>
+          </a:prstGeom>
+          <a:noFill/>
+          <a:ln/>
+        </p:spPr>
+        <p:txBody>
+          <a:bodyPr wrap="square" lIns="0" tIns="0" rIns="0" bIns="0" rtlCol="0" anchor="ctr"/>
+          <a:lstStyle/>
+          <a:p>
+            <a:pPr algn="ctr" indent="0" marL="0">
+              <a:buNone/>
+            </a:pPr>
+            <a:r>
+              <a:rPr lang="en-US" sz="700" b="1" dirty="0">
+                <a:solidFill>
+                  <a:srgbClr val="FFFFFF"/>
+                </a:solidFill>
+                <a:latin typeface="Calibri" pitchFamily="34" charset="0"/>
+                <a:ea typeface="Calibri" pitchFamily="34" charset="-122"/>
+                <a:cs typeface="Calibri" pitchFamily="34" charset="-120"/>
+              </a:rPr>
+              <a:t>+263</a:t>
+            </a:r>
+            <a:endParaRPr lang="en-US" sz="700" dirty="0"/>
+          </a:p>
+        </p:txBody>
+      </p:sp>
+      <p:sp>
+        <p:nvSpPr>
+          <p:cNvPr id="41" name="Shape 37"/>
+          <p:cNvSpPr/>
+          <p:nvPr/>
+        </p:nvSpPr>
+        <p:spPr>
+          <a:xfrm>
+            <a:off x="2648376" y="2823102"/>
+            <a:ext cx="234909" cy="201168"/>
+          </a:xfrm>
+          <a:prstGeom prst="roundRect">
+            <a:avLst>
+              <a:gd name="adj" fmla="val 13636"/>
+            </a:avLst>
+          </a:prstGeom>
+          <a:solidFill>
+            <a:srgbClr val="7F7F7F"/>
+          </a:solidFill>
+          <a:ln w="12700">
+            <a:solidFill>
+              <a:srgbClr val="333333"/>
+            </a:solidFill>
+            <a:prstDash val="solid"/>
+          </a:ln>
+        </p:spPr>
+      </p:sp>
+      <p:sp>
+        <p:nvSpPr>
+          <p:cNvPr id="42" name="Text 38"/>
+          <p:cNvSpPr/>
+          <p:nvPr/>
+        </p:nvSpPr>
+        <p:spPr>
+          <a:xfrm>
+            <a:off x="2648376" y="2823102"/>
+            <a:ext cx="234909" cy="201168"/>
+          </a:xfrm>
+          <a:prstGeom prst="rect">
+            <a:avLst/>
+          </a:prstGeom>
+          <a:noFill/>
+          <a:ln/>
+        </p:spPr>
+        <p:txBody>
+          <a:bodyPr wrap="square" lIns="0" tIns="0" rIns="0" bIns="0" rtlCol="0" anchor="ctr"/>
+          <a:lstStyle/>
+          <a:p>
+            <a:pPr algn="ctr" indent="0" marL="0">
+              <a:buNone/>
+            </a:pPr>
+            <a:r>
+              <a:rPr lang="en-US" sz="700" b="1" dirty="0">
+                <a:solidFill>
+                  <a:srgbClr val="FFFFFF"/>
+                </a:solidFill>
+                <a:latin typeface="Calibri" pitchFamily="34" charset="0"/>
+                <a:ea typeface="Calibri" pitchFamily="34" charset="-122"/>
+                <a:cs typeface="Calibri" pitchFamily="34" charset="-120"/>
+              </a:rPr>
+              <a:t>-178</a:t>
+            </a:r>
+            <a:endParaRPr lang="en-US" sz="700" dirty="0"/>
+          </a:p>
+        </p:txBody>
+      </p:sp>
+      <p:sp>
+        <p:nvSpPr>
+          <p:cNvPr id="43" name="Shape 39"/>
+          <p:cNvSpPr/>
+          <p:nvPr/>
+        </p:nvSpPr>
+        <p:spPr>
+          <a:xfrm>
+            <a:off x="3258528" y="3342857"/>
+            <a:ext cx="234909" cy="201168"/>
+          </a:xfrm>
+          <a:prstGeom prst="roundRect">
+            <a:avLst>
+              <a:gd name="adj" fmla="val 13636"/>
+            </a:avLst>
+          </a:prstGeom>
+          <a:solidFill>
+            <a:srgbClr val="7F7F7F"/>
+          </a:solidFill>
+          <a:ln w="12700">
+            <a:solidFill>
+              <a:srgbClr val="333333"/>
+            </a:solidFill>
+            <a:prstDash val="solid"/>
+          </a:ln>
+        </p:spPr>
+      </p:sp>
+      <p:sp>
+        <p:nvSpPr>
+          <p:cNvPr id="44" name="Text 40"/>
+          <p:cNvSpPr/>
+          <p:nvPr/>
+        </p:nvSpPr>
+        <p:spPr>
+          <a:xfrm>
+            <a:off x="3258528" y="3342857"/>
+            <a:ext cx="234909" cy="201168"/>
+          </a:xfrm>
+          <a:prstGeom prst="rect">
+            <a:avLst/>
+          </a:prstGeom>
+          <a:noFill/>
+          <a:ln/>
+        </p:spPr>
+        <p:txBody>
+          <a:bodyPr wrap="square" lIns="0" tIns="0" rIns="0" bIns="0" rtlCol="0" anchor="ctr"/>
+          <a:lstStyle/>
+          <a:p>
+            <a:pPr algn="ctr" indent="0" marL="0">
+              <a:buNone/>
+            </a:pPr>
+            <a:r>
+              <a:rPr lang="en-US" sz="700" b="1" dirty="0">
+                <a:solidFill>
+                  <a:srgbClr val="FFFFFF"/>
+                </a:solidFill>
+                <a:latin typeface="Calibri" pitchFamily="34" charset="0"/>
+                <a:ea typeface="Calibri" pitchFamily="34" charset="-122"/>
+                <a:cs typeface="Calibri" pitchFamily="34" charset="-120"/>
+              </a:rPr>
+              <a:t>-523</a:t>
+            </a:r>
+            <a:endParaRPr lang="en-US" sz="700" dirty="0"/>
+          </a:p>
+        </p:txBody>
+      </p:sp>
+      <p:sp>
+        <p:nvSpPr>
+          <p:cNvPr id="45" name="Shape 41"/>
+          <p:cNvSpPr/>
+          <p:nvPr/>
+        </p:nvSpPr>
+        <p:spPr>
+          <a:xfrm>
+            <a:off x="3868680" y="2587086"/>
+            <a:ext cx="234909" cy="201168"/>
+          </a:xfrm>
+          <a:prstGeom prst="roundRect">
+            <a:avLst>
+              <a:gd name="adj" fmla="val 13636"/>
+            </a:avLst>
+          </a:prstGeom>
+          <a:solidFill>
+            <a:srgbClr val="7F7F7F"/>
+          </a:solidFill>
+          <a:ln w="12700">
+            <a:solidFill>
+              <a:srgbClr val="333333"/>
+            </a:solidFill>
+            <a:prstDash val="solid"/>
+          </a:ln>
+        </p:spPr>
+      </p:sp>
+      <p:sp>
+        <p:nvSpPr>
+          <p:cNvPr id="46" name="Text 42"/>
+          <p:cNvSpPr/>
+          <p:nvPr/>
+        </p:nvSpPr>
+        <p:spPr>
+          <a:xfrm>
+            <a:off x="3868680" y="2587086"/>
+            <a:ext cx="234909" cy="201168"/>
+          </a:xfrm>
+          <a:prstGeom prst="rect">
+            <a:avLst/>
+          </a:prstGeom>
+          <a:noFill/>
+          <a:ln/>
+        </p:spPr>
+        <p:txBody>
+          <a:bodyPr wrap="square" lIns="0" tIns="0" rIns="0" bIns="0" rtlCol="0" anchor="ctr"/>
+          <a:lstStyle/>
+          <a:p>
+            <a:pPr algn="ctr" indent="0" marL="0">
+              <a:buNone/>
+            </a:pPr>
+            <a:r>
+              <a:rPr lang="en-US" sz="700" b="1" dirty="0">
+                <a:solidFill>
+                  <a:srgbClr val="FFFFFF"/>
+                </a:solidFill>
+                <a:latin typeface="Calibri" pitchFamily="34" charset="0"/>
+                <a:ea typeface="Calibri" pitchFamily="34" charset="-122"/>
+                <a:cs typeface="Calibri" pitchFamily="34" charset="-120"/>
+              </a:rPr>
+              <a:t>+522</a:t>
+            </a:r>
+            <a:endParaRPr lang="en-US" sz="700" dirty="0"/>
+          </a:p>
+        </p:txBody>
+      </p:sp>
+      <p:sp>
+        <p:nvSpPr>
+          <p:cNvPr id="47" name="Shape 43"/>
+          <p:cNvSpPr/>
+          <p:nvPr/>
+        </p:nvSpPr>
+        <p:spPr>
+          <a:xfrm>
+            <a:off x="4478833" y="2438884"/>
+            <a:ext cx="234909" cy="201168"/>
+          </a:xfrm>
+          <a:prstGeom prst="roundRect">
+            <a:avLst>
+              <a:gd name="adj" fmla="val 13636"/>
+            </a:avLst>
+          </a:prstGeom>
+          <a:solidFill>
+            <a:srgbClr val="7F7F7F"/>
+          </a:solidFill>
+          <a:ln w="12700">
+            <a:solidFill>
+              <a:srgbClr val="333333"/>
+            </a:solidFill>
+            <a:prstDash val="solid"/>
+          </a:ln>
+        </p:spPr>
+      </p:sp>
+      <p:sp>
+        <p:nvSpPr>
+          <p:cNvPr id="48" name="Text 44"/>
+          <p:cNvSpPr/>
+          <p:nvPr/>
+        </p:nvSpPr>
+        <p:spPr>
+          <a:xfrm>
+            <a:off x="4478833" y="2438884"/>
+            <a:ext cx="234909" cy="201168"/>
+          </a:xfrm>
+          <a:prstGeom prst="rect">
+            <a:avLst/>
+          </a:prstGeom>
+          <a:noFill/>
+          <a:ln/>
+        </p:spPr>
+        <p:txBody>
+          <a:bodyPr wrap="square" lIns="0" tIns="0" rIns="0" bIns="0" rtlCol="0" anchor="ctr"/>
+          <a:lstStyle/>
+          <a:p>
+            <a:pPr algn="ctr" indent="0" marL="0">
+              <a:buNone/>
+            </a:pPr>
+            <a:r>
+              <a:rPr lang="en-US" sz="700" b="1" dirty="0">
+                <a:solidFill>
+                  <a:srgbClr val="FFFFFF"/>
+                </a:solidFill>
+                <a:latin typeface="Calibri" pitchFamily="34" charset="0"/>
+                <a:ea typeface="Calibri" pitchFamily="34" charset="-122"/>
+                <a:cs typeface="Calibri" pitchFamily="34" charset="-120"/>
+              </a:rPr>
+              <a:t>+149</a:t>
+            </a:r>
+            <a:endParaRPr lang="en-US" sz="700" dirty="0"/>
+          </a:p>
+        </p:txBody>
+      </p:sp>
+      <p:sp>
+        <p:nvSpPr>
+          <p:cNvPr id="49" name="Shape 45"/>
+          <p:cNvSpPr/>
+          <p:nvPr/>
+        </p:nvSpPr>
+        <p:spPr>
+          <a:xfrm>
+            <a:off x="5088985" y="2213994"/>
+            <a:ext cx="234909" cy="201168"/>
+          </a:xfrm>
+          <a:prstGeom prst="roundRect">
+            <a:avLst>
+              <a:gd name="adj" fmla="val 13636"/>
+            </a:avLst>
+          </a:prstGeom>
+          <a:solidFill>
+            <a:srgbClr val="7F7F7F"/>
+          </a:solidFill>
+          <a:ln w="12700">
+            <a:solidFill>
+              <a:srgbClr val="333333"/>
+            </a:solidFill>
+            <a:prstDash val="solid"/>
+          </a:ln>
+        </p:spPr>
+      </p:sp>
+      <p:sp>
+        <p:nvSpPr>
+          <p:cNvPr id="50" name="Text 46"/>
+          <p:cNvSpPr/>
+          <p:nvPr/>
+        </p:nvSpPr>
+        <p:spPr>
+          <a:xfrm>
+            <a:off x="5088985" y="2213994"/>
+            <a:ext cx="234909" cy="201168"/>
+          </a:xfrm>
+          <a:prstGeom prst="rect">
+            <a:avLst/>
+          </a:prstGeom>
+          <a:noFill/>
+          <a:ln/>
+        </p:spPr>
+        <p:txBody>
+          <a:bodyPr wrap="square" lIns="0" tIns="0" rIns="0" bIns="0" rtlCol="0" anchor="ctr"/>
+          <a:lstStyle/>
+          <a:p>
+            <a:pPr algn="ctr" indent="0" marL="0">
+              <a:buNone/>
+            </a:pPr>
+            <a:r>
+              <a:rPr lang="en-US" sz="700" b="1" dirty="0">
+                <a:solidFill>
+                  <a:srgbClr val="FFFFFF"/>
+                </a:solidFill>
+                <a:latin typeface="Calibri" pitchFamily="34" charset="0"/>
+                <a:ea typeface="Calibri" pitchFamily="34" charset="-122"/>
+                <a:cs typeface="Calibri" pitchFamily="34" charset="-120"/>
+              </a:rPr>
+              <a:t>+227</a:t>
+            </a:r>
+            <a:endParaRPr lang="en-US" sz="700" dirty="0"/>
+          </a:p>
+        </p:txBody>
+      </p:sp>
+      <p:sp>
+        <p:nvSpPr>
+          <p:cNvPr id="51" name="Shape 47"/>
+          <p:cNvSpPr/>
+          <p:nvPr/>
+        </p:nvSpPr>
+        <p:spPr>
+          <a:xfrm>
+            <a:off x="5699137" y="3906128"/>
+            <a:ext cx="234909" cy="201168"/>
+          </a:xfrm>
+          <a:prstGeom prst="roundRect">
+            <a:avLst>
+              <a:gd name="adj" fmla="val 13636"/>
+            </a:avLst>
+          </a:prstGeom>
+          <a:solidFill>
+            <a:srgbClr val="7F7F7F"/>
+          </a:solidFill>
+          <a:ln w="12700">
+            <a:solidFill>
+              <a:srgbClr val="333333"/>
+            </a:solidFill>
+            <a:prstDash val="solid"/>
+          </a:ln>
+        </p:spPr>
+      </p:sp>
+      <p:sp>
+        <p:nvSpPr>
+          <p:cNvPr id="52" name="Text 48"/>
+          <p:cNvSpPr/>
+          <p:nvPr/>
+        </p:nvSpPr>
+        <p:spPr>
+          <a:xfrm>
+            <a:off x="5699137" y="3906128"/>
+            <a:ext cx="234909" cy="201168"/>
+          </a:xfrm>
+          <a:prstGeom prst="rect">
+            <a:avLst/>
+          </a:prstGeom>
+          <a:noFill/>
+          <a:ln/>
+        </p:spPr>
+        <p:txBody>
+          <a:bodyPr wrap="square" lIns="0" tIns="0" rIns="0" bIns="0" rtlCol="0" anchor="ctr"/>
+          <a:lstStyle/>
+          <a:p>
+            <a:pPr algn="ctr" indent="0" marL="0">
+              <a:buNone/>
+            </a:pPr>
+            <a:r>
+              <a:rPr lang="en-US" sz="700" b="1" dirty="0">
+                <a:solidFill>
+                  <a:srgbClr val="FFFFFF"/>
+                </a:solidFill>
+                <a:latin typeface="Calibri" pitchFamily="34" charset="0"/>
+                <a:ea typeface="Calibri" pitchFamily="34" charset="-122"/>
+                <a:cs typeface="Calibri" pitchFamily="34" charset="-120"/>
+              </a:rPr>
+              <a:t>-1,465</a:t>
+            </a:r>
+            <a:endParaRPr lang="en-US" sz="700" dirty="0"/>
+          </a:p>
+        </p:txBody>
+      </p:sp>
+      <p:sp>
+        <p:nvSpPr>
+          <p:cNvPr id="53" name="Shape 49"/>
+          <p:cNvSpPr/>
+          <p:nvPr/>
+        </p:nvSpPr>
+        <p:spPr>
+          <a:xfrm>
+            <a:off x="6309289" y="3360880"/>
+            <a:ext cx="234909" cy="201168"/>
+          </a:xfrm>
+          <a:prstGeom prst="roundRect">
+            <a:avLst>
+              <a:gd name="adj" fmla="val 13636"/>
+            </a:avLst>
+          </a:prstGeom>
+          <a:solidFill>
+            <a:srgbClr val="7F7F7F"/>
+          </a:solidFill>
+          <a:ln w="12700">
+            <a:solidFill>
+              <a:srgbClr val="333333"/>
+            </a:solidFill>
+            <a:prstDash val="solid"/>
+          </a:ln>
+        </p:spPr>
+      </p:sp>
+      <p:sp>
+        <p:nvSpPr>
+          <p:cNvPr id="54" name="Text 50"/>
+          <p:cNvSpPr/>
+          <p:nvPr/>
+        </p:nvSpPr>
+        <p:spPr>
+          <a:xfrm>
+            <a:off x="6309289" y="3360880"/>
+            <a:ext cx="234909" cy="201168"/>
+          </a:xfrm>
+          <a:prstGeom prst="rect">
+            <a:avLst/>
+          </a:prstGeom>
+          <a:noFill/>
+          <a:ln/>
+        </p:spPr>
+        <p:txBody>
+          <a:bodyPr wrap="square" lIns="0" tIns="0" rIns="0" bIns="0" rtlCol="0" anchor="ctr"/>
+          <a:lstStyle/>
+          <a:p>
+            <a:pPr algn="ctr" indent="0" marL="0">
+              <a:buNone/>
+            </a:pPr>
+            <a:r>
+              <a:rPr lang="en-US" sz="700" b="1" dirty="0">
+                <a:solidFill>
+                  <a:srgbClr val="FFFFFF"/>
+                </a:solidFill>
+                <a:latin typeface="Calibri" pitchFamily="34" charset="0"/>
+                <a:ea typeface="Calibri" pitchFamily="34" charset="-122"/>
+                <a:cs typeface="Calibri" pitchFamily="34" charset="-120"/>
+              </a:rPr>
+              <a:t>+310</a:t>
+            </a:r>
+            <a:endParaRPr lang="en-US" sz="700" dirty="0"/>
+          </a:p>
+        </p:txBody>
+      </p:sp>
+      <p:sp>
+        <p:nvSpPr>
+          <p:cNvPr id="55" name="Shape 51"/>
+          <p:cNvSpPr/>
+          <p:nvPr/>
+        </p:nvSpPr>
+        <p:spPr>
+          <a:xfrm>
+            <a:off x="6919442" y="4061975"/>
+            <a:ext cx="234909" cy="201168"/>
+          </a:xfrm>
+          <a:prstGeom prst="roundRect">
+            <a:avLst>
+              <a:gd name="adj" fmla="val 13636"/>
+            </a:avLst>
+          </a:prstGeom>
+          <a:solidFill>
+            <a:srgbClr val="7F7F7F"/>
+          </a:solidFill>
+          <a:ln w="12700">
+            <a:solidFill>
+              <a:srgbClr val="333333"/>
+            </a:solidFill>
+            <a:prstDash val="solid"/>
+          </a:ln>
+        </p:spPr>
+      </p:sp>
+      <p:sp>
+        <p:nvSpPr>
+          <p:cNvPr id="56" name="Text 52"/>
+          <p:cNvSpPr/>
+          <p:nvPr/>
+        </p:nvSpPr>
+        <p:spPr>
+          <a:xfrm>
+            <a:off x="6919442" y="4061975"/>
+            <a:ext cx="234909" cy="201168"/>
+          </a:xfrm>
+          <a:prstGeom prst="rect">
+            <a:avLst/>
+          </a:prstGeom>
+          <a:noFill/>
+          <a:ln/>
+        </p:spPr>
+        <p:txBody>
+          <a:bodyPr wrap="square" lIns="0" tIns="0" rIns="0" bIns="0" rtlCol="0" anchor="ctr"/>
+          <a:lstStyle/>
+          <a:p>
+            <a:pPr algn="ctr" indent="0" marL="0">
+              <a:buNone/>
+            </a:pPr>
+            <a:r>
+              <a:rPr lang="en-US" sz="700" b="1" dirty="0">
+                <a:solidFill>
+                  <a:srgbClr val="FFFFFF"/>
+                </a:solidFill>
+                <a:latin typeface="Calibri" pitchFamily="34" charset="0"/>
+                <a:ea typeface="Calibri" pitchFamily="34" charset="-122"/>
+                <a:cs typeface="Calibri" pitchFamily="34" charset="-120"/>
+              </a:rPr>
+              <a:t>-467</a:t>
+            </a:r>
+            <a:endParaRPr lang="en-US" sz="700" dirty="0"/>
+          </a:p>
+        </p:txBody>
+      </p:sp>
+      <p:sp>
+        <p:nvSpPr>
+          <p:cNvPr id="57" name="Shape 53"/>
+          <p:cNvSpPr/>
+          <p:nvPr/>
+        </p:nvSpPr>
+        <p:spPr>
+          <a:xfrm>
+            <a:off x="7529594" y="3618295"/>
+            <a:ext cx="234909" cy="201168"/>
+          </a:xfrm>
+          <a:prstGeom prst="roundRect">
+            <a:avLst>
+              <a:gd name="adj" fmla="val 13636"/>
+            </a:avLst>
+          </a:prstGeom>
+          <a:solidFill>
+            <a:srgbClr val="7F7F7F"/>
+          </a:solidFill>
+          <a:ln w="12700">
+            <a:solidFill>
+              <a:srgbClr val="333333"/>
+            </a:solidFill>
+            <a:prstDash val="solid"/>
+          </a:ln>
+        </p:spPr>
+      </p:sp>
+      <p:sp>
+        <p:nvSpPr>
+          <p:cNvPr id="58" name="Text 54"/>
+          <p:cNvSpPr/>
+          <p:nvPr/>
+        </p:nvSpPr>
+        <p:spPr>
+          <a:xfrm>
+            <a:off x="7529594" y="3618295"/>
+            <a:ext cx="234909" cy="201168"/>
+          </a:xfrm>
+          <a:prstGeom prst="rect">
+            <a:avLst/>
+          </a:prstGeom>
+          <a:noFill/>
+          <a:ln/>
+        </p:spPr>
+        <p:txBody>
+          <a:bodyPr wrap="square" lIns="0" tIns="0" rIns="0" bIns="0" rtlCol="0" anchor="ctr"/>
+          <a:lstStyle/>
+          <a:p>
+            <a:pPr algn="ctr" indent="0" marL="0">
+              <a:buNone/>
+            </a:pPr>
+            <a:r>
+              <a:rPr lang="en-US" sz="700" b="1" dirty="0">
+                <a:solidFill>
+                  <a:srgbClr val="FFFFFF"/>
+                </a:solidFill>
+                <a:latin typeface="Calibri" pitchFamily="34" charset="0"/>
+                <a:ea typeface="Calibri" pitchFamily="34" charset="-122"/>
+                <a:cs typeface="Calibri" pitchFamily="34" charset="-120"/>
+              </a:rPr>
+              <a:t>+207</a:t>
+            </a:r>
+            <a:endParaRPr lang="en-US" sz="700" dirty="0"/>
+          </a:p>
+        </p:txBody>
+      </p:sp>
+      <p:sp>
+        <p:nvSpPr>
+          <p:cNvPr id="59" name="Shape 55"/>
+          <p:cNvSpPr/>
+          <p:nvPr/>
+        </p:nvSpPr>
+        <p:spPr>
+          <a:xfrm>
+            <a:off x="8139746" y="3363868"/>
+            <a:ext cx="234909" cy="201168"/>
+          </a:xfrm>
+          <a:prstGeom prst="roundRect">
+            <a:avLst>
+              <a:gd name="adj" fmla="val 13636"/>
+            </a:avLst>
+          </a:prstGeom>
+          <a:solidFill>
+            <a:srgbClr val="7F7F7F"/>
+          </a:solidFill>
+          <a:ln w="12700">
+            <a:solidFill>
+              <a:srgbClr val="333333"/>
+            </a:solidFill>
+            <a:prstDash val="solid"/>
+          </a:ln>
+        </p:spPr>
+      </p:sp>
+      <p:sp>
+        <p:nvSpPr>
+          <p:cNvPr id="60" name="Text 56"/>
+          <p:cNvSpPr/>
+          <p:nvPr/>
+        </p:nvSpPr>
+        <p:spPr>
+          <a:xfrm>
+            <a:off x="8139746" y="3363868"/>
+            <a:ext cx="234909" cy="201168"/>
+          </a:xfrm>
+          <a:prstGeom prst="rect">
+            <a:avLst/>
+          </a:prstGeom>
+          <a:noFill/>
+          <a:ln/>
+        </p:spPr>
+        <p:txBody>
+          <a:bodyPr wrap="square" lIns="0" tIns="0" rIns="0" bIns="0" rtlCol="0" anchor="ctr"/>
+          <a:lstStyle/>
+          <a:p>
+            <a:pPr algn="ctr" indent="0" marL="0">
+              <a:buNone/>
+            </a:pPr>
+            <a:r>
+              <a:rPr lang="en-US" sz="700" b="1" dirty="0">
+                <a:solidFill>
+                  <a:srgbClr val="FFFFFF"/>
+                </a:solidFill>
+                <a:latin typeface="Calibri" pitchFamily="34" charset="0"/>
+                <a:ea typeface="Calibri" pitchFamily="34" charset="-122"/>
+                <a:cs typeface="Calibri" pitchFamily="34" charset="-120"/>
+              </a:rPr>
+              <a:t>+256</a:t>
+            </a:r>
+            <a:endParaRPr lang="en-US" sz="700" dirty="0"/>
+          </a:p>
+        </p:txBody>
+      </p:sp>
+      <p:sp>
+        <p:nvSpPr>
+          <p:cNvPr id="61" name="Shape 57"/>
+          <p:cNvSpPr/>
+          <p:nvPr/>
+        </p:nvSpPr>
+        <p:spPr>
+          <a:xfrm>
+            <a:off x="8749898" y="2825011"/>
+            <a:ext cx="234909" cy="201168"/>
+          </a:xfrm>
+          <a:prstGeom prst="roundRect">
+            <a:avLst>
+              <a:gd name="adj" fmla="val 13636"/>
+            </a:avLst>
+          </a:prstGeom>
+          <a:solidFill>
+            <a:srgbClr val="7F7F7F"/>
+          </a:solidFill>
+          <a:ln w="12700">
+            <a:solidFill>
+              <a:srgbClr val="333333"/>
+            </a:solidFill>
+            <a:prstDash val="solid"/>
+          </a:ln>
+        </p:spPr>
+      </p:sp>
+      <p:sp>
+        <p:nvSpPr>
+          <p:cNvPr id="62" name="Text 58"/>
+          <p:cNvSpPr/>
+          <p:nvPr/>
+        </p:nvSpPr>
+        <p:spPr>
+          <a:xfrm>
+            <a:off x="8749898" y="2825011"/>
+            <a:ext cx="234909" cy="201168"/>
+          </a:xfrm>
+          <a:prstGeom prst="rect">
+            <a:avLst/>
+          </a:prstGeom>
+          <a:noFill/>
+          <a:ln/>
+        </p:spPr>
+        <p:txBody>
+          <a:bodyPr wrap="square" lIns="0" tIns="0" rIns="0" bIns="0" rtlCol="0" anchor="ctr"/>
+          <a:lstStyle/>
+          <a:p>
+            <a:pPr algn="ctr" indent="0" marL="0">
+              <a:buNone/>
+            </a:pPr>
+            <a:r>
+              <a:rPr lang="en-US" sz="700" b="1" dirty="0">
+                <a:solidFill>
+                  <a:srgbClr val="FFFFFF"/>
+                </a:solidFill>
+                <a:latin typeface="Calibri" pitchFamily="34" charset="0"/>
+                <a:ea typeface="Calibri" pitchFamily="34" charset="-122"/>
+                <a:cs typeface="Calibri" pitchFamily="34" charset="-120"/>
+              </a:rPr>
+              <a:t>+543</a:t>
+            </a:r>
+            <a:endParaRPr lang="en-US" sz="700" dirty="0"/>
+          </a:p>
+        </p:txBody>
+      </p:sp>
+      <p:sp>
+        <p:nvSpPr>
+          <p:cNvPr id="63" name="Shape 59"/>
+          <p:cNvSpPr/>
+          <p:nvPr/>
+        </p:nvSpPr>
+        <p:spPr>
+          <a:xfrm>
+            <a:off x="9360051" y="2018602"/>
+            <a:ext cx="234909" cy="201168"/>
+          </a:xfrm>
+          <a:prstGeom prst="roundRect">
+            <a:avLst>
+              <a:gd name="adj" fmla="val 13636"/>
+            </a:avLst>
+          </a:prstGeom>
+          <a:solidFill>
+            <a:srgbClr val="7F7F7F"/>
+          </a:solidFill>
+          <a:ln w="12700">
+            <a:solidFill>
+              <a:srgbClr val="333333"/>
+            </a:solidFill>
+            <a:prstDash val="solid"/>
+          </a:ln>
+        </p:spPr>
+      </p:sp>
+      <p:sp>
+        <p:nvSpPr>
+          <p:cNvPr id="64" name="Text 60"/>
+          <p:cNvSpPr/>
+          <p:nvPr/>
+        </p:nvSpPr>
+        <p:spPr>
+          <a:xfrm>
+            <a:off x="9360051" y="2018602"/>
+            <a:ext cx="234909" cy="201168"/>
+          </a:xfrm>
+          <a:prstGeom prst="rect">
+            <a:avLst/>
+          </a:prstGeom>
+          <a:noFill/>
+          <a:ln/>
+        </p:spPr>
+        <p:txBody>
+          <a:bodyPr wrap="square" lIns="0" tIns="0" rIns="0" bIns="0" rtlCol="0" anchor="ctr"/>
+          <a:lstStyle/>
+          <a:p>
+            <a:pPr algn="ctr" indent="0" marL="0">
+              <a:buNone/>
+            </a:pPr>
+            <a:r>
+              <a:rPr lang="en-US" sz="700" b="1" dirty="0">
+                <a:solidFill>
+                  <a:srgbClr val="FFFFFF"/>
+                </a:solidFill>
+                <a:latin typeface="Calibri" pitchFamily="34" charset="0"/>
+                <a:ea typeface="Calibri" pitchFamily="34" charset="-122"/>
+                <a:cs typeface="Calibri" pitchFamily="34" charset="-120"/>
+              </a:rPr>
+              <a:t>+812</a:t>
+            </a:r>
+            <a:endParaRPr lang="en-US" sz="700" dirty="0"/>
+          </a:p>
+        </p:txBody>
+      </p:sp>
+      <p:sp>
+        <p:nvSpPr>
+          <p:cNvPr id="65" name="Shape 61"/>
+          <p:cNvSpPr/>
+          <p:nvPr/>
+        </p:nvSpPr>
+        <p:spPr>
+          <a:xfrm>
+            <a:off x="9970203" y="3097723"/>
+            <a:ext cx="234909" cy="201168"/>
+          </a:xfrm>
+          <a:prstGeom prst="roundRect">
+            <a:avLst>
+              <a:gd name="adj" fmla="val 13636"/>
+            </a:avLst>
+          </a:prstGeom>
+          <a:solidFill>
+            <a:srgbClr val="7F7F7F"/>
+          </a:solidFill>
+          <a:ln w="12700">
+            <a:solidFill>
+              <a:srgbClr val="333333"/>
+            </a:solidFill>
+            <a:prstDash val="solid"/>
+          </a:ln>
+        </p:spPr>
+      </p:sp>
+      <p:sp>
+        <p:nvSpPr>
+          <p:cNvPr id="66" name="Text 62"/>
+          <p:cNvSpPr/>
+          <p:nvPr/>
+        </p:nvSpPr>
+        <p:spPr>
+          <a:xfrm>
+            <a:off x="9970203" y="3097723"/>
+            <a:ext cx="234909" cy="201168"/>
+          </a:xfrm>
+          <a:prstGeom prst="rect">
+            <a:avLst/>
+          </a:prstGeom>
+          <a:noFill/>
+          <a:ln/>
+        </p:spPr>
+        <p:txBody>
+          <a:bodyPr wrap="square" lIns="0" tIns="0" rIns="0" bIns="0" rtlCol="0" anchor="ctr"/>
+          <a:lstStyle/>
+          <a:p>
+            <a:pPr algn="ctr" indent="0" marL="0">
+              <a:buNone/>
+            </a:pPr>
+            <a:r>
+              <a:rPr lang="en-US" sz="700" b="1" dirty="0">
+                <a:solidFill>
+                  <a:srgbClr val="FFFFFF"/>
+                </a:solidFill>
+                <a:latin typeface="Calibri" pitchFamily="34" charset="0"/>
+                <a:ea typeface="Calibri" pitchFamily="34" charset="-122"/>
+                <a:cs typeface="Calibri" pitchFamily="34" charset="-120"/>
+              </a:rPr>
+              <a:t>-847</a:t>
+            </a:r>
+            <a:endParaRPr lang="en-US" sz="700" dirty="0"/>
+          </a:p>
+        </p:txBody>
+      </p:sp>
+      <p:sp>
+        <p:nvSpPr>
+          <p:cNvPr id="67" name="Shape 63"/>
+          <p:cNvSpPr/>
+          <p:nvPr/>
+        </p:nvSpPr>
+        <p:spPr>
+          <a:xfrm>
+            <a:off x="10580355" y="2583839"/>
+            <a:ext cx="234909" cy="201168"/>
+          </a:xfrm>
+          <a:prstGeom prst="roundRect">
+            <a:avLst>
+              <a:gd name="adj" fmla="val 13636"/>
+            </a:avLst>
+          </a:prstGeom>
+          <a:solidFill>
+            <a:srgbClr val="7F7F7F"/>
+          </a:solidFill>
+          <a:ln w="12700">
+            <a:solidFill>
+              <a:srgbClr val="333333"/>
+            </a:solidFill>
+            <a:prstDash val="solid"/>
+          </a:ln>
+        </p:spPr>
+      </p:sp>
+      <p:sp>
+        <p:nvSpPr>
+          <p:cNvPr id="68" name="Text 64"/>
+          <p:cNvSpPr/>
+          <p:nvPr/>
+        </p:nvSpPr>
+        <p:spPr>
+          <a:xfrm>
+            <a:off x="10580355" y="2583839"/>
+            <a:ext cx="234909" cy="201168"/>
+          </a:xfrm>
+          <a:prstGeom prst="rect">
+            <a:avLst/>
+          </a:prstGeom>
+          <a:noFill/>
+          <a:ln/>
+        </p:spPr>
+        <p:txBody>
+          <a:bodyPr wrap="square" lIns="0" tIns="0" rIns="0" bIns="0" rtlCol="0" anchor="ctr"/>
+          <a:lstStyle/>
+          <a:p>
+            <a:pPr algn="ctr" indent="0" marL="0">
+              <a:buNone/>
+            </a:pPr>
+            <a:r>
+              <a:rPr lang="en-US" sz="700" b="1" dirty="0">
+                <a:solidFill>
+                  <a:srgbClr val="FFFFFF"/>
+                </a:solidFill>
+                <a:latin typeface="Calibri" pitchFamily="34" charset="0"/>
+                <a:ea typeface="Calibri" pitchFamily="34" charset="-122"/>
+                <a:cs typeface="Calibri" pitchFamily="34" charset="-120"/>
+              </a:rPr>
+              <a:t>+278</a:t>
+            </a:r>
+            <a:endParaRPr lang="en-US" sz="700" dirty="0"/>
+          </a:p>
+        </p:txBody>
+      </p:sp>
+      <p:sp>
+        <p:nvSpPr>
+          <p:cNvPr id="69" name="Shape 65"/>
+          <p:cNvSpPr/>
+          <p:nvPr/>
+        </p:nvSpPr>
+        <p:spPr>
+          <a:xfrm>
+            <a:off x="11190507" y="2900783"/>
+            <a:ext cx="234909" cy="201168"/>
+          </a:xfrm>
+          <a:prstGeom prst="roundRect">
+            <a:avLst>
+              <a:gd name="adj" fmla="val 13636"/>
+            </a:avLst>
+          </a:prstGeom>
+          <a:solidFill>
+            <a:srgbClr val="7F7F7F"/>
+          </a:solidFill>
+          <a:ln w="12700">
+            <a:solidFill>
+              <a:srgbClr val="333333"/>
+            </a:solidFill>
+            <a:prstDash val="solid"/>
+          </a:ln>
+        </p:spPr>
+      </p:sp>
+      <p:sp>
+        <p:nvSpPr>
+          <p:cNvPr id="70" name="Text 66"/>
+          <p:cNvSpPr/>
+          <p:nvPr/>
+        </p:nvSpPr>
+        <p:spPr>
+          <a:xfrm>
+            <a:off x="11190507" y="2900783"/>
+            <a:ext cx="234909" cy="201168"/>
+          </a:xfrm>
+          <a:prstGeom prst="rect">
+            <a:avLst/>
+          </a:prstGeom>
+          <a:noFill/>
+          <a:ln/>
+        </p:spPr>
+        <p:txBody>
+          <a:bodyPr wrap="square" lIns="0" tIns="0" rIns="0" bIns="0" rtlCol="0" anchor="ctr"/>
+          <a:lstStyle/>
+          <a:p>
+            <a:pPr algn="ctr" indent="0" marL="0">
+              <a:buNone/>
+            </a:pPr>
+            <a:r>
+              <a:rPr lang="en-US" sz="700" b="1" dirty="0">
+                <a:solidFill>
+                  <a:srgbClr val="FFFFFF"/>
+                </a:solidFill>
+                <a:latin typeface="Calibri" pitchFamily="34" charset="0"/>
+                <a:ea typeface="Calibri" pitchFamily="34" charset="-122"/>
+                <a:cs typeface="Calibri" pitchFamily="34" charset="-120"/>
+              </a:rPr>
+              <a:t>-80</a:t>
+            </a:r>
+            <a:endParaRPr lang="en-US" sz="700" dirty="0"/>
+          </a:p>
+        </p:txBody>
+      </p:sp>
+      <p:sp>
+        <p:nvSpPr>
+          <p:cNvPr id="71" name="Shape 67"/>
+          <p:cNvSpPr/>
+          <p:nvPr/>
+        </p:nvSpPr>
+        <p:spPr>
+          <a:xfrm>
+            <a:off x="457200" y="5166360"/>
+            <a:ext cx="11274552" cy="274320"/>
+          </a:xfrm>
+          <a:prstGeom prst="rect">
+            <a:avLst/>
+          </a:prstGeom>
+          <a:solidFill>
+            <a:srgbClr val="F2F2F2"/>
+          </a:solidFill>
+          <a:ln w="6350">
+            <a:solidFill>
+              <a:srgbClr val="CCCCCC"/>
+            </a:solidFill>
+            <a:prstDash val="solid"/>
+          </a:ln>
+        </p:spPr>
+      </p:sp>
+      <p:sp>
+        <p:nvSpPr>
+          <p:cNvPr id="72" name="Text 68"/>
+          <p:cNvSpPr/>
+          <p:nvPr/>
+        </p:nvSpPr>
+        <p:spPr>
+          <a:xfrm>
+            <a:off x="594360" y="5166360"/>
+            <a:ext cx="11000232" cy="274320"/>
+          </a:xfrm>
+          <a:prstGeom prst="rect">
+            <a:avLst/>
+          </a:prstGeom>
+          <a:noFill/>
+          <a:ln/>
+        </p:spPr>
+        <p:txBody>
+          <a:bodyPr wrap="square" lIns="0" tIns="0" rIns="0" bIns="0" rtlCol="0" anchor="ctr"/>
+          <a:lstStyle/>
+          <a:p>
+            <a:pPr algn="l" indent="0" marL="0">
+              <a:buNone/>
+            </a:pPr>
+            <a:r>
+              <a:rPr lang="en-US" sz="1100" b="1" dirty="0">
+                <a:solidFill>
+                  <a:srgbClr val="213366"/>
+                </a:solidFill>
+                <a:latin typeface="Calibri" pitchFamily="34" charset="0"/>
+                <a:ea typeface="Calibri" pitchFamily="34" charset="-122"/>
+                <a:cs typeface="Calibri" pitchFamily="34" charset="-120"/>
+              </a:rPr>
+              <a:t>Period avg:  Raipur 62  |  NCR -116 INR/MT</a:t>
             </a:r>
             <a:endParaRPr lang="en-US" sz="1100" dirty="0"/>
           </a:p>
@@ -5437,7 +8960,7 @@
       </p:sp>
       <p:sp>
         <p:nvSpPr>
-          <p:cNvPr id="9" name="Text 5"/>
+          <p:cNvPr id="73" name="Text 69"/>
           <p:cNvSpPr/>
           <p:nvPr/>
         </p:nvSpPr>
@@ -5476,7 +8999,7 @@
       </p:sp>
       <p:sp>
         <p:nvSpPr>
-          <p:cNvPr id="10" name="Text 6"/>
+          <p:cNvPr id="74" name="Text 70"/>
           <p:cNvSpPr/>
           <p:nvPr/>
         </p:nvSpPr>
@@ -5682,18 +9205,20 @@
         </p:nvSpPr>
         <p:spPr>
           <a:xfrm>
-            <a:off x="457200" y="5166360"/>
-            <a:ext cx="11274552" cy="274320"/>
-          </a:xfrm>
-          <a:prstGeom prst="rect">
-            <a:avLst/>
-          </a:prstGeom>
-          <a:solidFill>
-            <a:srgbClr val="F2F2F2"/>
-          </a:solidFill>
-          <a:ln w="6350">
-            <a:solidFill>
-              <a:srgbClr val="CCCCCC"/>
+            <a:off x="1824671" y="3598573"/>
+            <a:ext cx="234909" cy="201168"/>
+          </a:xfrm>
+          <a:prstGeom prst="roundRect">
+            <a:avLst>
+              <a:gd name="adj" fmla="val 13636"/>
+            </a:avLst>
+          </a:prstGeom>
+          <a:solidFill>
+            <a:srgbClr val="213366"/>
+          </a:solidFill>
+          <a:ln w="12700">
+            <a:solidFill>
+              <a:srgbClr val="333333"/>
             </a:solidFill>
             <a:prstDash val="solid"/>
           </a:ln>
@@ -5707,8 +9232,8 @@
         </p:nvSpPr>
         <p:spPr>
           <a:xfrm>
-            <a:off x="594360" y="5166360"/>
-            <a:ext cx="11000232" cy="274320"/>
+            <a:off x="1824671" y="3598573"/>
+            <a:ext cx="234909" cy="201168"/>
           </a:xfrm>
           <a:prstGeom prst="rect">
             <a:avLst/>
@@ -5720,19 +9245,2129 @@
           <a:bodyPr wrap="square" lIns="0" tIns="0" rIns="0" bIns="0" rtlCol="0" anchor="ctr"/>
           <a:lstStyle/>
           <a:p>
-            <a:pPr algn="l" indent="0" marL="0">
+            <a:pPr algn="ctr" indent="0" marL="0">
               <a:buNone/>
             </a:pPr>
             <a:r>
-              <a:rPr lang="en-US" sz="1100" b="1" dirty="0">
-                <a:solidFill>
-                  <a:srgbClr val="213366"/>
+              <a:rPr lang="en-US" sz="700" b="1" dirty="0">
+                <a:solidFill>
+                  <a:srgbClr val="FFFFFF"/>
                 </a:solidFill>
                 <a:latin typeface="Calibri" pitchFamily="34" charset="0"/>
                 <a:ea typeface="Calibri" pitchFamily="34" charset="-122"/>
                 <a:cs typeface="Calibri" pitchFamily="34" charset="-120"/>
               </a:rPr>
-              <a:t>Latest change:  Raipur +591  |  NCR +554     •     Period avg:  Raipur 959  |  NCR 1,900 INR/MT</a:t>
+              <a:t>-153</a:t>
+            </a:r>
+            <a:endParaRPr lang="en-US" sz="700" dirty="0"/>
+          </a:p>
+        </p:txBody>
+      </p:sp>
+      <p:sp>
+        <p:nvSpPr>
+          <p:cNvPr id="9" name="Shape 5"/>
+          <p:cNvSpPr/>
+          <p:nvPr/>
+        </p:nvSpPr>
+        <p:spPr>
+          <a:xfrm>
+            <a:off x="2434823" y="3739943"/>
+            <a:ext cx="234909" cy="201168"/>
+          </a:xfrm>
+          <a:prstGeom prst="roundRect">
+            <a:avLst>
+              <a:gd name="adj" fmla="val 13636"/>
+            </a:avLst>
+          </a:prstGeom>
+          <a:solidFill>
+            <a:srgbClr val="213366"/>
+          </a:solidFill>
+          <a:ln w="12700">
+            <a:solidFill>
+              <a:srgbClr val="333333"/>
+            </a:solidFill>
+            <a:prstDash val="solid"/>
+          </a:ln>
+        </p:spPr>
+      </p:sp>
+      <p:sp>
+        <p:nvSpPr>
+          <p:cNvPr id="10" name="Text 6"/>
+          <p:cNvSpPr/>
+          <p:nvPr/>
+        </p:nvSpPr>
+        <p:spPr>
+          <a:xfrm>
+            <a:off x="2434823" y="3739943"/>
+            <a:ext cx="234909" cy="201168"/>
+          </a:xfrm>
+          <a:prstGeom prst="rect">
+            <a:avLst/>
+          </a:prstGeom>
+          <a:noFill/>
+          <a:ln/>
+        </p:spPr>
+        <p:txBody>
+          <a:bodyPr wrap="square" lIns="0" tIns="0" rIns="0" bIns="0" rtlCol="0" anchor="ctr"/>
+          <a:lstStyle/>
+          <a:p>
+            <a:pPr algn="ctr" indent="0" marL="0">
+              <a:buNone/>
+            </a:pPr>
+            <a:r>
+              <a:rPr lang="en-US" sz="700" b="1" dirty="0">
+                <a:solidFill>
+                  <a:srgbClr val="FFFFFF"/>
+                </a:solidFill>
+                <a:latin typeface="Calibri" pitchFamily="34" charset="0"/>
+                <a:ea typeface="Calibri" pitchFamily="34" charset="-122"/>
+                <a:cs typeface="Calibri" pitchFamily="34" charset="-120"/>
+              </a:rPr>
+              <a:t>-267</a:t>
+            </a:r>
+            <a:endParaRPr lang="en-US" sz="700" dirty="0"/>
+          </a:p>
+        </p:txBody>
+      </p:sp>
+      <p:sp>
+        <p:nvSpPr>
+          <p:cNvPr id="11" name="Shape 7"/>
+          <p:cNvSpPr/>
+          <p:nvPr/>
+        </p:nvSpPr>
+        <p:spPr>
+          <a:xfrm>
+            <a:off x="3044975" y="2990956"/>
+            <a:ext cx="234909" cy="201168"/>
+          </a:xfrm>
+          <a:prstGeom prst="roundRect">
+            <a:avLst>
+              <a:gd name="adj" fmla="val 13636"/>
+            </a:avLst>
+          </a:prstGeom>
+          <a:solidFill>
+            <a:srgbClr val="213366"/>
+          </a:solidFill>
+          <a:ln w="12700">
+            <a:solidFill>
+              <a:srgbClr val="333333"/>
+            </a:solidFill>
+            <a:prstDash val="solid"/>
+          </a:ln>
+        </p:spPr>
+      </p:sp>
+      <p:sp>
+        <p:nvSpPr>
+          <p:cNvPr id="12" name="Text 8"/>
+          <p:cNvSpPr/>
+          <p:nvPr/>
+        </p:nvSpPr>
+        <p:spPr>
+          <a:xfrm>
+            <a:off x="3044975" y="2990956"/>
+            <a:ext cx="234909" cy="201168"/>
+          </a:xfrm>
+          <a:prstGeom prst="rect">
+            <a:avLst/>
+          </a:prstGeom>
+          <a:noFill/>
+          <a:ln/>
+        </p:spPr>
+        <p:txBody>
+          <a:bodyPr wrap="square" lIns="0" tIns="0" rIns="0" bIns="0" rtlCol="0" anchor="ctr"/>
+          <a:lstStyle/>
+          <a:p>
+            <a:pPr algn="ctr" indent="0" marL="0">
+              <a:buNone/>
+            </a:pPr>
+            <a:r>
+              <a:rPr lang="en-US" sz="700" b="1" dirty="0">
+                <a:solidFill>
+                  <a:srgbClr val="FFFFFF"/>
+                </a:solidFill>
+                <a:latin typeface="Calibri" pitchFamily="34" charset="0"/>
+                <a:ea typeface="Calibri" pitchFamily="34" charset="-122"/>
+                <a:cs typeface="Calibri" pitchFamily="34" charset="-120"/>
+              </a:rPr>
+              <a:t>+965</a:t>
+            </a:r>
+            <a:endParaRPr lang="en-US" sz="700" dirty="0"/>
+          </a:p>
+        </p:txBody>
+      </p:sp>
+      <p:sp>
+        <p:nvSpPr>
+          <p:cNvPr id="13" name="Shape 9"/>
+          <p:cNvSpPr/>
+          <p:nvPr/>
+        </p:nvSpPr>
+        <p:spPr>
+          <a:xfrm>
+            <a:off x="3655127" y="1989557"/>
+            <a:ext cx="234909" cy="201168"/>
+          </a:xfrm>
+          <a:prstGeom prst="roundRect">
+            <a:avLst>
+              <a:gd name="adj" fmla="val 13636"/>
+            </a:avLst>
+          </a:prstGeom>
+          <a:solidFill>
+            <a:srgbClr val="213366"/>
+          </a:solidFill>
+          <a:ln w="12700">
+            <a:solidFill>
+              <a:srgbClr val="333333"/>
+            </a:solidFill>
+            <a:prstDash val="solid"/>
+          </a:ln>
+        </p:spPr>
+      </p:sp>
+      <p:sp>
+        <p:nvSpPr>
+          <p:cNvPr id="14" name="Text 10"/>
+          <p:cNvSpPr/>
+          <p:nvPr/>
+        </p:nvSpPr>
+        <p:spPr>
+          <a:xfrm>
+            <a:off x="3655127" y="1989557"/>
+            <a:ext cx="234909" cy="201168"/>
+          </a:xfrm>
+          <a:prstGeom prst="rect">
+            <a:avLst/>
+          </a:prstGeom>
+          <a:noFill/>
+          <a:ln/>
+        </p:spPr>
+        <p:txBody>
+          <a:bodyPr wrap="square" lIns="0" tIns="0" rIns="0" bIns="0" rtlCol="0" anchor="ctr"/>
+          <a:lstStyle/>
+          <a:p>
+            <a:pPr algn="ctr" indent="0" marL="0">
+              <a:buNone/>
+            </a:pPr>
+            <a:r>
+              <a:rPr lang="en-US" sz="700" b="1" dirty="0">
+                <a:solidFill>
+                  <a:srgbClr val="FFFFFF"/>
+                </a:solidFill>
+                <a:latin typeface="Calibri" pitchFamily="34" charset="0"/>
+                <a:ea typeface="Calibri" pitchFamily="34" charset="-122"/>
+                <a:cs typeface="Calibri" pitchFamily="34" charset="-120"/>
+              </a:rPr>
+              <a:t>+1,891</a:t>
+            </a:r>
+            <a:endParaRPr lang="en-US" sz="700" dirty="0"/>
+          </a:p>
+        </p:txBody>
+      </p:sp>
+      <p:sp>
+        <p:nvSpPr>
+          <p:cNvPr id="15" name="Shape 11"/>
+          <p:cNvSpPr/>
+          <p:nvPr/>
+        </p:nvSpPr>
+        <p:spPr>
+          <a:xfrm>
+            <a:off x="4265279" y="2753520"/>
+            <a:ext cx="234909" cy="201168"/>
+          </a:xfrm>
+          <a:prstGeom prst="roundRect">
+            <a:avLst>
+              <a:gd name="adj" fmla="val 13636"/>
+            </a:avLst>
+          </a:prstGeom>
+          <a:solidFill>
+            <a:srgbClr val="213366"/>
+          </a:solidFill>
+          <a:ln w="12700">
+            <a:solidFill>
+              <a:srgbClr val="333333"/>
+            </a:solidFill>
+            <a:prstDash val="solid"/>
+          </a:ln>
+        </p:spPr>
+      </p:sp>
+      <p:sp>
+        <p:nvSpPr>
+          <p:cNvPr id="16" name="Text 12"/>
+          <p:cNvSpPr/>
+          <p:nvPr/>
+        </p:nvSpPr>
+        <p:spPr>
+          <a:xfrm>
+            <a:off x="4265279" y="2753520"/>
+            <a:ext cx="234909" cy="201168"/>
+          </a:xfrm>
+          <a:prstGeom prst="rect">
+            <a:avLst/>
+          </a:prstGeom>
+          <a:noFill/>
+          <a:ln/>
+        </p:spPr>
+        <p:txBody>
+          <a:bodyPr wrap="square" lIns="0" tIns="0" rIns="0" bIns="0" rtlCol="0" anchor="ctr"/>
+          <a:lstStyle/>
+          <a:p>
+            <a:pPr algn="ctr" indent="0" marL="0">
+              <a:buNone/>
+            </a:pPr>
+            <a:r>
+              <a:rPr lang="en-US" sz="700" b="1" dirty="0">
+                <a:solidFill>
+                  <a:srgbClr val="FFFFFF"/>
+                </a:solidFill>
+                <a:latin typeface="Calibri" pitchFamily="34" charset="0"/>
+                <a:ea typeface="Calibri" pitchFamily="34" charset="-122"/>
+                <a:cs typeface="Calibri" pitchFamily="34" charset="-120"/>
+              </a:rPr>
+              <a:t>-994</a:t>
+            </a:r>
+            <a:endParaRPr lang="en-US" sz="700" dirty="0"/>
+          </a:p>
+        </p:txBody>
+      </p:sp>
+      <p:sp>
+        <p:nvSpPr>
+          <p:cNvPr id="17" name="Shape 13"/>
+          <p:cNvSpPr/>
+          <p:nvPr/>
+        </p:nvSpPr>
+        <p:spPr>
+          <a:xfrm>
+            <a:off x="4875432" y="3094797"/>
+            <a:ext cx="234909" cy="201168"/>
+          </a:xfrm>
+          <a:prstGeom prst="roundRect">
+            <a:avLst>
+              <a:gd name="adj" fmla="val 13636"/>
+            </a:avLst>
+          </a:prstGeom>
+          <a:solidFill>
+            <a:srgbClr val="213366"/>
+          </a:solidFill>
+          <a:ln w="12700">
+            <a:solidFill>
+              <a:srgbClr val="333333"/>
+            </a:solidFill>
+            <a:prstDash val="solid"/>
+          </a:ln>
+        </p:spPr>
+      </p:sp>
+      <p:sp>
+        <p:nvSpPr>
+          <p:cNvPr id="18" name="Text 14"/>
+          <p:cNvSpPr/>
+          <p:nvPr/>
+        </p:nvSpPr>
+        <p:spPr>
+          <a:xfrm>
+            <a:off x="4875432" y="3094797"/>
+            <a:ext cx="234909" cy="201168"/>
+          </a:xfrm>
+          <a:prstGeom prst="rect">
+            <a:avLst/>
+          </a:prstGeom>
+          <a:noFill/>
+          <a:ln/>
+        </p:spPr>
+        <p:txBody>
+          <a:bodyPr wrap="square" lIns="0" tIns="0" rIns="0" bIns="0" rtlCol="0" anchor="ctr"/>
+          <a:lstStyle/>
+          <a:p>
+            <a:pPr algn="ctr" indent="0" marL="0">
+              <a:buNone/>
+            </a:pPr>
+            <a:r>
+              <a:rPr lang="en-US" sz="700" b="1" dirty="0">
+                <a:solidFill>
+                  <a:srgbClr val="FFFFFF"/>
+                </a:solidFill>
+                <a:latin typeface="Calibri" pitchFamily="34" charset="0"/>
+                <a:ea typeface="Calibri" pitchFamily="34" charset="-122"/>
+                <a:cs typeface="Calibri" pitchFamily="34" charset="-120"/>
+              </a:rPr>
+              <a:t>-644</a:t>
+            </a:r>
+            <a:endParaRPr lang="en-US" sz="700" dirty="0"/>
+          </a:p>
+        </p:txBody>
+      </p:sp>
+      <p:sp>
+        <p:nvSpPr>
+          <p:cNvPr id="19" name="Shape 15"/>
+          <p:cNvSpPr/>
+          <p:nvPr/>
+        </p:nvSpPr>
+        <p:spPr>
+          <a:xfrm>
+            <a:off x="5485584" y="4548763"/>
+            <a:ext cx="234909" cy="201168"/>
+          </a:xfrm>
+          <a:prstGeom prst="roundRect">
+            <a:avLst>
+              <a:gd name="adj" fmla="val 13636"/>
+            </a:avLst>
+          </a:prstGeom>
+          <a:solidFill>
+            <a:srgbClr val="213366"/>
+          </a:solidFill>
+          <a:ln w="12700">
+            <a:solidFill>
+              <a:srgbClr val="333333"/>
+            </a:solidFill>
+            <a:prstDash val="solid"/>
+          </a:ln>
+        </p:spPr>
+      </p:sp>
+      <p:sp>
+        <p:nvSpPr>
+          <p:cNvPr id="20" name="Text 16"/>
+          <p:cNvSpPr/>
+          <p:nvPr/>
+        </p:nvSpPr>
+        <p:spPr>
+          <a:xfrm>
+            <a:off x="5485584" y="4548763"/>
+            <a:ext cx="234909" cy="201168"/>
+          </a:xfrm>
+          <a:prstGeom prst="rect">
+            <a:avLst/>
+          </a:prstGeom>
+          <a:noFill/>
+          <a:ln/>
+        </p:spPr>
+        <p:txBody>
+          <a:bodyPr wrap="square" lIns="0" tIns="0" rIns="0" bIns="0" rtlCol="0" anchor="ctr"/>
+          <a:lstStyle/>
+          <a:p>
+            <a:pPr algn="ctr" indent="0" marL="0">
+              <a:buNone/>
+            </a:pPr>
+            <a:r>
+              <a:rPr lang="en-US" sz="700" b="1" dirty="0">
+                <a:solidFill>
+                  <a:srgbClr val="FFFFFF"/>
+                </a:solidFill>
+                <a:latin typeface="Calibri" pitchFamily="34" charset="0"/>
+                <a:ea typeface="Calibri" pitchFamily="34" charset="-122"/>
+                <a:cs typeface="Calibri" pitchFamily="34" charset="-120"/>
+              </a:rPr>
+              <a:t>-2,746</a:t>
+            </a:r>
+            <a:endParaRPr lang="en-US" sz="700" dirty="0"/>
+          </a:p>
+        </p:txBody>
+      </p:sp>
+      <p:sp>
+        <p:nvSpPr>
+          <p:cNvPr id="21" name="Shape 17"/>
+          <p:cNvSpPr/>
+          <p:nvPr/>
+        </p:nvSpPr>
+        <p:spPr>
+          <a:xfrm>
+            <a:off x="6095736" y="3834425"/>
+            <a:ext cx="234909" cy="201168"/>
+          </a:xfrm>
+          <a:prstGeom prst="roundRect">
+            <a:avLst>
+              <a:gd name="adj" fmla="val 13636"/>
+            </a:avLst>
+          </a:prstGeom>
+          <a:solidFill>
+            <a:srgbClr val="213366"/>
+          </a:solidFill>
+          <a:ln w="12700">
+            <a:solidFill>
+              <a:srgbClr val="333333"/>
+            </a:solidFill>
+            <a:prstDash val="solid"/>
+          </a:ln>
+        </p:spPr>
+      </p:sp>
+      <p:sp>
+        <p:nvSpPr>
+          <p:cNvPr id="22" name="Text 18"/>
+          <p:cNvSpPr/>
+          <p:nvPr/>
+        </p:nvSpPr>
+        <p:spPr>
+          <a:xfrm>
+            <a:off x="6095736" y="3834425"/>
+            <a:ext cx="234909" cy="201168"/>
+          </a:xfrm>
+          <a:prstGeom prst="rect">
+            <a:avLst/>
+          </a:prstGeom>
+          <a:noFill/>
+          <a:ln/>
+        </p:spPr>
+        <p:txBody>
+          <a:bodyPr wrap="square" lIns="0" tIns="0" rIns="0" bIns="0" rtlCol="0" anchor="ctr"/>
+          <a:lstStyle/>
+          <a:p>
+            <a:pPr algn="ctr" indent="0" marL="0">
+              <a:buNone/>
+            </a:pPr>
+            <a:r>
+              <a:rPr lang="en-US" sz="700" b="1" dirty="0">
+                <a:solidFill>
+                  <a:srgbClr val="FFFFFF"/>
+                </a:solidFill>
+                <a:latin typeface="Calibri" pitchFamily="34" charset="0"/>
+                <a:ea typeface="Calibri" pitchFamily="34" charset="-122"/>
+                <a:cs typeface="Calibri" pitchFamily="34" charset="-120"/>
+              </a:rPr>
+              <a:t>+900</a:t>
+            </a:r>
+            <a:endParaRPr lang="en-US" sz="700" dirty="0"/>
+          </a:p>
+        </p:txBody>
+      </p:sp>
+      <p:sp>
+        <p:nvSpPr>
+          <p:cNvPr id="23" name="Shape 19"/>
+          <p:cNvSpPr/>
+          <p:nvPr/>
+        </p:nvSpPr>
+        <p:spPr>
+          <a:xfrm>
+            <a:off x="6705888" y="4680808"/>
+            <a:ext cx="234909" cy="201168"/>
+          </a:xfrm>
+          <a:prstGeom prst="roundRect">
+            <a:avLst>
+              <a:gd name="adj" fmla="val 13636"/>
+            </a:avLst>
+          </a:prstGeom>
+          <a:solidFill>
+            <a:srgbClr val="213366"/>
+          </a:solidFill>
+          <a:ln w="12700">
+            <a:solidFill>
+              <a:srgbClr val="333333"/>
+            </a:solidFill>
+            <a:prstDash val="solid"/>
+          </a:ln>
+        </p:spPr>
+      </p:sp>
+      <p:sp>
+        <p:nvSpPr>
+          <p:cNvPr id="24" name="Text 20"/>
+          <p:cNvSpPr/>
+          <p:nvPr/>
+        </p:nvSpPr>
+        <p:spPr>
+          <a:xfrm>
+            <a:off x="6705888" y="4680808"/>
+            <a:ext cx="234909" cy="201168"/>
+          </a:xfrm>
+          <a:prstGeom prst="rect">
+            <a:avLst/>
+          </a:prstGeom>
+          <a:noFill/>
+          <a:ln/>
+        </p:spPr>
+        <p:txBody>
+          <a:bodyPr wrap="square" lIns="0" tIns="0" rIns="0" bIns="0" rtlCol="0" anchor="ctr"/>
+          <a:lstStyle/>
+          <a:p>
+            <a:pPr algn="ctr" indent="0" marL="0">
+              <a:buNone/>
+            </a:pPr>
+            <a:r>
+              <a:rPr lang="en-US" sz="700" b="1" dirty="0">
+                <a:solidFill>
+                  <a:srgbClr val="FFFFFF"/>
+                </a:solidFill>
+                <a:latin typeface="Calibri" pitchFamily="34" charset="0"/>
+                <a:ea typeface="Calibri" pitchFamily="34" charset="-122"/>
+                <a:cs typeface="Calibri" pitchFamily="34" charset="-120"/>
+              </a:rPr>
+              <a:t>-1,149</a:t>
+            </a:r>
+            <a:endParaRPr lang="en-US" sz="700" dirty="0"/>
+          </a:p>
+        </p:txBody>
+      </p:sp>
+      <p:sp>
+        <p:nvSpPr>
+          <p:cNvPr id="25" name="Shape 21"/>
+          <p:cNvSpPr/>
+          <p:nvPr/>
+        </p:nvSpPr>
+        <p:spPr>
+          <a:xfrm>
+            <a:off x="7316041" y="4756709"/>
+            <a:ext cx="234909" cy="201168"/>
+          </a:xfrm>
+          <a:prstGeom prst="roundRect">
+            <a:avLst>
+              <a:gd name="adj" fmla="val 13636"/>
+            </a:avLst>
+          </a:prstGeom>
+          <a:solidFill>
+            <a:srgbClr val="213366"/>
+          </a:solidFill>
+          <a:ln w="12700">
+            <a:solidFill>
+              <a:srgbClr val="333333"/>
+            </a:solidFill>
+            <a:prstDash val="solid"/>
+          </a:ln>
+        </p:spPr>
+      </p:sp>
+      <p:sp>
+        <p:nvSpPr>
+          <p:cNvPr id="26" name="Text 22"/>
+          <p:cNvSpPr/>
+          <p:nvPr/>
+        </p:nvSpPr>
+        <p:spPr>
+          <a:xfrm>
+            <a:off x="7316041" y="4756709"/>
+            <a:ext cx="234909" cy="201168"/>
+          </a:xfrm>
+          <a:prstGeom prst="rect">
+            <a:avLst/>
+          </a:prstGeom>
+          <a:noFill/>
+          <a:ln/>
+        </p:spPr>
+        <p:txBody>
+          <a:bodyPr wrap="square" lIns="0" tIns="0" rIns="0" bIns="0" rtlCol="0" anchor="ctr"/>
+          <a:lstStyle/>
+          <a:p>
+            <a:pPr algn="ctr" indent="0" marL="0">
+              <a:buNone/>
+            </a:pPr>
+            <a:r>
+              <a:rPr lang="en-US" sz="700" b="1" dirty="0">
+                <a:solidFill>
+                  <a:srgbClr val="FFFFFF"/>
+                </a:solidFill>
+                <a:latin typeface="Calibri" pitchFamily="34" charset="0"/>
+                <a:ea typeface="Calibri" pitchFamily="34" charset="-122"/>
+                <a:cs typeface="Calibri" pitchFamily="34" charset="-120"/>
+              </a:rPr>
+              <a:t>-143</a:t>
+            </a:r>
+            <a:endParaRPr lang="en-US" sz="700" dirty="0"/>
+          </a:p>
+        </p:txBody>
+      </p:sp>
+      <p:sp>
+        <p:nvSpPr>
+          <p:cNvPr id="27" name="Shape 23"/>
+          <p:cNvSpPr/>
+          <p:nvPr/>
+        </p:nvSpPr>
+        <p:spPr>
+          <a:xfrm>
+            <a:off x="7926193" y="4287830"/>
+            <a:ext cx="234909" cy="201168"/>
+          </a:xfrm>
+          <a:prstGeom prst="roundRect">
+            <a:avLst>
+              <a:gd name="adj" fmla="val 13636"/>
+            </a:avLst>
+          </a:prstGeom>
+          <a:solidFill>
+            <a:srgbClr val="213366"/>
+          </a:solidFill>
+          <a:ln w="12700">
+            <a:solidFill>
+              <a:srgbClr val="333333"/>
+            </a:solidFill>
+            <a:prstDash val="solid"/>
+          </a:ln>
+        </p:spPr>
+      </p:sp>
+      <p:sp>
+        <p:nvSpPr>
+          <p:cNvPr id="28" name="Text 24"/>
+          <p:cNvSpPr/>
+          <p:nvPr/>
+        </p:nvSpPr>
+        <p:spPr>
+          <a:xfrm>
+            <a:off x="7926193" y="4287830"/>
+            <a:ext cx="234909" cy="201168"/>
+          </a:xfrm>
+          <a:prstGeom prst="rect">
+            <a:avLst/>
+          </a:prstGeom>
+          <a:noFill/>
+          <a:ln/>
+        </p:spPr>
+        <p:txBody>
+          <a:bodyPr wrap="square" lIns="0" tIns="0" rIns="0" bIns="0" rtlCol="0" anchor="ctr"/>
+          <a:lstStyle/>
+          <a:p>
+            <a:pPr algn="ctr" indent="0" marL="0">
+              <a:buNone/>
+            </a:pPr>
+            <a:r>
+              <a:rPr lang="en-US" sz="700" b="1" dirty="0">
+                <a:solidFill>
+                  <a:srgbClr val="FFFFFF"/>
+                </a:solidFill>
+                <a:latin typeface="Calibri" pitchFamily="34" charset="0"/>
+                <a:ea typeface="Calibri" pitchFamily="34" charset="-122"/>
+                <a:cs typeface="Calibri" pitchFamily="34" charset="-120"/>
+              </a:rPr>
+              <a:t>+436</a:t>
+            </a:r>
+            <a:endParaRPr lang="en-US" sz="700" dirty="0"/>
+          </a:p>
+        </p:txBody>
+      </p:sp>
+      <p:sp>
+        <p:nvSpPr>
+          <p:cNvPr id="29" name="Shape 25"/>
+          <p:cNvSpPr/>
+          <p:nvPr/>
+        </p:nvSpPr>
+        <p:spPr>
+          <a:xfrm>
+            <a:off x="8536345" y="3380682"/>
+            <a:ext cx="234909" cy="201168"/>
+          </a:xfrm>
+          <a:prstGeom prst="roundRect">
+            <a:avLst>
+              <a:gd name="adj" fmla="val 13636"/>
+            </a:avLst>
+          </a:prstGeom>
+          <a:solidFill>
+            <a:srgbClr val="213366"/>
+          </a:solidFill>
+          <a:ln w="12700">
+            <a:solidFill>
+              <a:srgbClr val="333333"/>
+            </a:solidFill>
+            <a:prstDash val="solid"/>
+          </a:ln>
+        </p:spPr>
+      </p:sp>
+      <p:sp>
+        <p:nvSpPr>
+          <p:cNvPr id="30" name="Text 26"/>
+          <p:cNvSpPr/>
+          <p:nvPr/>
+        </p:nvSpPr>
+        <p:spPr>
+          <a:xfrm>
+            <a:off x="8536345" y="3380682"/>
+            <a:ext cx="234909" cy="201168"/>
+          </a:xfrm>
+          <a:prstGeom prst="rect">
+            <a:avLst/>
+          </a:prstGeom>
+          <a:noFill/>
+          <a:ln/>
+        </p:spPr>
+        <p:txBody>
+          <a:bodyPr wrap="square" lIns="0" tIns="0" rIns="0" bIns="0" rtlCol="0" anchor="ctr"/>
+          <a:lstStyle/>
+          <a:p>
+            <a:pPr algn="ctr" indent="0" marL="0">
+              <a:buNone/>
+            </a:pPr>
+            <a:r>
+              <a:rPr lang="en-US" sz="700" b="1" dirty="0">
+                <a:solidFill>
+                  <a:srgbClr val="FFFFFF"/>
+                </a:solidFill>
+                <a:latin typeface="Calibri" pitchFamily="34" charset="0"/>
+                <a:ea typeface="Calibri" pitchFamily="34" charset="-122"/>
+                <a:cs typeface="Calibri" pitchFamily="34" charset="-120"/>
+              </a:rPr>
+              <a:t>+1,713</a:t>
+            </a:r>
+            <a:endParaRPr lang="en-US" sz="700" dirty="0"/>
+          </a:p>
+        </p:txBody>
+      </p:sp>
+      <p:sp>
+        <p:nvSpPr>
+          <p:cNvPr id="31" name="Shape 27"/>
+          <p:cNvSpPr/>
+          <p:nvPr/>
+        </p:nvSpPr>
+        <p:spPr>
+          <a:xfrm>
+            <a:off x="9146497" y="3097084"/>
+            <a:ext cx="234909" cy="201168"/>
+          </a:xfrm>
+          <a:prstGeom prst="roundRect">
+            <a:avLst>
+              <a:gd name="adj" fmla="val 13636"/>
+            </a:avLst>
+          </a:prstGeom>
+          <a:solidFill>
+            <a:srgbClr val="213366"/>
+          </a:solidFill>
+          <a:ln w="12700">
+            <a:solidFill>
+              <a:srgbClr val="333333"/>
+            </a:solidFill>
+            <a:prstDash val="solid"/>
+          </a:ln>
+        </p:spPr>
+      </p:sp>
+      <p:sp>
+        <p:nvSpPr>
+          <p:cNvPr id="32" name="Text 28"/>
+          <p:cNvSpPr/>
+          <p:nvPr/>
+        </p:nvSpPr>
+        <p:spPr>
+          <a:xfrm>
+            <a:off x="9146497" y="3097084"/>
+            <a:ext cx="234909" cy="201168"/>
+          </a:xfrm>
+          <a:prstGeom prst="rect">
+            <a:avLst/>
+          </a:prstGeom>
+          <a:noFill/>
+          <a:ln/>
+        </p:spPr>
+        <p:txBody>
+          <a:bodyPr wrap="square" lIns="0" tIns="0" rIns="0" bIns="0" rtlCol="0" anchor="ctr"/>
+          <a:lstStyle/>
+          <a:p>
+            <a:pPr algn="ctr" indent="0" marL="0">
+              <a:buNone/>
+            </a:pPr>
+            <a:r>
+              <a:rPr lang="en-US" sz="700" b="1" dirty="0">
+                <a:solidFill>
+                  <a:srgbClr val="FFFFFF"/>
+                </a:solidFill>
+                <a:latin typeface="Calibri" pitchFamily="34" charset="0"/>
+                <a:ea typeface="Calibri" pitchFamily="34" charset="-122"/>
+                <a:cs typeface="Calibri" pitchFamily="34" charset="-120"/>
+              </a:rPr>
+              <a:t>+536</a:t>
+            </a:r>
+            <a:endParaRPr lang="en-US" sz="700" dirty="0"/>
+          </a:p>
+        </p:txBody>
+      </p:sp>
+      <p:sp>
+        <p:nvSpPr>
+          <p:cNvPr id="33" name="Shape 29"/>
+          <p:cNvSpPr/>
+          <p:nvPr/>
+        </p:nvSpPr>
+        <p:spPr>
+          <a:xfrm>
+            <a:off x="9756649" y="3649362"/>
+            <a:ext cx="234909" cy="201168"/>
+          </a:xfrm>
+          <a:prstGeom prst="roundRect">
+            <a:avLst>
+              <a:gd name="adj" fmla="val 13636"/>
+            </a:avLst>
+          </a:prstGeom>
+          <a:solidFill>
+            <a:srgbClr val="213366"/>
+          </a:solidFill>
+          <a:ln w="12700">
+            <a:solidFill>
+              <a:srgbClr val="333333"/>
+            </a:solidFill>
+            <a:prstDash val="solid"/>
+          </a:ln>
+        </p:spPr>
+      </p:sp>
+      <p:sp>
+        <p:nvSpPr>
+          <p:cNvPr id="34" name="Text 30"/>
+          <p:cNvSpPr/>
+          <p:nvPr/>
+        </p:nvSpPr>
+        <p:spPr>
+          <a:xfrm>
+            <a:off x="9756649" y="3649362"/>
+            <a:ext cx="234909" cy="201168"/>
+          </a:xfrm>
+          <a:prstGeom prst="rect">
+            <a:avLst/>
+          </a:prstGeom>
+          <a:noFill/>
+          <a:ln/>
+        </p:spPr>
+        <p:txBody>
+          <a:bodyPr wrap="square" lIns="0" tIns="0" rIns="0" bIns="0" rtlCol="0" anchor="ctr"/>
+          <a:lstStyle/>
+          <a:p>
+            <a:pPr algn="ctr" indent="0" marL="0">
+              <a:buNone/>
+            </a:pPr>
+            <a:r>
+              <a:rPr lang="en-US" sz="700" b="1" dirty="0">
+                <a:solidFill>
+                  <a:srgbClr val="FFFFFF"/>
+                </a:solidFill>
+                <a:latin typeface="Calibri" pitchFamily="34" charset="0"/>
+                <a:ea typeface="Calibri" pitchFamily="34" charset="-122"/>
+                <a:cs typeface="Calibri" pitchFamily="34" charset="-120"/>
+              </a:rPr>
+              <a:t>-594</a:t>
+            </a:r>
+            <a:endParaRPr lang="en-US" sz="700" dirty="0"/>
+          </a:p>
+        </p:txBody>
+      </p:sp>
+      <p:sp>
+        <p:nvSpPr>
+          <p:cNvPr id="35" name="Shape 31"/>
+          <p:cNvSpPr/>
+          <p:nvPr/>
+        </p:nvSpPr>
+        <p:spPr>
+          <a:xfrm>
+            <a:off x="10366802" y="2394847"/>
+            <a:ext cx="234909" cy="201168"/>
+          </a:xfrm>
+          <a:prstGeom prst="roundRect">
+            <a:avLst>
+              <a:gd name="adj" fmla="val 13636"/>
+            </a:avLst>
+          </a:prstGeom>
+          <a:solidFill>
+            <a:srgbClr val="213366"/>
+          </a:solidFill>
+          <a:ln w="12700">
+            <a:solidFill>
+              <a:srgbClr val="333333"/>
+            </a:solidFill>
+            <a:prstDash val="solid"/>
+          </a:ln>
+        </p:spPr>
+      </p:sp>
+      <p:sp>
+        <p:nvSpPr>
+          <p:cNvPr id="36" name="Text 32"/>
+          <p:cNvSpPr/>
+          <p:nvPr/>
+        </p:nvSpPr>
+        <p:spPr>
+          <a:xfrm>
+            <a:off x="10366802" y="2394847"/>
+            <a:ext cx="234909" cy="201168"/>
+          </a:xfrm>
+          <a:prstGeom prst="rect">
+            <a:avLst/>
+          </a:prstGeom>
+          <a:noFill/>
+          <a:ln/>
+        </p:spPr>
+        <p:txBody>
+          <a:bodyPr wrap="square" lIns="0" tIns="0" rIns="0" bIns="0" rtlCol="0" anchor="ctr"/>
+          <a:lstStyle/>
+          <a:p>
+            <a:pPr algn="ctr" indent="0" marL="0">
+              <a:buNone/>
+            </a:pPr>
+            <a:r>
+              <a:rPr lang="en-US" sz="700" b="1" dirty="0">
+                <a:solidFill>
+                  <a:srgbClr val="FFFFFF"/>
+                </a:solidFill>
+                <a:latin typeface="Calibri" pitchFamily="34" charset="0"/>
+                <a:ea typeface="Calibri" pitchFamily="34" charset="-122"/>
+                <a:cs typeface="Calibri" pitchFamily="34" charset="-120"/>
+              </a:rPr>
+              <a:t>+1,920</a:t>
+            </a:r>
+            <a:endParaRPr lang="en-US" sz="700" dirty="0"/>
+          </a:p>
+        </p:txBody>
+      </p:sp>
+      <p:sp>
+        <p:nvSpPr>
+          <p:cNvPr id="37" name="Shape 33"/>
+          <p:cNvSpPr/>
+          <p:nvPr/>
+        </p:nvSpPr>
+        <p:spPr>
+          <a:xfrm>
+            <a:off x="10976954" y="2081890"/>
+            <a:ext cx="234909" cy="201168"/>
+          </a:xfrm>
+          <a:prstGeom prst="roundRect">
+            <a:avLst>
+              <a:gd name="adj" fmla="val 13636"/>
+            </a:avLst>
+          </a:prstGeom>
+          <a:solidFill>
+            <a:srgbClr val="213366"/>
+          </a:solidFill>
+          <a:ln w="12700">
+            <a:solidFill>
+              <a:srgbClr val="333333"/>
+            </a:solidFill>
+            <a:prstDash val="solid"/>
+          </a:ln>
+        </p:spPr>
+      </p:sp>
+      <p:sp>
+        <p:nvSpPr>
+          <p:cNvPr id="38" name="Text 34"/>
+          <p:cNvSpPr/>
+          <p:nvPr/>
+        </p:nvSpPr>
+        <p:spPr>
+          <a:xfrm>
+            <a:off x="10976954" y="2081890"/>
+            <a:ext cx="234909" cy="201168"/>
+          </a:xfrm>
+          <a:prstGeom prst="rect">
+            <a:avLst/>
+          </a:prstGeom>
+          <a:noFill/>
+          <a:ln/>
+        </p:spPr>
+        <p:txBody>
+          <a:bodyPr wrap="square" lIns="0" tIns="0" rIns="0" bIns="0" rtlCol="0" anchor="ctr"/>
+          <a:lstStyle/>
+          <a:p>
+            <a:pPr algn="ctr" indent="0" marL="0">
+              <a:buNone/>
+            </a:pPr>
+            <a:r>
+              <a:rPr lang="en-US" sz="700" b="1" dirty="0">
+                <a:solidFill>
+                  <a:srgbClr val="FFFFFF"/>
+                </a:solidFill>
+                <a:latin typeface="Calibri" pitchFamily="34" charset="0"/>
+                <a:ea typeface="Calibri" pitchFamily="34" charset="-122"/>
+                <a:cs typeface="Calibri" pitchFamily="34" charset="-120"/>
+              </a:rPr>
+              <a:t>+591</a:t>
+            </a:r>
+            <a:endParaRPr lang="en-US" sz="700" dirty="0"/>
+          </a:p>
+        </p:txBody>
+      </p:sp>
+      <p:sp>
+        <p:nvSpPr>
+          <p:cNvPr id="39" name="Shape 35"/>
+          <p:cNvSpPr/>
+          <p:nvPr/>
+        </p:nvSpPr>
+        <p:spPr>
+          <a:xfrm>
+            <a:off x="2038224" y="3381794"/>
+            <a:ext cx="234909" cy="201168"/>
+          </a:xfrm>
+          <a:prstGeom prst="roundRect">
+            <a:avLst>
+              <a:gd name="adj" fmla="val 13636"/>
+            </a:avLst>
+          </a:prstGeom>
+          <a:solidFill>
+            <a:srgbClr val="7F7F7F"/>
+          </a:solidFill>
+          <a:ln w="12700">
+            <a:solidFill>
+              <a:srgbClr val="333333"/>
+            </a:solidFill>
+            <a:prstDash val="solid"/>
+          </a:ln>
+        </p:spPr>
+      </p:sp>
+      <p:sp>
+        <p:nvSpPr>
+          <p:cNvPr id="40" name="Text 36"/>
+          <p:cNvSpPr/>
+          <p:nvPr/>
+        </p:nvSpPr>
+        <p:spPr>
+          <a:xfrm>
+            <a:off x="2038224" y="3381794"/>
+            <a:ext cx="234909" cy="201168"/>
+          </a:xfrm>
+          <a:prstGeom prst="rect">
+            <a:avLst/>
+          </a:prstGeom>
+          <a:noFill/>
+          <a:ln/>
+        </p:spPr>
+        <p:txBody>
+          <a:bodyPr wrap="square" lIns="0" tIns="0" rIns="0" bIns="0" rtlCol="0" anchor="ctr"/>
+          <a:lstStyle/>
+          <a:p>
+            <a:pPr algn="ctr" indent="0" marL="0">
+              <a:buNone/>
+            </a:pPr>
+            <a:r>
+              <a:rPr lang="en-US" sz="700" b="1" dirty="0">
+                <a:solidFill>
+                  <a:srgbClr val="FFFFFF"/>
+                </a:solidFill>
+                <a:latin typeface="Calibri" pitchFamily="34" charset="0"/>
+                <a:ea typeface="Calibri" pitchFamily="34" charset="-122"/>
+                <a:cs typeface="Calibri" pitchFamily="34" charset="-120"/>
+              </a:rPr>
+              <a:t>-135</a:t>
+            </a:r>
+            <a:endParaRPr lang="en-US" sz="700" dirty="0"/>
+          </a:p>
+        </p:txBody>
+      </p:sp>
+      <p:sp>
+        <p:nvSpPr>
+          <p:cNvPr id="41" name="Shape 37"/>
+          <p:cNvSpPr/>
+          <p:nvPr/>
+        </p:nvSpPr>
+        <p:spPr>
+          <a:xfrm>
+            <a:off x="2648376" y="3083633"/>
+            <a:ext cx="234909" cy="201168"/>
+          </a:xfrm>
+          <a:prstGeom prst="roundRect">
+            <a:avLst>
+              <a:gd name="adj" fmla="val 13636"/>
+            </a:avLst>
+          </a:prstGeom>
+          <a:solidFill>
+            <a:srgbClr val="7F7F7F"/>
+          </a:solidFill>
+          <a:ln w="12700">
+            <a:solidFill>
+              <a:srgbClr val="333333"/>
+            </a:solidFill>
+            <a:prstDash val="solid"/>
+          </a:ln>
+        </p:spPr>
+      </p:sp>
+      <p:sp>
+        <p:nvSpPr>
+          <p:cNvPr id="42" name="Text 38"/>
+          <p:cNvSpPr/>
+          <p:nvPr/>
+        </p:nvSpPr>
+        <p:spPr>
+          <a:xfrm>
+            <a:off x="2648376" y="3083633"/>
+            <a:ext cx="234909" cy="201168"/>
+          </a:xfrm>
+          <a:prstGeom prst="rect">
+            <a:avLst/>
+          </a:prstGeom>
+          <a:noFill/>
+          <a:ln/>
+        </p:spPr>
+        <p:txBody>
+          <a:bodyPr wrap="square" lIns="0" tIns="0" rIns="0" bIns="0" rtlCol="0" anchor="ctr"/>
+          <a:lstStyle/>
+          <a:p>
+            <a:pPr algn="ctr" indent="0" marL="0">
+              <a:buNone/>
+            </a:pPr>
+            <a:r>
+              <a:rPr lang="en-US" sz="700" b="1" dirty="0">
+                <a:solidFill>
+                  <a:srgbClr val="FFFFFF"/>
+                </a:solidFill>
+                <a:latin typeface="Calibri" pitchFamily="34" charset="0"/>
+                <a:ea typeface="Calibri" pitchFamily="34" charset="-122"/>
+                <a:cs typeface="Calibri" pitchFamily="34" charset="-120"/>
+              </a:rPr>
+              <a:t>+114</a:t>
+            </a:r>
+            <a:endParaRPr lang="en-US" sz="700" dirty="0"/>
+          </a:p>
+        </p:txBody>
+      </p:sp>
+      <p:sp>
+        <p:nvSpPr>
+          <p:cNvPr id="43" name="Shape 39"/>
+          <p:cNvSpPr/>
+          <p:nvPr/>
+        </p:nvSpPr>
+        <p:spPr>
+          <a:xfrm>
+            <a:off x="3258528" y="2567471"/>
+            <a:ext cx="234909" cy="201168"/>
+          </a:xfrm>
+          <a:prstGeom prst="roundRect">
+            <a:avLst>
+              <a:gd name="adj" fmla="val 13636"/>
+            </a:avLst>
+          </a:prstGeom>
+          <a:solidFill>
+            <a:srgbClr val="7F7F7F"/>
+          </a:solidFill>
+          <a:ln w="12700">
+            <a:solidFill>
+              <a:srgbClr val="333333"/>
+            </a:solidFill>
+            <a:prstDash val="solid"/>
+          </a:ln>
+        </p:spPr>
+      </p:sp>
+      <p:sp>
+        <p:nvSpPr>
+          <p:cNvPr id="44" name="Text 40"/>
+          <p:cNvSpPr/>
+          <p:nvPr/>
+        </p:nvSpPr>
+        <p:spPr>
+          <a:xfrm>
+            <a:off x="3258528" y="2567471"/>
+            <a:ext cx="234909" cy="201168"/>
+          </a:xfrm>
+          <a:prstGeom prst="rect">
+            <a:avLst/>
+          </a:prstGeom>
+          <a:noFill/>
+          <a:ln/>
+        </p:spPr>
+        <p:txBody>
+          <a:bodyPr wrap="square" lIns="0" tIns="0" rIns="0" bIns="0" rtlCol="0" anchor="ctr"/>
+          <a:lstStyle/>
+          <a:p>
+            <a:pPr algn="ctr" indent="0" marL="0">
+              <a:buNone/>
+            </a:pPr>
+            <a:r>
+              <a:rPr lang="en-US" sz="700" b="1" dirty="0">
+                <a:solidFill>
+                  <a:srgbClr val="FFFFFF"/>
+                </a:solidFill>
+                <a:latin typeface="Calibri" pitchFamily="34" charset="0"/>
+                <a:ea typeface="Calibri" pitchFamily="34" charset="-122"/>
+                <a:cs typeface="Calibri" pitchFamily="34" charset="-120"/>
+              </a:rPr>
+              <a:t>+975</a:t>
+            </a:r>
+            <a:endParaRPr lang="en-US" sz="700" dirty="0"/>
+          </a:p>
+        </p:txBody>
+      </p:sp>
+      <p:sp>
+        <p:nvSpPr>
+          <p:cNvPr id="45" name="Shape 41"/>
+          <p:cNvSpPr/>
+          <p:nvPr/>
+        </p:nvSpPr>
+        <p:spPr>
+          <a:xfrm>
+            <a:off x="3868680" y="2105519"/>
+            <a:ext cx="234909" cy="201168"/>
+          </a:xfrm>
+          <a:prstGeom prst="roundRect">
+            <a:avLst>
+              <a:gd name="adj" fmla="val 13636"/>
+            </a:avLst>
+          </a:prstGeom>
+          <a:solidFill>
+            <a:srgbClr val="7F7F7F"/>
+          </a:solidFill>
+          <a:ln w="12700">
+            <a:solidFill>
+              <a:srgbClr val="333333"/>
+            </a:solidFill>
+            <a:prstDash val="solid"/>
+          </a:ln>
+        </p:spPr>
+      </p:sp>
+      <p:sp>
+        <p:nvSpPr>
+          <p:cNvPr id="46" name="Text 42"/>
+          <p:cNvSpPr/>
+          <p:nvPr/>
+        </p:nvSpPr>
+        <p:spPr>
+          <a:xfrm>
+            <a:off x="3868680" y="2105519"/>
+            <a:ext cx="234909" cy="201168"/>
+          </a:xfrm>
+          <a:prstGeom prst="rect">
+            <a:avLst/>
+          </a:prstGeom>
+          <a:noFill/>
+          <a:ln/>
+        </p:spPr>
+        <p:txBody>
+          <a:bodyPr wrap="square" lIns="0" tIns="0" rIns="0" bIns="0" rtlCol="0" anchor="ctr"/>
+          <a:lstStyle/>
+          <a:p>
+            <a:pPr algn="ctr" indent="0" marL="0">
+              <a:buNone/>
+            </a:pPr>
+            <a:r>
+              <a:rPr lang="en-US" sz="700" b="1" dirty="0">
+                <a:solidFill>
+                  <a:srgbClr val="FFFFFF"/>
+                </a:solidFill>
+                <a:latin typeface="Calibri" pitchFamily="34" charset="0"/>
+                <a:ea typeface="Calibri" pitchFamily="34" charset="-122"/>
+                <a:cs typeface="Calibri" pitchFamily="34" charset="-120"/>
+              </a:rPr>
+              <a:t>+872</a:t>
+            </a:r>
+            <a:endParaRPr lang="en-US" sz="700" dirty="0"/>
+          </a:p>
+        </p:txBody>
+      </p:sp>
+      <p:sp>
+        <p:nvSpPr>
+          <p:cNvPr id="47" name="Shape 43"/>
+          <p:cNvSpPr/>
+          <p:nvPr/>
+        </p:nvSpPr>
+        <p:spPr>
+          <a:xfrm>
+            <a:off x="4478833" y="2762215"/>
+            <a:ext cx="234909" cy="201168"/>
+          </a:xfrm>
+          <a:prstGeom prst="roundRect">
+            <a:avLst>
+              <a:gd name="adj" fmla="val 13636"/>
+            </a:avLst>
+          </a:prstGeom>
+          <a:solidFill>
+            <a:srgbClr val="7F7F7F"/>
+          </a:solidFill>
+          <a:ln w="12700">
+            <a:solidFill>
+              <a:srgbClr val="333333"/>
+            </a:solidFill>
+            <a:prstDash val="solid"/>
+          </a:ln>
+        </p:spPr>
+      </p:sp>
+      <p:sp>
+        <p:nvSpPr>
+          <p:cNvPr id="48" name="Text 44"/>
+          <p:cNvSpPr/>
+          <p:nvPr/>
+        </p:nvSpPr>
+        <p:spPr>
+          <a:xfrm>
+            <a:off x="4478833" y="2762215"/>
+            <a:ext cx="234909" cy="201168"/>
+          </a:xfrm>
+          <a:prstGeom prst="rect">
+            <a:avLst/>
+          </a:prstGeom>
+          <a:noFill/>
+          <a:ln/>
+        </p:spPr>
+        <p:txBody>
+          <a:bodyPr wrap="square" lIns="0" tIns="0" rIns="0" bIns="0" rtlCol="0" anchor="ctr"/>
+          <a:lstStyle/>
+          <a:p>
+            <a:pPr algn="ctr" indent="0" marL="0">
+              <a:buNone/>
+            </a:pPr>
+            <a:r>
+              <a:rPr lang="en-US" sz="700" b="1" dirty="0">
+                <a:solidFill>
+                  <a:srgbClr val="FFFFFF"/>
+                </a:solidFill>
+                <a:latin typeface="Calibri" pitchFamily="34" charset="0"/>
+                <a:ea typeface="Calibri" pitchFamily="34" charset="-122"/>
+                <a:cs typeface="Calibri" pitchFamily="34" charset="-120"/>
+              </a:rPr>
+              <a:t>-791</a:t>
+            </a:r>
+            <a:endParaRPr lang="en-US" sz="700" dirty="0"/>
+          </a:p>
+        </p:txBody>
+      </p:sp>
+      <p:sp>
+        <p:nvSpPr>
+          <p:cNvPr id="49" name="Shape 45"/>
+          <p:cNvSpPr/>
+          <p:nvPr/>
+        </p:nvSpPr>
+        <p:spPr>
+          <a:xfrm>
+            <a:off x="5088985" y="2850163"/>
+            <a:ext cx="234909" cy="201168"/>
+          </a:xfrm>
+          <a:prstGeom prst="roundRect">
+            <a:avLst>
+              <a:gd name="adj" fmla="val 13636"/>
+            </a:avLst>
+          </a:prstGeom>
+          <a:solidFill>
+            <a:srgbClr val="7F7F7F"/>
+          </a:solidFill>
+          <a:ln w="12700">
+            <a:solidFill>
+              <a:srgbClr val="333333"/>
+            </a:solidFill>
+            <a:prstDash val="solid"/>
+          </a:ln>
+        </p:spPr>
+      </p:sp>
+      <p:sp>
+        <p:nvSpPr>
+          <p:cNvPr id="50" name="Text 46"/>
+          <p:cNvSpPr/>
+          <p:nvPr/>
+        </p:nvSpPr>
+        <p:spPr>
+          <a:xfrm>
+            <a:off x="5088985" y="2850163"/>
+            <a:ext cx="234909" cy="201168"/>
+          </a:xfrm>
+          <a:prstGeom prst="rect">
+            <a:avLst/>
+          </a:prstGeom>
+          <a:noFill/>
+          <a:ln/>
+        </p:spPr>
+        <p:txBody>
+          <a:bodyPr wrap="square" lIns="0" tIns="0" rIns="0" bIns="0" rtlCol="0" anchor="ctr"/>
+          <a:lstStyle/>
+          <a:p>
+            <a:pPr algn="ctr" indent="0" marL="0">
+              <a:buNone/>
+            </a:pPr>
+            <a:r>
+              <a:rPr lang="en-US" sz="700" b="1" dirty="0">
+                <a:solidFill>
+                  <a:srgbClr val="FFFFFF"/>
+                </a:solidFill>
+                <a:latin typeface="Calibri" pitchFamily="34" charset="0"/>
+                <a:ea typeface="Calibri" pitchFamily="34" charset="-122"/>
+                <a:cs typeface="Calibri" pitchFamily="34" charset="-120"/>
+              </a:rPr>
+              <a:t>-166</a:t>
+            </a:r>
+            <a:endParaRPr lang="en-US" sz="700" dirty="0"/>
+          </a:p>
+        </p:txBody>
+      </p:sp>
+      <p:sp>
+        <p:nvSpPr>
+          <p:cNvPr id="51" name="Shape 47"/>
+          <p:cNvSpPr/>
+          <p:nvPr/>
+        </p:nvSpPr>
+        <p:spPr>
+          <a:xfrm>
+            <a:off x="5699137" y="3418582"/>
+            <a:ext cx="234909" cy="201168"/>
+          </a:xfrm>
+          <a:prstGeom prst="roundRect">
+            <a:avLst>
+              <a:gd name="adj" fmla="val 13636"/>
+            </a:avLst>
+          </a:prstGeom>
+          <a:solidFill>
+            <a:srgbClr val="7F7F7F"/>
+          </a:solidFill>
+          <a:ln w="12700">
+            <a:solidFill>
+              <a:srgbClr val="333333"/>
+            </a:solidFill>
+            <a:prstDash val="solid"/>
+          </a:ln>
+        </p:spPr>
+      </p:sp>
+      <p:sp>
+        <p:nvSpPr>
+          <p:cNvPr id="52" name="Text 48"/>
+          <p:cNvSpPr/>
+          <p:nvPr/>
+        </p:nvSpPr>
+        <p:spPr>
+          <a:xfrm>
+            <a:off x="5699137" y="3418582"/>
+            <a:ext cx="234909" cy="201168"/>
+          </a:xfrm>
+          <a:prstGeom prst="rect">
+            <a:avLst/>
+          </a:prstGeom>
+          <a:noFill/>
+          <a:ln/>
+        </p:spPr>
+        <p:txBody>
+          <a:bodyPr wrap="square" lIns="0" tIns="0" rIns="0" bIns="0" rtlCol="0" anchor="ctr"/>
+          <a:lstStyle/>
+          <a:p>
+            <a:pPr algn="ctr" indent="0" marL="0">
+              <a:buNone/>
+            </a:pPr>
+            <a:r>
+              <a:rPr lang="en-US" sz="700" b="1" dirty="0">
+                <a:solidFill>
+                  <a:srgbClr val="FFFFFF"/>
+                </a:solidFill>
+                <a:latin typeface="Calibri" pitchFamily="34" charset="0"/>
+                <a:ea typeface="Calibri" pitchFamily="34" charset="-122"/>
+                <a:cs typeface="Calibri" pitchFamily="34" charset="-120"/>
+              </a:rPr>
+              <a:t>-1,073</a:t>
+            </a:r>
+            <a:endParaRPr lang="en-US" sz="700" dirty="0"/>
+          </a:p>
+        </p:txBody>
+      </p:sp>
+      <p:sp>
+        <p:nvSpPr>
+          <p:cNvPr id="53" name="Shape 49"/>
+          <p:cNvSpPr/>
+          <p:nvPr/>
+        </p:nvSpPr>
+        <p:spPr>
+          <a:xfrm>
+            <a:off x="6309289" y="3830682"/>
+            <a:ext cx="234909" cy="201168"/>
+          </a:xfrm>
+          <a:prstGeom prst="roundRect">
+            <a:avLst>
+              <a:gd name="adj" fmla="val 13636"/>
+            </a:avLst>
+          </a:prstGeom>
+          <a:solidFill>
+            <a:srgbClr val="7F7F7F"/>
+          </a:solidFill>
+          <a:ln w="12700">
+            <a:solidFill>
+              <a:srgbClr val="333333"/>
+            </a:solidFill>
+            <a:prstDash val="solid"/>
+          </a:ln>
+        </p:spPr>
+      </p:sp>
+      <p:sp>
+        <p:nvSpPr>
+          <p:cNvPr id="54" name="Text 50"/>
+          <p:cNvSpPr/>
+          <p:nvPr/>
+        </p:nvSpPr>
+        <p:spPr>
+          <a:xfrm>
+            <a:off x="6309289" y="3830682"/>
+            <a:ext cx="234909" cy="201168"/>
+          </a:xfrm>
+          <a:prstGeom prst="rect">
+            <a:avLst/>
+          </a:prstGeom>
+          <a:noFill/>
+          <a:ln/>
+        </p:spPr>
+        <p:txBody>
+          <a:bodyPr wrap="square" lIns="0" tIns="0" rIns="0" bIns="0" rtlCol="0" anchor="ctr"/>
+          <a:lstStyle/>
+          <a:p>
+            <a:pPr algn="ctr" indent="0" marL="0">
+              <a:buNone/>
+            </a:pPr>
+            <a:r>
+              <a:rPr lang="en-US" sz="700" b="1" dirty="0">
+                <a:solidFill>
+                  <a:srgbClr val="FFFFFF"/>
+                </a:solidFill>
+                <a:latin typeface="Calibri" pitchFamily="34" charset="0"/>
+                <a:ea typeface="Calibri" pitchFamily="34" charset="-122"/>
+                <a:cs typeface="Calibri" pitchFamily="34" charset="-120"/>
+              </a:rPr>
+              <a:t>-778</a:t>
+            </a:r>
+            <a:endParaRPr lang="en-US" sz="700" dirty="0"/>
+          </a:p>
+        </p:txBody>
+      </p:sp>
+      <p:sp>
+        <p:nvSpPr>
+          <p:cNvPr id="55" name="Shape 51"/>
+          <p:cNvSpPr/>
+          <p:nvPr/>
+        </p:nvSpPr>
+        <p:spPr>
+          <a:xfrm>
+            <a:off x="6919442" y="4081489"/>
+            <a:ext cx="234909" cy="201168"/>
+          </a:xfrm>
+          <a:prstGeom prst="roundRect">
+            <a:avLst>
+              <a:gd name="adj" fmla="val 13636"/>
+            </a:avLst>
+          </a:prstGeom>
+          <a:solidFill>
+            <a:srgbClr val="7F7F7F"/>
+          </a:solidFill>
+          <a:ln w="12700">
+            <a:solidFill>
+              <a:srgbClr val="333333"/>
+            </a:solidFill>
+            <a:prstDash val="solid"/>
+          </a:ln>
+        </p:spPr>
+      </p:sp>
+      <p:sp>
+        <p:nvSpPr>
+          <p:cNvPr id="56" name="Text 52"/>
+          <p:cNvSpPr/>
+          <p:nvPr/>
+        </p:nvSpPr>
+        <p:spPr>
+          <a:xfrm>
+            <a:off x="6919442" y="4081489"/>
+            <a:ext cx="234909" cy="201168"/>
+          </a:xfrm>
+          <a:prstGeom prst="rect">
+            <a:avLst/>
+          </a:prstGeom>
+          <a:noFill/>
+          <a:ln/>
+        </p:spPr>
+        <p:txBody>
+          <a:bodyPr wrap="square" lIns="0" tIns="0" rIns="0" bIns="0" rtlCol="0" anchor="ctr"/>
+          <a:lstStyle/>
+          <a:p>
+            <a:pPr algn="ctr" indent="0" marL="0">
+              <a:buNone/>
+            </a:pPr>
+            <a:r>
+              <a:rPr lang="en-US" sz="700" b="1" dirty="0">
+                <a:solidFill>
+                  <a:srgbClr val="FFFFFF"/>
+                </a:solidFill>
+                <a:latin typeface="Calibri" pitchFamily="34" charset="0"/>
+                <a:ea typeface="Calibri" pitchFamily="34" charset="-122"/>
+                <a:cs typeface="Calibri" pitchFamily="34" charset="-120"/>
+              </a:rPr>
+              <a:t>-474</a:t>
+            </a:r>
+            <a:endParaRPr lang="en-US" sz="700" dirty="0"/>
+          </a:p>
+        </p:txBody>
+      </p:sp>
+      <p:sp>
+        <p:nvSpPr>
+          <p:cNvPr id="57" name="Shape 53"/>
+          <p:cNvSpPr/>
+          <p:nvPr/>
+        </p:nvSpPr>
+        <p:spPr>
+          <a:xfrm>
+            <a:off x="7529594" y="4388488"/>
+            <a:ext cx="234909" cy="201168"/>
+          </a:xfrm>
+          <a:prstGeom prst="roundRect">
+            <a:avLst>
+              <a:gd name="adj" fmla="val 13636"/>
+            </a:avLst>
+          </a:prstGeom>
+          <a:solidFill>
+            <a:srgbClr val="7F7F7F"/>
+          </a:solidFill>
+          <a:ln w="12700">
+            <a:solidFill>
+              <a:srgbClr val="333333"/>
+            </a:solidFill>
+            <a:prstDash val="solid"/>
+          </a:ln>
+        </p:spPr>
+      </p:sp>
+      <p:sp>
+        <p:nvSpPr>
+          <p:cNvPr id="58" name="Text 54"/>
+          <p:cNvSpPr/>
+          <p:nvPr/>
+        </p:nvSpPr>
+        <p:spPr>
+          <a:xfrm>
+            <a:off x="7529594" y="4388488"/>
+            <a:ext cx="234909" cy="201168"/>
+          </a:xfrm>
+          <a:prstGeom prst="rect">
+            <a:avLst/>
+          </a:prstGeom>
+          <a:noFill/>
+          <a:ln/>
+        </p:spPr>
+        <p:txBody>
+          <a:bodyPr wrap="square" lIns="0" tIns="0" rIns="0" bIns="0" rtlCol="0" anchor="ctr"/>
+          <a:lstStyle/>
+          <a:p>
+            <a:pPr algn="ctr" indent="0" marL="0">
+              <a:buNone/>
+            </a:pPr>
+            <a:r>
+              <a:rPr lang="en-US" sz="700" b="1" dirty="0">
+                <a:solidFill>
+                  <a:srgbClr val="FFFFFF"/>
+                </a:solidFill>
+                <a:latin typeface="Calibri" pitchFamily="34" charset="0"/>
+                <a:ea typeface="Calibri" pitchFamily="34" charset="-122"/>
+                <a:cs typeface="Calibri" pitchFamily="34" charset="-120"/>
+              </a:rPr>
+              <a:t>-580</a:t>
+            </a:r>
+            <a:endParaRPr lang="en-US" sz="700" dirty="0"/>
+          </a:p>
+        </p:txBody>
+      </p:sp>
+      <p:sp>
+        <p:nvSpPr>
+          <p:cNvPr id="59" name="Shape 55"/>
+          <p:cNvSpPr/>
+          <p:nvPr/>
+        </p:nvSpPr>
+        <p:spPr>
+          <a:xfrm>
+            <a:off x="8139746" y="3994891"/>
+            <a:ext cx="234909" cy="201168"/>
+          </a:xfrm>
+          <a:prstGeom prst="roundRect">
+            <a:avLst>
+              <a:gd name="adj" fmla="val 13636"/>
+            </a:avLst>
+          </a:prstGeom>
+          <a:solidFill>
+            <a:srgbClr val="7F7F7F"/>
+          </a:solidFill>
+          <a:ln w="12700">
+            <a:solidFill>
+              <a:srgbClr val="333333"/>
+            </a:solidFill>
+            <a:prstDash val="solid"/>
+          </a:ln>
+        </p:spPr>
+      </p:sp>
+      <p:sp>
+        <p:nvSpPr>
+          <p:cNvPr id="60" name="Text 56"/>
+          <p:cNvSpPr/>
+          <p:nvPr/>
+        </p:nvSpPr>
+        <p:spPr>
+          <a:xfrm>
+            <a:off x="8139746" y="3994891"/>
+            <a:ext cx="234909" cy="201168"/>
+          </a:xfrm>
+          <a:prstGeom prst="rect">
+            <a:avLst/>
+          </a:prstGeom>
+          <a:noFill/>
+          <a:ln/>
+        </p:spPr>
+        <p:txBody>
+          <a:bodyPr wrap="square" lIns="0" tIns="0" rIns="0" bIns="0" rtlCol="0" anchor="ctr"/>
+          <a:lstStyle/>
+          <a:p>
+            <a:pPr algn="ctr" indent="0" marL="0">
+              <a:buNone/>
+            </a:pPr>
+            <a:r>
+              <a:rPr lang="en-US" sz="700" b="1" dirty="0">
+                <a:solidFill>
+                  <a:srgbClr val="FFFFFF"/>
+                </a:solidFill>
+                <a:latin typeface="Calibri" pitchFamily="34" charset="0"/>
+                <a:ea typeface="Calibri" pitchFamily="34" charset="-122"/>
+                <a:cs typeface="Calibri" pitchFamily="34" charset="-120"/>
+              </a:rPr>
+              <a:t>+294</a:t>
+            </a:r>
+            <a:endParaRPr lang="en-US" sz="700" dirty="0"/>
+          </a:p>
+        </p:txBody>
+      </p:sp>
+      <p:sp>
+        <p:nvSpPr>
+          <p:cNvPr id="61" name="Shape 57"/>
+          <p:cNvSpPr/>
+          <p:nvPr/>
+        </p:nvSpPr>
+        <p:spPr>
+          <a:xfrm>
+            <a:off x="8749898" y="3361602"/>
+            <a:ext cx="234909" cy="201168"/>
+          </a:xfrm>
+          <a:prstGeom prst="roundRect">
+            <a:avLst>
+              <a:gd name="adj" fmla="val 13636"/>
+            </a:avLst>
+          </a:prstGeom>
+          <a:solidFill>
+            <a:srgbClr val="7F7F7F"/>
+          </a:solidFill>
+          <a:ln w="12700">
+            <a:solidFill>
+              <a:srgbClr val="333333"/>
+            </a:solidFill>
+            <a:prstDash val="solid"/>
+          </a:ln>
+        </p:spPr>
+      </p:sp>
+      <p:sp>
+        <p:nvSpPr>
+          <p:cNvPr id="62" name="Text 58"/>
+          <p:cNvSpPr/>
+          <p:nvPr/>
+        </p:nvSpPr>
+        <p:spPr>
+          <a:xfrm>
+            <a:off x="8749898" y="3361602"/>
+            <a:ext cx="234909" cy="201168"/>
+          </a:xfrm>
+          <a:prstGeom prst="rect">
+            <a:avLst/>
+          </a:prstGeom>
+          <a:noFill/>
+          <a:ln/>
+        </p:spPr>
+        <p:txBody>
+          <a:bodyPr wrap="square" lIns="0" tIns="0" rIns="0" bIns="0" rtlCol="0" anchor="ctr"/>
+          <a:lstStyle/>
+          <a:p>
+            <a:pPr algn="ctr" indent="0" marL="0">
+              <a:buNone/>
+            </a:pPr>
+            <a:r>
+              <a:rPr lang="en-US" sz="700" b="1" dirty="0">
+                <a:solidFill>
+                  <a:srgbClr val="FFFFFF"/>
+                </a:solidFill>
+                <a:latin typeface="Calibri" pitchFamily="34" charset="0"/>
+                <a:ea typeface="Calibri" pitchFamily="34" charset="-122"/>
+                <a:cs typeface="Calibri" pitchFamily="34" charset="-120"/>
+              </a:rPr>
+              <a:t>+1,196</a:t>
+            </a:r>
+            <a:endParaRPr lang="en-US" sz="700" dirty="0"/>
+          </a:p>
+        </p:txBody>
+      </p:sp>
+      <p:sp>
+        <p:nvSpPr>
+          <p:cNvPr id="63" name="Shape 59"/>
+          <p:cNvSpPr/>
+          <p:nvPr/>
+        </p:nvSpPr>
+        <p:spPr>
+          <a:xfrm>
+            <a:off x="9360051" y="2522623"/>
+            <a:ext cx="234909" cy="201168"/>
+          </a:xfrm>
+          <a:prstGeom prst="roundRect">
+            <a:avLst>
+              <a:gd name="adj" fmla="val 13636"/>
+            </a:avLst>
+          </a:prstGeom>
+          <a:solidFill>
+            <a:srgbClr val="7F7F7F"/>
+          </a:solidFill>
+          <a:ln w="12700">
+            <a:solidFill>
+              <a:srgbClr val="333333"/>
+            </a:solidFill>
+            <a:prstDash val="solid"/>
+          </a:ln>
+        </p:spPr>
+      </p:sp>
+      <p:sp>
+        <p:nvSpPr>
+          <p:cNvPr id="64" name="Text 60"/>
+          <p:cNvSpPr/>
+          <p:nvPr/>
+        </p:nvSpPr>
+        <p:spPr>
+          <a:xfrm>
+            <a:off x="9360051" y="2522623"/>
+            <a:ext cx="234909" cy="201168"/>
+          </a:xfrm>
+          <a:prstGeom prst="rect">
+            <a:avLst/>
+          </a:prstGeom>
+          <a:noFill/>
+          <a:ln/>
+        </p:spPr>
+        <p:txBody>
+          <a:bodyPr wrap="square" lIns="0" tIns="0" rIns="0" bIns="0" rtlCol="0" anchor="ctr"/>
+          <a:lstStyle/>
+          <a:p>
+            <a:pPr algn="ctr" indent="0" marL="0">
+              <a:buNone/>
+            </a:pPr>
+            <a:r>
+              <a:rPr lang="en-US" sz="700" b="1" dirty="0">
+                <a:solidFill>
+                  <a:srgbClr val="FFFFFF"/>
+                </a:solidFill>
+                <a:latin typeface="Calibri" pitchFamily="34" charset="0"/>
+                <a:ea typeface="Calibri" pitchFamily="34" charset="-122"/>
+                <a:cs typeface="Calibri" pitchFamily="34" charset="-120"/>
+              </a:rPr>
+              <a:t>+1,584</a:t>
+            </a:r>
+            <a:endParaRPr lang="en-US" sz="700" dirty="0"/>
+          </a:p>
+        </p:txBody>
+      </p:sp>
+      <p:sp>
+        <p:nvSpPr>
+          <p:cNvPr id="65" name="Shape 61"/>
+          <p:cNvSpPr/>
+          <p:nvPr/>
+        </p:nvSpPr>
+        <p:spPr>
+          <a:xfrm>
+            <a:off x="9970203" y="2226395"/>
+            <a:ext cx="234909" cy="201168"/>
+          </a:xfrm>
+          <a:prstGeom prst="roundRect">
+            <a:avLst>
+              <a:gd name="adj" fmla="val 13636"/>
+            </a:avLst>
+          </a:prstGeom>
+          <a:solidFill>
+            <a:srgbClr val="7F7F7F"/>
+          </a:solidFill>
+          <a:ln w="12700">
+            <a:solidFill>
+              <a:srgbClr val="333333"/>
+            </a:solidFill>
+            <a:prstDash val="solid"/>
+          </a:ln>
+        </p:spPr>
+      </p:sp>
+      <p:sp>
+        <p:nvSpPr>
+          <p:cNvPr id="66" name="Text 62"/>
+          <p:cNvSpPr/>
+          <p:nvPr/>
+        </p:nvSpPr>
+        <p:spPr>
+          <a:xfrm>
+            <a:off x="9970203" y="2226395"/>
+            <a:ext cx="234909" cy="201168"/>
+          </a:xfrm>
+          <a:prstGeom prst="rect">
+            <a:avLst/>
+          </a:prstGeom>
+          <a:noFill/>
+          <a:ln/>
+        </p:spPr>
+        <p:txBody>
+          <a:bodyPr wrap="square" lIns="0" tIns="0" rIns="0" bIns="0" rtlCol="0" anchor="ctr"/>
+          <a:lstStyle/>
+          <a:p>
+            <a:pPr algn="ctr" indent="0" marL="0">
+              <a:buNone/>
+            </a:pPr>
+            <a:r>
+              <a:rPr lang="en-US" sz="700" b="1" dirty="0">
+                <a:solidFill>
+                  <a:srgbClr val="FFFFFF"/>
+                </a:solidFill>
+                <a:latin typeface="Calibri" pitchFamily="34" charset="0"/>
+                <a:ea typeface="Calibri" pitchFamily="34" charset="-122"/>
+                <a:cs typeface="Calibri" pitchFamily="34" charset="-120"/>
+              </a:rPr>
+              <a:t>+559</a:t>
+            </a:r>
+            <a:endParaRPr lang="en-US" sz="700" dirty="0"/>
+          </a:p>
+        </p:txBody>
+      </p:sp>
+      <p:sp>
+        <p:nvSpPr>
+          <p:cNvPr id="67" name="Shape 63"/>
+          <p:cNvSpPr/>
+          <p:nvPr/>
+        </p:nvSpPr>
+        <p:spPr>
+          <a:xfrm>
+            <a:off x="10580355" y="1447129"/>
+            <a:ext cx="234909" cy="201168"/>
+          </a:xfrm>
+          <a:prstGeom prst="roundRect">
+            <a:avLst>
+              <a:gd name="adj" fmla="val 13636"/>
+            </a:avLst>
+          </a:prstGeom>
+          <a:solidFill>
+            <a:srgbClr val="7F7F7F"/>
+          </a:solidFill>
+          <a:ln w="12700">
+            <a:solidFill>
+              <a:srgbClr val="333333"/>
+            </a:solidFill>
+            <a:prstDash val="solid"/>
+          </a:ln>
+        </p:spPr>
+      </p:sp>
+      <p:sp>
+        <p:nvSpPr>
+          <p:cNvPr id="68" name="Text 64"/>
+          <p:cNvSpPr/>
+          <p:nvPr/>
+        </p:nvSpPr>
+        <p:spPr>
+          <a:xfrm>
+            <a:off x="10580355" y="1447129"/>
+            <a:ext cx="234909" cy="201168"/>
+          </a:xfrm>
+          <a:prstGeom prst="rect">
+            <a:avLst/>
+          </a:prstGeom>
+          <a:noFill/>
+          <a:ln/>
+        </p:spPr>
+        <p:txBody>
+          <a:bodyPr wrap="square" lIns="0" tIns="0" rIns="0" bIns="0" rtlCol="0" anchor="ctr"/>
+          <a:lstStyle/>
+          <a:p>
+            <a:pPr algn="ctr" indent="0" marL="0">
+              <a:buNone/>
+            </a:pPr>
+            <a:r>
+              <a:rPr lang="en-US" sz="700" b="1" dirty="0">
+                <a:solidFill>
+                  <a:srgbClr val="FFFFFF"/>
+                </a:solidFill>
+                <a:latin typeface="Calibri" pitchFamily="34" charset="0"/>
+                <a:ea typeface="Calibri" pitchFamily="34" charset="-122"/>
+                <a:cs typeface="Calibri" pitchFamily="34" charset="-120"/>
+              </a:rPr>
+              <a:t>+1,472</a:t>
+            </a:r>
+            <a:endParaRPr lang="en-US" sz="700" dirty="0"/>
+          </a:p>
+        </p:txBody>
+      </p:sp>
+      <p:sp>
+        <p:nvSpPr>
+          <p:cNvPr id="69" name="Shape 65"/>
+          <p:cNvSpPr/>
+          <p:nvPr/>
+        </p:nvSpPr>
+        <p:spPr>
+          <a:xfrm>
+            <a:off x="11190507" y="1153973"/>
+            <a:ext cx="234909" cy="201168"/>
+          </a:xfrm>
+          <a:prstGeom prst="roundRect">
+            <a:avLst>
+              <a:gd name="adj" fmla="val 13636"/>
+            </a:avLst>
+          </a:prstGeom>
+          <a:solidFill>
+            <a:srgbClr val="7F7F7F"/>
+          </a:solidFill>
+          <a:ln w="12700">
+            <a:solidFill>
+              <a:srgbClr val="333333"/>
+            </a:solidFill>
+            <a:prstDash val="solid"/>
+          </a:ln>
+        </p:spPr>
+      </p:sp>
+      <p:sp>
+        <p:nvSpPr>
+          <p:cNvPr id="70" name="Text 66"/>
+          <p:cNvSpPr/>
+          <p:nvPr/>
+        </p:nvSpPr>
+        <p:spPr>
+          <a:xfrm>
+            <a:off x="11190507" y="1153973"/>
+            <a:ext cx="234909" cy="201168"/>
+          </a:xfrm>
+          <a:prstGeom prst="rect">
+            <a:avLst/>
+          </a:prstGeom>
+          <a:noFill/>
+          <a:ln/>
+        </p:spPr>
+        <p:txBody>
+          <a:bodyPr wrap="square" lIns="0" tIns="0" rIns="0" bIns="0" rtlCol="0" anchor="ctr"/>
+          <a:lstStyle/>
+          <a:p>
+            <a:pPr algn="ctr" indent="0" marL="0">
+              <a:buNone/>
+            </a:pPr>
+            <a:r>
+              <a:rPr lang="en-US" sz="700" b="1" dirty="0">
+                <a:solidFill>
+                  <a:srgbClr val="FFFFFF"/>
+                </a:solidFill>
+                <a:latin typeface="Calibri" pitchFamily="34" charset="0"/>
+                <a:ea typeface="Calibri" pitchFamily="34" charset="-122"/>
+                <a:cs typeface="Calibri" pitchFamily="34" charset="-120"/>
+              </a:rPr>
+              <a:t>+554</a:t>
+            </a:r>
+            <a:endParaRPr lang="en-US" sz="700" dirty="0"/>
+          </a:p>
+        </p:txBody>
+      </p:sp>
+      <p:sp>
+        <p:nvSpPr>
+          <p:cNvPr id="71" name="Shape 67"/>
+          <p:cNvSpPr/>
+          <p:nvPr/>
+        </p:nvSpPr>
+        <p:spPr>
+          <a:xfrm>
+            <a:off x="457200" y="5166360"/>
+            <a:ext cx="11274552" cy="274320"/>
+          </a:xfrm>
+          <a:prstGeom prst="rect">
+            <a:avLst/>
+          </a:prstGeom>
+          <a:solidFill>
+            <a:srgbClr val="F2F2F2"/>
+          </a:solidFill>
+          <a:ln w="6350">
+            <a:solidFill>
+              <a:srgbClr val="CCCCCC"/>
+            </a:solidFill>
+            <a:prstDash val="solid"/>
+          </a:ln>
+        </p:spPr>
+      </p:sp>
+      <p:sp>
+        <p:nvSpPr>
+          <p:cNvPr id="72" name="Text 68"/>
+          <p:cNvSpPr/>
+          <p:nvPr/>
+        </p:nvSpPr>
+        <p:spPr>
+          <a:xfrm>
+            <a:off x="594360" y="5166360"/>
+            <a:ext cx="11000232" cy="274320"/>
+          </a:xfrm>
+          <a:prstGeom prst="rect">
+            <a:avLst/>
+          </a:prstGeom>
+          <a:noFill/>
+          <a:ln/>
+        </p:spPr>
+        <p:txBody>
+          <a:bodyPr wrap="square" lIns="0" tIns="0" rIns="0" bIns="0" rtlCol="0" anchor="ctr"/>
+          <a:lstStyle/>
+          <a:p>
+            <a:pPr algn="l" indent="0" marL="0">
+              <a:buNone/>
+            </a:pPr>
+            <a:r>
+              <a:rPr lang="en-US" sz="1100" b="1" dirty="0">
+                <a:solidFill>
+                  <a:srgbClr val="213366"/>
+                </a:solidFill>
+                <a:latin typeface="Calibri" pitchFamily="34" charset="0"/>
+                <a:ea typeface="Calibri" pitchFamily="34" charset="-122"/>
+                <a:cs typeface="Calibri" pitchFamily="34" charset="-120"/>
+              </a:rPr>
+              <a:t>Period avg:  Raipur 729  |  NCR 1,582 INR/MT</a:t>
             </a:r>
             <a:endParaRPr lang="en-US" sz="1100" dirty="0"/>
           </a:p>
@@ -5740,7 +11375,7 @@
       </p:sp>
       <p:sp>
         <p:nvSpPr>
-          <p:cNvPr id="9" name="Text 5"/>
+          <p:cNvPr id="73" name="Text 69"/>
           <p:cNvSpPr/>
           <p:nvPr/>
         </p:nvSpPr>
@@ -5779,7 +11414,7 @@
       </p:sp>
       <p:sp>
         <p:nvSpPr>
-          <p:cNvPr id="10" name="Text 6"/>
+          <p:cNvPr id="74" name="Text 70"/>
           <p:cNvSpPr/>
           <p:nvPr/>
         </p:nvSpPr>

--- a/output/material_change_graphs.pptx
+++ b/output/material_change_graphs.pptx
@@ -179,67 +179,67 @@
                   </c:pt>
                   <c:pt idx="1">
                     <c:v>Jan'25
-(+700)</c:v>
+R:+700 | N:-300</c:v>
                   </c:pt>
                   <c:pt idx="2">
                     <c:v>Feb'25
-(+800)</c:v>
+R:+800 | N:+900</c:v>
                   </c:pt>
                   <c:pt idx="3">
                     <c:v>Mar'25
-(+600)</c:v>
+R:+600 | N:-500</c:v>
                   </c:pt>
                   <c:pt idx="4">
                     <c:v>Apr'25
-(-700)</c:v>
+R:-700 | N:+600</c:v>
                   </c:pt>
                   <c:pt idx="5">
                     <c:v>May'25
-(-900)</c:v>
+R:-900 | N:-1,000</c:v>
                   </c:pt>
                   <c:pt idx="6">
                     <c:v>Jun'25
-(-700)</c:v>
+R:-700 | N:-400</c:v>
                   </c:pt>
                   <c:pt idx="7">
                     <c:v>Jul'25
-(+100)</c:v>
+R:+100 | N:-500</c:v>
                   </c:pt>
                   <c:pt idx="8">
                     <c:v>Aug'25
-(+300)</c:v>
+R:+300 | N:-1,200</c:v>
                   </c:pt>
                   <c:pt idx="9">
                     <c:v>Sep'25
-(+300)</c:v>
+R:+300 | N:+700</c:v>
                   </c:pt>
                   <c:pt idx="10">
                     <c:v>Oct'25
-(-1,600)</c:v>
+R:-1,600 | N:-1,500</c:v>
                   </c:pt>
                   <c:pt idx="11">
                     <c:v>Nov'25
-(+800)</c:v>
+R:+800 | N:+1,900</c:v>
                   </c:pt>
                   <c:pt idx="12">
                     <c:v>Dec'25
-(+500)</c:v>
+R:+500 | N:-100</c:v>
                   </c:pt>
                   <c:pt idx="13">
                     <c:v>Jan'26
-(+2,250)</c:v>
+R:+2,250 | N:+2,700</c:v>
                   </c:pt>
                   <c:pt idx="14">
                     <c:v>Feb'26
-(-50)</c:v>
+R:-50 | N:-1,600</c:v>
                   </c:pt>
                   <c:pt idx="15">
                     <c:v>Mar'26
-(+800)</c:v>
+R:+800 | N:+1,700</c:v>
                   </c:pt>
                   <c:pt idx="16">
                     <c:v>Apr'26
-(+1,500)</c:v>
+R:+1,500 | N:+2,000</c:v>
                   </c:pt>
                 </c:lvl>
               </c:multiLvlStrCache>
@@ -362,67 +362,67 @@
                   </c:pt>
                   <c:pt idx="1">
                     <c:v>Jan'25
-(+700)</c:v>
+R:+700 | N:-300</c:v>
                   </c:pt>
                   <c:pt idx="2">
                     <c:v>Feb'25
-(+800)</c:v>
+R:+800 | N:+900</c:v>
                   </c:pt>
                   <c:pt idx="3">
                     <c:v>Mar'25
-(+600)</c:v>
+R:+600 | N:-500</c:v>
                   </c:pt>
                   <c:pt idx="4">
                     <c:v>Apr'25
-(-700)</c:v>
+R:-700 | N:+600</c:v>
                   </c:pt>
                   <c:pt idx="5">
                     <c:v>May'25
-(-900)</c:v>
+R:-900 | N:-1,000</c:v>
                   </c:pt>
                   <c:pt idx="6">
                     <c:v>Jun'25
-(-700)</c:v>
+R:-700 | N:-400</c:v>
                   </c:pt>
                   <c:pt idx="7">
                     <c:v>Jul'25
-(+100)</c:v>
+R:+100 | N:-500</c:v>
                   </c:pt>
                   <c:pt idx="8">
                     <c:v>Aug'25
-(+300)</c:v>
+R:+300 | N:-1,200</c:v>
                   </c:pt>
                   <c:pt idx="9">
                     <c:v>Sep'25
-(+300)</c:v>
+R:+300 | N:+700</c:v>
                   </c:pt>
                   <c:pt idx="10">
                     <c:v>Oct'25
-(-1,600)</c:v>
+R:-1,600 | N:-1,500</c:v>
                   </c:pt>
                   <c:pt idx="11">
                     <c:v>Nov'25
-(+800)</c:v>
+R:+800 | N:+1,900</c:v>
                   </c:pt>
                   <c:pt idx="12">
                     <c:v>Dec'25
-(+500)</c:v>
+R:+500 | N:-100</c:v>
                   </c:pt>
                   <c:pt idx="13">
                     <c:v>Jan'26
-(+2,250)</c:v>
+R:+2,250 | N:+2,700</c:v>
                   </c:pt>
                   <c:pt idx="14">
                     <c:v>Feb'26
-(-50)</c:v>
+R:-50 | N:-1,600</c:v>
                   </c:pt>
                   <c:pt idx="15">
                     <c:v>Mar'26
-(+800)</c:v>
+R:+800 | N:+1,700</c:v>
                   </c:pt>
                   <c:pt idx="16">
                     <c:v>Apr'26
-(+1,500)</c:v>
+R:+1,500 | N:+2,000</c:v>
                   </c:pt>
                 </c:lvl>
               </c:multiLvlStrCache>
@@ -664,9 +664,7 @@
     <c:autoTitleDeleted val="1"/>
     <c:plotArea>
       <c:layout/>
-      <c:barChart>
-        <c:barDir val="col"/>
-        <c:grouping val="clustered"/>
+      <c:lineChart>
         <c:varyColors val="0"/>
         <c:ser>
           <c:idx val="0"/>
@@ -686,6 +684,13 @@
             <a:solidFill>
               <a:srgbClr val="1565C0"/>
             </a:solidFill>
+            <a:ln w="25400" cap="flat">
+              <a:solidFill>
+                <a:srgbClr val="1565C0"/>
+              </a:solidFill>
+              <a:prstDash val="solid"/>
+              <a:round/>
+            </a:ln>
             <a:effectLst/>
           </c:spPr>
           <c:invertIfNegative val="0"/>
@@ -713,6 +718,23 @@
             <c:showBubbleSize val="0"/>
             <c:showLeaderLines val="0"/>
           </c:dLbls>
+          <c:marker>
+            <c:symbol val="circle"/>
+            <c:size val="6"/>
+            <c:spPr>
+              <a:solidFill>
+                <a:srgbClr val="1565C0"/>
+              </a:solidFill>
+              <a:ln w="9525" cap="flat">
+                <a:solidFill>
+                  <a:srgbClr val="1565C0"/>
+                </a:solidFill>
+                <a:prstDash val="solid"/>
+                <a:round/>
+              </a:ln>
+              <a:effectLst/>
+            </c:spPr>
+          </c:marker>
           <c:cat>
             <c:multiLvlStrRef>
               <c:f>Sheet1!$A$2:$A$18</c:f>
@@ -834,6 +856,7 @@
               </c:numCache>
             </c:numRef>
           </c:val>
+          <c:smooth val="0"/>
         </c:ser>
         <c:ser>
           <c:idx val="1"/>
@@ -853,6 +876,13 @@
             <a:solidFill>
               <a:srgbClr val="D32F2F"/>
             </a:solidFill>
+            <a:ln w="25400" cap="flat">
+              <a:solidFill>
+                <a:srgbClr val="D32F2F"/>
+              </a:solidFill>
+              <a:prstDash val="solid"/>
+              <a:round/>
+            </a:ln>
             <a:effectLst/>
           </c:spPr>
           <c:invertIfNegative val="0"/>
@@ -880,6 +910,23 @@
             <c:showBubbleSize val="0"/>
             <c:showLeaderLines val="0"/>
           </c:dLbls>
+          <c:marker>
+            <c:symbol val="circle"/>
+            <c:size val="6"/>
+            <c:spPr>
+              <a:solidFill>
+                <a:srgbClr val="D32F2F"/>
+              </a:solidFill>
+              <a:ln w="9525" cap="flat">
+                <a:solidFill>
+                  <a:srgbClr val="D32F2F"/>
+                </a:solidFill>
+                <a:prstDash val="solid"/>
+                <a:round/>
+              </a:ln>
+              <a:effectLst/>
+            </c:spPr>
+          </c:marker>
           <c:cat>
             <c:multiLvlStrRef>
               <c:f>Sheet1!$A$2:$A$18</c:f>
@@ -1001,6 +1048,7 @@
               </c:numCache>
             </c:numRef>
           </c:val>
+          <c:smooth val="0"/>
         </c:ser>
         <c:ser>
           <c:idx val="2"/>
@@ -1020,6 +1068,13 @@
             <a:solidFill>
               <a:srgbClr val="616161"/>
             </a:solidFill>
+            <a:ln w="25400" cap="flat">
+              <a:solidFill>
+                <a:srgbClr val="616161"/>
+              </a:solidFill>
+              <a:prstDash val="solid"/>
+              <a:round/>
+            </a:ln>
             <a:effectLst/>
           </c:spPr>
           <c:invertIfNegative val="0"/>
@@ -1047,6 +1102,23 @@
             <c:showBubbleSize val="0"/>
             <c:showLeaderLines val="0"/>
           </c:dLbls>
+          <c:marker>
+            <c:symbol val="circle"/>
+            <c:size val="6"/>
+            <c:spPr>
+              <a:solidFill>
+                <a:srgbClr val="616161"/>
+              </a:solidFill>
+              <a:ln w="9525" cap="flat">
+                <a:solidFill>
+                  <a:srgbClr val="616161"/>
+                </a:solidFill>
+                <a:prstDash val="solid"/>
+                <a:round/>
+              </a:ln>
+              <a:effectLst/>
+            </c:spPr>
+          </c:marker>
           <c:cat>
             <c:multiLvlStrRef>
               <c:f>Sheet1!$A$2:$A$18</c:f>
@@ -1168,39 +1240,8 @@
               </c:numCache>
             </c:numRef>
           </c:val>
+          <c:smooth val="0"/>
         </c:ser>
-        <c:dLbls>
-          <c:numFmt formatCode="#,##0" sourceLinked="0"/>
-          <c:txPr>
-            <a:bodyPr/>
-            <a:lstStyle/>
-            <a:p>
-              <a:pPr>
-                <a:defRPr b="0" i="0" strike="noStrike" sz="1200" u="none">
-                  <a:solidFill>
-                    <a:srgbClr val="000000"/>
-                  </a:solidFill>
-                  <a:latin typeface="Arial"/>
-                </a:defRPr>
-              </a:pPr>
-            </a:p>
-          </c:txPr>
-          <c:showLegendKey val="0"/>
-          <c:showVal val="0"/>
-          <c:showCatName val="0"/>
-          <c:showSerName val="0"/>
-          <c:showPercent val="0"/>
-          <c:showBubbleSize val="0"/>
-          <c:showLeaderLines val="0"/>
-        </c:dLbls>
-        <c:gapWidth val="150"/>
-        <c:overlap val="0"/>
-        <c:axId val="2094734554"/>
-        <c:axId val="2094734553"/>
-        <c:axId val="2094734556"/>
-      </c:barChart>
-      <c:lineChart>
-        <c:varyColors val="0"/>
         <c:ser>
           <c:idx val="3"/>
           <c:order val="3"/>
@@ -1219,7 +1260,7 @@
             <a:solidFill>
               <a:srgbClr val="FF8F00"/>
             </a:solidFill>
-            <a:ln w="31750" cap="flat">
+            <a:ln w="25400" cap="flat">
               <a:solidFill>
                 <a:srgbClr val="FF8F00"/>
               </a:solidFill>
@@ -1419,7 +1460,7 @@
         </c:dLbls>
         <c:marker val="1"/>
         <c:axId val="2094734554"/>
-        <c:axId val="2094734553"/>
+        <c:axId val="2094734552"/>
         <c:axId val="2094734556"/>
       </c:lineChart>
       <c:catAx>
@@ -1627,67 +1668,67 @@
                   </c:pt>
                   <c:pt idx="1">
                     <c:v>Jan'25
-(+97)</c:v>
+R:+97 | N:+263</c:v>
                   </c:pt>
                   <c:pt idx="2">
                     <c:v>Feb'25
-(-409)</c:v>
+R:-409 | N:-178</c:v>
                   </c:pt>
                   <c:pt idx="3">
                     <c:v>Mar'25
-(+220)</c:v>
+R:+220 | N:-523</c:v>
                   </c:pt>
                   <c:pt idx="4">
                     <c:v>Apr'25
-(+1,186)</c:v>
+R:+1,186 | N:+522</c:v>
                   </c:pt>
                   <c:pt idx="5">
                     <c:v>May'25
-(-154)</c:v>
+R:-154 | N:+149</c:v>
                   </c:pt>
                   <c:pt idx="6">
                     <c:v>Jun'25
-(-556)</c:v>
+R:-556 | N:+227</c:v>
                   </c:pt>
                   <c:pt idx="7">
                     <c:v>Jul'25
-(-2,075)</c:v>
+R:-2,075 | N:-1,465</c:v>
                   </c:pt>
                   <c:pt idx="8">
                     <c:v>Aug'25
-(+687)</c:v>
+R:+687 | N:+310</c:v>
                   </c:pt>
                   <c:pt idx="9">
                     <c:v>Sep'25
-(-1,291)</c:v>
+R:-1,291 | N:-467</c:v>
                   </c:pt>
                   <c:pt idx="10">
                     <c:v>Oct'25
-(+343)</c:v>
+R:+343 | N:+207</c:v>
                   </c:pt>
                   <c:pt idx="11">
                     <c:v>Nov'25
-(+244)</c:v>
+R:+244 | N:+256</c:v>
                   </c:pt>
                   <c:pt idx="12">
                     <c:v>Dec'25
-(+1,808)</c:v>
+R:+1,808 | N:+543</c:v>
                   </c:pt>
                   <c:pt idx="13">
                     <c:v>Jan'26
-(-185)</c:v>
+R:-185 | N:+812</c:v>
                   </c:pt>
                   <c:pt idx="14">
                     <c:v>Feb'26
-(-1,044)</c:v>
+R:-1,044 | N:-847</c:v>
                   </c:pt>
                   <c:pt idx="15">
                     <c:v>Mar'26
-(+1,121)</c:v>
+R:+1,121 | N:+278</c:v>
                   </c:pt>
                   <c:pt idx="16">
                     <c:v>Apr'26
-(-93)</c:v>
+R:-93 | N:-80</c:v>
                   </c:pt>
                 </c:lvl>
               </c:multiLvlStrCache>
@@ -1810,67 +1851,67 @@
                   </c:pt>
                   <c:pt idx="1">
                     <c:v>Jan'25
-(+97)</c:v>
+R:+97 | N:+263</c:v>
                   </c:pt>
                   <c:pt idx="2">
                     <c:v>Feb'25
-(-409)</c:v>
+R:-409 | N:-178</c:v>
                   </c:pt>
                   <c:pt idx="3">
                     <c:v>Mar'25
-(+220)</c:v>
+R:+220 | N:-523</c:v>
                   </c:pt>
                   <c:pt idx="4">
                     <c:v>Apr'25
-(+1,186)</c:v>
+R:+1,186 | N:+522</c:v>
                   </c:pt>
                   <c:pt idx="5">
                     <c:v>May'25
-(-154)</c:v>
+R:-154 | N:+149</c:v>
                   </c:pt>
                   <c:pt idx="6">
                     <c:v>Jun'25
-(-556)</c:v>
+R:-556 | N:+227</c:v>
                   </c:pt>
                   <c:pt idx="7">
                     <c:v>Jul'25
-(-2,075)</c:v>
+R:-2,075 | N:-1,465</c:v>
                   </c:pt>
                   <c:pt idx="8">
                     <c:v>Aug'25
-(+687)</c:v>
+R:+687 | N:+310</c:v>
                   </c:pt>
                   <c:pt idx="9">
                     <c:v>Sep'25
-(-1,291)</c:v>
+R:-1,291 | N:-467</c:v>
                   </c:pt>
                   <c:pt idx="10">
                     <c:v>Oct'25
-(+343)</c:v>
+R:+343 | N:+207</c:v>
                   </c:pt>
                   <c:pt idx="11">
                     <c:v>Nov'25
-(+244)</c:v>
+R:+244 | N:+256</c:v>
                   </c:pt>
                   <c:pt idx="12">
                     <c:v>Dec'25
-(+1,808)</c:v>
+R:+1,808 | N:+543</c:v>
                   </c:pt>
                   <c:pt idx="13">
                     <c:v>Jan'26
-(-185)</c:v>
+R:-185 | N:+812</c:v>
                   </c:pt>
                   <c:pt idx="14">
                     <c:v>Feb'26
-(-1,044)</c:v>
+R:-1,044 | N:-847</c:v>
                   </c:pt>
                   <c:pt idx="15">
                     <c:v>Mar'26
-(+1,121)</c:v>
+R:+1,121 | N:+278</c:v>
                   </c:pt>
                   <c:pt idx="16">
                     <c:v>Apr'26
-(-93)</c:v>
+R:-93 | N:-80</c:v>
                   </c:pt>
                 </c:lvl>
               </c:multiLvlStrCache>
@@ -2172,67 +2213,67 @@
                   </c:pt>
                   <c:pt idx="1">
                     <c:v>Jan'25
-(-153)</c:v>
+R:-153 | N:-135</c:v>
                   </c:pt>
                   <c:pt idx="2">
                     <c:v>Feb'25
-(-267)</c:v>
+R:-267 | N:+114</c:v>
                   </c:pt>
                   <c:pt idx="3">
                     <c:v>Mar'25
-(+965)</c:v>
+R:+965 | N:+975</c:v>
                   </c:pt>
                   <c:pt idx="4">
                     <c:v>Apr'25
-(+1,891)</c:v>
+R:+1,891 | N:+872</c:v>
                   </c:pt>
                   <c:pt idx="5">
                     <c:v>May'25
-(-994)</c:v>
+R:-994 | N:-791</c:v>
                   </c:pt>
                   <c:pt idx="6">
                     <c:v>Jun'25
-(-644)</c:v>
+R:-644 | N:-166</c:v>
                   </c:pt>
                   <c:pt idx="7">
                     <c:v>Jul'25
-(-2,746)</c:v>
+R:-2,746 | N:-1,073</c:v>
                   </c:pt>
                   <c:pt idx="8">
                     <c:v>Aug'25
-(+900)</c:v>
+R:+900 | N:-778</c:v>
                   </c:pt>
                   <c:pt idx="9">
                     <c:v>Sep'25
-(-1,149)</c:v>
+R:-1,149 | N:-474</c:v>
                   </c:pt>
                   <c:pt idx="10">
                     <c:v>Oct'25
-(-143)</c:v>
+R:-143 | N:-580</c:v>
                   </c:pt>
                   <c:pt idx="11">
                     <c:v>Nov'25
-(+436)</c:v>
+R:+436 | N:+294</c:v>
                   </c:pt>
                   <c:pt idx="12">
                     <c:v>Dec'25
-(+1,713)</c:v>
+R:+1,713 | N:+1,196</c:v>
                   </c:pt>
                   <c:pt idx="13">
                     <c:v>Jan'26
-(+536)</c:v>
+R:+536 | N:+1,584</c:v>
                   </c:pt>
                   <c:pt idx="14">
                     <c:v>Feb'26
-(-594)</c:v>
+R:-594 | N:+559</c:v>
                   </c:pt>
                   <c:pt idx="15">
                     <c:v>Mar'26
-(+1,920)</c:v>
+R:+1,920 | N:+1,472</c:v>
                   </c:pt>
                   <c:pt idx="16">
                     <c:v>Apr'26
-(+591)</c:v>
+R:+591 | N:+554</c:v>
                   </c:pt>
                 </c:lvl>
               </c:multiLvlStrCache>
@@ -2355,67 +2396,67 @@
                   </c:pt>
                   <c:pt idx="1">
                     <c:v>Jan'25
-(-153)</c:v>
+R:-153 | N:-135</c:v>
                   </c:pt>
                   <c:pt idx="2">
                     <c:v>Feb'25
-(-267)</c:v>
+R:-267 | N:+114</c:v>
                   </c:pt>
                   <c:pt idx="3">
                     <c:v>Mar'25
-(+965)</c:v>
+R:+965 | N:+975</c:v>
                   </c:pt>
                   <c:pt idx="4">
                     <c:v>Apr'25
-(+1,891)</c:v>
+R:+1,891 | N:+872</c:v>
                   </c:pt>
                   <c:pt idx="5">
                     <c:v>May'25
-(-994)</c:v>
+R:-994 | N:-791</c:v>
                   </c:pt>
                   <c:pt idx="6">
                     <c:v>Jun'25
-(-644)</c:v>
+R:-644 | N:-166</c:v>
                   </c:pt>
                   <c:pt idx="7">
                     <c:v>Jul'25
-(-2,746)</c:v>
+R:-2,746 | N:-1,073</c:v>
                   </c:pt>
                   <c:pt idx="8">
                     <c:v>Aug'25
-(+900)</c:v>
+R:+900 | N:-778</c:v>
                   </c:pt>
                   <c:pt idx="9">
                     <c:v>Sep'25
-(-1,149)</c:v>
+R:-1,149 | N:-474</c:v>
                   </c:pt>
                   <c:pt idx="10">
                     <c:v>Oct'25
-(-143)</c:v>
+R:-143 | N:-580</c:v>
                   </c:pt>
                   <c:pt idx="11">
                     <c:v>Nov'25
-(+436)</c:v>
+R:+436 | N:+294</c:v>
                   </c:pt>
                   <c:pt idx="12">
                     <c:v>Dec'25
-(+1,713)</c:v>
+R:+1,713 | N:+1,196</c:v>
                   </c:pt>
                   <c:pt idx="13">
                     <c:v>Jan'26
-(+536)</c:v>
+R:+536 | N:+1,584</c:v>
                   </c:pt>
                   <c:pt idx="14">
                     <c:v>Feb'26
-(-594)</c:v>
+R:-594 | N:+559</c:v>
                   </c:pt>
                   <c:pt idx="15">
                     <c:v>Mar'26
-(+1,920)</c:v>
+R:+1,920 | N:+1,472</c:v>
                   </c:pt>
                   <c:pt idx="16">
                     <c:v>Apr'26
-(+591)</c:v>
+R:+591 | N:+554</c:v>
                   </c:pt>
                 </c:lvl>
               </c:multiLvlStrCache>
@@ -4521,7 +4562,7 @@
                 <a:ea typeface="Calibri" pitchFamily="34" charset="-122"/>
                 <a:cs typeface="Calibri" pitchFamily="34" charset="-120"/>
               </a:rPr>
-              <a:t>Latest change:  Pallet DRI: +1,600 INR/MT  |  Pig Iron: +1,500 INR/MT  |  Iron Ore DRI: +1,750 INR/MT  |  Silico Manganese: +5.5 INR/kg</a:t>
+              <a:t>Latest change:  Pallet DRI: +1,600 INR/MT  |  Pig Iron: +1,500 INR/MT  |  Iron Ore DRI: +1,750 INR/MT  |  Silico Manganese: +5.5 INR/kg  •  Note: Silico Mn values in INR/kg (others in INR/MT)</a:t>
             </a:r>
             <a:endParaRPr lang="en-US" sz="1100" dirty="0"/>
           </a:p>

--- a/output/material_change_graphs.pptx
+++ b/output/material_change_graphs.pptx
@@ -1251,7 +1251,7 @@
               <c:strCache>
                 <c:ptCount val="1"/>
                 <c:pt idx="0">
-                  <c:v>Silico Manganese</c:v>
+                  <c:v>Silico Manganese (INR/kg × 400)</c:v>
                 </c:pt>
               </c:strCache>
             </c:strRef>
@@ -1379,55 +1379,55 @@
                 <c:formatCode>General</c:formatCode>
                 <c:ptCount val="17"/>
                 <c:pt idx="0">
-                  <c:v>65.5</c:v>
+                  <c:v>26200</c:v>
                 </c:pt>
                 <c:pt idx="1">
-                  <c:v>69.8</c:v>
+                  <c:v>27920</c:v>
                 </c:pt>
                 <c:pt idx="2">
-                  <c:v>71.4</c:v>
+                  <c:v>28560.000000000004</c:v>
                 </c:pt>
                 <c:pt idx="3">
-                  <c:v>73</c:v>
+                  <c:v>29200</c:v>
                 </c:pt>
                 <c:pt idx="4">
-                  <c:v>70.8</c:v>
+                  <c:v>28320</c:v>
                 </c:pt>
                 <c:pt idx="5">
-                  <c:v>72.2</c:v>
+                  <c:v>28880</c:v>
                 </c:pt>
                 <c:pt idx="6">
-                  <c:v>72.3</c:v>
+                  <c:v>28920</c:v>
                 </c:pt>
                 <c:pt idx="7">
-                  <c:v>72.3</c:v>
+                  <c:v>28920</c:v>
                 </c:pt>
                 <c:pt idx="8">
-                  <c:v>69.9</c:v>
+                  <c:v>27960.000000000004</c:v>
                 </c:pt>
                 <c:pt idx="9">
-                  <c:v>69.9</c:v>
+                  <c:v>27960.000000000004</c:v>
                 </c:pt>
                 <c:pt idx="10">
-                  <c:v>72</c:v>
+                  <c:v>28800</c:v>
                 </c:pt>
                 <c:pt idx="11">
-                  <c:v>69.9</c:v>
+                  <c:v>27960.000000000004</c:v>
                 </c:pt>
                 <c:pt idx="12">
-                  <c:v>69.3</c:v>
+                  <c:v>27720</c:v>
                 </c:pt>
                 <c:pt idx="13">
-                  <c:v>73.1</c:v>
+                  <c:v>29239.999999999996</c:v>
                 </c:pt>
                 <c:pt idx="14">
-                  <c:v>73.2</c:v>
+                  <c:v>29280</c:v>
                 </c:pt>
                 <c:pt idx="15">
-                  <c:v>75.5</c:v>
+                  <c:v>30200</c:v>
                 </c:pt>
                 <c:pt idx="16">
-                  <c:v>81</c:v>
+                  <c:v>32400</c:v>
                 </c:pt>
               </c:numCache>
             </c:numRef>
@@ -4408,7 +4408,7 @@
                 <a:ea typeface="Calibri" pitchFamily="34" charset="-122"/>
                 <a:cs typeface="Calibri" pitchFamily="34" charset="-120"/>
               </a:rPr>
-              <a:t>Raw Materials — Raipur — INR/MT / INR/kg</a:t>
+              <a:t>Raw Materials — Raipur — INR/MT</a:t>
             </a:r>
             <a:endParaRPr lang="en-US" sz="2000" dirty="0"/>
           </a:p>
@@ -4562,7 +4562,7 @@
                 <a:ea typeface="Calibri" pitchFamily="34" charset="-122"/>
                 <a:cs typeface="Calibri" pitchFamily="34" charset="-120"/>
               </a:rPr>
-              <a:t>Latest change:  Pallet DRI: +1,600 INR/MT  |  Pig Iron: +1,500 INR/MT  |  Iron Ore DRI: +1,750 INR/MT  |  Silico Manganese: +5.5 INR/kg  •  Note: Silico Mn values in INR/kg (others in INR/MT)</a:t>
+              <a:t>Latest change:  Pallet DRI: +1,600 INR/MT  |  Pig Iron: +1,500 INR/MT  |  Iron Ore DRI: +1,750 INR/MT  |  Silico Manganese: +5.5 INR/kg</a:t>
             </a:r>
             <a:endParaRPr lang="en-US" sz="1100" dirty="0"/>
           </a:p>

--- a/output/material_change_graphs.pptx
+++ b/output/material_change_graphs.pptx
@@ -1251,7 +1251,7 @@
               <c:strCache>
                 <c:ptCount val="1"/>
                 <c:pt idx="0">
-                  <c:v>Silico Manganese (INR/kg × 400)</c:v>
+                  <c:v>Silico Manganese (INR/kg)</c:v>
                 </c:pt>
               </c:strCache>
             </c:strRef>

--- a/output/material_change_graphs.pptx
+++ b/output/material_change_graphs.pptx
@@ -239,7 +239,7 @@
                   </c:pt>
                   <c:pt idx="16">
                     <c:v>Apr'26
-R:+1,500 | N:+2,000</c:v>
+R:+1,800 | N:+2,800</c:v>
                   </c:pt>
                 </c:lvl>
               </c:multiLvlStrCache>
@@ -300,7 +300,7 @@
                   <c:v>34500</c:v>
                 </c:pt>
                 <c:pt idx="16">
-                  <c:v>36000</c:v>
+                  <c:v>36300</c:v>
                 </c:pt>
               </c:numCache>
             </c:numRef>
@@ -422,7 +422,7 @@
                   </c:pt>
                   <c:pt idx="16">
                     <c:v>Apr'26
-R:+1,500 | N:+2,000</c:v>
+R:+1,800 | N:+2,800</c:v>
                   </c:pt>
                 </c:lvl>
               </c:multiLvlStrCache>
@@ -483,7 +483,7 @@
                   <c:v>34500</c:v>
                 </c:pt>
                 <c:pt idx="16">
-                  <c:v>36500</c:v>
+                  <c:v>37300</c:v>
                 </c:pt>
               </c:numCache>
             </c:numRef>
@@ -851,7 +851,7 @@
                   <c:v>25800</c:v>
                 </c:pt>
                 <c:pt idx="16">
-                  <c:v>27400</c:v>
+                  <c:v>27050</c:v>
                 </c:pt>
               </c:numCache>
             </c:numRef>
@@ -1043,7 +1043,7 @@
                   <c:v>37050</c:v>
                 </c:pt>
                 <c:pt idx="16">
-                  <c:v>38550</c:v>
+                  <c:v>39700</c:v>
                 </c:pt>
               </c:numCache>
             </c:numRef>
@@ -1235,7 +1235,7 @@
                   <c:v>29650</c:v>
                 </c:pt>
                 <c:pt idx="16">
-                  <c:v>31400</c:v>
+                  <c:v>31000</c:v>
                 </c:pt>
               </c:numCache>
             </c:numRef>
@@ -1427,7 +1427,7 @@
                   <c:v>30200</c:v>
                 </c:pt>
                 <c:pt idx="16">
-                  <c:v>32400</c:v>
+                  <c:v>34840</c:v>
                 </c:pt>
               </c:numCache>
             </c:numRef>
@@ -1728,7 +1728,7 @@
                   </c:pt>
                   <c:pt idx="16">
                     <c:v>Apr'26
-R:-93 | N:-80</c:v>
+R:+239 | N:+340</c:v>
                   </c:pt>
                 </c:lvl>
               </c:multiLvlStrCache>
@@ -1789,7 +1789,7 @@
                   <c:v>509.7</c:v>
                 </c:pt>
                 <c:pt idx="16">
-                  <c:v>416.63</c:v>
+                  <c:v>748.29</c:v>
                 </c:pt>
               </c:numCache>
             </c:numRef>
@@ -1911,7 +1911,7 @@
                   </c:pt>
                   <c:pt idx="16">
                     <c:v>Apr'26
-R:-93 | N:-80</c:v>
+R:+239 | N:+340</c:v>
                   </c:pt>
                 </c:lvl>
               </c:multiLvlStrCache>
@@ -1972,7 +1972,7 @@
                   <c:v>172.45</c:v>
                 </c:pt>
                 <c:pt idx="16">
-                  <c:v>92.68</c:v>
+                  <c:v>512.16</c:v>
                 </c:pt>
               </c:numCache>
             </c:numRef>
@@ -2273,7 +2273,7 @@
                   </c:pt>
                   <c:pt idx="16">
                     <c:v>Apr'26
-R:+591 | N:+554</c:v>
+R:+273 | N:+669</c:v>
                   </c:pt>
                 </c:lvl>
               </c:multiLvlStrCache>
@@ -2334,7 +2334,7 @@
                   <c:v>2456.18</c:v>
                 </c:pt>
                 <c:pt idx="16">
-                  <c:v>3047.16</c:v>
+                  <c:v>2729.48</c:v>
                 </c:pt>
               </c:numCache>
             </c:numRef>
@@ -2456,7 +2456,7 @@
                   </c:pt>
                   <c:pt idx="16">
                     <c:v>Apr'26
-R:+591 | N:+554</c:v>
+R:+273 | N:+669</c:v>
                   </c:pt>
                 </c:lvl>
               </c:multiLvlStrCache>
@@ -2517,7 +2517,7 @@
                   <c:v>4245.83</c:v>
                 </c:pt>
                 <c:pt idx="16">
-                  <c:v>4799.42</c:v>
+                  <c:v>4915.05</c:v>
                 </c:pt>
               </c:numCache>
             </c:numRef>
@@ -3995,7 +3995,7 @@
                 <a:ea typeface="Calibri" pitchFamily="34" charset="-122"/>
                 <a:cs typeface="Calibri" pitchFamily="34" charset="-120"/>
               </a:rPr>
-              <a:t>Period: 2024-12-12 to 2026-04-02  |  17 months</a:t>
+              <a:t>Period: 2024-12-12 to 2026-04-10  |  17 months</a:t>
             </a:r>
             <a:endParaRPr lang="en-US" sz="1200" dirty="0"/>
           </a:p>
@@ -4259,7 +4259,7 @@
                 <a:ea typeface="Calibri" pitchFamily="34" charset="-122"/>
                 <a:cs typeface="Calibri" pitchFamily="34" charset="-120"/>
               </a:rPr>
-              <a:t>Latest:  Raipur +1,500  |  NCR +2,000     •     Avg:  Raipur 32,368  |  NCR 32,788 INR/MT</a:t>
+              <a:t>Latest:  Raipur +1,800  |  NCR +2,800     •     Avg:  Raipur 32,385  |  NCR 32,835 INR/MT</a:t>
             </a:r>
             <a:endParaRPr lang="en-US" sz="1100" dirty="0"/>
           </a:p>
@@ -4562,7 +4562,7 @@
                 <a:ea typeface="Calibri" pitchFamily="34" charset="-122"/>
                 <a:cs typeface="Calibri" pitchFamily="34" charset="-120"/>
               </a:rPr>
-              <a:t>Latest change:  Pallet DRI: +1,600 INR/MT  |  Pig Iron: +1,500 INR/MT  |  Iron Ore DRI: +1,750 INR/MT  |  Silico Manganese: +5.5 INR/kg</a:t>
+              <a:t>Latest change:  Pallet DRI: +1,250 INR/MT  |  Pig Iron: +2,650 INR/MT  |  Iron Ore DRI: +1,350 INR/MT  |  Silico Manganese: +11.6 INR/kg</a:t>
             </a:r>
             <a:endParaRPr lang="en-US" sz="1100" dirty="0"/>
           </a:p>
@@ -4865,7 +4865,7 @@
                 <a:ea typeface="Calibri" pitchFamily="34" charset="-122"/>
                 <a:cs typeface="Calibri" pitchFamily="34" charset="-120"/>
               </a:rPr>
-              <a:t>Latest:  Raipur -93  |  NCR -80     •     Avg:  Raipur 62  |  NCR -116 INR/MT</a:t>
+              <a:t>Latest:  Raipur +239  |  NCR +340     •     Avg:  Raipur 81  |  NCR -91 INR/MT</a:t>
             </a:r>
             <a:endParaRPr lang="en-US" sz="1100" dirty="0"/>
           </a:p>
@@ -5168,7 +5168,7 @@
                 <a:ea typeface="Calibri" pitchFamily="34" charset="-122"/>
                 <a:cs typeface="Calibri" pitchFamily="34" charset="-120"/>
               </a:rPr>
-              <a:t>Latest:  Raipur +591  |  NCR +554     •     Avg:  Raipur 729  |  NCR 1,582 INR/MT</a:t>
+              <a:t>Latest:  Raipur +273  |  NCR +669     •     Avg:  Raipur 711  |  NCR 1,589 INR/MT</a:t>
             </a:r>
             <a:endParaRPr lang="en-US" sz="1100" dirty="0"/>
           </a:p>

--- a/output/material_change_graphs.pptx
+++ b/output/material_change_graphs.pptx
@@ -170,9 +170,9 @@
           </c:dLbls>
           <c:cat>
             <c:multiLvlStrRef>
-              <c:f>Sheet1!$A$2:$A$18</c:f>
+              <c:f>Sheet1!$A$2:$A$19</c:f>
               <c:multiLvlStrCache>
-                <c:ptCount val="17"/>
+                <c:ptCount val="18"/>
                 <c:lvl>
                   <c:pt idx="0">
                     <c:v>Dec'24</c:v>
@@ -239,7 +239,11 @@
                   </c:pt>
                   <c:pt idx="16">
                     <c:v>Apr'26
-R:+1,800 | N:+2,800</c:v>
+R:+1,100 | N:+1,300</c:v>
+                  </c:pt>
+                  <c:pt idx="17">
+                    <c:v>May'26
+R:-1,100 | N:-1,600</c:v>
                   </c:pt>
                 </c:lvl>
               </c:multiLvlStrCache>
@@ -247,10 +251,10 @@
           </c:cat>
           <c:val>
             <c:numRef>
-              <c:f>Sheet1!$B$2:$B$18</c:f>
+              <c:f>Sheet1!$B$2:$B$19</c:f>
               <c:numCache>
                 <c:formatCode>General</c:formatCode>
-                <c:ptCount val="17"/>
+                <c:ptCount val="18"/>
                 <c:pt idx="0">
                   <c:v>31300</c:v>
                 </c:pt>
@@ -300,7 +304,10 @@
                   <c:v>34500</c:v>
                 </c:pt>
                 <c:pt idx="16">
-                  <c:v>36300</c:v>
+                  <c:v>35600</c:v>
+                </c:pt>
+                <c:pt idx="17">
+                  <c:v>34500</c:v>
                 </c:pt>
               </c:numCache>
             </c:numRef>
@@ -353,9 +360,9 @@
           </c:dLbls>
           <c:cat>
             <c:multiLvlStrRef>
-              <c:f>Sheet1!$A$2:$A$18</c:f>
+              <c:f>Sheet1!$A$2:$A$19</c:f>
               <c:multiLvlStrCache>
-                <c:ptCount val="17"/>
+                <c:ptCount val="18"/>
                 <c:lvl>
                   <c:pt idx="0">
                     <c:v>Dec'24</c:v>
@@ -422,7 +429,11 @@
                   </c:pt>
                   <c:pt idx="16">
                     <c:v>Apr'26
-R:+1,800 | N:+2,800</c:v>
+R:+1,100 | N:+1,300</c:v>
+                  </c:pt>
+                  <c:pt idx="17">
+                    <c:v>May'26
+R:-1,100 | N:-1,600</c:v>
                   </c:pt>
                 </c:lvl>
               </c:multiLvlStrCache>
@@ -430,10 +441,10 @@
           </c:cat>
           <c:val>
             <c:numRef>
-              <c:f>Sheet1!$C$2:$C$18</c:f>
+              <c:f>Sheet1!$C$2:$C$19</c:f>
               <c:numCache>
                 <c:formatCode>General</c:formatCode>
-                <c:ptCount val="17"/>
+                <c:ptCount val="18"/>
                 <c:pt idx="0">
                   <c:v>33100</c:v>
                 </c:pt>
@@ -483,7 +494,10 @@
                   <c:v>34500</c:v>
                 </c:pt>
                 <c:pt idx="16">
-                  <c:v>37300</c:v>
+                  <c:v>35800</c:v>
+                </c:pt>
+                <c:pt idx="17">
+                  <c:v>34200</c:v>
                 </c:pt>
               </c:numCache>
             </c:numRef>
@@ -737,9 +751,9 @@
           </c:marker>
           <c:cat>
             <c:multiLvlStrRef>
-              <c:f>Sheet1!$A$2:$A$18</c:f>
+              <c:f>Sheet1!$A$2:$A$19</c:f>
               <c:multiLvlStrCache>
-                <c:ptCount val="17"/>
+                <c:ptCount val="18"/>
                 <c:lvl>
                   <c:pt idx="0">
                     <c:v>Dec'24</c:v>
@@ -791,6 +805,9 @@
                   </c:pt>
                   <c:pt idx="16">
                     <c:v>Apr'26</c:v>
+                  </c:pt>
+                  <c:pt idx="17">
+                    <c:v>May'26</c:v>
                   </c:pt>
                 </c:lvl>
               </c:multiLvlStrCache>
@@ -798,10 +815,10 @@
           </c:cat>
           <c:val>
             <c:numRef>
-              <c:f>Sheet1!$B$2:$B$18</c:f>
+              <c:f>Sheet1!$B$2:$B$19</c:f>
               <c:numCache>
                 <c:formatCode>General</c:formatCode>
-                <c:ptCount val="17"/>
+                <c:ptCount val="18"/>
                 <c:pt idx="0">
                   <c:v>24200</c:v>
                 </c:pt>
@@ -851,7 +868,10 @@
                   <c:v>25800</c:v>
                 </c:pt>
                 <c:pt idx="16">
-                  <c:v>27050</c:v>
+                  <c:v>25550</c:v>
+                </c:pt>
+                <c:pt idx="17">
+                  <c:v>25000</c:v>
                 </c:pt>
               </c:numCache>
             </c:numRef>
@@ -929,9 +949,9 @@
           </c:marker>
           <c:cat>
             <c:multiLvlStrRef>
-              <c:f>Sheet1!$A$2:$A$18</c:f>
+              <c:f>Sheet1!$A$2:$A$19</c:f>
               <c:multiLvlStrCache>
-                <c:ptCount val="17"/>
+                <c:ptCount val="18"/>
                 <c:lvl>
                   <c:pt idx="0">
                     <c:v>Dec'24</c:v>
@@ -983,6 +1003,9 @@
                   </c:pt>
                   <c:pt idx="16">
                     <c:v>Apr'26</c:v>
+                  </c:pt>
+                  <c:pt idx="17">
+                    <c:v>May'26</c:v>
                   </c:pt>
                 </c:lvl>
               </c:multiLvlStrCache>
@@ -990,10 +1013,10 @@
           </c:cat>
           <c:val>
             <c:numRef>
-              <c:f>Sheet1!$C$2:$C$18</c:f>
+              <c:f>Sheet1!$C$2:$C$19</c:f>
               <c:numCache>
                 <c:formatCode>General</c:formatCode>
-                <c:ptCount val="17"/>
+                <c:ptCount val="18"/>
                 <c:pt idx="0">
                   <c:v>32550</c:v>
                 </c:pt>
@@ -1044,6 +1067,9 @@
                 </c:pt>
                 <c:pt idx="16">
                   <c:v>39700</c:v>
+                </c:pt>
+                <c:pt idx="17">
+                  <c:v>38950</c:v>
                 </c:pt>
               </c:numCache>
             </c:numRef>
@@ -1121,9 +1147,9 @@
           </c:marker>
           <c:cat>
             <c:multiLvlStrRef>
-              <c:f>Sheet1!$A$2:$A$18</c:f>
+              <c:f>Sheet1!$A$2:$A$19</c:f>
               <c:multiLvlStrCache>
-                <c:ptCount val="17"/>
+                <c:ptCount val="18"/>
                 <c:lvl>
                   <c:pt idx="0">
                     <c:v>Dec'24</c:v>
@@ -1175,6 +1201,9 @@
                   </c:pt>
                   <c:pt idx="16">
                     <c:v>Apr'26</c:v>
+                  </c:pt>
+                  <c:pt idx="17">
+                    <c:v>May'26</c:v>
                   </c:pt>
                 </c:lvl>
               </c:multiLvlStrCache>
@@ -1182,10 +1211,10 @@
           </c:cat>
           <c:val>
             <c:numRef>
-              <c:f>Sheet1!$D$2:$D$18</c:f>
+              <c:f>Sheet1!$D$2:$D$19</c:f>
               <c:numCache>
                 <c:formatCode>General</c:formatCode>
-                <c:ptCount val="17"/>
+                <c:ptCount val="18"/>
                 <c:pt idx="0">
                   <c:v>28800</c:v>
                 </c:pt>
@@ -1235,7 +1264,10 @@
                   <c:v>29650</c:v>
                 </c:pt>
                 <c:pt idx="16">
-                  <c:v>31000</c:v>
+                  <c:v>29800</c:v>
+                </c:pt>
+                <c:pt idx="17">
+                  <c:v>29250</c:v>
                 </c:pt>
               </c:numCache>
             </c:numRef>
@@ -1313,9 +1345,9 @@
           </c:marker>
           <c:cat>
             <c:multiLvlStrRef>
-              <c:f>Sheet1!$A$2:$A$18</c:f>
+              <c:f>Sheet1!$A$2:$A$19</c:f>
               <c:multiLvlStrCache>
-                <c:ptCount val="17"/>
+                <c:ptCount val="18"/>
                 <c:lvl>
                   <c:pt idx="0">
                     <c:v>Dec'24</c:v>
@@ -1367,6 +1399,9 @@
                   </c:pt>
                   <c:pt idx="16">
                     <c:v>Apr'26</c:v>
+                  </c:pt>
+                  <c:pt idx="17">
+                    <c:v>May'26</c:v>
                   </c:pt>
                 </c:lvl>
               </c:multiLvlStrCache>
@@ -1374,10 +1409,10 @@
           </c:cat>
           <c:val>
             <c:numRef>
-              <c:f>Sheet1!$E$2:$E$18</c:f>
+              <c:f>Sheet1!$E$2:$E$19</c:f>
               <c:numCache>
                 <c:formatCode>General</c:formatCode>
-                <c:ptCount val="17"/>
+                <c:ptCount val="18"/>
                 <c:pt idx="0">
                   <c:v>26200</c:v>
                 </c:pt>
@@ -1427,7 +1462,10 @@
                   <c:v>30200</c:v>
                 </c:pt>
                 <c:pt idx="16">
-                  <c:v>34840</c:v>
+                  <c:v>31920</c:v>
+                </c:pt>
+                <c:pt idx="17">
+                  <c:v>30000</c:v>
                 </c:pt>
               </c:numCache>
             </c:numRef>
@@ -1659,9 +1697,9 @@
           </c:dLbls>
           <c:cat>
             <c:multiLvlStrRef>
-              <c:f>Sheet1!$A$2:$A$18</c:f>
+              <c:f>Sheet1!$A$2:$A$19</c:f>
               <c:multiLvlStrCache>
-                <c:ptCount val="17"/>
+                <c:ptCount val="18"/>
                 <c:lvl>
                   <c:pt idx="0">
                     <c:v>Dec'24</c:v>
@@ -1728,7 +1766,11 @@
                   </c:pt>
                   <c:pt idx="16">
                     <c:v>Apr'26
-R:+239 | N:+340</c:v>
+R:+732 | N:+45</c:v>
+                  </c:pt>
+                  <c:pt idx="17">
+                    <c:v>May'26
+R:-1,939 | N:-889</c:v>
                   </c:pt>
                 </c:lvl>
               </c:multiLvlStrCache>
@@ -1736,10 +1778,10 @@
           </c:cat>
           <c:val>
             <c:numRef>
-              <c:f>Sheet1!$B$2:$B$18</c:f>
+              <c:f>Sheet1!$B$2:$B$19</c:f>
               <c:numCache>
                 <c:formatCode>General</c:formatCode>
-                <c:ptCount val="17"/>
+                <c:ptCount val="18"/>
                 <c:pt idx="0">
                   <c:v>518.69</c:v>
                 </c:pt>
@@ -1789,7 +1831,10 @@
                   <c:v>509.7</c:v>
                 </c:pt>
                 <c:pt idx="16">
-                  <c:v>748.29</c:v>
+                  <c:v>1241.26</c:v>
+                </c:pt>
+                <c:pt idx="17">
+                  <c:v>-698.23</c:v>
                 </c:pt>
               </c:numCache>
             </c:numRef>
@@ -1842,9 +1887,9 @@
           </c:dLbls>
           <c:cat>
             <c:multiLvlStrRef>
-              <c:f>Sheet1!$A$2:$A$18</c:f>
+              <c:f>Sheet1!$A$2:$A$19</c:f>
               <c:multiLvlStrCache>
-                <c:ptCount val="17"/>
+                <c:ptCount val="18"/>
                 <c:lvl>
                   <c:pt idx="0">
                     <c:v>Dec'24</c:v>
@@ -1911,7 +1956,11 @@
                   </c:pt>
                   <c:pt idx="16">
                     <c:v>Apr'26
-R:+239 | N:+340</c:v>
+R:+732 | N:+45</c:v>
+                  </c:pt>
+                  <c:pt idx="17">
+                    <c:v>May'26
+R:-1,939 | N:-889</c:v>
                   </c:pt>
                 </c:lvl>
               </c:multiLvlStrCache>
@@ -1919,10 +1968,10 @@
           </c:cat>
           <c:val>
             <c:numRef>
-              <c:f>Sheet1!$C$2:$C$18</c:f>
+              <c:f>Sheet1!$C$2:$C$19</c:f>
               <c:numCache>
                 <c:formatCode>General</c:formatCode>
-                <c:ptCount val="17"/>
+                <c:ptCount val="18"/>
                 <c:pt idx="0">
                   <c:v>85.71</c:v>
                 </c:pt>
@@ -1972,7 +2021,10 @@
                   <c:v>172.45</c:v>
                 </c:pt>
                 <c:pt idx="16">
-                  <c:v>512.16</c:v>
+                  <c:v>217.12</c:v>
+                </c:pt>
+                <c:pt idx="17">
+                  <c:v>-672.04</c:v>
                 </c:pt>
               </c:numCache>
             </c:numRef>
@@ -2204,9 +2256,9 @@
           </c:dLbls>
           <c:cat>
             <c:multiLvlStrRef>
-              <c:f>Sheet1!$A$2:$A$18</c:f>
+              <c:f>Sheet1!$A$2:$A$19</c:f>
               <c:multiLvlStrCache>
-                <c:ptCount val="17"/>
+                <c:ptCount val="18"/>
                 <c:lvl>
                   <c:pt idx="0">
                     <c:v>Dec'24</c:v>
@@ -2273,7 +2325,11 @@
                   </c:pt>
                   <c:pt idx="16">
                     <c:v>Apr'26
-R:+273 | N:+669</c:v>
+R:+179 | N:-2,213</c:v>
+                  </c:pt>
+                  <c:pt idx="17">
+                    <c:v>May'26
+R:-2,983 | N:-1,429</c:v>
                   </c:pt>
                 </c:lvl>
               </c:multiLvlStrCache>
@@ -2281,10 +2337,10 @@
           </c:cat>
           <c:val>
             <c:numRef>
-              <c:f>Sheet1!$B$2:$B$18</c:f>
+              <c:f>Sheet1!$B$2:$B$19</c:f>
               <c:numCache>
                 <c:formatCode>General</c:formatCode>
-                <c:ptCount val="17"/>
+                <c:ptCount val="18"/>
                 <c:pt idx="0">
                   <c:v>785.24</c:v>
                 </c:pt>
@@ -2334,7 +2390,10 @@
                   <c:v>2456.18</c:v>
                 </c:pt>
                 <c:pt idx="16">
-                  <c:v>2729.48</c:v>
+                  <c:v>2635.19</c:v>
+                </c:pt>
+                <c:pt idx="17">
+                  <c:v>-347.82</c:v>
                 </c:pt>
               </c:numCache>
             </c:numRef>
@@ -2387,9 +2446,9 @@
           </c:dLbls>
           <c:cat>
             <c:multiLvlStrRef>
-              <c:f>Sheet1!$A$2:$A$18</c:f>
+              <c:f>Sheet1!$A$2:$A$19</c:f>
               <c:multiLvlStrCache>
-                <c:ptCount val="17"/>
+                <c:ptCount val="18"/>
                 <c:lvl>
                   <c:pt idx="0">
                     <c:v>Dec'24</c:v>
@@ -2456,7 +2515,11 @@
                   </c:pt>
                   <c:pt idx="16">
                     <c:v>Apr'26
-R:+273 | N:+669</c:v>
+R:+179 | N:-2,213</c:v>
+                  </c:pt>
+                  <c:pt idx="17">
+                    <c:v>May'26
+R:-2,983 | N:-1,429</c:v>
                   </c:pt>
                 </c:lvl>
               </c:multiLvlStrCache>
@@ -2464,10 +2527,10 @@
           </c:cat>
           <c:val>
             <c:numRef>
-              <c:f>Sheet1!$C$2:$C$18</c:f>
+              <c:f>Sheet1!$C$2:$C$19</c:f>
               <c:numCache>
                 <c:formatCode>General</c:formatCode>
-                <c:ptCount val="17"/>
+                <c:ptCount val="18"/>
                 <c:pt idx="0">
                   <c:v>1176.79</c:v>
                 </c:pt>
@@ -2517,7 +2580,10 @@
                   <c:v>4245.83</c:v>
                 </c:pt>
                 <c:pt idx="16">
-                  <c:v>4915.05</c:v>
+                  <c:v>2032.86</c:v>
+                </c:pt>
+                <c:pt idx="17">
+                  <c:v>603.78</c:v>
                 </c:pt>
               </c:numCache>
             </c:numRef>
@@ -3995,7 +4061,7 @@
                 <a:ea typeface="Calibri" pitchFamily="34" charset="-122"/>
                 <a:cs typeface="Calibri" pitchFamily="34" charset="-120"/>
               </a:rPr>
-              <a:t>Period: 2024-12-12 to 2026-04-10  |  17 months</a:t>
+              <a:t>Period: 2024-12-12 to 2026-05-21  |  18 months</a:t>
             </a:r>
             <a:endParaRPr lang="en-US" sz="1200" dirty="0"/>
           </a:p>
@@ -4259,7 +4325,7 @@
                 <a:ea typeface="Calibri" pitchFamily="34" charset="-122"/>
                 <a:cs typeface="Calibri" pitchFamily="34" charset="-120"/>
               </a:rPr>
-              <a:t>Latest:  Raipur +1,800  |  NCR +2,800     •     Avg:  Raipur 32,385  |  NCR 32,835 INR/MT</a:t>
+              <a:t>Latest:  Raipur -1,100  |  NCR -1,600     •     Avg:  Raipur 32,464  |  NCR 32,828 INR/MT</a:t>
             </a:r>
             <a:endParaRPr lang="en-US" sz="1100" dirty="0"/>
           </a:p>
@@ -4562,7 +4628,7 @@
                 <a:ea typeface="Calibri" pitchFamily="34" charset="-122"/>
                 <a:cs typeface="Calibri" pitchFamily="34" charset="-120"/>
               </a:rPr>
-              <a:t>Latest change:  Pallet DRI: +1,250 INR/MT  |  Pig Iron: +2,650 INR/MT  |  Iron Ore DRI: +1,350 INR/MT  |  Silico Manganese: +11.6 INR/kg</a:t>
+              <a:t>Latest change:  Pallet DRI: -550 INR/MT  |  Pig Iron: -750 INR/MT  |  Iron Ore DRI: -550 INR/MT  |  Silico Manganese: -4.8 INR/kg</a:t>
             </a:r>
             <a:endParaRPr lang="en-US" sz="1100" dirty="0"/>
           </a:p>
@@ -4865,7 +4931,7 @@
                 <a:ea typeface="Calibri" pitchFamily="34" charset="-122"/>
                 <a:cs typeface="Calibri" pitchFamily="34" charset="-120"/>
               </a:rPr>
-              <a:t>Latest:  Raipur +239  |  NCR +340     •     Avg:  Raipur 81  |  NCR -91 INR/MT</a:t>
+              <a:t>Latest:  Raipur -1,939  |  NCR -889     •     Avg:  Raipur 65  |  NCR -140 INR/MT</a:t>
             </a:r>
             <a:endParaRPr lang="en-US" sz="1100" dirty="0"/>
           </a:p>
@@ -5168,7 +5234,7 @@
                 <a:ea typeface="Calibri" pitchFamily="34" charset="-122"/>
                 <a:cs typeface="Calibri" pitchFamily="34" charset="-120"/>
               </a:rPr>
-              <a:t>Latest:  Raipur +273  |  NCR +669     •     Avg:  Raipur 711  |  NCR 1,589 INR/MT</a:t>
+              <a:t>Latest:  Raipur -2,983  |  NCR -1,429     •     Avg:  Raipur 647  |  NCR 1,374 INR/MT</a:t>
             </a:r>
             <a:endParaRPr lang="en-US" sz="1100" dirty="0"/>
           </a:p>

--- a/output/material_change_graphs.pptx
+++ b/output/material_change_graphs.pptx
@@ -243,7 +243,7 @@
                   </c:pt>
                   <c:pt idx="17">
                     <c:v>May'26
-R:-1,100 | N:-1,600</c:v>
+R:-700 | N:-900</c:v>
                   </c:pt>
                 </c:lvl>
               </c:multiLvlStrCache>
@@ -307,7 +307,7 @@
                   <c:v>35600</c:v>
                 </c:pt>
                 <c:pt idx="17">
-                  <c:v>34500</c:v>
+                  <c:v>34900</c:v>
                 </c:pt>
               </c:numCache>
             </c:numRef>
@@ -433,7 +433,7 @@
                   </c:pt>
                   <c:pt idx="17">
                     <c:v>May'26
-R:-1,100 | N:-1,600</c:v>
+R:-700 | N:-900</c:v>
                   </c:pt>
                 </c:lvl>
               </c:multiLvlStrCache>
@@ -497,7 +497,7 @@
                   <c:v>35800</c:v>
                 </c:pt>
                 <c:pt idx="17">
-                  <c:v>34200</c:v>
+                  <c:v>34900</c:v>
                 </c:pt>
               </c:numCache>
             </c:numRef>
@@ -871,7 +871,7 @@
                   <c:v>25550</c:v>
                 </c:pt>
                 <c:pt idx="17">
-                  <c:v>25000</c:v>
+                  <c:v>25250</c:v>
                 </c:pt>
               </c:numCache>
             </c:numRef>
@@ -1069,7 +1069,7 @@
                   <c:v>39700</c:v>
                 </c:pt>
                 <c:pt idx="17">
-                  <c:v>38950</c:v>
+                  <c:v>38350</c:v>
                 </c:pt>
               </c:numCache>
             </c:numRef>
@@ -1267,7 +1267,7 @@
                   <c:v>29800</c:v>
                 </c:pt>
                 <c:pt idx="17">
-                  <c:v>29250</c:v>
+                  <c:v>29700</c:v>
                 </c:pt>
               </c:numCache>
             </c:numRef>
@@ -1465,7 +1465,7 @@
                   <c:v>31920</c:v>
                 </c:pt>
                 <c:pt idx="17">
-                  <c:v>30000</c:v>
+                  <c:v>29680</c:v>
                 </c:pt>
               </c:numCache>
             </c:numRef>
@@ -1770,7 +1770,7 @@
                   </c:pt>
                   <c:pt idx="17">
                     <c:v>May'26
-R:-1,939 | N:-889</c:v>
+R:-1,859 | N:-636</c:v>
                   </c:pt>
                 </c:lvl>
               </c:multiLvlStrCache>
@@ -1834,7 +1834,7 @@
                   <c:v>1241.26</c:v>
                 </c:pt>
                 <c:pt idx="17">
-                  <c:v>-698.23</c:v>
+                  <c:v>-618.18</c:v>
                 </c:pt>
               </c:numCache>
             </c:numRef>
@@ -1960,7 +1960,7 @@
                   </c:pt>
                   <c:pt idx="17">
                     <c:v>May'26
-R:-1,939 | N:-889</c:v>
+R:-1,859 | N:-636</c:v>
                   </c:pt>
                 </c:lvl>
               </c:multiLvlStrCache>
@@ -2024,7 +2024,7 @@
                   <c:v>217.12</c:v>
                 </c:pt>
                 <c:pt idx="17">
-                  <c:v>-672.04</c:v>
+                  <c:v>-419.08</c:v>
                 </c:pt>
               </c:numCache>
             </c:numRef>
@@ -2329,7 +2329,7 @@
                   </c:pt>
                   <c:pt idx="17">
                     <c:v>May'26
-R:-2,983 | N:-1,429</c:v>
+R:-2,805 | N:-379</c:v>
                   </c:pt>
                 </c:lvl>
               </c:multiLvlStrCache>
@@ -2393,7 +2393,7 @@
                   <c:v>2635.19</c:v>
                 </c:pt>
                 <c:pt idx="17">
-                  <c:v>-347.82</c:v>
+                  <c:v>-169.52</c:v>
                 </c:pt>
               </c:numCache>
             </c:numRef>
@@ -2519,7 +2519,7 @@
                   </c:pt>
                   <c:pt idx="17">
                     <c:v>May'26
-R:-2,983 | N:-1,429</c:v>
+R:-2,805 | N:-379</c:v>
                   </c:pt>
                 </c:lvl>
               </c:multiLvlStrCache>
@@ -2583,7 +2583,7 @@
                   <c:v>2032.86</c:v>
                 </c:pt>
                 <c:pt idx="17">
-                  <c:v>603.78</c:v>
+                  <c:v>1653.57</c:v>
                 </c:pt>
               </c:numCache>
             </c:numRef>
@@ -4061,7 +4061,7 @@
                 <a:ea typeface="Calibri" pitchFamily="34" charset="-122"/>
                 <a:cs typeface="Calibri" pitchFamily="34" charset="-120"/>
               </a:rPr>
-              <a:t>Period: 2024-12-12 to 2026-05-21  |  18 months</a:t>
+              <a:t>Period: 2024-12-12 to 2026-05-28  |  18 months</a:t>
             </a:r>
             <a:endParaRPr lang="en-US" sz="1200" dirty="0"/>
           </a:p>
@@ -4325,7 +4325,7 @@
                 <a:ea typeface="Calibri" pitchFamily="34" charset="-122"/>
                 <a:cs typeface="Calibri" pitchFamily="34" charset="-120"/>
               </a:rPr>
-              <a:t>Latest:  Raipur -1,100  |  NCR -1,600     •     Avg:  Raipur 32,464  |  NCR 32,828 INR/MT</a:t>
+              <a:t>Latest:  Raipur -700  |  NCR -900     •     Avg:  Raipur 32,486  |  NCR 32,867 INR/MT</a:t>
             </a:r>
             <a:endParaRPr lang="en-US" sz="1100" dirty="0"/>
           </a:p>
@@ -4628,7 +4628,7 @@
                 <a:ea typeface="Calibri" pitchFamily="34" charset="-122"/>
                 <a:cs typeface="Calibri" pitchFamily="34" charset="-120"/>
               </a:rPr>
-              <a:t>Latest change:  Pallet DRI: -550 INR/MT  |  Pig Iron: -750 INR/MT  |  Iron Ore DRI: -550 INR/MT  |  Silico Manganese: -4.8 INR/kg</a:t>
+              <a:t>Latest change:  Pallet DRI: -300 INR/MT  |  Pig Iron: -1,350 INR/MT  |  Iron Ore DRI: -100 INR/MT  |  Silico Manganese: -5.6 INR/kg</a:t>
             </a:r>
             <a:endParaRPr lang="en-US" sz="1100" dirty="0"/>
           </a:p>
@@ -4931,7 +4931,7 @@
                 <a:ea typeface="Calibri" pitchFamily="34" charset="-122"/>
                 <a:cs typeface="Calibri" pitchFamily="34" charset="-120"/>
               </a:rPr>
-              <a:t>Latest:  Raipur -1,939  |  NCR -889     •     Avg:  Raipur 65  |  NCR -140 INR/MT</a:t>
+              <a:t>Latest:  Raipur -1,859  |  NCR -636     •     Avg:  Raipur 70  |  NCR -126 INR/MT</a:t>
             </a:r>
             <a:endParaRPr lang="en-US" sz="1100" dirty="0"/>
           </a:p>
@@ -5234,7 +5234,7 @@
                 <a:ea typeface="Calibri" pitchFamily="34" charset="-122"/>
                 <a:cs typeface="Calibri" pitchFamily="34" charset="-120"/>
               </a:rPr>
-              <a:t>Latest:  Raipur -2,983  |  NCR -1,429     •     Avg:  Raipur 647  |  NCR 1,374 INR/MT</a:t>
+              <a:t>Latest:  Raipur -2,805  |  NCR -379     •     Avg:  Raipur 657  |  NCR 1,432 INR/MT</a:t>
             </a:r>
             <a:endParaRPr lang="en-US" sz="1100" dirty="0"/>
           </a:p>

--- a/output/material_change_graphs.pptx
+++ b/output/material_change_graphs.pptx
@@ -170,9 +170,9 @@
           </c:dLbls>
           <c:cat>
             <c:multiLvlStrRef>
-              <c:f>Sheet1!$A$2:$A$19</c:f>
+              <c:f>Sheet1!$A$2:$A$21</c:f>
               <c:multiLvlStrCache>
-                <c:ptCount val="18"/>
+                <c:ptCount val="20"/>
                 <c:lvl>
                   <c:pt idx="0">
                     <c:v>Dec'24</c:v>
@@ -244,6 +244,14 @@
                   <c:pt idx="17">
                     <c:v>May'26
 R:-700 | N:-900</c:v>
+                  </c:pt>
+                  <c:pt idx="18">
+                    <c:v>Jun'26
+R:-600 | N:+0.00</c:v>
+                  </c:pt>
+                  <c:pt idx="19">
+                    <c:v>Jul'26
+R:-300 | N:-1,400</c:v>
                   </c:pt>
                 </c:lvl>
               </c:multiLvlStrCache>
@@ -251,10 +259,10 @@
           </c:cat>
           <c:val>
             <c:numRef>
-              <c:f>Sheet1!$B$2:$B$19</c:f>
+              <c:f>Sheet1!$B$2:$B$21</c:f>
               <c:numCache>
                 <c:formatCode>General</c:formatCode>
-                <c:ptCount val="18"/>
+                <c:ptCount val="20"/>
                 <c:pt idx="0">
                   <c:v>31300</c:v>
                 </c:pt>
@@ -308,6 +316,12 @@
                 </c:pt>
                 <c:pt idx="17">
                   <c:v>34900</c:v>
+                </c:pt>
+                <c:pt idx="18">
+                  <c:v>34300</c:v>
+                </c:pt>
+                <c:pt idx="19">
+                  <c:v>34000</c:v>
                 </c:pt>
               </c:numCache>
             </c:numRef>
@@ -360,9 +374,9 @@
           </c:dLbls>
           <c:cat>
             <c:multiLvlStrRef>
-              <c:f>Sheet1!$A$2:$A$19</c:f>
+              <c:f>Sheet1!$A$2:$A$21</c:f>
               <c:multiLvlStrCache>
-                <c:ptCount val="18"/>
+                <c:ptCount val="20"/>
                 <c:lvl>
                   <c:pt idx="0">
                     <c:v>Dec'24</c:v>
@@ -434,6 +448,14 @@
                   <c:pt idx="17">
                     <c:v>May'26
 R:-700 | N:-900</c:v>
+                  </c:pt>
+                  <c:pt idx="18">
+                    <c:v>Jun'26
+R:-600 | N:+0.00</c:v>
+                  </c:pt>
+                  <c:pt idx="19">
+                    <c:v>Jul'26
+R:-300 | N:-1,400</c:v>
                   </c:pt>
                 </c:lvl>
               </c:multiLvlStrCache>
@@ -441,10 +463,10 @@
           </c:cat>
           <c:val>
             <c:numRef>
-              <c:f>Sheet1!$C$2:$C$19</c:f>
+              <c:f>Sheet1!$C$2:$C$21</c:f>
               <c:numCache>
                 <c:formatCode>General</c:formatCode>
-                <c:ptCount val="18"/>
+                <c:ptCount val="20"/>
                 <c:pt idx="0">
                   <c:v>33100</c:v>
                 </c:pt>
@@ -498,6 +520,12 @@
                 </c:pt>
                 <c:pt idx="17">
                   <c:v>34900</c:v>
+                </c:pt>
+                <c:pt idx="18">
+                  <c:v>34900</c:v>
+                </c:pt>
+                <c:pt idx="19">
+                  <c:v>33500</c:v>
                 </c:pt>
               </c:numCache>
             </c:numRef>
@@ -751,9 +779,9 @@
           </c:marker>
           <c:cat>
             <c:multiLvlStrRef>
-              <c:f>Sheet1!$A$2:$A$19</c:f>
+              <c:f>Sheet1!$A$2:$A$21</c:f>
               <c:multiLvlStrCache>
-                <c:ptCount val="18"/>
+                <c:ptCount val="20"/>
                 <c:lvl>
                   <c:pt idx="0">
                     <c:v>Dec'24</c:v>
@@ -808,6 +836,12 @@
                   </c:pt>
                   <c:pt idx="17">
                     <c:v>May'26</c:v>
+                  </c:pt>
+                  <c:pt idx="18">
+                    <c:v>Jun'26</c:v>
+                  </c:pt>
+                  <c:pt idx="19">
+                    <c:v>Jul'26</c:v>
                   </c:pt>
                 </c:lvl>
               </c:multiLvlStrCache>
@@ -815,10 +849,10 @@
           </c:cat>
           <c:val>
             <c:numRef>
-              <c:f>Sheet1!$B$2:$B$19</c:f>
+              <c:f>Sheet1!$B$2:$B$21</c:f>
               <c:numCache>
                 <c:formatCode>General</c:formatCode>
-                <c:ptCount val="18"/>
+                <c:ptCount val="20"/>
                 <c:pt idx="0">
                   <c:v>24200</c:v>
                 </c:pt>
@@ -872,6 +906,12 @@
                 </c:pt>
                 <c:pt idx="17">
                   <c:v>25250</c:v>
+                </c:pt>
+                <c:pt idx="18">
+                  <c:v>24150</c:v>
+                </c:pt>
+                <c:pt idx="19">
+                  <c:v>23100</c:v>
                 </c:pt>
               </c:numCache>
             </c:numRef>
@@ -949,9 +989,9 @@
           </c:marker>
           <c:cat>
             <c:multiLvlStrRef>
-              <c:f>Sheet1!$A$2:$A$19</c:f>
+              <c:f>Sheet1!$A$2:$A$21</c:f>
               <c:multiLvlStrCache>
-                <c:ptCount val="18"/>
+                <c:ptCount val="20"/>
                 <c:lvl>
                   <c:pt idx="0">
                     <c:v>Dec'24</c:v>
@@ -1006,6 +1046,12 @@
                   </c:pt>
                   <c:pt idx="17">
                     <c:v>May'26</c:v>
+                  </c:pt>
+                  <c:pt idx="18">
+                    <c:v>Jun'26</c:v>
+                  </c:pt>
+                  <c:pt idx="19">
+                    <c:v>Jul'26</c:v>
                   </c:pt>
                 </c:lvl>
               </c:multiLvlStrCache>
@@ -1013,10 +1059,10 @@
           </c:cat>
           <c:val>
             <c:numRef>
-              <c:f>Sheet1!$C$2:$C$19</c:f>
+              <c:f>Sheet1!$C$2:$C$21</c:f>
               <c:numCache>
                 <c:formatCode>General</c:formatCode>
-                <c:ptCount val="18"/>
+                <c:ptCount val="20"/>
                 <c:pt idx="0">
                   <c:v>32550</c:v>
                 </c:pt>
@@ -1070,6 +1116,12 @@
                 </c:pt>
                 <c:pt idx="17">
                   <c:v>38350</c:v>
+                </c:pt>
+                <c:pt idx="18">
+                  <c:v>37150</c:v>
+                </c:pt>
+                <c:pt idx="19">
+                  <c:v>37550</c:v>
                 </c:pt>
               </c:numCache>
             </c:numRef>
@@ -1147,9 +1199,9 @@
           </c:marker>
           <c:cat>
             <c:multiLvlStrRef>
-              <c:f>Sheet1!$A$2:$A$19</c:f>
+              <c:f>Sheet1!$A$2:$A$21</c:f>
               <c:multiLvlStrCache>
-                <c:ptCount val="18"/>
+                <c:ptCount val="20"/>
                 <c:lvl>
                   <c:pt idx="0">
                     <c:v>Dec'24</c:v>
@@ -1204,6 +1256,12 @@
                   </c:pt>
                   <c:pt idx="17">
                     <c:v>May'26</c:v>
+                  </c:pt>
+                  <c:pt idx="18">
+                    <c:v>Jun'26</c:v>
+                  </c:pt>
+                  <c:pt idx="19">
+                    <c:v>Jul'26</c:v>
                   </c:pt>
                 </c:lvl>
               </c:multiLvlStrCache>
@@ -1211,10 +1269,10 @@
           </c:cat>
           <c:val>
             <c:numRef>
-              <c:f>Sheet1!$D$2:$D$19</c:f>
+              <c:f>Sheet1!$D$2:$D$21</c:f>
               <c:numCache>
                 <c:formatCode>General</c:formatCode>
-                <c:ptCount val="18"/>
+                <c:ptCount val="20"/>
                 <c:pt idx="0">
                   <c:v>28800</c:v>
                 </c:pt>
@@ -1268,6 +1326,12 @@
                 </c:pt>
                 <c:pt idx="17">
                   <c:v>29700</c:v>
+                </c:pt>
+                <c:pt idx="18">
+                  <c:v>28250</c:v>
+                </c:pt>
+                <c:pt idx="19">
+                  <c:v>27100</c:v>
                 </c:pt>
               </c:numCache>
             </c:numRef>
@@ -1345,9 +1409,9 @@
           </c:marker>
           <c:cat>
             <c:multiLvlStrRef>
-              <c:f>Sheet1!$A$2:$A$19</c:f>
+              <c:f>Sheet1!$A$2:$A$21</c:f>
               <c:multiLvlStrCache>
-                <c:ptCount val="18"/>
+                <c:ptCount val="20"/>
                 <c:lvl>
                   <c:pt idx="0">
                     <c:v>Dec'24</c:v>
@@ -1402,6 +1466,12 @@
                   </c:pt>
                   <c:pt idx="17">
                     <c:v>May'26</c:v>
+                  </c:pt>
+                  <c:pt idx="18">
+                    <c:v>Jun'26</c:v>
+                  </c:pt>
+                  <c:pt idx="19">
+                    <c:v>Jul'26</c:v>
                   </c:pt>
                 </c:lvl>
               </c:multiLvlStrCache>
@@ -1409,10 +1479,10 @@
           </c:cat>
           <c:val>
             <c:numRef>
-              <c:f>Sheet1!$E$2:$E$19</c:f>
+              <c:f>Sheet1!$E$2:$E$21</c:f>
               <c:numCache>
                 <c:formatCode>General</c:formatCode>
-                <c:ptCount val="18"/>
+                <c:ptCount val="20"/>
                 <c:pt idx="0">
                   <c:v>26200</c:v>
                 </c:pt>
@@ -1466,6 +1536,12 @@
                 </c:pt>
                 <c:pt idx="17">
                   <c:v>29680</c:v>
+                </c:pt>
+                <c:pt idx="18">
+                  <c:v>30880</c:v>
+                </c:pt>
+                <c:pt idx="19">
+                  <c:v>30360.000000000004</c:v>
                 </c:pt>
               </c:numCache>
             </c:numRef>
@@ -1697,9 +1773,9 @@
           </c:dLbls>
           <c:cat>
             <c:multiLvlStrRef>
-              <c:f>Sheet1!$A$2:$A$19</c:f>
+              <c:f>Sheet1!$A$2:$A$21</c:f>
               <c:multiLvlStrCache>
-                <c:ptCount val="18"/>
+                <c:ptCount val="20"/>
                 <c:lvl>
                   <c:pt idx="0">
                     <c:v>Dec'24</c:v>
@@ -1771,6 +1847,14 @@
                   <c:pt idx="17">
                     <c:v>May'26
 R:-1,859 | N:-636</c:v>
+                  </c:pt>
+                  <c:pt idx="18">
+                    <c:v>Jun'26
+R:+831 | N:+340</c:v>
+                  </c:pt>
+                  <c:pt idx="19">
+                    <c:v>Jul'26
+R:-72 | N:+101</c:v>
                   </c:pt>
                 </c:lvl>
               </c:multiLvlStrCache>
@@ -1778,10 +1862,10 @@
           </c:cat>
           <c:val>
             <c:numRef>
-              <c:f>Sheet1!$B$2:$B$19</c:f>
+              <c:f>Sheet1!$B$2:$B$21</c:f>
               <c:numCache>
                 <c:formatCode>General</c:formatCode>
-                <c:ptCount val="18"/>
+                <c:ptCount val="20"/>
                 <c:pt idx="0">
                   <c:v>518.69</c:v>
                 </c:pt>
@@ -1835,6 +1919,12 @@
                 </c:pt>
                 <c:pt idx="17">
                   <c:v>-618.18</c:v>
+                </c:pt>
+                <c:pt idx="18">
+                  <c:v>213.13</c:v>
+                </c:pt>
+                <c:pt idx="19">
+                  <c:v>140.93</c:v>
                 </c:pt>
               </c:numCache>
             </c:numRef>
@@ -1887,9 +1977,9 @@
           </c:dLbls>
           <c:cat>
             <c:multiLvlStrRef>
-              <c:f>Sheet1!$A$2:$A$19</c:f>
+              <c:f>Sheet1!$A$2:$A$21</c:f>
               <c:multiLvlStrCache>
-                <c:ptCount val="18"/>
+                <c:ptCount val="20"/>
                 <c:lvl>
                   <c:pt idx="0">
                     <c:v>Dec'24</c:v>
@@ -1961,6 +2051,14 @@
                   <c:pt idx="17">
                     <c:v>May'26
 R:-1,859 | N:-636</c:v>
+                  </c:pt>
+                  <c:pt idx="18">
+                    <c:v>Jun'26
+R:+831 | N:+340</c:v>
+                  </c:pt>
+                  <c:pt idx="19">
+                    <c:v>Jul'26
+R:-72 | N:+101</c:v>
                   </c:pt>
                 </c:lvl>
               </c:multiLvlStrCache>
@@ -1968,10 +2066,10 @@
           </c:cat>
           <c:val>
             <c:numRef>
-              <c:f>Sheet1!$C$2:$C$19</c:f>
+              <c:f>Sheet1!$C$2:$C$21</c:f>
               <c:numCache>
                 <c:formatCode>General</c:formatCode>
-                <c:ptCount val="18"/>
+                <c:ptCount val="20"/>
                 <c:pt idx="0">
                   <c:v>85.71</c:v>
                 </c:pt>
@@ -2025,6 +2123,12 @@
                 </c:pt>
                 <c:pt idx="17">
                   <c:v>-419.08</c:v>
+                </c:pt>
+                <c:pt idx="18">
+                  <c:v>-78.78</c:v>
+                </c:pt>
+                <c:pt idx="19">
+                  <c:v>22.59</c:v>
                 </c:pt>
               </c:numCache>
             </c:numRef>
@@ -2256,9 +2360,9 @@
           </c:dLbls>
           <c:cat>
             <c:multiLvlStrRef>
-              <c:f>Sheet1!$A$2:$A$19</c:f>
+              <c:f>Sheet1!$A$2:$A$21</c:f>
               <c:multiLvlStrCache>
-                <c:ptCount val="18"/>
+                <c:ptCount val="20"/>
                 <c:lvl>
                   <c:pt idx="0">
                     <c:v>Dec'24</c:v>
@@ -2330,6 +2434,14 @@
                   <c:pt idx="17">
                     <c:v>May'26
 R:-2,805 | N:-379</c:v>
+                  </c:pt>
+                  <c:pt idx="18">
+                    <c:v>Jun'26
+R:+192 | N:-455</c:v>
+                  </c:pt>
+                  <c:pt idx="19">
+                    <c:v>Jul'26
+R:-364 | N:-1,139</c:v>
                   </c:pt>
                 </c:lvl>
               </c:multiLvlStrCache>
@@ -2337,10 +2449,10 @@
           </c:cat>
           <c:val>
             <c:numRef>
-              <c:f>Sheet1!$B$2:$B$19</c:f>
+              <c:f>Sheet1!$B$2:$B$21</c:f>
               <c:numCache>
                 <c:formatCode>General</c:formatCode>
-                <c:ptCount val="18"/>
+                <c:ptCount val="20"/>
                 <c:pt idx="0">
                   <c:v>785.24</c:v>
                 </c:pt>
@@ -2394,6 +2506,12 @@
                 </c:pt>
                 <c:pt idx="17">
                   <c:v>-169.52</c:v>
+                </c:pt>
+                <c:pt idx="18">
+                  <c:v>22.04</c:v>
+                </c:pt>
+                <c:pt idx="19">
+                  <c:v>-341.95</c:v>
                 </c:pt>
               </c:numCache>
             </c:numRef>
@@ -2446,9 +2564,9 @@
           </c:dLbls>
           <c:cat>
             <c:multiLvlStrRef>
-              <c:f>Sheet1!$A$2:$A$19</c:f>
+              <c:f>Sheet1!$A$2:$A$21</c:f>
               <c:multiLvlStrCache>
-                <c:ptCount val="18"/>
+                <c:ptCount val="20"/>
                 <c:lvl>
                   <c:pt idx="0">
                     <c:v>Dec'24</c:v>
@@ -2520,6 +2638,14 @@
                   <c:pt idx="17">
                     <c:v>May'26
 R:-2,805 | N:-379</c:v>
+                  </c:pt>
+                  <c:pt idx="18">
+                    <c:v>Jun'26
+R:+192 | N:-455</c:v>
+                  </c:pt>
+                  <c:pt idx="19">
+                    <c:v>Jul'26
+R:-364 | N:-1,139</c:v>
                   </c:pt>
                 </c:lvl>
               </c:multiLvlStrCache>
@@ -2527,10 +2653,10 @@
           </c:cat>
           <c:val>
             <c:numRef>
-              <c:f>Sheet1!$C$2:$C$19</c:f>
+              <c:f>Sheet1!$C$2:$C$21</c:f>
               <c:numCache>
                 <c:formatCode>General</c:formatCode>
-                <c:ptCount val="18"/>
+                <c:ptCount val="20"/>
                 <c:pt idx="0">
                   <c:v>1176.79</c:v>
                 </c:pt>
@@ -2584,6 +2710,12 @@
                 </c:pt>
                 <c:pt idx="17">
                   <c:v>1653.57</c:v>
+                </c:pt>
+                <c:pt idx="18">
+                  <c:v>1198.99</c:v>
+                </c:pt>
+                <c:pt idx="19">
+                  <c:v>59.97</c:v>
                 </c:pt>
               </c:numCache>
             </c:numRef>
@@ -4061,7 +4193,7 @@
                 <a:ea typeface="Calibri" pitchFamily="34" charset="-122"/>
                 <a:cs typeface="Calibri" pitchFamily="34" charset="-120"/>
               </a:rPr>
-              <a:t>Period: 2024-12-12 to 2026-05-28  |  18 months</a:t>
+              <a:t>Period: 2024-12-12 to 2026-07-08  |  20 months</a:t>
             </a:r>
             <a:endParaRPr lang="en-US" sz="1200" dirty="0"/>
           </a:p>
@@ -4325,7 +4457,7 @@
                 <a:ea typeface="Calibri" pitchFamily="34" charset="-122"/>
                 <a:cs typeface="Calibri" pitchFamily="34" charset="-120"/>
               </a:rPr>
-              <a:t>Latest:  Raipur -700  |  NCR -900     •     Avg:  Raipur 32,486  |  NCR 32,867 INR/MT</a:t>
+              <a:t>Latest:  Raipur -300  |  NCR -1,400     •     Avg:  Raipur 32,653  |  NCR 33,000 INR/MT</a:t>
             </a:r>
             <a:endParaRPr lang="en-US" sz="1100" dirty="0"/>
           </a:p>
@@ -4628,7 +4760,7 @@
                 <a:ea typeface="Calibri" pitchFamily="34" charset="-122"/>
                 <a:cs typeface="Calibri" pitchFamily="34" charset="-120"/>
               </a:rPr>
-              <a:t>Latest change:  Pallet DRI: -300 INR/MT  |  Pig Iron: -1,350 INR/MT  |  Iron Ore DRI: -100 INR/MT  |  Silico Manganese: -5.6 INR/kg</a:t>
+              <a:t>Latest change:  Pallet DRI: -1,050 INR/MT  |  Pig Iron: +400 INR/MT  |  Iron Ore DRI: -1,150 INR/MT  |  Silico Manganese: -1.3 INR/kg</a:t>
             </a:r>
             <a:endParaRPr lang="en-US" sz="1100" dirty="0"/>
           </a:p>
@@ -4931,7 +5063,7 @@
                 <a:ea typeface="Calibri" pitchFamily="34" charset="-122"/>
                 <a:cs typeface="Calibri" pitchFamily="34" charset="-120"/>
               </a:rPr>
-              <a:t>Latest:  Raipur -1,859  |  NCR -636     •     Avg:  Raipur 70  |  NCR -126 INR/MT</a:t>
+              <a:t>Latest:  Raipur -72  |  NCR +101     •     Avg:  Raipur 80  |  NCR -116 INR/MT</a:t>
             </a:r>
             <a:endParaRPr lang="en-US" sz="1100" dirty="0"/>
           </a:p>
@@ -5234,7 +5366,7 @@
                 <a:ea typeface="Calibri" pitchFamily="34" charset="-122"/>
                 <a:cs typeface="Calibri" pitchFamily="34" charset="-120"/>
               </a:rPr>
-              <a:t>Latest:  Raipur -2,805  |  NCR -379     •     Avg:  Raipur 657  |  NCR 1,432 INR/MT</a:t>
+              <a:t>Latest:  Raipur -364  |  NCR -1,139     •     Avg:  Raipur 575  |  NCR 1,352 INR/MT</a:t>
             </a:r>
             <a:endParaRPr lang="en-US" sz="1100" dirty="0"/>
           </a:p>

--- a/output/material_change_graphs.pptx
+++ b/output/material_change_graphs.pptx
@@ -251,7 +251,7 @@
                   </c:pt>
                   <c:pt idx="19">
                     <c:v>Jul'26
-R:-300 | N:-1,400</c:v>
+R:-300 | N:-1,600</c:v>
                   </c:pt>
                 </c:lvl>
               </c:multiLvlStrCache>
@@ -455,7 +455,7 @@
                   </c:pt>
                   <c:pt idx="19">
                     <c:v>Jul'26
-R:-300 | N:-1,400</c:v>
+R:-300 | N:-1,600</c:v>
                   </c:pt>
                 </c:lvl>
               </c:multiLvlStrCache>
@@ -525,7 +525,7 @@
                   <c:v>34900</c:v>
                 </c:pt>
                 <c:pt idx="19">
-                  <c:v>33500</c:v>
+                  <c:v>33300</c:v>
                 </c:pt>
               </c:numCache>
             </c:numRef>
@@ -911,7 +911,7 @@
                   <c:v>24150</c:v>
                 </c:pt>
                 <c:pt idx="19">
-                  <c:v>23100</c:v>
+                  <c:v>22950</c:v>
                 </c:pt>
               </c:numCache>
             </c:numRef>
@@ -1121,7 +1121,7 @@
                   <c:v>37150</c:v>
                 </c:pt>
                 <c:pt idx="19">
-                  <c:v>37550</c:v>
+                  <c:v>38000</c:v>
                 </c:pt>
               </c:numCache>
             </c:numRef>
@@ -1331,7 +1331,7 @@
                   <c:v>28250</c:v>
                 </c:pt>
                 <c:pt idx="19">
-                  <c:v>27100</c:v>
+                  <c:v>26900</c:v>
                 </c:pt>
               </c:numCache>
             </c:numRef>
@@ -1541,7 +1541,7 @@
                   <c:v>30880</c:v>
                 </c:pt>
                 <c:pt idx="19">
-                  <c:v>30360.000000000004</c:v>
+                  <c:v>30000</c:v>
                 </c:pt>
               </c:numCache>
             </c:numRef>
@@ -1854,7 +1854,7 @@
                   </c:pt>
                   <c:pt idx="19">
                     <c:v>Jul'26
-R:-72 | N:+101</c:v>
+R:-516 | N:-67</c:v>
                   </c:pt>
                 </c:lvl>
               </c:multiLvlStrCache>
@@ -1924,7 +1924,7 @@
                   <c:v>213.13</c:v>
                 </c:pt>
                 <c:pt idx="19">
-                  <c:v>140.93</c:v>
+                  <c:v>-302.61</c:v>
                 </c:pt>
               </c:numCache>
             </c:numRef>
@@ -2058,7 +2058,7 @@
                   </c:pt>
                   <c:pt idx="19">
                     <c:v>Jul'26
-R:-72 | N:+101</c:v>
+R:-516 | N:-67</c:v>
                   </c:pt>
                 </c:lvl>
               </c:multiLvlStrCache>
@@ -2128,7 +2128,7 @@
                   <c:v>-78.78</c:v>
                 </c:pt>
                 <c:pt idx="19">
-                  <c:v>22.59</c:v>
+                  <c:v>-145.94</c:v>
                 </c:pt>
               </c:numCache>
             </c:numRef>
@@ -2441,7 +2441,7 @@
                   </c:pt>
                   <c:pt idx="19">
                     <c:v>Jul'26
-R:-364 | N:-1,139</c:v>
+R:-1,157 | N:-1,756</c:v>
                   </c:pt>
                 </c:lvl>
               </c:multiLvlStrCache>
@@ -2511,7 +2511,7 @@
                   <c:v>22.04</c:v>
                 </c:pt>
                 <c:pt idx="19">
-                  <c:v>-341.95</c:v>
+                  <c:v>-1134.63</c:v>
                 </c:pt>
               </c:numCache>
             </c:numRef>
@@ -2645,7 +2645,7 @@
                   </c:pt>
                   <c:pt idx="19">
                     <c:v>Jul'26
-R:-364 | N:-1,139</c:v>
+R:-1,157 | N:-1,756</c:v>
                   </c:pt>
                 </c:lvl>
               </c:multiLvlStrCache>
@@ -2715,7 +2715,7 @@
                   <c:v>1198.99</c:v>
                 </c:pt>
                 <c:pt idx="19">
-                  <c:v>59.97</c:v>
+                  <c:v>-557.51</c:v>
                 </c:pt>
               </c:numCache>
             </c:numRef>
@@ -4193,7 +4193,7 @@
                 <a:ea typeface="Calibri" pitchFamily="34" charset="-122"/>
                 <a:cs typeface="Calibri" pitchFamily="34" charset="-120"/>
               </a:rPr>
-              <a:t>Period: 2024-12-12 to 2026-07-08  |  20 months</a:t>
+              <a:t>Period: 2024-12-12 to 2026-07-14  |  20 months</a:t>
             </a:r>
             <a:endParaRPr lang="en-US" sz="1200" dirty="0"/>
           </a:p>
@@ -4457,7 +4457,7 @@
                 <a:ea typeface="Calibri" pitchFamily="34" charset="-122"/>
                 <a:cs typeface="Calibri" pitchFamily="34" charset="-120"/>
               </a:rPr>
-              <a:t>Latest:  Raipur -300  |  NCR -1,400     •     Avg:  Raipur 32,653  |  NCR 33,000 INR/MT</a:t>
+              <a:t>Latest:  Raipur -300  |  NCR -1,600     •     Avg:  Raipur 32,653  |  NCR 32,990 INR/MT</a:t>
             </a:r>
             <a:endParaRPr lang="en-US" sz="1100" dirty="0"/>
           </a:p>
@@ -4760,7 +4760,7 @@
                 <a:ea typeface="Calibri" pitchFamily="34" charset="-122"/>
                 <a:cs typeface="Calibri" pitchFamily="34" charset="-120"/>
               </a:rPr>
-              <a:t>Latest change:  Pallet DRI: -1,050 INR/MT  |  Pig Iron: +400 INR/MT  |  Iron Ore DRI: -1,150 INR/MT  |  Silico Manganese: -1.3 INR/kg</a:t>
+              <a:t>Latest change:  Pallet DRI: -1,200 INR/MT  |  Pig Iron: +850 INR/MT  |  Iron Ore DRI: -1,350 INR/MT  |  Silico Manganese: -2.2 INR/kg</a:t>
             </a:r>
             <a:endParaRPr lang="en-US" sz="1100" dirty="0"/>
           </a:p>
@@ -5063,7 +5063,7 @@
                 <a:ea typeface="Calibri" pitchFamily="34" charset="-122"/>
                 <a:cs typeface="Calibri" pitchFamily="34" charset="-120"/>
               </a:rPr>
-              <a:t>Latest:  Raipur -72  |  NCR +101     •     Avg:  Raipur 80  |  NCR -116 INR/MT</a:t>
+              <a:t>Latest:  Raipur -516  |  NCR -67     •     Avg:  Raipur 58  |  NCR -125 INR/MT</a:t>
             </a:r>
             <a:endParaRPr lang="en-US" sz="1100" dirty="0"/>
           </a:p>
@@ -5366,7 +5366,7 @@
                 <a:ea typeface="Calibri" pitchFamily="34" charset="-122"/>
                 <a:cs typeface="Calibri" pitchFamily="34" charset="-120"/>
               </a:rPr>
-              <a:t>Latest:  Raipur -364  |  NCR -1,139     •     Avg:  Raipur 575  |  NCR 1,352 INR/MT</a:t>
+              <a:t>Latest:  Raipur -1,157  |  NCR -1,756     •     Avg:  Raipur 535  |  NCR 1,321 INR/MT</a:t>
             </a:r>
             <a:endParaRPr lang="en-US" sz="1100" dirty="0"/>
           </a:p>
